--- a/client_alignment_deck.pptx
+++ b/client_alignment_deck.pptx
@@ -3203,7 +3203,7 @@
                 </a:solidFill>
                 <a:latin typeface="Calibri"/>
               </a:rPr>
-              <a:t>A system that turns lab procedure documents into a ready-to-use backlog of dev work — without an expert reviewing each item.</a:t>
+              <a:t>A system that turns SOPs (Standard Operating Procedures) into a ready-to-use backlog of dev work — without an expert reviewing each item.</a:t>
             </a:r>
           </a:p>
         </p:txBody>
@@ -3257,8 +3257,8 @@
                 </a:solidFill>
                 <a:latin typeface="Calibri"/>
               </a:rPr>
-              <a:t>Lab procedure documents
-(SOPs)</a:t>
+              <a:t>SOPs
+(Standard Operating Procedures)</a:t>
             </a:r>
           </a:p>
         </p:txBody>
@@ -3548,7 +3548,7 @@
                 </a:solidFill>
                 <a:latin typeface="Calibri"/>
               </a:rPr>
-              <a:t>•  Today: every new procedure → manual expert review → hand-written stories. Slow, costly, inconsistent.</a:t>
+              <a:t>•  Today: every new SOP → manual expert review → hand-written stories. Slow, costly, inconsistent.</a:t>
             </a:r>
           </a:p>
           <a:p>
@@ -3564,7 +3564,7 @@
                 </a:solidFill>
                 <a:latin typeface="Calibri"/>
               </a:rPr>
-              <a:t>•  With this system: documents in, structured stories out. Quality is built into the rules, not into one expert's review.</a:t>
+              <a:t>•  With this system: SOPs in, structured stories out. Quality is built into the rules, not into one expert's review.</a:t>
             </a:r>
           </a:p>
           <a:p>
@@ -4330,7 +4330,7 @@
                 </a:solidFill>
                 <a:latin typeface="Calibri"/>
               </a:rPr>
-              <a:t>Tests   •   Roles   •   Documents (new discipline's SOPs)   •   Tasks (out of scope; dev team owns decomposition)</a:t>
+              <a:t>Tests   •   Roles   •   The new discipline's own SOPs   •   Tasks (out of scope; dev team owns decomposition)</a:t>
             </a:r>
           </a:p>
         </p:txBody>
@@ -4792,7 +4792,7 @@
                           </a:solidFill>
                           <a:latin typeface="Calibri"/>
                         </a:rPr>
-                        <a:t>Builds the new discipline's theme catalog (categories) by classifying sample documents against the prior discipline's themes; new themes emerge only with evidence.</a:t>
+                        <a:t>Builds the new discipline's theme catalog (categories) by classifying sample SOPs against the prior discipline's themes; new themes emerge only with evidence.</a:t>
                       </a:r>
                     </a:p>
                   </a:txBody>
@@ -4887,7 +4887,7 @@
                           </a:solidFill>
                           <a:latin typeface="Calibri"/>
                         </a:rPr>
-                        <a:t>Drafts high-level epics from each document; matches each draft against the prior discipline's epic catalog. Matches inherit; non-matches are clustered for novelty review.</a:t>
+                        <a:t>Drafts high-level epics from each SOP; matches each draft against the prior discipline's epic catalog. Matches inherit; non-matches are clustered for novelty review.</a:t>
                       </a:r>
                     </a:p>
                   </a:txBody>
@@ -4910,7 +4910,7 @@
                           </a:solidFill>
                           <a:latin typeface="Calibri"/>
                         </a:rPr>
-                        <a:t>Once per document
+                        <a:t>Once per SOP
 + batch novelty pass</a:t>
                       </a:r>
                     </a:p>
@@ -4982,7 +4982,7 @@
                           </a:solidFill>
                           <a:latin typeface="Calibri"/>
                         </a:rPr>
-                        <a:t>Drafts user stories from document chunks using schema + shape definitions + closed-enum catalogs. Optionally retrieves (test, role, stage, shape)-matched exemplars from the prior discipline's Jira if it's available — improves style fidelity.</a:t>
+                        <a:t>Drafts user stories from SOP chunks using schema + shape definitions + closed-enum catalogs. Optionally retrieves (test, role, stage, shape)-matched exemplars from the prior discipline's Jira if it's available — improves style fidelity.</a:t>
                       </a:r>
                     </a:p>
                   </a:txBody>
@@ -5005,7 +5005,7 @@
                           </a:solidFill>
                           <a:latin typeface="Calibri"/>
                         </a:rPr>
-                        <a:t>Per epic, per document</a:t>
+                        <a:t>Per epic, per SOP</a:t>
                       </a:r>
                     </a:p>
                   </a:txBody>
@@ -5171,7 +5171,7 @@
                           </a:solidFill>
                           <a:latin typeface="Calibri"/>
                         </a:rPr>
-                        <a:t>After all documents are processed, finds patterns recurring across ≥ 2 documents and lifts them into broader "capability stories" with parameters.</a:t>
+                        <a:t>After all SOPs are processed, finds patterns recurring across ≥ 2 SOPs and lifts them into broader "capability stories" with parameters.</a:t>
                       </a:r>
                     </a:p>
                   </a:txBody>
@@ -5812,7 +5812,7 @@
                 <a:latin typeface="Calibri"/>
               </a:rPr>
               <a:t>Phase 2
-Per-document</a:t>
+Per-SOP</a:t>
             </a:r>
           </a:p>
         </p:txBody>
@@ -5847,7 +5847,7 @@
                 </a:solidFill>
                 <a:latin typeface="Calibri"/>
               </a:rPr>
-              <a:t>Read each procedure document, draft stories, quality-check.</a:t>
+              <a:t>Read each SOP, draft stories, quality-check.</a:t>
             </a:r>
           </a:p>
         </p:txBody>
@@ -5917,7 +5917,7 @@
                 </a:solidFill>
                 <a:latin typeface="Calibri"/>
               </a:rPr>
-              <a:t>Runs for every new procedure document.</a:t>
+              <a:t>Runs for every new SOP.</a:t>
             </a:r>
           </a:p>
         </p:txBody>
@@ -6007,7 +6007,7 @@
                 </a:solidFill>
                 <a:latin typeface="Calibri"/>
               </a:rPr>
-              <a:t>Look across all documents, lift recurring patterns, generate outputs.</a:t>
+              <a:t>Look across all SOPs, lift recurring patterns, generate outputs.</a:t>
             </a:r>
           </a:p>
         </p:txBody>
@@ -6077,7 +6077,7 @@
                 </a:solidFill>
                 <a:latin typeface="Calibri"/>
               </a:rPr>
-              <a:t>Runs after a batch of documents is processed.</a:t>
+              <a:t>Runs after a batch of SOPs is processed.</a:t>
             </a:r>
           </a:p>
         </p:txBody>
@@ -7469,9 +7469,9 @@
           <p:nvPr/>
         </p:nvCxnSpPr>
         <p:spPr>
-          <a:xfrm>
-            <a:off x="4709160" y="3543300"/>
-            <a:ext cx="0" cy="2468880"/>
+          <a:xfrm flipH="1">
+            <a:off x="3200400" y="3543300"/>
+            <a:ext cx="1508760" cy="2468880"/>
           </a:xfrm>
           <a:prstGeom prst="bentConnector3">
             <a:avLst/>
@@ -8267,7 +8267,7 @@
                 </a:solidFill>
                 <a:latin typeface="Calibri"/>
               </a:rPr>
-              <a:t>Phase 2 — Per-document processing</a:t>
+              <a:t>Phase 2 — Per-SOP processing</a:t>
             </a:r>
           </a:p>
         </p:txBody>
@@ -8345,7 +8345,7 @@
                 </a:solidFill>
                 <a:latin typeface="Calibri"/>
               </a:rPr>
-              <a:t>Runs once per procedure document. Result: validated stories under the right epics.</a:t>
+              <a:t>Runs once per SOP. Result: validated stories under the right epics.</a:t>
             </a:r>
           </a:p>
         </p:txBody>
@@ -9777,7 +9777,7 @@
                 </a:solidFill>
                 <a:latin typeface="Calibri"/>
               </a:rPr>
-              <a:t>Runs after a batch of documents. Recurring patterns lift to broader "capability stories" with parameters.</a:t>
+              <a:t>Runs after a batch of SOPs. Recurring patterns lift to broader "capability stories" with parameters.</a:t>
             </a:r>
           </a:p>
         </p:txBody>
@@ -9832,7 +9832,7 @@
                 <a:latin typeface="Calibri"/>
               </a:rPr>
               <a:t>All kept stories
-from all documents</a:t>
+from all SOPs</a:t>
             </a:r>
           </a:p>
         </p:txBody>
@@ -10549,9 +10549,9 @@
           <p:nvPr/>
         </p:nvCxnSpPr>
         <p:spPr>
-          <a:xfrm>
-            <a:off x="4709160" y="2994660"/>
-            <a:ext cx="0" cy="2194560"/>
+          <a:xfrm flipH="1">
+            <a:off x="3200400" y="2994660"/>
+            <a:ext cx="1508760" cy="2194560"/>
           </a:xfrm>
           <a:prstGeom prst="bentConnector3">
             <a:avLst/>
@@ -10986,7 +10986,7 @@
                 </a:solidFill>
                 <a:latin typeface="Consolas"/>
               </a:rPr>
-              <a:t>  source_documents: [SOP-014, SOP-019, SOP-022]</a:t>
+              <a:t>  source_sops: [SOP-014, SOP-019, SOP-022]</a:t>
             </a:r>
           </a:p>
         </p:txBody>
@@ -11701,7 +11701,7 @@
                 </a:solidFill>
                 <a:latin typeface="Calibri"/>
               </a:rPr>
-              <a:t>•  A sample of ~20 procedure documents per new discipline to seed Phase 1.</a:t>
+              <a:t>•  A sample of ~20 SOPs per new discipline to seed Phase 1.</a:t>
             </a:r>
           </a:p>
         </p:txBody>

--- a/client_alignment_deck.pptx
+++ b/client_alignment_deck.pptx
@@ -5305,14 +5305,49 @@
       </p:graphicFrame>
       <p:sp>
         <p:nvSpPr>
-          <p:cNvPr id="6" name="Rounded Rectangle 5"/>
+          <p:cNvPr id="6" name="TextBox 5"/>
+          <p:cNvSpPr txBox="1"/>
+          <p:nvPr/>
+        </p:nvSpPr>
+        <p:spPr>
+          <a:xfrm>
+            <a:off x="365760" y="5330951"/>
+            <a:ext cx="11475720" cy="274320"/>
+          </a:xfrm>
+          <a:prstGeom prst="rect">
+            <a:avLst/>
+          </a:prstGeom>
+          <a:noFill/>
+        </p:spPr>
+        <p:txBody>
+          <a:bodyPr wrap="square" anchor="t">
+            <a:spAutoFit/>
+          </a:bodyPr>
+          <a:lstStyle/>
+          <a:p>
+            <a:pPr algn="l"/>
+            <a:r>
+              <a:rPr sz="1200" b="1" i="0">
+                <a:solidFill>
+                  <a:srgbClr val="1F4E79"/>
+                </a:solidFill>
+                <a:latin typeface="Calibri"/>
+              </a:rPr>
+              <a:t>Quorum panel — 5 reviewer agents running IN PARALLEL  (used inside Theme Discovery and Epic Extractor)</a:t>
+            </a:r>
+          </a:p>
+        </p:txBody>
+      </p:sp>
+      <p:sp>
+        <p:nvSpPr>
+          <p:cNvPr id="7" name="Rounded Rectangle 6"/>
           <p:cNvSpPr/>
           <p:nvPr/>
         </p:nvSpPr>
         <p:spPr>
           <a:xfrm>
-            <a:off x="365760" y="5330951"/>
-            <a:ext cx="11475720" cy="1115568"/>
+            <a:off x="365760" y="5623559"/>
+            <a:ext cx="2236622" cy="502920"/>
           </a:xfrm>
           <a:prstGeom prst="roundRect">
             <a:avLst/>
@@ -5344,22 +5379,278 @@
           <a:bodyPr rtlCol="0" anchor="ctr" wrap="square" lIns="73152" rIns="73152" tIns="36576" bIns="36576"/>
           <a:lstStyle/>
           <a:p>
-            <a:pPr algn="l"/>
-            <a:r>
-              <a:rPr sz="1100" b="0" i="0">
+            <a:pPr algn="ctr"/>
+            <a:r>
+              <a:rPr sz="900" b="0" i="0">
                 <a:solidFill>
                   <a:srgbClr val="1F2D3D"/>
                 </a:solidFill>
                 <a:latin typeface="Calibri"/>
               </a:rPr>
-              <a:t>Quorum panel (5 reviewer agents):  used by Theme Discovery and Epic Extractor when admitting new categories. Each reviewer asks a different question — "is this coherent?", "is it distinct?", "is the description sharp?", etc. Need 3 of 5 agreeing on the same action; their descriptions must be similar enough to count. Otherwise the candidate goes to the review pile for the next round.</a:t>
-            </a:r>
-          </a:p>
-        </p:txBody>
-      </p:sp>
-      <p:sp>
-        <p:nvSpPr>
-          <p:cNvPr id="7" name="Rectangle 6"/>
+              <a:t>1. Is it coherent
+as a new theme?</a:t>
+            </a:r>
+          </a:p>
+        </p:txBody>
+      </p:sp>
+      <p:sp>
+        <p:nvSpPr>
+          <p:cNvPr id="8" name="Rounded Rectangle 7"/>
+          <p:cNvSpPr/>
+          <p:nvPr/>
+        </p:nvSpPr>
+        <p:spPr>
+          <a:xfrm>
+            <a:off x="2675534" y="5623559"/>
+            <a:ext cx="2236622" cy="502920"/>
+          </a:xfrm>
+          <a:prstGeom prst="roundRect">
+            <a:avLst/>
+          </a:prstGeom>
+          <a:solidFill>
+            <a:srgbClr val="FAE9CB"/>
+          </a:solidFill>
+          <a:ln w="12700">
+            <a:solidFill>
+              <a:srgbClr val="C9952C"/>
+            </a:solidFill>
+          </a:ln>
+        </p:spPr>
+        <p:style>
+          <a:lnRef idx="1">
+            <a:schemeClr val="accent1"/>
+          </a:lnRef>
+          <a:fillRef idx="3">
+            <a:schemeClr val="accent1"/>
+          </a:fillRef>
+          <a:effectRef idx="2">
+            <a:schemeClr val="accent1"/>
+          </a:effectRef>
+          <a:fontRef idx="minor">
+            <a:schemeClr val="lt1"/>
+          </a:fontRef>
+        </p:style>
+        <p:txBody>
+          <a:bodyPr rtlCol="0" anchor="ctr" wrap="square" lIns="73152" rIns="73152" tIns="36576" bIns="36576"/>
+          <a:lstStyle/>
+          <a:p>
+            <a:pPr algn="ctr"/>
+            <a:r>
+              <a:rPr sz="900" b="0" i="0">
+                <a:solidFill>
+                  <a:srgbClr val="1F2D3D"/>
+                </a:solidFill>
+                <a:latin typeface="Calibri"/>
+              </a:rPr>
+              <a:t>2. Is it distinct
+from existing?</a:t>
+            </a:r>
+          </a:p>
+        </p:txBody>
+      </p:sp>
+      <p:sp>
+        <p:nvSpPr>
+          <p:cNvPr id="9" name="Rounded Rectangle 8"/>
+          <p:cNvSpPr/>
+          <p:nvPr/>
+        </p:nvSpPr>
+        <p:spPr>
+          <a:xfrm>
+            <a:off x="4985308" y="5623559"/>
+            <a:ext cx="2236622" cy="502920"/>
+          </a:xfrm>
+          <a:prstGeom prst="roundRect">
+            <a:avLst/>
+          </a:prstGeom>
+          <a:solidFill>
+            <a:srgbClr val="FAE9CB"/>
+          </a:solidFill>
+          <a:ln w="12700">
+            <a:solidFill>
+              <a:srgbClr val="C9952C"/>
+            </a:solidFill>
+          </a:ln>
+        </p:spPr>
+        <p:style>
+          <a:lnRef idx="1">
+            <a:schemeClr val="accent1"/>
+          </a:lnRef>
+          <a:fillRef idx="3">
+            <a:schemeClr val="accent1"/>
+          </a:fillRef>
+          <a:effectRef idx="2">
+            <a:schemeClr val="accent1"/>
+          </a:effectRef>
+          <a:fontRef idx="minor">
+            <a:schemeClr val="lt1"/>
+          </a:fontRef>
+        </p:style>
+        <p:txBody>
+          <a:bodyPr rtlCol="0" anchor="ctr" wrap="square" lIns="73152" rIns="73152" tIns="36576" bIns="36576"/>
+          <a:lstStyle/>
+          <a:p>
+            <a:pPr algn="ctr"/>
+            <a:r>
+              <a:rPr sz="900" b="0" i="0">
+                <a:solidFill>
+                  <a:srgbClr val="1F2D3D"/>
+                </a:solidFill>
+                <a:latin typeface="Calibri"/>
+              </a:rPr>
+              <a:t>3. Is the description
+sharp enough?</a:t>
+            </a:r>
+          </a:p>
+        </p:txBody>
+      </p:sp>
+      <p:sp>
+        <p:nvSpPr>
+          <p:cNvPr id="10" name="Rounded Rectangle 9"/>
+          <p:cNvSpPr/>
+          <p:nvPr/>
+        </p:nvSpPr>
+        <p:spPr>
+          <a:xfrm>
+            <a:off x="7295083" y="5623559"/>
+            <a:ext cx="2236622" cy="502920"/>
+          </a:xfrm>
+          <a:prstGeom prst="roundRect">
+            <a:avLst/>
+          </a:prstGeom>
+          <a:solidFill>
+            <a:srgbClr val="FAE9CB"/>
+          </a:solidFill>
+          <a:ln w="12700">
+            <a:solidFill>
+              <a:srgbClr val="C9952C"/>
+            </a:solidFill>
+          </a:ln>
+        </p:spPr>
+        <p:style>
+          <a:lnRef idx="1">
+            <a:schemeClr val="accent1"/>
+          </a:lnRef>
+          <a:fillRef idx="3">
+            <a:schemeClr val="accent1"/>
+          </a:fillRef>
+          <a:effectRef idx="2">
+            <a:schemeClr val="accent1"/>
+          </a:effectRef>
+          <a:fontRef idx="minor">
+            <a:schemeClr val="lt1"/>
+          </a:fontRef>
+        </p:style>
+        <p:txBody>
+          <a:bodyPr rtlCol="0" anchor="ctr" wrap="square" lIns="73152" rIns="73152" tIns="36576" bIns="36576"/>
+          <a:lstStyle/>
+          <a:p>
+            <a:pPr algn="ctr"/>
+            <a:r>
+              <a:rPr sz="900" b="0" i="0">
+                <a:solidFill>
+                  <a:srgbClr val="1F2D3D"/>
+                </a:solidFill>
+                <a:latin typeface="Calibri"/>
+              </a:rPr>
+              <a:t>4. Are the cluster
+members consistent?</a:t>
+            </a:r>
+          </a:p>
+        </p:txBody>
+      </p:sp>
+      <p:sp>
+        <p:nvSpPr>
+          <p:cNvPr id="11" name="Rounded Rectangle 10"/>
+          <p:cNvSpPr/>
+          <p:nvPr/>
+        </p:nvSpPr>
+        <p:spPr>
+          <a:xfrm>
+            <a:off x="9604857" y="5623559"/>
+            <a:ext cx="2236622" cy="502920"/>
+          </a:xfrm>
+          <a:prstGeom prst="roundRect">
+            <a:avLst/>
+          </a:prstGeom>
+          <a:solidFill>
+            <a:srgbClr val="FAE9CB"/>
+          </a:solidFill>
+          <a:ln w="12700">
+            <a:solidFill>
+              <a:srgbClr val="C9952C"/>
+            </a:solidFill>
+          </a:ln>
+        </p:spPr>
+        <p:style>
+          <a:lnRef idx="1">
+            <a:schemeClr val="accent1"/>
+          </a:lnRef>
+          <a:fillRef idx="3">
+            <a:schemeClr val="accent1"/>
+          </a:fillRef>
+          <a:effectRef idx="2">
+            <a:schemeClr val="accent1"/>
+          </a:effectRef>
+          <a:fontRef idx="minor">
+            <a:schemeClr val="lt1"/>
+          </a:fontRef>
+        </p:style>
+        <p:txBody>
+          <a:bodyPr rtlCol="0" anchor="ctr" wrap="square" lIns="73152" rIns="73152" tIns="36576" bIns="36576"/>
+          <a:lstStyle/>
+          <a:p>
+            <a:pPr algn="ctr"/>
+            <a:r>
+              <a:rPr sz="900" b="0" i="0">
+                <a:solidFill>
+                  <a:srgbClr val="1F2D3D"/>
+                </a:solidFill>
+                <a:latin typeface="Calibri"/>
+              </a:rPr>
+              <a:t>5. Would admitting
+fragment the catalog?</a:t>
+            </a:r>
+          </a:p>
+        </p:txBody>
+      </p:sp>
+      <p:sp>
+        <p:nvSpPr>
+          <p:cNvPr id="12" name="TextBox 11"/>
+          <p:cNvSpPr txBox="1"/>
+          <p:nvPr/>
+        </p:nvSpPr>
+        <p:spPr>
+          <a:xfrm>
+            <a:off x="365760" y="6172199"/>
+            <a:ext cx="11475720" cy="274320"/>
+          </a:xfrm>
+          <a:prstGeom prst="rect">
+            <a:avLst/>
+          </a:prstGeom>
+          <a:noFill/>
+        </p:spPr>
+        <p:txBody>
+          <a:bodyPr wrap="square" anchor="ctr">
+            <a:spAutoFit/>
+          </a:bodyPr>
+          <a:lstStyle/>
+          <a:p>
+            <a:pPr algn="ctr"/>
+            <a:r>
+              <a:rPr sz="1000" b="0" i="1">
+                <a:solidFill>
+                  <a:srgbClr val="1F2D3D"/>
+                </a:solidFill>
+                <a:latin typeface="Calibri"/>
+              </a:rPr>
+              <a:t>All 5 vote in parallel. Need 3 of 5 agreeing on the same action; their descriptions must be similar enough.  Otherwise the candidate goes to the review pile for the next round.</a:t>
+            </a:r>
+          </a:p>
+        </p:txBody>
+      </p:sp>
+      <p:sp>
+        <p:nvSpPr>
+          <p:cNvPr id="13" name="Rectangle 12"/>
           <p:cNvSpPr/>
           <p:nvPr/>
         </p:nvSpPr>
@@ -5402,7 +5693,7 @@
       </p:sp>
       <p:sp>
         <p:nvSpPr>
-          <p:cNvPr id="8" name="TextBox 7"/>
+          <p:cNvPr id="14" name="TextBox 13"/>
           <p:cNvSpPr txBox="1"/>
           <p:nvPr/>
         </p:nvSpPr>
@@ -5437,7 +5728,7 @@
       </p:sp>
       <p:sp>
         <p:nvSpPr>
-          <p:cNvPr id="9" name="TextBox 8"/>
+          <p:cNvPr id="15" name="TextBox 14"/>
           <p:cNvSpPr txBox="1"/>
           <p:nvPr/>
         </p:nvSpPr>
@@ -6788,7 +7079,7 @@
         <p:spPr>
           <a:xfrm>
             <a:off x="457200" y="4434840"/>
-            <a:ext cx="2743200" cy="411480"/>
+            <a:ext cx="519379" cy="457200"/>
           </a:xfrm>
           <a:prstGeom prst="roundRect">
             <a:avLst/>
@@ -6822,26 +7113,277 @@
           <a:p>
             <a:pPr algn="ctr"/>
             <a:r>
-              <a:rPr sz="900" b="1" i="0">
+              <a:rPr sz="1100" b="1" i="0">
                 <a:solidFill>
                   <a:srgbClr val="1F2D3D"/>
                 </a:solidFill>
                 <a:latin typeface="Calibri"/>
               </a:rPr>
-              <a:t>5-reviewer quorum panel votes</a:t>
-            </a:r>
-          </a:p>
-        </p:txBody>
-      </p:sp>
-      <p:sp>
-        <p:nvSpPr>
-          <p:cNvPr id="12" name="Diamond 11"/>
+              <a:t>1</a:t>
+            </a:r>
+          </a:p>
+        </p:txBody>
+      </p:sp>
+      <p:sp>
+        <p:nvSpPr>
+          <p:cNvPr id="12" name="Rounded Rectangle 11"/>
           <p:cNvSpPr/>
           <p:nvPr/>
         </p:nvSpPr>
         <p:spPr>
           <a:xfrm>
-            <a:off x="822960" y="4983480"/>
+            <a:off x="1013155" y="4434840"/>
+            <a:ext cx="519379" cy="457200"/>
+          </a:xfrm>
+          <a:prstGeom prst="roundRect">
+            <a:avLst/>
+          </a:prstGeom>
+          <a:solidFill>
+            <a:srgbClr val="FAE9CB"/>
+          </a:solidFill>
+          <a:ln w="12700">
+            <a:solidFill>
+              <a:srgbClr val="C9952C"/>
+            </a:solidFill>
+          </a:ln>
+        </p:spPr>
+        <p:style>
+          <a:lnRef idx="1">
+            <a:schemeClr val="accent1"/>
+          </a:lnRef>
+          <a:fillRef idx="3">
+            <a:schemeClr val="accent1"/>
+          </a:fillRef>
+          <a:effectRef idx="2">
+            <a:schemeClr val="accent1"/>
+          </a:effectRef>
+          <a:fontRef idx="minor">
+            <a:schemeClr val="lt1"/>
+          </a:fontRef>
+        </p:style>
+        <p:txBody>
+          <a:bodyPr rtlCol="0" anchor="ctr" wrap="square" lIns="73152" rIns="73152" tIns="36576" bIns="36576"/>
+          <a:lstStyle/>
+          <a:p>
+            <a:pPr algn="ctr"/>
+            <a:r>
+              <a:rPr sz="1100" b="1" i="0">
+                <a:solidFill>
+                  <a:srgbClr val="1F2D3D"/>
+                </a:solidFill>
+                <a:latin typeface="Calibri"/>
+              </a:rPr>
+              <a:t>2</a:t>
+            </a:r>
+          </a:p>
+        </p:txBody>
+      </p:sp>
+      <p:sp>
+        <p:nvSpPr>
+          <p:cNvPr id="13" name="Rounded Rectangle 12"/>
+          <p:cNvSpPr/>
+          <p:nvPr/>
+        </p:nvSpPr>
+        <p:spPr>
+          <a:xfrm>
+            <a:off x="1569110" y="4434840"/>
+            <a:ext cx="519379" cy="457200"/>
+          </a:xfrm>
+          <a:prstGeom prst="roundRect">
+            <a:avLst/>
+          </a:prstGeom>
+          <a:solidFill>
+            <a:srgbClr val="FAE9CB"/>
+          </a:solidFill>
+          <a:ln w="12700">
+            <a:solidFill>
+              <a:srgbClr val="C9952C"/>
+            </a:solidFill>
+          </a:ln>
+        </p:spPr>
+        <p:style>
+          <a:lnRef idx="1">
+            <a:schemeClr val="accent1"/>
+          </a:lnRef>
+          <a:fillRef idx="3">
+            <a:schemeClr val="accent1"/>
+          </a:fillRef>
+          <a:effectRef idx="2">
+            <a:schemeClr val="accent1"/>
+          </a:effectRef>
+          <a:fontRef idx="minor">
+            <a:schemeClr val="lt1"/>
+          </a:fontRef>
+        </p:style>
+        <p:txBody>
+          <a:bodyPr rtlCol="0" anchor="ctr" wrap="square" lIns="73152" rIns="73152" tIns="36576" bIns="36576"/>
+          <a:lstStyle/>
+          <a:p>
+            <a:pPr algn="ctr"/>
+            <a:r>
+              <a:rPr sz="1100" b="1" i="0">
+                <a:solidFill>
+                  <a:srgbClr val="1F2D3D"/>
+                </a:solidFill>
+                <a:latin typeface="Calibri"/>
+              </a:rPr>
+              <a:t>3</a:t>
+            </a:r>
+          </a:p>
+        </p:txBody>
+      </p:sp>
+      <p:sp>
+        <p:nvSpPr>
+          <p:cNvPr id="14" name="Rounded Rectangle 13"/>
+          <p:cNvSpPr/>
+          <p:nvPr/>
+        </p:nvSpPr>
+        <p:spPr>
+          <a:xfrm>
+            <a:off x="2125065" y="4434840"/>
+            <a:ext cx="519379" cy="457200"/>
+          </a:xfrm>
+          <a:prstGeom prst="roundRect">
+            <a:avLst/>
+          </a:prstGeom>
+          <a:solidFill>
+            <a:srgbClr val="FAE9CB"/>
+          </a:solidFill>
+          <a:ln w="12700">
+            <a:solidFill>
+              <a:srgbClr val="C9952C"/>
+            </a:solidFill>
+          </a:ln>
+        </p:spPr>
+        <p:style>
+          <a:lnRef idx="1">
+            <a:schemeClr val="accent1"/>
+          </a:lnRef>
+          <a:fillRef idx="3">
+            <a:schemeClr val="accent1"/>
+          </a:fillRef>
+          <a:effectRef idx="2">
+            <a:schemeClr val="accent1"/>
+          </a:effectRef>
+          <a:fontRef idx="minor">
+            <a:schemeClr val="lt1"/>
+          </a:fontRef>
+        </p:style>
+        <p:txBody>
+          <a:bodyPr rtlCol="0" anchor="ctr" wrap="square" lIns="73152" rIns="73152" tIns="36576" bIns="36576"/>
+          <a:lstStyle/>
+          <a:p>
+            <a:pPr algn="ctr"/>
+            <a:r>
+              <a:rPr sz="1100" b="1" i="0">
+                <a:solidFill>
+                  <a:srgbClr val="1F2D3D"/>
+                </a:solidFill>
+                <a:latin typeface="Calibri"/>
+              </a:rPr>
+              <a:t>4</a:t>
+            </a:r>
+          </a:p>
+        </p:txBody>
+      </p:sp>
+      <p:sp>
+        <p:nvSpPr>
+          <p:cNvPr id="15" name="Rounded Rectangle 14"/>
+          <p:cNvSpPr/>
+          <p:nvPr/>
+        </p:nvSpPr>
+        <p:spPr>
+          <a:xfrm>
+            <a:off x="2681020" y="4434840"/>
+            <a:ext cx="519379" cy="457200"/>
+          </a:xfrm>
+          <a:prstGeom prst="roundRect">
+            <a:avLst/>
+          </a:prstGeom>
+          <a:solidFill>
+            <a:srgbClr val="FAE9CB"/>
+          </a:solidFill>
+          <a:ln w="12700">
+            <a:solidFill>
+              <a:srgbClr val="C9952C"/>
+            </a:solidFill>
+          </a:ln>
+        </p:spPr>
+        <p:style>
+          <a:lnRef idx="1">
+            <a:schemeClr val="accent1"/>
+          </a:lnRef>
+          <a:fillRef idx="3">
+            <a:schemeClr val="accent1"/>
+          </a:fillRef>
+          <a:effectRef idx="2">
+            <a:schemeClr val="accent1"/>
+          </a:effectRef>
+          <a:fontRef idx="minor">
+            <a:schemeClr val="lt1"/>
+          </a:fontRef>
+        </p:style>
+        <p:txBody>
+          <a:bodyPr rtlCol="0" anchor="ctr" wrap="square" lIns="73152" rIns="73152" tIns="36576" bIns="36576"/>
+          <a:lstStyle/>
+          <a:p>
+            <a:pPr algn="ctr"/>
+            <a:r>
+              <a:rPr sz="1100" b="1" i="0">
+                <a:solidFill>
+                  <a:srgbClr val="1F2D3D"/>
+                </a:solidFill>
+                <a:latin typeface="Calibri"/>
+              </a:rPr>
+              <a:t>5</a:t>
+            </a:r>
+          </a:p>
+        </p:txBody>
+      </p:sp>
+      <p:sp>
+        <p:nvSpPr>
+          <p:cNvPr id="16" name="TextBox 15"/>
+          <p:cNvSpPr txBox="1"/>
+          <p:nvPr/>
+        </p:nvSpPr>
+        <p:spPr>
+          <a:xfrm>
+            <a:off x="457200" y="4910328"/>
+            <a:ext cx="2743200" cy="182880"/>
+          </a:xfrm>
+          <a:prstGeom prst="rect">
+            <a:avLst/>
+          </a:prstGeom>
+          <a:noFill/>
+        </p:spPr>
+        <p:txBody>
+          <a:bodyPr wrap="square" anchor="t">
+            <a:spAutoFit/>
+          </a:bodyPr>
+          <a:lstStyle/>
+          <a:p>
+            <a:pPr algn="ctr"/>
+            <a:r>
+              <a:rPr sz="800" b="0" i="1">
+                <a:solidFill>
+                  <a:srgbClr val="55606E"/>
+                </a:solidFill>
+                <a:latin typeface="Calibri"/>
+              </a:rPr>
+              <a:t>5 reviewers vote in parallel</a:t>
+            </a:r>
+          </a:p>
+        </p:txBody>
+      </p:sp>
+      <p:sp>
+        <p:nvSpPr>
+          <p:cNvPr id="17" name="Diamond 16"/>
+          <p:cNvSpPr/>
+          <p:nvPr/>
+        </p:nvSpPr>
+        <p:spPr>
+          <a:xfrm>
+            <a:off x="822960" y="5166360"/>
             <a:ext cx="2011680" cy="548640"/>
           </a:xfrm>
           <a:prstGeom prst="diamond">
@@ -6889,13 +7431,13 @@
       </p:sp>
       <p:sp>
         <p:nvSpPr>
-          <p:cNvPr id="13" name="Rounded Rectangle 12"/>
+          <p:cNvPr id="18" name="Rounded Rectangle 17"/>
           <p:cNvSpPr/>
           <p:nvPr/>
         </p:nvSpPr>
         <p:spPr>
           <a:xfrm>
-            <a:off x="3566160" y="5052060"/>
+            <a:off x="3566160" y="5234940"/>
             <a:ext cx="2286000" cy="411480"/>
           </a:xfrm>
           <a:prstGeom prst="roundRect">
@@ -6944,13 +7486,13 @@
       </p:sp>
       <p:sp>
         <p:nvSpPr>
-          <p:cNvPr id="14" name="Rounded Rectangle 13"/>
+          <p:cNvPr id="19" name="Rounded Rectangle 18"/>
           <p:cNvSpPr/>
           <p:nvPr/>
         </p:nvSpPr>
         <p:spPr>
           <a:xfrm>
-            <a:off x="457200" y="5806440"/>
+            <a:off x="457200" y="5989320"/>
             <a:ext cx="2743200" cy="411480"/>
           </a:xfrm>
           <a:prstGeom prst="roundRect">
@@ -6998,7 +7540,7 @@
       </p:sp>
       <p:cxnSp>
         <p:nvCxnSpPr>
-          <p:cNvPr id="15" name="Connector 14"/>
+          <p:cNvPr id="20" name="Connector 19"/>
           <p:cNvCxnSpPr/>
           <p:nvPr/>
         </p:nvCxnSpPr>
@@ -7034,7 +7576,7 @@
       </p:cxnSp>
       <p:cxnSp>
         <p:nvCxnSpPr>
-          <p:cNvPr id="16" name="Connector 15"/>
+          <p:cNvPr id="21" name="Connector 20"/>
           <p:cNvCxnSpPr/>
           <p:nvPr/>
         </p:nvCxnSpPr>
@@ -7070,193 +7612,13 @@
       </p:cxnSp>
       <p:cxnSp>
         <p:nvCxnSpPr>
-          <p:cNvPr id="17" name="Connector 16"/>
-          <p:cNvCxnSpPr/>
-          <p:nvPr/>
-        </p:nvCxnSpPr>
-        <p:spPr>
-          <a:xfrm>
-            <a:off x="1828800" y="2926080"/>
-            <a:ext cx="0" cy="137160"/>
-          </a:xfrm>
-          <a:prstGeom prst="line">
-            <a:avLst/>
-          </a:prstGeom>
-          <a:ln w="25400">
-            <a:solidFill>
-              <a:srgbClr val="4A6EA0"/>
-            </a:solidFill>
-            <a:tailEnd type="triangle" w="med" h="med"/>
-          </a:ln>
-        </p:spPr>
-        <p:style>
-          <a:lnRef idx="2">
-            <a:schemeClr val="accent1"/>
-          </a:lnRef>
-          <a:fillRef idx="0">
-            <a:schemeClr val="accent1"/>
-          </a:fillRef>
-          <a:effectRef idx="1">
-            <a:schemeClr val="accent1"/>
-          </a:effectRef>
-          <a:fontRef idx="minor">
-            <a:schemeClr val="tx1"/>
-          </a:fontRef>
-        </p:style>
-      </p:cxnSp>
-      <p:cxnSp>
-        <p:nvCxnSpPr>
-          <p:cNvPr id="18" name="Connector 17"/>
-          <p:cNvCxnSpPr/>
-          <p:nvPr/>
-        </p:nvCxnSpPr>
-        <p:spPr>
-          <a:xfrm>
-            <a:off x="2834640" y="3337560"/>
-            <a:ext cx="731520" cy="0"/>
-          </a:xfrm>
-          <a:prstGeom prst="line">
-            <a:avLst/>
-          </a:prstGeom>
-          <a:ln w="25400">
-            <a:solidFill>
-              <a:srgbClr val="4A6EA0"/>
-            </a:solidFill>
-            <a:tailEnd type="triangle" w="med" h="med"/>
-          </a:ln>
-        </p:spPr>
-        <p:style>
-          <a:lnRef idx="2">
-            <a:schemeClr val="accent1"/>
-          </a:lnRef>
-          <a:fillRef idx="0">
-            <a:schemeClr val="accent1"/>
-          </a:fillRef>
-          <a:effectRef idx="1">
-            <a:schemeClr val="accent1"/>
-          </a:effectRef>
-          <a:fontRef idx="minor">
-            <a:schemeClr val="tx1"/>
-          </a:fontRef>
-        </p:style>
-      </p:cxnSp>
-      <p:sp>
-        <p:nvSpPr>
-          <p:cNvPr id="19" name="TextBox 18"/>
-          <p:cNvSpPr txBox="1"/>
-          <p:nvPr/>
-        </p:nvSpPr>
-        <p:spPr>
-          <a:xfrm>
-            <a:off x="3246120" y="3044952"/>
-            <a:ext cx="822960" cy="274320"/>
-          </a:xfrm>
-          <a:prstGeom prst="rect">
-            <a:avLst/>
-          </a:prstGeom>
-          <a:noFill/>
-        </p:spPr>
-        <p:txBody>
-          <a:bodyPr wrap="none" lIns="36576" rIns="36576" tIns="0" bIns="0">
-            <a:spAutoFit/>
-          </a:bodyPr>
-          <a:lstStyle/>
-          <a:p>
-            <a:pPr algn="ctr"/>
-            <a:r>
-              <a:rPr sz="1000" b="1">
-                <a:solidFill>
-                  <a:srgbClr val="5C8347"/>
-                </a:solidFill>
-                <a:latin typeface="Calibri"/>
-              </a:rPr>
-              <a:t>yes
-(inherit)</a:t>
-            </a:r>
-          </a:p>
-        </p:txBody>
-      </p:sp>
-      <p:cxnSp>
-        <p:nvCxnSpPr>
-          <p:cNvPr id="20" name="Connector 19"/>
-          <p:cNvCxnSpPr/>
-          <p:nvPr/>
-        </p:nvCxnSpPr>
-        <p:spPr>
-          <a:xfrm>
-            <a:off x="1828800" y="3611880"/>
-            <a:ext cx="0" cy="274320"/>
-          </a:xfrm>
-          <a:prstGeom prst="line">
-            <a:avLst/>
-          </a:prstGeom>
-          <a:ln w="25400">
-            <a:solidFill>
-              <a:srgbClr val="4A6EA0"/>
-            </a:solidFill>
-            <a:tailEnd type="triangle" w="med" h="med"/>
-          </a:ln>
-        </p:spPr>
-        <p:style>
-          <a:lnRef idx="2">
-            <a:schemeClr val="accent1"/>
-          </a:lnRef>
-          <a:fillRef idx="0">
-            <a:schemeClr val="accent1"/>
-          </a:fillRef>
-          <a:effectRef idx="1">
-            <a:schemeClr val="accent1"/>
-          </a:effectRef>
-          <a:fontRef idx="minor">
-            <a:schemeClr val="tx1"/>
-          </a:fontRef>
-        </p:style>
-      </p:cxnSp>
-      <p:sp>
-        <p:nvSpPr>
-          <p:cNvPr id="21" name="TextBox 20"/>
-          <p:cNvSpPr txBox="1"/>
-          <p:nvPr/>
-        </p:nvSpPr>
-        <p:spPr>
-          <a:xfrm>
-            <a:off x="1901952" y="3584447"/>
-            <a:ext cx="822960" cy="274320"/>
-          </a:xfrm>
-          <a:prstGeom prst="rect">
-            <a:avLst/>
-          </a:prstGeom>
-          <a:noFill/>
-        </p:spPr>
-        <p:txBody>
-          <a:bodyPr wrap="none" lIns="36576" rIns="36576" tIns="0" bIns="0">
-            <a:spAutoFit/>
-          </a:bodyPr>
-          <a:lstStyle/>
-          <a:p>
-            <a:pPr algn="ctr"/>
-            <a:r>
-              <a:rPr sz="1000" b="1">
-                <a:solidFill>
-                  <a:srgbClr val="A84A4A"/>
-                </a:solidFill>
-                <a:latin typeface="Calibri"/>
-              </a:rPr>
-              <a:t>no
-(residual)</a:t>
-            </a:r>
-          </a:p>
-        </p:txBody>
-      </p:sp>
-      <p:cxnSp>
-        <p:nvCxnSpPr>
           <p:cNvPr id="22" name="Connector 21"/>
           <p:cNvCxnSpPr/>
           <p:nvPr/>
         </p:nvCxnSpPr>
         <p:spPr>
           <a:xfrm>
-            <a:off x="1828800" y="4297680"/>
+            <a:off x="1828800" y="2926080"/>
             <a:ext cx="0" cy="137160"/>
           </a:xfrm>
           <a:prstGeom prst="line">
@@ -7292,7 +7654,151 @@
         </p:nvCxnSpPr>
         <p:spPr>
           <a:xfrm>
-            <a:off x="1828800" y="4846320"/>
+            <a:off x="2834640" y="3337560"/>
+            <a:ext cx="731520" cy="0"/>
+          </a:xfrm>
+          <a:prstGeom prst="line">
+            <a:avLst/>
+          </a:prstGeom>
+          <a:ln w="25400">
+            <a:solidFill>
+              <a:srgbClr val="4A6EA0"/>
+            </a:solidFill>
+            <a:tailEnd type="triangle" w="med" h="med"/>
+          </a:ln>
+        </p:spPr>
+        <p:style>
+          <a:lnRef idx="2">
+            <a:schemeClr val="accent1"/>
+          </a:lnRef>
+          <a:fillRef idx="0">
+            <a:schemeClr val="accent1"/>
+          </a:fillRef>
+          <a:effectRef idx="1">
+            <a:schemeClr val="accent1"/>
+          </a:effectRef>
+          <a:fontRef idx="minor">
+            <a:schemeClr val="tx1"/>
+          </a:fontRef>
+        </p:style>
+      </p:cxnSp>
+      <p:sp>
+        <p:nvSpPr>
+          <p:cNvPr id="24" name="TextBox 23"/>
+          <p:cNvSpPr txBox="1"/>
+          <p:nvPr/>
+        </p:nvSpPr>
+        <p:spPr>
+          <a:xfrm>
+            <a:off x="3246120" y="3044952"/>
+            <a:ext cx="822960" cy="274320"/>
+          </a:xfrm>
+          <a:prstGeom prst="rect">
+            <a:avLst/>
+          </a:prstGeom>
+          <a:noFill/>
+        </p:spPr>
+        <p:txBody>
+          <a:bodyPr wrap="none" lIns="36576" rIns="36576" tIns="0" bIns="0">
+            <a:spAutoFit/>
+          </a:bodyPr>
+          <a:lstStyle/>
+          <a:p>
+            <a:pPr algn="ctr"/>
+            <a:r>
+              <a:rPr sz="1000" b="1">
+                <a:solidFill>
+                  <a:srgbClr val="5C8347"/>
+                </a:solidFill>
+                <a:latin typeface="Calibri"/>
+              </a:rPr>
+              <a:t>yes
+(inherit)</a:t>
+            </a:r>
+          </a:p>
+        </p:txBody>
+      </p:sp>
+      <p:cxnSp>
+        <p:nvCxnSpPr>
+          <p:cNvPr id="25" name="Connector 24"/>
+          <p:cNvCxnSpPr/>
+          <p:nvPr/>
+        </p:nvCxnSpPr>
+        <p:spPr>
+          <a:xfrm>
+            <a:off x="1828800" y="3611880"/>
+            <a:ext cx="0" cy="274320"/>
+          </a:xfrm>
+          <a:prstGeom prst="line">
+            <a:avLst/>
+          </a:prstGeom>
+          <a:ln w="25400">
+            <a:solidFill>
+              <a:srgbClr val="4A6EA0"/>
+            </a:solidFill>
+            <a:tailEnd type="triangle" w="med" h="med"/>
+          </a:ln>
+        </p:spPr>
+        <p:style>
+          <a:lnRef idx="2">
+            <a:schemeClr val="accent1"/>
+          </a:lnRef>
+          <a:fillRef idx="0">
+            <a:schemeClr val="accent1"/>
+          </a:fillRef>
+          <a:effectRef idx="1">
+            <a:schemeClr val="accent1"/>
+          </a:effectRef>
+          <a:fontRef idx="minor">
+            <a:schemeClr val="tx1"/>
+          </a:fontRef>
+        </p:style>
+      </p:cxnSp>
+      <p:sp>
+        <p:nvSpPr>
+          <p:cNvPr id="26" name="TextBox 25"/>
+          <p:cNvSpPr txBox="1"/>
+          <p:nvPr/>
+        </p:nvSpPr>
+        <p:spPr>
+          <a:xfrm>
+            <a:off x="1901952" y="3584447"/>
+            <a:ext cx="822960" cy="274320"/>
+          </a:xfrm>
+          <a:prstGeom prst="rect">
+            <a:avLst/>
+          </a:prstGeom>
+          <a:noFill/>
+        </p:spPr>
+        <p:txBody>
+          <a:bodyPr wrap="none" lIns="36576" rIns="36576" tIns="0" bIns="0">
+            <a:spAutoFit/>
+          </a:bodyPr>
+          <a:lstStyle/>
+          <a:p>
+            <a:pPr algn="ctr"/>
+            <a:r>
+              <a:rPr sz="1000" b="1">
+                <a:solidFill>
+                  <a:srgbClr val="A84A4A"/>
+                </a:solidFill>
+                <a:latin typeface="Calibri"/>
+              </a:rPr>
+              <a:t>no
+(residual)</a:t>
+            </a:r>
+          </a:p>
+        </p:txBody>
+      </p:sp>
+      <p:cxnSp>
+        <p:nvCxnSpPr>
+          <p:cNvPr id="27" name="Connector 26"/>
+          <p:cNvCxnSpPr/>
+          <p:nvPr/>
+        </p:nvCxnSpPr>
+        <p:spPr>
+          <a:xfrm>
+            <a:off x="1828800" y="4297680"/>
             <a:ext cx="0" cy="137160"/>
           </a:xfrm>
           <a:prstGeom prst="line">
@@ -7322,14 +7828,14 @@
       </p:cxnSp>
       <p:cxnSp>
         <p:nvCxnSpPr>
-          <p:cNvPr id="24" name="Connector 23"/>
+          <p:cNvPr id="28" name="Connector 27"/>
           <p:cNvCxnSpPr/>
           <p:nvPr/>
         </p:nvCxnSpPr>
         <p:spPr>
           <a:xfrm>
-            <a:off x="2834640" y="5257800"/>
-            <a:ext cx="731520" cy="0"/>
+            <a:off x="1828800" y="5093208"/>
+            <a:ext cx="0" cy="73152"/>
           </a:xfrm>
           <a:prstGeom prst="line">
             <a:avLst/>
@@ -7356,51 +7862,16 @@
           </a:fontRef>
         </p:style>
       </p:cxnSp>
-      <p:sp>
-        <p:nvSpPr>
-          <p:cNvPr id="25" name="TextBox 24"/>
-          <p:cNvSpPr txBox="1"/>
-          <p:nvPr/>
-        </p:nvSpPr>
-        <p:spPr>
-          <a:xfrm>
-            <a:off x="3246120" y="5093208"/>
-            <a:ext cx="822960" cy="274320"/>
-          </a:xfrm>
-          <a:prstGeom prst="rect">
-            <a:avLst/>
-          </a:prstGeom>
-          <a:noFill/>
-        </p:spPr>
-        <p:txBody>
-          <a:bodyPr wrap="none" lIns="36576" rIns="36576" tIns="0" bIns="0">
-            <a:spAutoFit/>
-          </a:bodyPr>
-          <a:lstStyle/>
-          <a:p>
-            <a:pPr algn="ctr"/>
-            <a:r>
-              <a:rPr sz="1000" b="1">
-                <a:solidFill>
-                  <a:srgbClr val="A84A4A"/>
-                </a:solidFill>
-                <a:latin typeface="Calibri"/>
-              </a:rPr>
-              <a:t>no</a:t>
-            </a:r>
-          </a:p>
-        </p:txBody>
-      </p:sp>
       <p:cxnSp>
         <p:nvCxnSpPr>
-          <p:cNvPr id="26" name="Connector 25"/>
+          <p:cNvPr id="29" name="Connector 28"/>
           <p:cNvCxnSpPr/>
           <p:nvPr/>
         </p:nvCxnSpPr>
         <p:spPr>
           <a:xfrm>
-            <a:off x="1828800" y="5532120"/>
-            <a:ext cx="0" cy="274320"/>
+            <a:off x="2834640" y="5440680"/>
+            <a:ext cx="731520" cy="0"/>
           </a:xfrm>
           <a:prstGeom prst="line">
             <a:avLst/>
@@ -7429,13 +7900,13 @@
       </p:cxnSp>
       <p:sp>
         <p:nvSpPr>
-          <p:cNvPr id="27" name="TextBox 26"/>
+          <p:cNvPr id="30" name="TextBox 29"/>
           <p:cNvSpPr txBox="1"/>
           <p:nvPr/>
         </p:nvSpPr>
         <p:spPr>
           <a:xfrm>
-            <a:off x="1874519" y="5504688"/>
+            <a:off x="3246120" y="5276088"/>
             <a:ext cx="822960" cy="274320"/>
           </a:xfrm>
           <a:prstGeom prst="rect">
@@ -7453,25 +7924,96 @@
             <a:r>
               <a:rPr sz="1000" b="1">
                 <a:solidFill>
-                  <a:srgbClr val="5C8347"/>
+                  <a:srgbClr val="A84A4A"/>
                 </a:solidFill>
                 <a:latin typeface="Calibri"/>
               </a:rPr>
-              <a:t>yes (admit)</a:t>
+              <a:t>no</a:t>
             </a:r>
           </a:p>
         </p:txBody>
       </p:sp>
       <p:cxnSp>
         <p:nvCxnSpPr>
-          <p:cNvPr id="28" name="Connector 27"/>
+          <p:cNvPr id="31" name="Connector 30"/>
+          <p:cNvCxnSpPr/>
+          <p:nvPr/>
+        </p:nvCxnSpPr>
+        <p:spPr>
+          <a:xfrm>
+            <a:off x="1828800" y="5715000"/>
+            <a:ext cx="0" cy="274320"/>
+          </a:xfrm>
+          <a:prstGeom prst="line">
+            <a:avLst/>
+          </a:prstGeom>
+          <a:ln w="25400">
+            <a:solidFill>
+              <a:srgbClr val="4A6EA0"/>
+            </a:solidFill>
+            <a:tailEnd type="triangle" w="med" h="med"/>
+          </a:ln>
+        </p:spPr>
+        <p:style>
+          <a:lnRef idx="2">
+            <a:schemeClr val="accent1"/>
+          </a:lnRef>
+          <a:fillRef idx="0">
+            <a:schemeClr val="accent1"/>
+          </a:fillRef>
+          <a:effectRef idx="1">
+            <a:schemeClr val="accent1"/>
+          </a:effectRef>
+          <a:fontRef idx="minor">
+            <a:schemeClr val="tx1"/>
+          </a:fontRef>
+        </p:style>
+      </p:cxnSp>
+      <p:sp>
+        <p:nvSpPr>
+          <p:cNvPr id="32" name="TextBox 31"/>
+          <p:cNvSpPr txBox="1"/>
+          <p:nvPr/>
+        </p:nvSpPr>
+        <p:spPr>
+          <a:xfrm>
+            <a:off x="1874519" y="5687568"/>
+            <a:ext cx="822960" cy="274320"/>
+          </a:xfrm>
+          <a:prstGeom prst="rect">
+            <a:avLst/>
+          </a:prstGeom>
+          <a:noFill/>
+        </p:spPr>
+        <p:txBody>
+          <a:bodyPr wrap="none" lIns="36576" rIns="36576" tIns="0" bIns="0">
+            <a:spAutoFit/>
+          </a:bodyPr>
+          <a:lstStyle/>
+          <a:p>
+            <a:pPr algn="ctr"/>
+            <a:r>
+              <a:rPr sz="1000" b="1">
+                <a:solidFill>
+                  <a:srgbClr val="5C8347"/>
+                </a:solidFill>
+                <a:latin typeface="Calibri"/>
+              </a:rPr>
+              <a:t>yes (admit)</a:t>
+            </a:r>
+          </a:p>
+        </p:txBody>
+      </p:sp>
+      <p:cxnSp>
+        <p:nvCxnSpPr>
+          <p:cNvPr id="33" name="Connector 32"/>
           <p:cNvCxnSpPr/>
           <p:nvPr/>
         </p:nvCxnSpPr>
         <p:spPr>
           <a:xfrm flipH="1">
             <a:off x="3200400" y="3543300"/>
-            <a:ext cx="1508760" cy="2468880"/>
+            <a:ext cx="1508760" cy="2651759"/>
           </a:xfrm>
           <a:prstGeom prst="bentConnector3">
             <a:avLst/>
@@ -7500,7 +8042,7 @@
       </p:cxnSp>
       <p:sp>
         <p:nvSpPr>
-          <p:cNvPr id="29" name="TextBox 28"/>
+          <p:cNvPr id="34" name="TextBox 33"/>
           <p:cNvSpPr txBox="1"/>
           <p:nvPr/>
         </p:nvSpPr>
@@ -7535,7 +8077,7 @@
       </p:sp>
       <p:sp>
         <p:nvSpPr>
-          <p:cNvPr id="30" name="Rectangle 29"/>
+          <p:cNvPr id="35" name="Rectangle 34"/>
           <p:cNvSpPr/>
           <p:nvPr/>
         </p:nvSpPr>
@@ -8073,7 +8615,7 @@
       </p:sp>
       <p:sp>
         <p:nvSpPr>
-          <p:cNvPr id="31" name="TextBox 30"/>
+          <p:cNvPr id="36" name="TextBox 35"/>
           <p:cNvSpPr txBox="1"/>
           <p:nvPr/>
         </p:nvSpPr>
@@ -8108,7 +8650,7 @@
       </p:sp>
       <p:sp>
         <p:nvSpPr>
-          <p:cNvPr id="32" name="Rectangle 31"/>
+          <p:cNvPr id="37" name="Rectangle 36"/>
           <p:cNvSpPr/>
           <p:nvPr/>
         </p:nvSpPr>
@@ -8151,7 +8693,7 @@
       </p:sp>
       <p:sp>
         <p:nvSpPr>
-          <p:cNvPr id="33" name="TextBox 32"/>
+          <p:cNvPr id="38" name="TextBox 37"/>
           <p:cNvSpPr txBox="1"/>
           <p:nvPr/>
         </p:nvSpPr>
@@ -8186,7 +8728,7 @@
       </p:sp>
       <p:sp>
         <p:nvSpPr>
-          <p:cNvPr id="34" name="TextBox 33"/>
+          <p:cNvPr id="39" name="TextBox 38"/>
           <p:cNvSpPr txBox="1"/>
           <p:nvPr/>
         </p:nvSpPr>
@@ -8345,7 +8887,7 @@
                 </a:solidFill>
                 <a:latin typeface="Calibri"/>
               </a:rPr>
-              <a:t>Runs once per SOP. Result: validated stories under the right epics.</a:t>
+              <a:t>Runs once per SOP. Result: validated stories under the right epics.   Multiple SOPs can run through this pipeline in parallel (data-parallel).</a:t>
             </a:r>
           </a:p>
         </p:txBody>

--- a/client_alignment_deck.pptx
+++ b/client_alignment_deck.pptx
@@ -13,6 +13,7 @@
     <p:sldId id="261" r:id="rId12"/>
     <p:sldId id="262" r:id="rId13"/>
     <p:sldId id="263" r:id="rId14"/>
+    <p:sldId id="264" r:id="rId15"/>
   </p:sldIdLst>
   <p:sldSz cx="12191695" cy="6858000" type="screen4x3"/>
   <p:notesSz cx="6858000" cy="9144000"/>
@@ -3693,7 +3694,7 @@
                 </a:solidFill>
                 <a:latin typeface="Calibri"/>
               </a:rPr>
-              <a:t>1 / 8</a:t>
+              <a:t>1 / 9</a:t>
             </a:r>
           </a:p>
         </p:txBody>
@@ -4478,7 +4479,7 @@
                 </a:solidFill>
                 <a:latin typeface="Calibri"/>
               </a:rPr>
-              <a:t>2 / 8</a:t>
+              <a:t>2 / 9</a:t>
             </a:r>
           </a:p>
         </p:txBody>
@@ -5756,7 +5757,7 @@
                 </a:solidFill>
                 <a:latin typeface="Calibri"/>
               </a:rPr>
-              <a:t>3 / 8</a:t>
+              <a:t>3 / 9</a:t>
             </a:r>
           </a:p>
         </p:txBody>
@@ -6607,7 +6608,7 @@
                 </a:solidFill>
                 <a:latin typeface="Calibri"/>
               </a:rPr>
-              <a:t>4 / 8</a:t>
+              <a:t>4 / 9</a:t>
             </a:r>
           </a:p>
         </p:txBody>
@@ -8756,7 +8757,7 @@
                 </a:solidFill>
                 <a:latin typeface="Calibri"/>
               </a:rPr>
-              <a:t>5 / 8</a:t>
+              <a:t>5 / 9</a:t>
             </a:r>
           </a:p>
         </p:txBody>
@@ -8887,14 +8888,136 @@
                 </a:solidFill>
                 <a:latin typeface="Calibri"/>
               </a:rPr>
-              <a:t>Runs once per SOP. Result: validated stories under the right epics.   Multiple SOPs can run through this pipeline in parallel (data-parallel).</a:t>
-            </a:r>
-          </a:p>
-        </p:txBody>
-      </p:sp>
-      <p:sp>
-        <p:nvSpPr>
-          <p:cNvPr id="5" name="Rounded Rectangle 4"/>
+              <a:t>Runs once per SOP. Result: validated stories under the right epics. The dashed box below wraps everything that runs per SOP — N instances run in parallel.</a:t>
+            </a:r>
+          </a:p>
+        </p:txBody>
+      </p:sp>
+      <p:sp>
+        <p:nvSpPr>
+          <p:cNvPr id="5" name="Rectangle 4"/>
+          <p:cNvSpPr/>
+          <p:nvPr/>
+        </p:nvSpPr>
+        <p:spPr>
+          <a:xfrm>
+            <a:off x="274320" y="1325880"/>
+            <a:ext cx="5669280" cy="5212080"/>
+          </a:xfrm>
+          <a:prstGeom prst="rect">
+            <a:avLst/>
+          </a:prstGeom>
+          <a:noFill/>
+          <a:ln w="12700">
+            <a:solidFill>
+              <a:srgbClr val="9099A3"/>
+            </a:solidFill>
+            <a:prstDash val="dash"/>
+          </a:ln>
+        </p:spPr>
+        <p:style>
+          <a:lnRef idx="1">
+            <a:schemeClr val="accent1"/>
+          </a:lnRef>
+          <a:fillRef idx="3">
+            <a:schemeClr val="accent1"/>
+          </a:fillRef>
+          <a:effectRef idx="2">
+            <a:schemeClr val="accent1"/>
+          </a:effectRef>
+          <a:fontRef idx="minor">
+            <a:schemeClr val="lt1"/>
+          </a:fontRef>
+        </p:style>
+        <p:txBody>
+          <a:bodyPr rtlCol="0" anchor="ctr"/>
+          <a:lstStyle/>
+          <a:p>
+            <a:pPr algn="ctr"/>
+          </a:p>
+        </p:txBody>
+      </p:sp>
+      <p:sp>
+        <p:nvSpPr>
+          <p:cNvPr id="6" name="Rectangle 5"/>
+          <p:cNvSpPr/>
+          <p:nvPr/>
+        </p:nvSpPr>
+        <p:spPr>
+          <a:xfrm>
+            <a:off x="411480" y="1243584"/>
+            <a:ext cx="3200400" cy="201168"/>
+          </a:xfrm>
+          <a:prstGeom prst="rect">
+            <a:avLst/>
+          </a:prstGeom>
+          <a:solidFill>
+            <a:srgbClr val="FFFFFF"/>
+          </a:solidFill>
+          <a:ln>
+            <a:noFill/>
+          </a:ln>
+        </p:spPr>
+        <p:style>
+          <a:lnRef idx="1">
+            <a:schemeClr val="accent1"/>
+          </a:lnRef>
+          <a:fillRef idx="3">
+            <a:schemeClr val="accent1"/>
+          </a:fillRef>
+          <a:effectRef idx="2">
+            <a:schemeClr val="accent1"/>
+          </a:effectRef>
+          <a:fontRef idx="minor">
+            <a:schemeClr val="lt1"/>
+          </a:fontRef>
+        </p:style>
+        <p:txBody>
+          <a:bodyPr rtlCol="0" anchor="ctr"/>
+          <a:lstStyle/>
+          <a:p>
+            <a:pPr algn="ctr"/>
+          </a:p>
+        </p:txBody>
+      </p:sp>
+      <p:sp>
+        <p:nvSpPr>
+          <p:cNvPr id="7" name="TextBox 6"/>
+          <p:cNvSpPr txBox="1"/>
+          <p:nvPr/>
+        </p:nvSpPr>
+        <p:spPr>
+          <a:xfrm>
+            <a:off x="411480" y="1243584"/>
+            <a:ext cx="3200400" cy="201168"/>
+          </a:xfrm>
+          <a:prstGeom prst="rect">
+            <a:avLst/>
+          </a:prstGeom>
+          <a:noFill/>
+        </p:spPr>
+        <p:txBody>
+          <a:bodyPr wrap="square" anchor="ctr">
+            <a:spAutoFit/>
+          </a:bodyPr>
+          <a:lstStyle/>
+          <a:p>
+            <a:pPr algn="ctr"/>
+            <a:r>
+              <a:rPr sz="1000" b="1" i="1">
+                <a:solidFill>
+                  <a:srgbClr val="606870"/>
+                </a:solidFill>
+                <a:latin typeface="Calibri"/>
+              </a:rPr>
+              <a:t>ForEach SOP   —   N instances run in parallel</a:t>
+            </a:r>
+          </a:p>
+        </p:txBody>
+      </p:sp>
+      <p:sp>
+        <p:nvSpPr>
+          <p:cNvPr id="8" name="Rounded Rectangle 7"/>
           <p:cNvSpPr/>
           <p:nvPr/>
         </p:nvSpPr>
@@ -8948,7 +9071,7 @@
       </p:sp>
       <p:sp>
         <p:nvSpPr>
-          <p:cNvPr id="6" name="Rounded Rectangle 5"/>
+          <p:cNvPr id="9" name="Rounded Rectangle 8"/>
           <p:cNvSpPr/>
           <p:nvPr/>
         </p:nvSpPr>
@@ -9002,7 +9125,7 @@
       </p:sp>
       <p:sp>
         <p:nvSpPr>
-          <p:cNvPr id="7" name="Rounded Rectangle 6"/>
+          <p:cNvPr id="10" name="Rounded Rectangle 9"/>
           <p:cNvSpPr/>
           <p:nvPr/>
         </p:nvSpPr>
@@ -9056,7 +9179,7 @@
       </p:sp>
       <p:sp>
         <p:nvSpPr>
-          <p:cNvPr id="8" name="Rounded Rectangle 7"/>
+          <p:cNvPr id="11" name="Rounded Rectangle 10"/>
           <p:cNvSpPr/>
           <p:nvPr/>
         </p:nvSpPr>
@@ -9111,7 +9234,7 @@
       </p:sp>
       <p:sp>
         <p:nvSpPr>
-          <p:cNvPr id="9" name="Rounded Rectangle 8"/>
+          <p:cNvPr id="12" name="Rounded Rectangle 11"/>
           <p:cNvSpPr/>
           <p:nvPr/>
         </p:nvSpPr>
@@ -9165,7 +9288,7 @@
       </p:sp>
       <p:sp>
         <p:nvSpPr>
-          <p:cNvPr id="10" name="Diamond 9"/>
+          <p:cNvPr id="13" name="Diamond 12"/>
           <p:cNvSpPr/>
           <p:nvPr/>
         </p:nvSpPr>
@@ -9219,7 +9342,7 @@
       </p:sp>
       <p:sp>
         <p:nvSpPr>
-          <p:cNvPr id="11" name="Rounded Rectangle 10"/>
+          <p:cNvPr id="14" name="Rounded Rectangle 13"/>
           <p:cNvSpPr/>
           <p:nvPr/>
         </p:nvSpPr>
@@ -9274,7 +9397,7 @@
       </p:sp>
       <p:sp>
         <p:nvSpPr>
-          <p:cNvPr id="12" name="Rounded Rectangle 11"/>
+          <p:cNvPr id="15" name="Rounded Rectangle 14"/>
           <p:cNvSpPr/>
           <p:nvPr/>
         </p:nvSpPr>
@@ -9328,7 +9451,7 @@
       </p:sp>
       <p:cxnSp>
         <p:nvCxnSpPr>
-          <p:cNvPr id="13" name="Connector 12"/>
+          <p:cNvPr id="16" name="Connector 15"/>
           <p:cNvCxnSpPr/>
           <p:nvPr/>
         </p:nvCxnSpPr>
@@ -9336,114 +9459,6 @@
           <a:xfrm>
             <a:off x="1828800" y="1920240"/>
             <a:ext cx="0" cy="182880"/>
-          </a:xfrm>
-          <a:prstGeom prst="line">
-            <a:avLst/>
-          </a:prstGeom>
-          <a:ln w="25400">
-            <a:solidFill>
-              <a:srgbClr val="4A6EA0"/>
-            </a:solidFill>
-            <a:tailEnd type="triangle" w="med" h="med"/>
-          </a:ln>
-        </p:spPr>
-        <p:style>
-          <a:lnRef idx="2">
-            <a:schemeClr val="accent1"/>
-          </a:lnRef>
-          <a:fillRef idx="0">
-            <a:schemeClr val="accent1"/>
-          </a:fillRef>
-          <a:effectRef idx="1">
-            <a:schemeClr val="accent1"/>
-          </a:effectRef>
-          <a:fontRef idx="minor">
-            <a:schemeClr val="tx1"/>
-          </a:fontRef>
-        </p:style>
-      </p:cxnSp>
-      <p:cxnSp>
-        <p:nvCxnSpPr>
-          <p:cNvPr id="14" name="Connector 13"/>
-          <p:cNvCxnSpPr/>
-          <p:nvPr/>
-        </p:nvCxnSpPr>
-        <p:spPr>
-          <a:xfrm>
-            <a:off x="1828800" y="2606039"/>
-            <a:ext cx="0" cy="182881"/>
-          </a:xfrm>
-          <a:prstGeom prst="line">
-            <a:avLst/>
-          </a:prstGeom>
-          <a:ln w="25400">
-            <a:solidFill>
-              <a:srgbClr val="4A6EA0"/>
-            </a:solidFill>
-            <a:tailEnd type="triangle" w="med" h="med"/>
-          </a:ln>
-        </p:spPr>
-        <p:style>
-          <a:lnRef idx="2">
-            <a:schemeClr val="accent1"/>
-          </a:lnRef>
-          <a:fillRef idx="0">
-            <a:schemeClr val="accent1"/>
-          </a:fillRef>
-          <a:effectRef idx="1">
-            <a:schemeClr val="accent1"/>
-          </a:effectRef>
-          <a:fontRef idx="minor">
-            <a:schemeClr val="tx1"/>
-          </a:fontRef>
-        </p:style>
-      </p:cxnSp>
-      <p:cxnSp>
-        <p:nvCxnSpPr>
-          <p:cNvPr id="15" name="Connector 14"/>
-          <p:cNvCxnSpPr/>
-          <p:nvPr/>
-        </p:nvCxnSpPr>
-        <p:spPr>
-          <a:xfrm>
-            <a:off x="1828800" y="3291839"/>
-            <a:ext cx="0" cy="182881"/>
-          </a:xfrm>
-          <a:prstGeom prst="line">
-            <a:avLst/>
-          </a:prstGeom>
-          <a:ln w="25400">
-            <a:solidFill>
-              <a:srgbClr val="4A6EA0"/>
-            </a:solidFill>
-            <a:tailEnd type="triangle" w="med" h="med"/>
-          </a:ln>
-        </p:spPr>
-        <p:style>
-          <a:lnRef idx="2">
-            <a:schemeClr val="accent1"/>
-          </a:lnRef>
-          <a:fillRef idx="0">
-            <a:schemeClr val="accent1"/>
-          </a:fillRef>
-          <a:effectRef idx="1">
-            <a:schemeClr val="accent1"/>
-          </a:effectRef>
-          <a:fontRef idx="minor">
-            <a:schemeClr val="tx1"/>
-          </a:fontRef>
-        </p:style>
-      </p:cxnSp>
-      <p:cxnSp>
-        <p:nvCxnSpPr>
-          <p:cNvPr id="16" name="Connector 15"/>
-          <p:cNvCxnSpPr/>
-          <p:nvPr/>
-        </p:nvCxnSpPr>
-        <p:spPr>
-          <a:xfrm>
-            <a:off x="1828800" y="3977639"/>
-            <a:ext cx="0" cy="274320"/>
           </a:xfrm>
           <a:prstGeom prst="line">
             <a:avLst/>
@@ -9478,8 +9493,8 @@
         </p:nvCxnSpPr>
         <p:spPr>
           <a:xfrm>
-            <a:off x="1828800" y="4754879"/>
-            <a:ext cx="0" cy="182880"/>
+            <a:off x="1828800" y="2606039"/>
+            <a:ext cx="0" cy="182881"/>
           </a:xfrm>
           <a:prstGeom prst="line">
             <a:avLst/>
@@ -9514,8 +9529,8 @@
         </p:nvCxnSpPr>
         <p:spPr>
           <a:xfrm>
-            <a:off x="2834640" y="5280659"/>
-            <a:ext cx="731520" cy="0"/>
+            <a:off x="1828800" y="3291839"/>
+            <a:ext cx="0" cy="182881"/>
           </a:xfrm>
           <a:prstGeom prst="line">
             <a:avLst/>
@@ -9542,51 +9557,16 @@
           </a:fontRef>
         </p:style>
       </p:cxnSp>
-      <p:sp>
-        <p:nvSpPr>
-          <p:cNvPr id="19" name="TextBox 18"/>
-          <p:cNvSpPr txBox="1"/>
-          <p:nvPr/>
-        </p:nvSpPr>
-        <p:spPr>
-          <a:xfrm>
-            <a:off x="3246120" y="5116068"/>
-            <a:ext cx="822960" cy="274320"/>
-          </a:xfrm>
-          <a:prstGeom prst="rect">
-            <a:avLst/>
-          </a:prstGeom>
-          <a:noFill/>
-        </p:spPr>
-        <p:txBody>
-          <a:bodyPr wrap="none" lIns="36576" rIns="36576" tIns="0" bIns="0">
-            <a:spAutoFit/>
-          </a:bodyPr>
-          <a:lstStyle/>
-          <a:p>
-            <a:pPr algn="ctr"/>
-            <a:r>
-              <a:rPr sz="1000" b="1">
-                <a:solidFill>
-                  <a:srgbClr val="A84A4A"/>
-                </a:solidFill>
-                <a:latin typeface="Calibri"/>
-              </a:rPr>
-              <a:t>no</a:t>
-            </a:r>
-          </a:p>
-        </p:txBody>
-      </p:sp>
       <p:cxnSp>
         <p:nvCxnSpPr>
-          <p:cNvPr id="20" name="Connector 19"/>
+          <p:cNvPr id="19" name="Connector 18"/>
           <p:cNvCxnSpPr/>
           <p:nvPr/>
         </p:nvCxnSpPr>
         <p:spPr>
           <a:xfrm>
-            <a:off x="1828800" y="5623559"/>
-            <a:ext cx="0" cy="411481"/>
+            <a:off x="1828800" y="3977639"/>
+            <a:ext cx="0" cy="274320"/>
           </a:xfrm>
           <a:prstGeom prst="line">
             <a:avLst/>
@@ -9613,15 +9593,87 @@
           </a:fontRef>
         </p:style>
       </p:cxnSp>
-      <p:sp>
-        <p:nvSpPr>
-          <p:cNvPr id="21" name="TextBox 20"/>
+      <p:cxnSp>
+        <p:nvCxnSpPr>
+          <p:cNvPr id="20" name="Connector 19"/>
+          <p:cNvCxnSpPr/>
+          <p:nvPr/>
+        </p:nvCxnSpPr>
+        <p:spPr>
+          <a:xfrm>
+            <a:off x="1828800" y="4754879"/>
+            <a:ext cx="0" cy="182880"/>
+          </a:xfrm>
+          <a:prstGeom prst="line">
+            <a:avLst/>
+          </a:prstGeom>
+          <a:ln w="25400">
+            <a:solidFill>
+              <a:srgbClr val="4A6EA0"/>
+            </a:solidFill>
+            <a:tailEnd type="triangle" w="med" h="med"/>
+          </a:ln>
+        </p:spPr>
+        <p:style>
+          <a:lnRef idx="2">
+            <a:schemeClr val="accent1"/>
+          </a:lnRef>
+          <a:fillRef idx="0">
+            <a:schemeClr val="accent1"/>
+          </a:fillRef>
+          <a:effectRef idx="1">
+            <a:schemeClr val="accent1"/>
+          </a:effectRef>
+          <a:fontRef idx="minor">
+            <a:schemeClr val="tx1"/>
+          </a:fontRef>
+        </p:style>
+      </p:cxnSp>
+      <p:cxnSp>
+        <p:nvCxnSpPr>
+          <p:cNvPr id="21" name="Connector 20"/>
+          <p:cNvCxnSpPr/>
+          <p:nvPr/>
+        </p:nvCxnSpPr>
+        <p:spPr>
+          <a:xfrm>
+            <a:off x="2834640" y="5280659"/>
+            <a:ext cx="731520" cy="0"/>
+          </a:xfrm>
+          <a:prstGeom prst="line">
+            <a:avLst/>
+          </a:prstGeom>
+          <a:ln w="25400">
+            <a:solidFill>
+              <a:srgbClr val="4A6EA0"/>
+            </a:solidFill>
+            <a:tailEnd type="triangle" w="med" h="med"/>
+          </a:ln>
+        </p:spPr>
+        <p:style>
+          <a:lnRef idx="2">
+            <a:schemeClr val="accent1"/>
+          </a:lnRef>
+          <a:fillRef idx="0">
+            <a:schemeClr val="accent1"/>
+          </a:fillRef>
+          <a:effectRef idx="1">
+            <a:schemeClr val="accent1"/>
+          </a:effectRef>
+          <a:fontRef idx="minor">
+            <a:schemeClr val="tx1"/>
+          </a:fontRef>
+        </p:style>
+      </p:cxnSp>
+      <p:sp>
+        <p:nvSpPr>
+          <p:cNvPr id="22" name="TextBox 21"/>
           <p:cNvSpPr txBox="1"/>
           <p:nvPr/>
         </p:nvSpPr>
         <p:spPr>
           <a:xfrm>
-            <a:off x="1874519" y="5664708"/>
+            <a:off x="3246120" y="5116068"/>
             <a:ext cx="822960" cy="274320"/>
           </a:xfrm>
           <a:prstGeom prst="rect">
@@ -9639,6 +9691,77 @@
             <a:r>
               <a:rPr sz="1000" b="1">
                 <a:solidFill>
+                  <a:srgbClr val="A84A4A"/>
+                </a:solidFill>
+                <a:latin typeface="Calibri"/>
+              </a:rPr>
+              <a:t>no</a:t>
+            </a:r>
+          </a:p>
+        </p:txBody>
+      </p:sp>
+      <p:cxnSp>
+        <p:nvCxnSpPr>
+          <p:cNvPr id="23" name="Connector 22"/>
+          <p:cNvCxnSpPr/>
+          <p:nvPr/>
+        </p:nvCxnSpPr>
+        <p:spPr>
+          <a:xfrm>
+            <a:off x="1828800" y="5623559"/>
+            <a:ext cx="0" cy="411481"/>
+          </a:xfrm>
+          <a:prstGeom prst="line">
+            <a:avLst/>
+          </a:prstGeom>
+          <a:ln w="25400">
+            <a:solidFill>
+              <a:srgbClr val="4A6EA0"/>
+            </a:solidFill>
+            <a:tailEnd type="triangle" w="med" h="med"/>
+          </a:ln>
+        </p:spPr>
+        <p:style>
+          <a:lnRef idx="2">
+            <a:schemeClr val="accent1"/>
+          </a:lnRef>
+          <a:fillRef idx="0">
+            <a:schemeClr val="accent1"/>
+          </a:fillRef>
+          <a:effectRef idx="1">
+            <a:schemeClr val="accent1"/>
+          </a:effectRef>
+          <a:fontRef idx="minor">
+            <a:schemeClr val="tx1"/>
+          </a:fontRef>
+        </p:style>
+      </p:cxnSp>
+      <p:sp>
+        <p:nvSpPr>
+          <p:cNvPr id="24" name="TextBox 23"/>
+          <p:cNvSpPr txBox="1"/>
+          <p:nvPr/>
+        </p:nvSpPr>
+        <p:spPr>
+          <a:xfrm>
+            <a:off x="1874519" y="5664708"/>
+            <a:ext cx="822960" cy="274320"/>
+          </a:xfrm>
+          <a:prstGeom prst="rect">
+            <a:avLst/>
+          </a:prstGeom>
+          <a:noFill/>
+        </p:spPr>
+        <p:txBody>
+          <a:bodyPr wrap="none" lIns="36576" rIns="36576" tIns="0" bIns="0">
+            <a:spAutoFit/>
+          </a:bodyPr>
+          <a:lstStyle/>
+          <a:p>
+            <a:pPr algn="ctr"/>
+            <a:r>
+              <a:rPr sz="1000" b="1">
+                <a:solidFill>
                   <a:srgbClr val="5C8347"/>
                 </a:solidFill>
                 <a:latin typeface="Calibri"/>
@@ -9650,7 +9773,7 @@
       </p:sp>
       <p:sp>
         <p:nvSpPr>
-          <p:cNvPr id="22" name="TextBox 21"/>
+          <p:cNvPr id="25" name="TextBox 24"/>
           <p:cNvSpPr txBox="1"/>
           <p:nvPr/>
         </p:nvSpPr>
@@ -9685,7 +9808,7 @@
       </p:sp>
       <p:sp>
         <p:nvSpPr>
-          <p:cNvPr id="23" name="Rectangle 22"/>
+          <p:cNvPr id="26" name="Rectangle 25"/>
           <p:cNvSpPr/>
           <p:nvPr/>
         </p:nvSpPr>
@@ -10047,7 +10170,7 @@
       </p:sp>
       <p:sp>
         <p:nvSpPr>
-          <p:cNvPr id="24" name="TextBox 23"/>
+          <p:cNvPr id="27" name="TextBox 26"/>
           <p:cNvSpPr txBox="1"/>
           <p:nvPr/>
         </p:nvSpPr>
@@ -10082,7 +10205,7 @@
       </p:sp>
       <p:sp>
         <p:nvSpPr>
-          <p:cNvPr id="25" name="Rectangle 24"/>
+          <p:cNvPr id="28" name="Rectangle 27"/>
           <p:cNvSpPr/>
           <p:nvPr/>
         </p:nvSpPr>
@@ -10125,7 +10248,7 @@
       </p:sp>
       <p:sp>
         <p:nvSpPr>
-          <p:cNvPr id="26" name="TextBox 25"/>
+          <p:cNvPr id="29" name="TextBox 28"/>
           <p:cNvSpPr txBox="1"/>
           <p:nvPr/>
         </p:nvSpPr>
@@ -10160,7 +10283,7 @@
       </p:sp>
       <p:sp>
         <p:nvSpPr>
-          <p:cNvPr id="27" name="TextBox 26"/>
+          <p:cNvPr id="30" name="TextBox 29"/>
           <p:cNvSpPr txBox="1"/>
           <p:nvPr/>
         </p:nvSpPr>
@@ -10188,7 +10311,7 @@
                 </a:solidFill>
                 <a:latin typeface="Calibri"/>
               </a:rPr>
-              <a:t>6 / 8</a:t>
+              <a:t>6 / 9</a:t>
             </a:r>
           </a:p>
         </p:txBody>
@@ -11695,7 +11818,7 @@
                 </a:solidFill>
                 <a:latin typeface="Calibri"/>
               </a:rPr>
-              <a:t>7 / 8</a:t>
+              <a:t>7 / 9</a:t>
             </a:r>
           </a:p>
         </p:txBody>
@@ -11748,6 +11871,1212 @@
                 </a:solidFill>
                 <a:latin typeface="Calibri"/>
               </a:rPr>
+              <a:t>What happens when something fails</a:t>
+            </a:r>
+          </a:p>
+        </p:txBody>
+      </p:sp>
+      <p:sp>
+        <p:nvSpPr>
+          <p:cNvPr id="3" name="Rectangle 2"/>
+          <p:cNvSpPr/>
+          <p:nvPr/>
+        </p:nvSpPr>
+        <p:spPr>
+          <a:xfrm>
+            <a:off x="457200" y="868680"/>
+            <a:ext cx="1463040" cy="54864"/>
+          </a:xfrm>
+          <a:prstGeom prst="rect">
+            <a:avLst/>
+          </a:prstGeom>
+          <a:solidFill>
+            <a:srgbClr val="1F4E79"/>
+          </a:solidFill>
+          <a:ln>
+            <a:noFill/>
+          </a:ln>
+        </p:spPr>
+        <p:style>
+          <a:lnRef idx="1">
+            <a:schemeClr val="accent1"/>
+          </a:lnRef>
+          <a:fillRef idx="3">
+            <a:schemeClr val="accent1"/>
+          </a:fillRef>
+          <a:effectRef idx="2">
+            <a:schemeClr val="accent1"/>
+          </a:effectRef>
+          <a:fontRef idx="minor">
+            <a:schemeClr val="lt1"/>
+          </a:fontRef>
+        </p:style>
+        <p:txBody>
+          <a:bodyPr rtlCol="0" anchor="ctr"/>
+          <a:lstStyle/>
+          <a:p>
+            <a:pPr algn="ctr"/>
+          </a:p>
+        </p:txBody>
+      </p:sp>
+      <p:sp>
+        <p:nvSpPr>
+          <p:cNvPr id="4" name="TextBox 3"/>
+          <p:cNvSpPr txBox="1"/>
+          <p:nvPr/>
+        </p:nvSpPr>
+        <p:spPr>
+          <a:xfrm>
+            <a:off x="457200" y="960120"/>
+            <a:ext cx="11430000" cy="457200"/>
+          </a:xfrm>
+          <a:prstGeom prst="rect">
+            <a:avLst/>
+          </a:prstGeom>
+          <a:noFill/>
+        </p:spPr>
+        <p:txBody>
+          <a:bodyPr wrap="square" anchor="t">
+            <a:spAutoFit/>
+          </a:bodyPr>
+          <a:lstStyle/>
+          <a:p>
+            <a:pPr algn="l"/>
+            <a:r>
+              <a:rPr sz="1200" b="0" i="0">
+                <a:solidFill>
+                  <a:srgbClr val="1F2D3D"/>
+                </a:solidFill>
+                <a:latin typeface="Calibri"/>
+              </a:rPr>
+              <a:t>Failures at three levels — each has a deterministic fallback. No human intervention is required at runtime.</a:t>
+            </a:r>
+          </a:p>
+        </p:txBody>
+      </p:sp>
+      <p:sp>
+        <p:nvSpPr>
+          <p:cNvPr id="5" name="Rounded Rectangle 4"/>
+          <p:cNvSpPr/>
+          <p:nvPr/>
+        </p:nvSpPr>
+        <p:spPr>
+          <a:xfrm>
+            <a:off x="376275" y="1554480"/>
+            <a:ext cx="3703320" cy="457200"/>
+          </a:xfrm>
+          <a:prstGeom prst="roundRect">
+            <a:avLst/>
+          </a:prstGeom>
+          <a:solidFill>
+            <a:srgbClr val="FAE9CB"/>
+          </a:solidFill>
+          <a:ln w="12700">
+            <a:solidFill>
+              <a:srgbClr val="C9952C"/>
+            </a:solidFill>
+          </a:ln>
+        </p:spPr>
+        <p:style>
+          <a:lnRef idx="1">
+            <a:schemeClr val="accent1"/>
+          </a:lnRef>
+          <a:fillRef idx="3">
+            <a:schemeClr val="accent1"/>
+          </a:fillRef>
+          <a:effectRef idx="2">
+            <a:schemeClr val="accent1"/>
+          </a:effectRef>
+          <a:fontRef idx="minor">
+            <a:schemeClr val="lt1"/>
+          </a:fontRef>
+        </p:style>
+        <p:txBody>
+          <a:bodyPr rtlCol="0" anchor="ctr" wrap="square" lIns="73152" rIns="73152" tIns="36576" bIns="36576"/>
+          <a:lstStyle/>
+          <a:p>
+            <a:pPr algn="ctr"/>
+            <a:r>
+              <a:rPr sz="1400" b="1" i="0">
+                <a:solidFill>
+                  <a:srgbClr val="1F4E79"/>
+                </a:solidFill>
+                <a:latin typeface="Calibri"/>
+              </a:rPr>
+              <a:t>Per-call</a:t>
+            </a:r>
+          </a:p>
+        </p:txBody>
+      </p:sp>
+      <p:sp>
+        <p:nvSpPr>
+          <p:cNvPr id="6" name="TextBox 5"/>
+          <p:cNvSpPr txBox="1"/>
+          <p:nvPr/>
+        </p:nvSpPr>
+        <p:spPr>
+          <a:xfrm>
+            <a:off x="376275" y="2057400"/>
+            <a:ext cx="3703320" cy="228600"/>
+          </a:xfrm>
+          <a:prstGeom prst="rect">
+            <a:avLst/>
+          </a:prstGeom>
+          <a:noFill/>
+        </p:spPr>
+        <p:txBody>
+          <a:bodyPr wrap="square" anchor="t">
+            <a:spAutoFit/>
+          </a:bodyPr>
+          <a:lstStyle/>
+          <a:p>
+            <a:pPr algn="ctr"/>
+            <a:r>
+              <a:rPr sz="1000" b="0" i="1">
+                <a:solidFill>
+                  <a:srgbClr val="55606E"/>
+                </a:solidFill>
+                <a:latin typeface="Calibri"/>
+              </a:rPr>
+              <a:t>(LLM error or timeout)</a:t>
+            </a:r>
+          </a:p>
+        </p:txBody>
+      </p:sp>
+      <p:sp>
+        <p:nvSpPr>
+          <p:cNvPr id="7" name="Rectangle 6"/>
+          <p:cNvSpPr/>
+          <p:nvPr/>
+        </p:nvSpPr>
+        <p:spPr>
+          <a:xfrm>
+            <a:off x="376275" y="2331720"/>
+            <a:ext cx="3703320" cy="2606040"/>
+          </a:xfrm>
+          <a:prstGeom prst="rect">
+            <a:avLst/>
+          </a:prstGeom>
+          <a:solidFill>
+            <a:srgbClr val="FFFFFF"/>
+          </a:solidFill>
+          <a:ln w="9525">
+            <a:solidFill>
+              <a:srgbClr val="C9952C"/>
+            </a:solidFill>
+          </a:ln>
+        </p:spPr>
+        <p:style>
+          <a:lnRef idx="1">
+            <a:schemeClr val="accent1"/>
+          </a:lnRef>
+          <a:fillRef idx="3">
+            <a:schemeClr val="accent1"/>
+          </a:fillRef>
+          <a:effectRef idx="2">
+            <a:schemeClr val="accent1"/>
+          </a:effectRef>
+          <a:fontRef idx="minor">
+            <a:schemeClr val="lt1"/>
+          </a:fontRef>
+        </p:style>
+        <p:txBody>
+          <a:bodyPr rtlCol="0" anchor="t" wrap="square" lIns="109728" rIns="109728" tIns="91440" bIns="91440"/>
+          <a:lstStyle/>
+          <a:p>
+            <a:pPr algn="l">
+              <a:spcAft>
+                <a:spcPts val="600"/>
+              </a:spcAft>
+            </a:pPr>
+            <a:r>
+              <a:rPr sz="1000" b="1">
+                <a:solidFill>
+                  <a:srgbClr val="1F4E79"/>
+                </a:solidFill>
+                <a:latin typeface="Calibri"/>
+              </a:rPr>
+              <a:t>Trigger: </a:t>
+            </a:r>
+            <a:r>
+              <a:rPr sz="1000">
+                <a:solidFill>
+                  <a:srgbClr val="1F2D3D"/>
+                </a:solidFill>
+                <a:latin typeface="Calibri"/>
+              </a:rPr>
+              <a:t>An agent's LLM call returns an error or times out.</a:t>
+            </a:r>
+          </a:p>
+          <a:p>
+            <a:pPr algn="l">
+              <a:spcAft>
+                <a:spcPts val="600"/>
+              </a:spcAft>
+            </a:pPr>
+            <a:r>
+              <a:rPr sz="1000" b="1">
+                <a:solidFill>
+                  <a:srgbClr val="1F4E79"/>
+                </a:solidFill>
+                <a:latin typeface="Calibri"/>
+              </a:rPr>
+              <a:t>Fallback: </a:t>
+            </a:r>
+            <a:r>
+              <a:rPr sz="1000">
+                <a:solidFill>
+                  <a:srgbClr val="1F2D3D"/>
+                </a:solidFill>
+                <a:latin typeface="Calibri"/>
+              </a:rPr>
+              <a:t>Retry with exponential backoff (3 attempts).</a:t>
+            </a:r>
+          </a:p>
+          <a:p>
+            <a:pPr algn="l">
+              <a:spcAft>
+                <a:spcPts val="600"/>
+              </a:spcAft>
+            </a:pPr>
+            <a:r>
+              <a:rPr sz="1000" b="1">
+                <a:solidFill>
+                  <a:srgbClr val="1F4E79"/>
+                </a:solidFill>
+                <a:latin typeface="Calibri"/>
+              </a:rPr>
+              <a:t>If persistent: </a:t>
+            </a:r>
+            <a:r>
+              <a:rPr sz="1000">
+                <a:solidFill>
+                  <a:srgbClr val="1F2D3D"/>
+                </a:solidFill>
+                <a:latin typeface="Calibri"/>
+              </a:rPr>
+              <a:t>Defer the item to the next batch; log the failure to the audit trail.</a:t>
+            </a:r>
+          </a:p>
+          <a:p>
+            <a:pPr algn="l">
+              <a:spcAft>
+                <a:spcPts val="600"/>
+              </a:spcAft>
+            </a:pPr>
+            <a:r>
+              <a:rPr sz="1000" b="1">
+                <a:solidFill>
+                  <a:srgbClr val="1F4E79"/>
+                </a:solidFill>
+                <a:latin typeface="Calibri"/>
+              </a:rPr>
+              <a:t>Pipeline impact: </a:t>
+            </a:r>
+            <a:r>
+              <a:rPr sz="1000">
+                <a:solidFill>
+                  <a:srgbClr val="1F2D3D"/>
+                </a:solidFill>
+                <a:latin typeface="Calibri"/>
+              </a:rPr>
+              <a:t>Other items continue. No block.</a:t>
+            </a:r>
+          </a:p>
+        </p:txBody>
+      </p:sp>
+      <p:sp>
+        <p:nvSpPr>
+          <p:cNvPr id="8" name="Rounded Rectangle 7"/>
+          <p:cNvSpPr/>
+          <p:nvPr/>
+        </p:nvSpPr>
+        <p:spPr>
+          <a:xfrm>
+            <a:off x="4244187" y="1554480"/>
+            <a:ext cx="3703320" cy="457200"/>
+          </a:xfrm>
+          <a:prstGeom prst="roundRect">
+            <a:avLst/>
+          </a:prstGeom>
+          <a:solidFill>
+            <a:srgbClr val="ECF4E8"/>
+          </a:solidFill>
+          <a:ln w="12700">
+            <a:solidFill>
+              <a:srgbClr val="5C8347"/>
+            </a:solidFill>
+          </a:ln>
+        </p:spPr>
+        <p:style>
+          <a:lnRef idx="1">
+            <a:schemeClr val="accent1"/>
+          </a:lnRef>
+          <a:fillRef idx="3">
+            <a:schemeClr val="accent1"/>
+          </a:fillRef>
+          <a:effectRef idx="2">
+            <a:schemeClr val="accent1"/>
+          </a:effectRef>
+          <a:fontRef idx="minor">
+            <a:schemeClr val="lt1"/>
+          </a:fontRef>
+        </p:style>
+        <p:txBody>
+          <a:bodyPr rtlCol="0" anchor="ctr" wrap="square" lIns="73152" rIns="73152" tIns="36576" bIns="36576"/>
+          <a:lstStyle/>
+          <a:p>
+            <a:pPr algn="ctr"/>
+            <a:r>
+              <a:rPr sz="1400" b="1" i="0">
+                <a:solidFill>
+                  <a:srgbClr val="1F4E79"/>
+                </a:solidFill>
+                <a:latin typeface="Calibri"/>
+              </a:rPr>
+              <a:t>Per-story</a:t>
+            </a:r>
+          </a:p>
+        </p:txBody>
+      </p:sp>
+      <p:sp>
+        <p:nvSpPr>
+          <p:cNvPr id="9" name="TextBox 8"/>
+          <p:cNvSpPr txBox="1"/>
+          <p:nvPr/>
+        </p:nvSpPr>
+        <p:spPr>
+          <a:xfrm>
+            <a:off x="4244187" y="2057400"/>
+            <a:ext cx="3703320" cy="228600"/>
+          </a:xfrm>
+          <a:prstGeom prst="rect">
+            <a:avLst/>
+          </a:prstGeom>
+          <a:noFill/>
+        </p:spPr>
+        <p:txBody>
+          <a:bodyPr wrap="square" anchor="t">
+            <a:spAutoFit/>
+          </a:bodyPr>
+          <a:lstStyle/>
+          <a:p>
+            <a:pPr algn="ctr"/>
+            <a:r>
+              <a:rPr sz="1000" b="0" i="1">
+                <a:solidFill>
+                  <a:srgbClr val="55606E"/>
+                </a:solidFill>
+                <a:latin typeface="Calibri"/>
+              </a:rPr>
+              <a:t>(quality check fails)</a:t>
+            </a:r>
+          </a:p>
+        </p:txBody>
+      </p:sp>
+      <p:sp>
+        <p:nvSpPr>
+          <p:cNvPr id="10" name="Rectangle 9"/>
+          <p:cNvSpPr/>
+          <p:nvPr/>
+        </p:nvSpPr>
+        <p:spPr>
+          <a:xfrm>
+            <a:off x="4244187" y="2331720"/>
+            <a:ext cx="3703320" cy="2606040"/>
+          </a:xfrm>
+          <a:prstGeom prst="rect">
+            <a:avLst/>
+          </a:prstGeom>
+          <a:solidFill>
+            <a:srgbClr val="FFFFFF"/>
+          </a:solidFill>
+          <a:ln w="9525">
+            <a:solidFill>
+              <a:srgbClr val="5C8347"/>
+            </a:solidFill>
+          </a:ln>
+        </p:spPr>
+        <p:style>
+          <a:lnRef idx="1">
+            <a:schemeClr val="accent1"/>
+          </a:lnRef>
+          <a:fillRef idx="3">
+            <a:schemeClr val="accent1"/>
+          </a:fillRef>
+          <a:effectRef idx="2">
+            <a:schemeClr val="accent1"/>
+          </a:effectRef>
+          <a:fontRef idx="minor">
+            <a:schemeClr val="lt1"/>
+          </a:fontRef>
+        </p:style>
+        <p:txBody>
+          <a:bodyPr rtlCol="0" anchor="t" wrap="square" lIns="109728" rIns="109728" tIns="91440" bIns="91440"/>
+          <a:lstStyle/>
+          <a:p>
+            <a:pPr algn="l">
+              <a:spcAft>
+                <a:spcPts val="600"/>
+              </a:spcAft>
+            </a:pPr>
+            <a:r>
+              <a:rPr sz="1000" b="1">
+                <a:solidFill>
+                  <a:srgbClr val="1F4E79"/>
+                </a:solidFill>
+                <a:latin typeface="Calibri"/>
+              </a:rPr>
+              <a:t>Trigger: </a:t>
+            </a:r>
+            <a:r>
+              <a:rPr sz="1000">
+                <a:solidFill>
+                  <a:srgbClr val="1F2D3D"/>
+                </a:solidFill>
+                <a:latin typeface="Calibri"/>
+              </a:rPr>
+              <a:t>Validator rejects a story.</a:t>
+            </a:r>
+          </a:p>
+          <a:p>
+            <a:pPr algn="l">
+              <a:spcAft>
+                <a:spcPts val="600"/>
+              </a:spcAft>
+            </a:pPr>
+            <a:r>
+              <a:rPr sz="1000" b="1">
+                <a:solidFill>
+                  <a:srgbClr val="1F4E79"/>
+                </a:solidFill>
+                <a:latin typeface="Calibri"/>
+              </a:rPr>
+              <a:t>Fallback: </a:t>
+            </a:r>
+            <a:r>
+              <a:rPr sz="1000">
+                <a:solidFill>
+                  <a:srgbClr val="1F2D3D"/>
+                </a:solidFill>
+                <a:latin typeface="Calibri"/>
+              </a:rPr>
+              <a:t>Up to 2 revision attempts; the Validator drives revisions with the failed-checks list.</a:t>
+            </a:r>
+          </a:p>
+          <a:p>
+            <a:pPr algn="l">
+              <a:spcAft>
+                <a:spcPts val="600"/>
+              </a:spcAft>
+            </a:pPr>
+            <a:r>
+              <a:rPr sz="1000" b="1">
+                <a:solidFill>
+                  <a:srgbClr val="1F4E79"/>
+                </a:solidFill>
+                <a:latin typeface="Calibri"/>
+              </a:rPr>
+              <a:t>If persistent: </a:t>
+            </a:r>
+            <a:r>
+              <a:rPr sz="1000">
+                <a:solidFill>
+                  <a:srgbClr val="1F2D3D"/>
+                </a:solidFill>
+                <a:latin typeface="Calibri"/>
+              </a:rPr>
+              <a:t>Auto-park to the review pile. Story does not reach Output A in strict mode.</a:t>
+            </a:r>
+          </a:p>
+          <a:p>
+            <a:pPr algn="l">
+              <a:spcAft>
+                <a:spcPts val="600"/>
+              </a:spcAft>
+            </a:pPr>
+            <a:r>
+              <a:rPr sz="1000" b="1">
+                <a:solidFill>
+                  <a:srgbClr val="1F4E79"/>
+                </a:solidFill>
+                <a:latin typeface="Calibri"/>
+              </a:rPr>
+              <a:t>Pipeline impact: </a:t>
+            </a:r>
+            <a:r>
+              <a:rPr sz="1000">
+                <a:solidFill>
+                  <a:srgbClr val="1F2D3D"/>
+                </a:solidFill>
+                <a:latin typeface="Calibri"/>
+              </a:rPr>
+              <a:t>Subsequent stories continue. No block.</a:t>
+            </a:r>
+          </a:p>
+        </p:txBody>
+      </p:sp>
+      <p:sp>
+        <p:nvSpPr>
+          <p:cNvPr id="11" name="Rounded Rectangle 10"/>
+          <p:cNvSpPr/>
+          <p:nvPr/>
+        </p:nvSpPr>
+        <p:spPr>
+          <a:xfrm>
+            <a:off x="8112099" y="1554480"/>
+            <a:ext cx="3703320" cy="457200"/>
+          </a:xfrm>
+          <a:prstGeom prst="roundRect">
+            <a:avLst/>
+          </a:prstGeom>
+          <a:solidFill>
+            <a:srgbClr val="F8E3E3"/>
+          </a:solidFill>
+          <a:ln w="12700">
+            <a:solidFill>
+              <a:srgbClr val="A84A4A"/>
+            </a:solidFill>
+          </a:ln>
+        </p:spPr>
+        <p:style>
+          <a:lnRef idx="1">
+            <a:schemeClr val="accent1"/>
+          </a:lnRef>
+          <a:fillRef idx="3">
+            <a:schemeClr val="accent1"/>
+          </a:fillRef>
+          <a:effectRef idx="2">
+            <a:schemeClr val="accent1"/>
+          </a:effectRef>
+          <a:fontRef idx="minor">
+            <a:schemeClr val="lt1"/>
+          </a:fontRef>
+        </p:style>
+        <p:txBody>
+          <a:bodyPr rtlCol="0" anchor="ctr" wrap="square" lIns="73152" rIns="73152" tIns="36576" bIns="36576"/>
+          <a:lstStyle/>
+          <a:p>
+            <a:pPr algn="ctr"/>
+            <a:r>
+              <a:rPr sz="1400" b="1" i="0">
+                <a:solidFill>
+                  <a:srgbClr val="1F4E79"/>
+                </a:solidFill>
+                <a:latin typeface="Calibri"/>
+              </a:rPr>
+              <a:t>Per-batch</a:t>
+            </a:r>
+          </a:p>
+        </p:txBody>
+      </p:sp>
+      <p:sp>
+        <p:nvSpPr>
+          <p:cNvPr id="12" name="TextBox 11"/>
+          <p:cNvSpPr txBox="1"/>
+          <p:nvPr/>
+        </p:nvSpPr>
+        <p:spPr>
+          <a:xfrm>
+            <a:off x="8112099" y="2057400"/>
+            <a:ext cx="3703320" cy="228600"/>
+          </a:xfrm>
+          <a:prstGeom prst="rect">
+            <a:avLst/>
+          </a:prstGeom>
+          <a:noFill/>
+        </p:spPr>
+        <p:txBody>
+          <a:bodyPr wrap="square" anchor="t">
+            <a:spAutoFit/>
+          </a:bodyPr>
+          <a:lstStyle/>
+          <a:p>
+            <a:pPr algn="ctr"/>
+            <a:r>
+              <a:rPr sz="1000" b="0" i="1">
+                <a:solidFill>
+                  <a:srgbClr val="55606E"/>
+                </a:solidFill>
+                <a:latin typeface="Calibri"/>
+              </a:rPr>
+              <a:t>(drift / catalog issues)</a:t>
+            </a:r>
+          </a:p>
+        </p:txBody>
+      </p:sp>
+      <p:sp>
+        <p:nvSpPr>
+          <p:cNvPr id="13" name="Rectangle 12"/>
+          <p:cNvSpPr/>
+          <p:nvPr/>
+        </p:nvSpPr>
+        <p:spPr>
+          <a:xfrm>
+            <a:off x="8112099" y="2331720"/>
+            <a:ext cx="3703320" cy="2606040"/>
+          </a:xfrm>
+          <a:prstGeom prst="rect">
+            <a:avLst/>
+          </a:prstGeom>
+          <a:solidFill>
+            <a:srgbClr val="FFFFFF"/>
+          </a:solidFill>
+          <a:ln w="9525">
+            <a:solidFill>
+              <a:srgbClr val="A84A4A"/>
+            </a:solidFill>
+          </a:ln>
+        </p:spPr>
+        <p:style>
+          <a:lnRef idx="1">
+            <a:schemeClr val="accent1"/>
+          </a:lnRef>
+          <a:fillRef idx="3">
+            <a:schemeClr val="accent1"/>
+          </a:fillRef>
+          <a:effectRef idx="2">
+            <a:schemeClr val="accent1"/>
+          </a:effectRef>
+          <a:fontRef idx="minor">
+            <a:schemeClr val="lt1"/>
+          </a:fontRef>
+        </p:style>
+        <p:txBody>
+          <a:bodyPr rtlCol="0" anchor="t" wrap="square" lIns="109728" rIns="109728" tIns="91440" bIns="91440"/>
+          <a:lstStyle/>
+          <a:p>
+            <a:pPr algn="l">
+              <a:spcAft>
+                <a:spcPts val="600"/>
+              </a:spcAft>
+            </a:pPr>
+            <a:r>
+              <a:rPr sz="1000" b="1">
+                <a:solidFill>
+                  <a:srgbClr val="1F4E79"/>
+                </a:solidFill>
+                <a:latin typeface="Calibri"/>
+              </a:rPr>
+              <a:t>Trigger: </a:t>
+            </a:r>
+            <a:r>
+              <a:rPr sz="1000">
+                <a:solidFill>
+                  <a:srgbClr val="1F2D3D"/>
+                </a:solidFill>
+                <a:latin typeface="Calibri"/>
+              </a:rPr>
+              <a:t>G0 / E0 bucket &gt; 5% rolling, or auto-park rate &gt; 15% sustained.</a:t>
+            </a:r>
+          </a:p>
+          <a:p>
+            <a:pPr algn="l">
+              <a:spcAft>
+                <a:spcPts val="600"/>
+              </a:spcAft>
+            </a:pPr>
+            <a:r>
+              <a:rPr sz="1000" b="1">
+                <a:solidFill>
+                  <a:srgbClr val="1F4E79"/>
+                </a:solidFill>
+                <a:latin typeface="Calibri"/>
+              </a:rPr>
+              <a:t>Fallback: </a:t>
+            </a:r>
+            <a:r>
+              <a:rPr sz="1000">
+                <a:solidFill>
+                  <a:srgbClr val="1F2D3D"/>
+                </a:solidFill>
+                <a:latin typeface="Calibri"/>
+              </a:rPr>
+              <a:t>Auto-rerun discovery with τ_match −0.05 (more permissive); re-cluster G0; quorum re-evaluates.</a:t>
+            </a:r>
+          </a:p>
+          <a:p>
+            <a:pPr algn="l">
+              <a:spcAft>
+                <a:spcPts val="600"/>
+              </a:spcAft>
+            </a:pPr>
+            <a:r>
+              <a:rPr sz="1000" b="1">
+                <a:solidFill>
+                  <a:srgbClr val="1F4E79"/>
+                </a:solidFill>
+                <a:latin typeface="Calibri"/>
+              </a:rPr>
+              <a:t>If τ_match floor (0.50) hit: </a:t>
+            </a:r>
+            <a:r>
+              <a:rPr sz="1000">
+                <a:solidFill>
+                  <a:srgbClr val="1F2D3D"/>
+                </a:solidFill>
+                <a:latin typeface="Calibri"/>
+              </a:rPr>
+              <a:t>Drift report flags the discipline for manual catalog re-curation (one-time architect action).</a:t>
+            </a:r>
+          </a:p>
+          <a:p>
+            <a:pPr algn="l">
+              <a:spcAft>
+                <a:spcPts val="600"/>
+              </a:spcAft>
+            </a:pPr>
+            <a:r>
+              <a:rPr sz="1000" b="1">
+                <a:solidFill>
+                  <a:srgbClr val="1F4E79"/>
+                </a:solidFill>
+                <a:latin typeface="Calibri"/>
+              </a:rPr>
+              <a:t>Pipeline impact: </a:t>
+            </a:r>
+            <a:r>
+              <a:rPr sz="1000">
+                <a:solidFill>
+                  <a:srgbClr val="1F2D3D"/>
+                </a:solidFill>
+                <a:latin typeface="Calibri"/>
+              </a:rPr>
+              <a:t>Pipeline continues. The drift report is informational.</a:t>
+            </a:r>
+          </a:p>
+        </p:txBody>
+      </p:sp>
+      <p:sp>
+        <p:nvSpPr>
+          <p:cNvPr id="14" name="TextBox 13"/>
+          <p:cNvSpPr txBox="1"/>
+          <p:nvPr/>
+        </p:nvSpPr>
+        <p:spPr>
+          <a:xfrm>
+            <a:off x="457200" y="5120640"/>
+            <a:ext cx="11430000" cy="320040"/>
+          </a:xfrm>
+          <a:prstGeom prst="rect">
+            <a:avLst/>
+          </a:prstGeom>
+          <a:noFill/>
+        </p:spPr>
+        <p:txBody>
+          <a:bodyPr wrap="square" anchor="t">
+            <a:spAutoFit/>
+          </a:bodyPr>
+          <a:lstStyle/>
+          <a:p>
+            <a:pPr algn="l"/>
+            <a:r>
+              <a:rPr sz="1400" b="1" i="0">
+                <a:solidFill>
+                  <a:srgbClr val="1F4E79"/>
+                </a:solidFill>
+                <a:latin typeface="Calibri"/>
+              </a:rPr>
+              <a:t>Three queues collect different kinds of failures</a:t>
+            </a:r>
+          </a:p>
+        </p:txBody>
+      </p:sp>
+      <p:sp>
+        <p:nvSpPr>
+          <p:cNvPr id="15" name="Rounded Rectangle 14"/>
+          <p:cNvSpPr/>
+          <p:nvPr/>
+        </p:nvSpPr>
+        <p:spPr>
+          <a:xfrm>
+            <a:off x="376275" y="5532120"/>
+            <a:ext cx="3703320" cy="914399"/>
+          </a:xfrm>
+          <a:prstGeom prst="roundRect">
+            <a:avLst/>
+          </a:prstGeom>
+          <a:solidFill>
+            <a:srgbClr val="F1F5FA"/>
+          </a:solidFill>
+          <a:ln w="9525">
+            <a:solidFill>
+              <a:srgbClr val="4A6EA0"/>
+            </a:solidFill>
+          </a:ln>
+        </p:spPr>
+        <p:style>
+          <a:lnRef idx="1">
+            <a:schemeClr val="accent1"/>
+          </a:lnRef>
+          <a:fillRef idx="3">
+            <a:schemeClr val="accent1"/>
+          </a:fillRef>
+          <a:effectRef idx="2">
+            <a:schemeClr val="accent1"/>
+          </a:effectRef>
+          <a:fontRef idx="minor">
+            <a:schemeClr val="lt1"/>
+          </a:fontRef>
+        </p:style>
+        <p:txBody>
+          <a:bodyPr rtlCol="0" anchor="ctr" wrap="square" lIns="109728" rIns="109728" tIns="73152" bIns="73152"/>
+          <a:lstStyle/>
+          <a:p>
+            <a:pPr algn="l"/>
+            <a:r>
+              <a:rPr sz="1200" b="1">
+                <a:solidFill>
+                  <a:srgbClr val="1F4E79"/>
+                </a:solidFill>
+                <a:latin typeface="Calibri"/>
+              </a:rPr>
+              <a:t>Review pile</a:t>
+            </a:r>
+          </a:p>
+          <a:p>
+            <a:pPr algn="l"/>
+            <a:r>
+              <a:rPr sz="1000" i="1">
+                <a:solidFill>
+                  <a:srgbClr val="55606E"/>
+                </a:solidFill>
+                <a:latin typeface="Calibri"/>
+              </a:rPr>
+              <a:t>Quality / rubric failures</a:t>
+            </a:r>
+          </a:p>
+          <a:p>
+            <a:pPr algn="l"/>
+            <a:r>
+              <a:rPr sz="1000">
+                <a:solidFill>
+                  <a:srgbClr val="1F2D3D"/>
+                </a:solidFill>
+                <a:latin typeface="Calibri"/>
+              </a:rPr>
+              <a:t>Stories that failed Validator after 2 revisions.</a:t>
+            </a:r>
+          </a:p>
+        </p:txBody>
+      </p:sp>
+      <p:sp>
+        <p:nvSpPr>
+          <p:cNvPr id="16" name="Rounded Rectangle 15"/>
+          <p:cNvSpPr/>
+          <p:nvPr/>
+        </p:nvSpPr>
+        <p:spPr>
+          <a:xfrm>
+            <a:off x="4244187" y="5532120"/>
+            <a:ext cx="3703320" cy="914399"/>
+          </a:xfrm>
+          <a:prstGeom prst="roundRect">
+            <a:avLst/>
+          </a:prstGeom>
+          <a:solidFill>
+            <a:srgbClr val="F1F5FA"/>
+          </a:solidFill>
+          <a:ln w="9525">
+            <a:solidFill>
+              <a:srgbClr val="4A6EA0"/>
+            </a:solidFill>
+          </a:ln>
+        </p:spPr>
+        <p:style>
+          <a:lnRef idx="1">
+            <a:schemeClr val="accent1"/>
+          </a:lnRef>
+          <a:fillRef idx="3">
+            <a:schemeClr val="accent1"/>
+          </a:fillRef>
+          <a:effectRef idx="2">
+            <a:schemeClr val="accent1"/>
+          </a:effectRef>
+          <a:fontRef idx="minor">
+            <a:schemeClr val="lt1"/>
+          </a:fontRef>
+        </p:style>
+        <p:txBody>
+          <a:bodyPr rtlCol="0" anchor="ctr" wrap="square" lIns="109728" rIns="109728" tIns="73152" bIns="73152"/>
+          <a:lstStyle/>
+          <a:p>
+            <a:pPr algn="l"/>
+            <a:r>
+              <a:rPr sz="1200" b="1">
+                <a:solidFill>
+                  <a:srgbClr val="1F4E79"/>
+                </a:solidFill>
+                <a:latin typeface="Calibri"/>
+              </a:rPr>
+              <a:t>G0 / E0 buckets</a:t>
+            </a:r>
+          </a:p>
+          <a:p>
+            <a:pPr algn="l"/>
+            <a:r>
+              <a:rPr sz="1000" i="1">
+                <a:solidFill>
+                  <a:srgbClr val="55606E"/>
+                </a:solidFill>
+                <a:latin typeface="Calibri"/>
+              </a:rPr>
+              <a:t>Classification failures</a:t>
+            </a:r>
+          </a:p>
+          <a:p>
+            <a:pPr algn="l"/>
+            <a:r>
+              <a:rPr sz="1000">
+                <a:solidFill>
+                  <a:srgbClr val="1F2D3D"/>
+                </a:solidFill>
+                <a:latin typeface="Calibri"/>
+              </a:rPr>
+              <a:t>Chunks (G0) and draft epics (E0) that didn't classify or cluster.</a:t>
+            </a:r>
+          </a:p>
+        </p:txBody>
+      </p:sp>
+      <p:sp>
+        <p:nvSpPr>
+          <p:cNvPr id="17" name="Rounded Rectangle 16"/>
+          <p:cNvSpPr/>
+          <p:nvPr/>
+        </p:nvSpPr>
+        <p:spPr>
+          <a:xfrm>
+            <a:off x="8112099" y="5532120"/>
+            <a:ext cx="3703320" cy="914399"/>
+          </a:xfrm>
+          <a:prstGeom prst="roundRect">
+            <a:avLst/>
+          </a:prstGeom>
+          <a:solidFill>
+            <a:srgbClr val="F1F5FA"/>
+          </a:solidFill>
+          <a:ln w="9525">
+            <a:solidFill>
+              <a:srgbClr val="4A6EA0"/>
+            </a:solidFill>
+          </a:ln>
+        </p:spPr>
+        <p:style>
+          <a:lnRef idx="1">
+            <a:schemeClr val="accent1"/>
+          </a:lnRef>
+          <a:fillRef idx="3">
+            <a:schemeClr val="accent1"/>
+          </a:fillRef>
+          <a:effectRef idx="2">
+            <a:schemeClr val="accent1"/>
+          </a:effectRef>
+          <a:fontRef idx="minor">
+            <a:schemeClr val="lt1"/>
+          </a:fontRef>
+        </p:style>
+        <p:txBody>
+          <a:bodyPr rtlCol="0" anchor="ctr" wrap="square" lIns="109728" rIns="109728" tIns="73152" bIns="73152"/>
+          <a:lstStyle/>
+          <a:p>
+            <a:pPr algn="l"/>
+            <a:r>
+              <a:rPr sz="1200" b="1">
+                <a:solidFill>
+                  <a:srgbClr val="1F4E79"/>
+                </a:solidFill>
+                <a:latin typeface="Calibri"/>
+              </a:rPr>
+              <a:t>Audit trail</a:t>
+            </a:r>
+          </a:p>
+          <a:p>
+            <a:pPr algn="l"/>
+            <a:r>
+              <a:rPr sz="1000" i="1">
+                <a:solidFill>
+                  <a:srgbClr val="55606E"/>
+                </a:solidFill>
+                <a:latin typeface="Calibri"/>
+              </a:rPr>
+              <a:t>Call-level errors</a:t>
+            </a:r>
+          </a:p>
+          <a:p>
+            <a:pPr algn="l"/>
+            <a:r>
+              <a:rPr sz="1000">
+                <a:solidFill>
+                  <a:srgbClr val="1F2D3D"/>
+                </a:solidFill>
+                <a:latin typeface="Calibri"/>
+              </a:rPr>
+              <a:t>LLM-call failures after retry exhaustion. For diagnostics.</a:t>
+            </a:r>
+          </a:p>
+        </p:txBody>
+      </p:sp>
+      <p:sp>
+        <p:nvSpPr>
+          <p:cNvPr id="18" name="Rectangle 17"/>
+          <p:cNvSpPr/>
+          <p:nvPr/>
+        </p:nvSpPr>
+        <p:spPr>
+          <a:xfrm>
+            <a:off x="457200" y="6565392"/>
+            <a:ext cx="11274552" cy="10972"/>
+          </a:xfrm>
+          <a:prstGeom prst="rect">
+            <a:avLst/>
+          </a:prstGeom>
+          <a:solidFill>
+            <a:srgbClr val="D0D6DC"/>
+          </a:solidFill>
+          <a:ln>
+            <a:noFill/>
+          </a:ln>
+        </p:spPr>
+        <p:style>
+          <a:lnRef idx="1">
+            <a:schemeClr val="accent1"/>
+          </a:lnRef>
+          <a:fillRef idx="3">
+            <a:schemeClr val="accent1"/>
+          </a:fillRef>
+          <a:effectRef idx="2">
+            <a:schemeClr val="accent1"/>
+          </a:effectRef>
+          <a:fontRef idx="minor">
+            <a:schemeClr val="lt1"/>
+          </a:fontRef>
+        </p:style>
+        <p:txBody>
+          <a:bodyPr rtlCol="0" anchor="ctr"/>
+          <a:lstStyle/>
+          <a:p>
+            <a:pPr algn="ctr"/>
+          </a:p>
+        </p:txBody>
+      </p:sp>
+      <p:sp>
+        <p:nvSpPr>
+          <p:cNvPr id="19" name="TextBox 18"/>
+          <p:cNvSpPr txBox="1"/>
+          <p:nvPr/>
+        </p:nvSpPr>
+        <p:spPr>
+          <a:xfrm>
+            <a:off x="457200" y="6601968"/>
+            <a:ext cx="7315200" cy="228600"/>
+          </a:xfrm>
+          <a:prstGeom prst="rect">
+            <a:avLst/>
+          </a:prstGeom>
+          <a:noFill/>
+        </p:spPr>
+        <p:txBody>
+          <a:bodyPr wrap="square" anchor="t">
+            <a:spAutoFit/>
+          </a:bodyPr>
+          <a:lstStyle/>
+          <a:p>
+            <a:pPr algn="l"/>
+            <a:r>
+              <a:rPr sz="800" b="0" i="1">
+                <a:solidFill>
+                  <a:srgbClr val="90979F"/>
+                </a:solidFill>
+                <a:latin typeface="Calibri"/>
+              </a:rPr>
+              <a:t>LIMS Story Generation — Client Alignment</a:t>
+            </a:r>
+          </a:p>
+        </p:txBody>
+      </p:sp>
+      <p:sp>
+        <p:nvSpPr>
+          <p:cNvPr id="20" name="TextBox 19"/>
+          <p:cNvSpPr txBox="1"/>
+          <p:nvPr/>
+        </p:nvSpPr>
+        <p:spPr>
+          <a:xfrm>
+            <a:off x="10817352" y="6601968"/>
+            <a:ext cx="914400" cy="228600"/>
+          </a:xfrm>
+          <a:prstGeom prst="rect">
+            <a:avLst/>
+          </a:prstGeom>
+          <a:noFill/>
+        </p:spPr>
+        <p:txBody>
+          <a:bodyPr wrap="square" anchor="t">
+            <a:spAutoFit/>
+          </a:bodyPr>
+          <a:lstStyle/>
+          <a:p>
+            <a:pPr algn="r"/>
+            <a:r>
+              <a:rPr sz="800" b="0" i="0">
+                <a:solidFill>
+                  <a:srgbClr val="90979F"/>
+                </a:solidFill>
+                <a:latin typeface="Calibri"/>
+              </a:rPr>
+              <a:t>8 / 9</a:t>
+            </a:r>
+          </a:p>
+        </p:txBody>
+      </p:sp>
+    </p:spTree>
+  </p:cSld>
+  <p:clrMapOvr>
+    <a:masterClrMapping/>
+  </p:clrMapOvr>
+</p:sld>
+</file>
+
+<file path=ppt/slides/slide9.xml><?xml version="1.0" encoding="utf-8"?>
+<p:sld xmlns:a="http://schemas.openxmlformats.org/drawingml/2006/main" xmlns:p="http://schemas.openxmlformats.org/presentationml/2006/main" xmlns:r="http://schemas.openxmlformats.org/officeDocument/2006/relationships">
+  <p:cSld>
+    <p:spTree>
+      <p:nvGrpSpPr>
+        <p:cNvPr id="1" name=""/>
+        <p:cNvGrpSpPr/>
+        <p:nvPr/>
+      </p:nvGrpSpPr>
+      <p:grpSpPr/>
+      <p:sp>
+        <p:nvSpPr>
+          <p:cNvPr id="2" name="TextBox 1"/>
+          <p:cNvSpPr txBox="1"/>
+          <p:nvPr/>
+        </p:nvSpPr>
+        <p:spPr>
+          <a:xfrm>
+            <a:off x="457200" y="292608"/>
+            <a:ext cx="11430000" cy="548640"/>
+          </a:xfrm>
+          <a:prstGeom prst="rect">
+            <a:avLst/>
+          </a:prstGeom>
+          <a:noFill/>
+        </p:spPr>
+        <p:txBody>
+          <a:bodyPr wrap="square" anchor="t">
+            <a:spAutoFit/>
+          </a:bodyPr>
+          <a:lstStyle/>
+          <a:p>
+            <a:pPr algn="l"/>
+            <a:r>
+              <a:rPr sz="2600" b="1" i="0">
+                <a:solidFill>
+                  <a:srgbClr val="1F4E79"/>
+                </a:solidFill>
+                <a:latin typeface="Calibri"/>
+              </a:rPr>
               <a:t>What ships and the alignment ask</a:t>
             </a:r>
           </a:p>
@@ -12484,7 +13813,7 @@
                 </a:solidFill>
                 <a:latin typeface="Calibri"/>
               </a:rPr>
-              <a:t>8 / 8</a:t>
+              <a:t>9 / 9</a:t>
             </a:r>
           </a:p>
         </p:txBody>

--- a/client_alignment_deck.pptx
+++ b/client_alignment_deck.pptx
@@ -3524,7 +3524,7 @@
         <p:spPr>
           <a:xfrm>
             <a:off x="640080" y="4480560"/>
-            <a:ext cx="10972800" cy="1371600"/>
+            <a:ext cx="10972800" cy="1280160"/>
           </a:xfrm>
           <a:prstGeom prst="rect">
             <a:avLst/>
@@ -3588,7 +3588,420 @@
       </p:sp>
       <p:sp>
         <p:nvSpPr>
-          <p:cNvPr id="13" name="Rectangle 12"/>
+          <p:cNvPr id="13" name="TextBox 12"/>
+          <p:cNvSpPr txBox="1"/>
+          <p:nvPr/>
+        </p:nvSpPr>
+        <p:spPr>
+          <a:xfrm>
+            <a:off x="457200" y="5897880"/>
+            <a:ext cx="11430000" cy="182880"/>
+          </a:xfrm>
+          <a:prstGeom prst="rect">
+            <a:avLst/>
+          </a:prstGeom>
+          <a:noFill/>
+        </p:spPr>
+        <p:txBody>
+          <a:bodyPr wrap="square" anchor="t">
+            <a:spAutoFit/>
+          </a:bodyPr>
+          <a:lstStyle/>
+          <a:p>
+            <a:pPr algn="l"/>
+            <a:r>
+              <a:rPr sz="1100" b="1" i="1">
+                <a:solidFill>
+                  <a:srgbClr val="1F4E79"/>
+                </a:solidFill>
+                <a:latin typeface="Calibri"/>
+              </a:rPr>
+              <a:t>What's inside the Dev backlog (Jira hierarchy)</a:t>
+            </a:r>
+          </a:p>
+        </p:txBody>
+      </p:sp>
+      <p:sp>
+        <p:nvSpPr>
+          <p:cNvPr id="14" name="Rounded Rectangle 13"/>
+          <p:cNvSpPr/>
+          <p:nvPr/>
+        </p:nvSpPr>
+        <p:spPr>
+          <a:xfrm>
+            <a:off x="2194560" y="6144768"/>
+            <a:ext cx="1280160" cy="411480"/>
+          </a:xfrm>
+          <a:prstGeom prst="roundRect">
+            <a:avLst/>
+          </a:prstGeom>
+          <a:solidFill>
+            <a:srgbClr val="EEE7F8"/>
+          </a:solidFill>
+          <a:ln w="12700">
+            <a:solidFill>
+              <a:srgbClr val="6E4FA0"/>
+            </a:solidFill>
+          </a:ln>
+        </p:spPr>
+        <p:style>
+          <a:lnRef idx="1">
+            <a:schemeClr val="accent1"/>
+          </a:lnRef>
+          <a:fillRef idx="3">
+            <a:schemeClr val="accent1"/>
+          </a:fillRef>
+          <a:effectRef idx="2">
+            <a:schemeClr val="accent1"/>
+          </a:effectRef>
+          <a:fontRef idx="minor">
+            <a:schemeClr val="lt1"/>
+          </a:fontRef>
+        </p:style>
+        <p:txBody>
+          <a:bodyPr rtlCol="0" anchor="ctr" wrap="square" lIns="73152" rIns="73152" tIns="36576" bIns="36576"/>
+          <a:lstStyle/>
+          <a:p>
+            <a:pPr algn="ctr"/>
+            <a:r>
+              <a:rPr sz="1200" b="1" i="0">
+                <a:solidFill>
+                  <a:srgbClr val="1F2D3D"/>
+                </a:solidFill>
+                <a:latin typeface="Calibri"/>
+              </a:rPr>
+              <a:t>Epic</a:t>
+            </a:r>
+          </a:p>
+        </p:txBody>
+      </p:sp>
+      <p:sp>
+        <p:nvSpPr>
+          <p:cNvPr id="15" name="Rounded Rectangle 14"/>
+          <p:cNvSpPr/>
+          <p:nvPr/>
+        </p:nvSpPr>
+        <p:spPr>
+          <a:xfrm>
+            <a:off x="3931920" y="6144768"/>
+            <a:ext cx="1280160" cy="411480"/>
+          </a:xfrm>
+          <a:prstGeom prst="roundRect">
+            <a:avLst/>
+          </a:prstGeom>
+          <a:solidFill>
+            <a:srgbClr val="DCE9D7"/>
+          </a:solidFill>
+          <a:ln w="12700">
+            <a:solidFill>
+              <a:srgbClr val="5C8347"/>
+            </a:solidFill>
+          </a:ln>
+        </p:spPr>
+        <p:style>
+          <a:lnRef idx="1">
+            <a:schemeClr val="accent1"/>
+          </a:lnRef>
+          <a:fillRef idx="3">
+            <a:schemeClr val="accent1"/>
+          </a:fillRef>
+          <a:effectRef idx="2">
+            <a:schemeClr val="accent1"/>
+          </a:effectRef>
+          <a:fontRef idx="minor">
+            <a:schemeClr val="lt1"/>
+          </a:fontRef>
+        </p:style>
+        <p:txBody>
+          <a:bodyPr rtlCol="0" anchor="ctr" wrap="square" lIns="73152" rIns="73152" tIns="36576" bIns="36576"/>
+          <a:lstStyle/>
+          <a:p>
+            <a:pPr algn="ctr"/>
+            <a:r>
+              <a:rPr sz="1200" b="1" i="0">
+                <a:solidFill>
+                  <a:srgbClr val="1F2D3D"/>
+                </a:solidFill>
+                <a:latin typeface="Calibri"/>
+              </a:rPr>
+              <a:t>Story</a:t>
+            </a:r>
+          </a:p>
+        </p:txBody>
+      </p:sp>
+      <p:cxnSp>
+        <p:nvCxnSpPr>
+          <p:cNvPr id="16" name="Connector 15"/>
+          <p:cNvCxnSpPr/>
+          <p:nvPr/>
+        </p:nvCxnSpPr>
+        <p:spPr>
+          <a:xfrm>
+            <a:off x="3474720" y="6350508"/>
+            <a:ext cx="457200" cy="0"/>
+          </a:xfrm>
+          <a:prstGeom prst="line">
+            <a:avLst/>
+          </a:prstGeom>
+          <a:ln w="12700">
+            <a:solidFill>
+              <a:srgbClr val="4A6EA0"/>
+            </a:solidFill>
+            <a:tailEnd type="triangle" w="med" h="med"/>
+          </a:ln>
+        </p:spPr>
+        <p:style>
+          <a:lnRef idx="2">
+            <a:schemeClr val="accent1"/>
+          </a:lnRef>
+          <a:fillRef idx="0">
+            <a:schemeClr val="accent1"/>
+          </a:fillRef>
+          <a:effectRef idx="1">
+            <a:schemeClr val="accent1"/>
+          </a:effectRef>
+          <a:fontRef idx="minor">
+            <a:schemeClr val="tx1"/>
+          </a:fontRef>
+        </p:style>
+      </p:cxnSp>
+      <p:sp>
+        <p:nvSpPr>
+          <p:cNvPr id="17" name="Rounded Rectangle 16"/>
+          <p:cNvSpPr/>
+          <p:nvPr/>
+        </p:nvSpPr>
+        <p:spPr>
+          <a:xfrm>
+            <a:off x="5349240" y="6144768"/>
+            <a:ext cx="1280160" cy="411480"/>
+          </a:xfrm>
+          <a:prstGeom prst="roundRect">
+            <a:avLst/>
+          </a:prstGeom>
+          <a:solidFill>
+            <a:srgbClr val="DCE9D7"/>
+          </a:solidFill>
+          <a:ln w="12700">
+            <a:solidFill>
+              <a:srgbClr val="5C8347"/>
+            </a:solidFill>
+          </a:ln>
+        </p:spPr>
+        <p:style>
+          <a:lnRef idx="1">
+            <a:schemeClr val="accent1"/>
+          </a:lnRef>
+          <a:fillRef idx="3">
+            <a:schemeClr val="accent1"/>
+          </a:fillRef>
+          <a:effectRef idx="2">
+            <a:schemeClr val="accent1"/>
+          </a:effectRef>
+          <a:fontRef idx="minor">
+            <a:schemeClr val="lt1"/>
+          </a:fontRef>
+        </p:style>
+        <p:txBody>
+          <a:bodyPr rtlCol="0" anchor="ctr" wrap="square" lIns="73152" rIns="73152" tIns="36576" bIns="36576"/>
+          <a:lstStyle/>
+          <a:p>
+            <a:pPr algn="ctr"/>
+            <a:r>
+              <a:rPr sz="1200" b="1" i="0">
+                <a:solidFill>
+                  <a:srgbClr val="1F2D3D"/>
+                </a:solidFill>
+                <a:latin typeface="Calibri"/>
+              </a:rPr>
+              <a:t>Story</a:t>
+            </a:r>
+          </a:p>
+        </p:txBody>
+      </p:sp>
+      <p:cxnSp>
+        <p:nvCxnSpPr>
+          <p:cNvPr id="18" name="Connector 17"/>
+          <p:cNvCxnSpPr/>
+          <p:nvPr/>
+        </p:nvCxnSpPr>
+        <p:spPr>
+          <a:xfrm>
+            <a:off x="3474720" y="6350508"/>
+            <a:ext cx="1874520" cy="0"/>
+          </a:xfrm>
+          <a:prstGeom prst="line">
+            <a:avLst/>
+          </a:prstGeom>
+          <a:ln w="12700">
+            <a:solidFill>
+              <a:srgbClr val="4A6EA0"/>
+            </a:solidFill>
+            <a:tailEnd type="triangle" w="med" h="med"/>
+          </a:ln>
+        </p:spPr>
+        <p:style>
+          <a:lnRef idx="2">
+            <a:schemeClr val="accent1"/>
+          </a:lnRef>
+          <a:fillRef idx="0">
+            <a:schemeClr val="accent1"/>
+          </a:fillRef>
+          <a:effectRef idx="1">
+            <a:schemeClr val="accent1"/>
+          </a:effectRef>
+          <a:fontRef idx="minor">
+            <a:schemeClr val="tx1"/>
+          </a:fontRef>
+        </p:style>
+      </p:cxnSp>
+      <p:sp>
+        <p:nvSpPr>
+          <p:cNvPr id="19" name="Rounded Rectangle 18"/>
+          <p:cNvSpPr/>
+          <p:nvPr/>
+        </p:nvSpPr>
+        <p:spPr>
+          <a:xfrm>
+            <a:off x="6766559" y="6144768"/>
+            <a:ext cx="1280160" cy="411480"/>
+          </a:xfrm>
+          <a:prstGeom prst="roundRect">
+            <a:avLst/>
+          </a:prstGeom>
+          <a:solidFill>
+            <a:srgbClr val="DCE9D7"/>
+          </a:solidFill>
+          <a:ln w="12700">
+            <a:solidFill>
+              <a:srgbClr val="5C8347"/>
+            </a:solidFill>
+          </a:ln>
+        </p:spPr>
+        <p:style>
+          <a:lnRef idx="1">
+            <a:schemeClr val="accent1"/>
+          </a:lnRef>
+          <a:fillRef idx="3">
+            <a:schemeClr val="accent1"/>
+          </a:fillRef>
+          <a:effectRef idx="2">
+            <a:schemeClr val="accent1"/>
+          </a:effectRef>
+          <a:fontRef idx="minor">
+            <a:schemeClr val="lt1"/>
+          </a:fontRef>
+        </p:style>
+        <p:txBody>
+          <a:bodyPr rtlCol="0" anchor="ctr" wrap="square" lIns="73152" rIns="73152" tIns="36576" bIns="36576"/>
+          <a:lstStyle/>
+          <a:p>
+            <a:pPr algn="ctr"/>
+            <a:r>
+              <a:rPr sz="1200" b="1" i="0">
+                <a:solidFill>
+                  <a:srgbClr val="1F2D3D"/>
+                </a:solidFill>
+                <a:latin typeface="Calibri"/>
+              </a:rPr>
+              <a:t>Story</a:t>
+            </a:r>
+          </a:p>
+        </p:txBody>
+      </p:sp>
+      <p:cxnSp>
+        <p:nvCxnSpPr>
+          <p:cNvPr id="20" name="Connector 19"/>
+          <p:cNvCxnSpPr/>
+          <p:nvPr/>
+        </p:nvCxnSpPr>
+        <p:spPr>
+          <a:xfrm>
+            <a:off x="3474720" y="6350508"/>
+            <a:ext cx="3291839" cy="0"/>
+          </a:xfrm>
+          <a:prstGeom prst="line">
+            <a:avLst/>
+          </a:prstGeom>
+          <a:ln w="12700">
+            <a:solidFill>
+              <a:srgbClr val="4A6EA0"/>
+            </a:solidFill>
+            <a:tailEnd type="triangle" w="med" h="med"/>
+          </a:ln>
+        </p:spPr>
+        <p:style>
+          <a:lnRef idx="2">
+            <a:schemeClr val="accent1"/>
+          </a:lnRef>
+          <a:fillRef idx="0">
+            <a:schemeClr val="accent1"/>
+          </a:fillRef>
+          <a:effectRef idx="1">
+            <a:schemeClr val="accent1"/>
+          </a:effectRef>
+          <a:fontRef idx="minor">
+            <a:schemeClr val="tx1"/>
+          </a:fontRef>
+        </p:style>
+      </p:cxnSp>
+      <p:sp>
+        <p:nvSpPr>
+          <p:cNvPr id="21" name="Rounded Rectangle 20"/>
+          <p:cNvSpPr/>
+          <p:nvPr/>
+        </p:nvSpPr>
+        <p:spPr>
+          <a:xfrm>
+            <a:off x="8458200" y="6144768"/>
+            <a:ext cx="2560320" cy="411480"/>
+          </a:xfrm>
+          <a:prstGeom prst="roundRect">
+            <a:avLst/>
+          </a:prstGeom>
+          <a:solidFill>
+            <a:srgbClr val="F1F1F1"/>
+          </a:solidFill>
+          <a:ln w="12700">
+            <a:solidFill>
+              <a:srgbClr val="B0B0B0"/>
+            </a:solidFill>
+          </a:ln>
+        </p:spPr>
+        <p:style>
+          <a:lnRef idx="1">
+            <a:schemeClr val="accent1"/>
+          </a:lnRef>
+          <a:fillRef idx="3">
+            <a:schemeClr val="accent1"/>
+          </a:fillRef>
+          <a:effectRef idx="2">
+            <a:schemeClr val="accent1"/>
+          </a:effectRef>
+          <a:fontRef idx="minor">
+            <a:schemeClr val="lt1"/>
+          </a:fontRef>
+        </p:style>
+        <p:txBody>
+          <a:bodyPr rtlCol="0" anchor="ctr" wrap="square" lIns="73152" rIns="73152" tIns="36576" bIns="36576"/>
+          <a:lstStyle/>
+          <a:p>
+            <a:pPr algn="ctr"/>
+            <a:r>
+              <a:rPr sz="1000" b="0" i="0">
+                <a:solidFill>
+                  <a:srgbClr val="808080"/>
+                </a:solidFill>
+                <a:latin typeface="Calibri"/>
+              </a:rPr>
+              <a:t>Task    (out of scope — dev team owns)</a:t>
+            </a:r>
+          </a:p>
+        </p:txBody>
+      </p:sp>
+      <p:sp>
+        <p:nvSpPr>
+          <p:cNvPr id="22" name="Rectangle 21"/>
           <p:cNvSpPr/>
           <p:nvPr/>
         </p:nvSpPr>
@@ -3631,7 +4044,7 @@
       </p:sp>
       <p:sp>
         <p:nvSpPr>
-          <p:cNvPr id="14" name="TextBox 13"/>
+          <p:cNvPr id="23" name="TextBox 22"/>
           <p:cNvSpPr txBox="1"/>
           <p:nvPr/>
         </p:nvSpPr>
@@ -3666,7 +4079,7 @@
       </p:sp>
       <p:sp>
         <p:nvSpPr>
-          <p:cNvPr id="15" name="TextBox 14"/>
+          <p:cNvPr id="24" name="TextBox 23"/>
           <p:cNvSpPr txBox="1"/>
           <p:nvPr/>
         </p:nvSpPr>
@@ -8085,7 +8498,7 @@
         <p:spPr>
           <a:xfrm>
             <a:off x="7040880" y="1463040"/>
-            <a:ext cx="4937760" cy="4297680"/>
+            <a:ext cx="4937760" cy="3657600"/>
           </a:xfrm>
           <a:prstGeom prst="rect">
             <a:avLst/>
@@ -8622,8 +9035,8 @@
         </p:nvSpPr>
         <p:spPr>
           <a:xfrm>
-            <a:off x="7040880" y="5852160"/>
-            <a:ext cx="4937760" cy="594360"/>
+            <a:off x="7040880" y="5212079"/>
+            <a:ext cx="4937760" cy="201168"/>
           </a:xfrm>
           <a:prstGeom prst="rect">
             <a:avLst/>
@@ -8638,20 +9051,585 @@
           <a:p>
             <a:pPr algn="l"/>
             <a:r>
-              <a:rPr sz="1000" b="0" i="1">
+              <a:rPr sz="1000" b="1" i="0">
+                <a:solidFill>
+                  <a:srgbClr val="1F4E79"/>
+                </a:solidFill>
+                <a:latin typeface="Calibri"/>
+              </a:rPr>
+              <a:t>What Pass 1 produced  (Microbiology classified vs Cytology's themes)</a:t>
+            </a:r>
+          </a:p>
+        </p:txBody>
+      </p:sp>
+      <p:sp>
+        <p:nvSpPr>
+          <p:cNvPr id="37" name="Rounded Rectangle 36"/>
+          <p:cNvSpPr/>
+          <p:nvPr/>
+        </p:nvSpPr>
+        <p:spPr>
+          <a:xfrm>
+            <a:off x="7040880" y="5458967"/>
+            <a:ext cx="350672" cy="384048"/>
+          </a:xfrm>
+          <a:prstGeom prst="roundRect">
+            <a:avLst/>
+          </a:prstGeom>
+          <a:solidFill>
+            <a:srgbClr val="E7EFF8"/>
+          </a:solidFill>
+          <a:ln w="12700">
+            <a:solidFill>
+              <a:srgbClr val="4A6EA0"/>
+            </a:solidFill>
+          </a:ln>
+        </p:spPr>
+        <p:style>
+          <a:lnRef idx="1">
+            <a:schemeClr val="accent1"/>
+          </a:lnRef>
+          <a:fillRef idx="3">
+            <a:schemeClr val="accent1"/>
+          </a:fillRef>
+          <a:effectRef idx="2">
+            <a:schemeClr val="accent1"/>
+          </a:effectRef>
+          <a:fontRef idx="minor">
+            <a:schemeClr val="lt1"/>
+          </a:fontRef>
+        </p:style>
+        <p:txBody>
+          <a:bodyPr rtlCol="0" anchor="ctr" wrap="square" lIns="73152" rIns="73152" tIns="36576" bIns="36576"/>
+          <a:lstStyle/>
+          <a:p>
+            <a:pPr algn="ctr"/>
+            <a:r>
+              <a:rPr sz="800" b="1" i="0">
+                <a:solidFill>
+                  <a:srgbClr val="1F2D3D"/>
+                </a:solidFill>
+                <a:latin typeface="Calibri"/>
+              </a:rPr>
+              <a:t>G1
+145</a:t>
+            </a:r>
+          </a:p>
+        </p:txBody>
+      </p:sp>
+      <p:sp>
+        <p:nvSpPr>
+          <p:cNvPr id="38" name="Rounded Rectangle 37"/>
+          <p:cNvSpPr/>
+          <p:nvPr/>
+        </p:nvSpPr>
+        <p:spPr>
+          <a:xfrm>
+            <a:off x="7428128" y="5458967"/>
+            <a:ext cx="350672" cy="384048"/>
+          </a:xfrm>
+          <a:prstGeom prst="roundRect">
+            <a:avLst/>
+          </a:prstGeom>
+          <a:solidFill>
+            <a:srgbClr val="E7EFF8"/>
+          </a:solidFill>
+          <a:ln w="12700">
+            <a:solidFill>
+              <a:srgbClr val="4A6EA0"/>
+            </a:solidFill>
+          </a:ln>
+        </p:spPr>
+        <p:style>
+          <a:lnRef idx="1">
+            <a:schemeClr val="accent1"/>
+          </a:lnRef>
+          <a:fillRef idx="3">
+            <a:schemeClr val="accent1"/>
+          </a:fillRef>
+          <a:effectRef idx="2">
+            <a:schemeClr val="accent1"/>
+          </a:effectRef>
+          <a:fontRef idx="minor">
+            <a:schemeClr val="lt1"/>
+          </a:fontRef>
+        </p:style>
+        <p:txBody>
+          <a:bodyPr rtlCol="0" anchor="ctr" wrap="square" lIns="73152" rIns="73152" tIns="36576" bIns="36576"/>
+          <a:lstStyle/>
+          <a:p>
+            <a:pPr algn="ctr"/>
+            <a:r>
+              <a:rPr sz="800" b="1" i="0">
+                <a:solidFill>
+                  <a:srgbClr val="1F2D3D"/>
+                </a:solidFill>
+                <a:latin typeface="Calibri"/>
+              </a:rPr>
+              <a:t>G2
+88</a:t>
+            </a:r>
+          </a:p>
+        </p:txBody>
+      </p:sp>
+      <p:sp>
+        <p:nvSpPr>
+          <p:cNvPr id="39" name="Rounded Rectangle 38"/>
+          <p:cNvSpPr/>
+          <p:nvPr/>
+        </p:nvSpPr>
+        <p:spPr>
+          <a:xfrm>
+            <a:off x="7815376" y="5458967"/>
+            <a:ext cx="350672" cy="384048"/>
+          </a:xfrm>
+          <a:prstGeom prst="roundRect">
+            <a:avLst/>
+          </a:prstGeom>
+          <a:solidFill>
+            <a:srgbClr val="E7EFF8"/>
+          </a:solidFill>
+          <a:ln w="12700">
+            <a:solidFill>
+              <a:srgbClr val="4A6EA0"/>
+            </a:solidFill>
+          </a:ln>
+        </p:spPr>
+        <p:style>
+          <a:lnRef idx="1">
+            <a:schemeClr val="accent1"/>
+          </a:lnRef>
+          <a:fillRef idx="3">
+            <a:schemeClr val="accent1"/>
+          </a:fillRef>
+          <a:effectRef idx="2">
+            <a:schemeClr val="accent1"/>
+          </a:effectRef>
+          <a:fontRef idx="minor">
+            <a:schemeClr val="lt1"/>
+          </a:fontRef>
+        </p:style>
+        <p:txBody>
+          <a:bodyPr rtlCol="0" anchor="ctr" wrap="square" lIns="73152" rIns="73152" tIns="36576" bIns="36576"/>
+          <a:lstStyle/>
+          <a:p>
+            <a:pPr algn="ctr"/>
+            <a:r>
+              <a:rPr sz="800" b="1" i="0">
+                <a:solidFill>
+                  <a:srgbClr val="1F2D3D"/>
+                </a:solidFill>
+                <a:latin typeface="Calibri"/>
+              </a:rPr>
+              <a:t>G3
+60</a:t>
+            </a:r>
+          </a:p>
+        </p:txBody>
+      </p:sp>
+      <p:sp>
+        <p:nvSpPr>
+          <p:cNvPr id="40" name="Rounded Rectangle 39"/>
+          <p:cNvSpPr/>
+          <p:nvPr/>
+        </p:nvSpPr>
+        <p:spPr>
+          <a:xfrm>
+            <a:off x="8202625" y="5458967"/>
+            <a:ext cx="350672" cy="384048"/>
+          </a:xfrm>
+          <a:prstGeom prst="roundRect">
+            <a:avLst/>
+          </a:prstGeom>
+          <a:solidFill>
+            <a:srgbClr val="E7EFF8"/>
+          </a:solidFill>
+          <a:ln w="12700">
+            <a:solidFill>
+              <a:srgbClr val="4A6EA0"/>
+            </a:solidFill>
+          </a:ln>
+        </p:spPr>
+        <p:style>
+          <a:lnRef idx="1">
+            <a:schemeClr val="accent1"/>
+          </a:lnRef>
+          <a:fillRef idx="3">
+            <a:schemeClr val="accent1"/>
+          </a:fillRef>
+          <a:effectRef idx="2">
+            <a:schemeClr val="accent1"/>
+          </a:effectRef>
+          <a:fontRef idx="minor">
+            <a:schemeClr val="lt1"/>
+          </a:fontRef>
+        </p:style>
+        <p:txBody>
+          <a:bodyPr rtlCol="0" anchor="ctr" wrap="square" lIns="73152" rIns="73152" tIns="36576" bIns="36576"/>
+          <a:lstStyle/>
+          <a:p>
+            <a:pPr algn="ctr"/>
+            <a:r>
+              <a:rPr sz="800" b="1" i="0">
+                <a:solidFill>
+                  <a:srgbClr val="1F2D3D"/>
+                </a:solidFill>
+                <a:latin typeface="Calibri"/>
+              </a:rPr>
+              <a:t>G4
+52</a:t>
+            </a:r>
+          </a:p>
+        </p:txBody>
+      </p:sp>
+      <p:sp>
+        <p:nvSpPr>
+          <p:cNvPr id="41" name="Rounded Rectangle 40"/>
+          <p:cNvSpPr/>
+          <p:nvPr/>
+        </p:nvSpPr>
+        <p:spPr>
+          <a:xfrm>
+            <a:off x="8589873" y="5458967"/>
+            <a:ext cx="350672" cy="384048"/>
+          </a:xfrm>
+          <a:prstGeom prst="roundRect">
+            <a:avLst/>
+          </a:prstGeom>
+          <a:solidFill>
+            <a:srgbClr val="E7EFF8"/>
+          </a:solidFill>
+          <a:ln w="12700">
+            <a:solidFill>
+              <a:srgbClr val="4A6EA0"/>
+            </a:solidFill>
+          </a:ln>
+        </p:spPr>
+        <p:style>
+          <a:lnRef idx="1">
+            <a:schemeClr val="accent1"/>
+          </a:lnRef>
+          <a:fillRef idx="3">
+            <a:schemeClr val="accent1"/>
+          </a:fillRef>
+          <a:effectRef idx="2">
+            <a:schemeClr val="accent1"/>
+          </a:effectRef>
+          <a:fontRef idx="minor">
+            <a:schemeClr val="lt1"/>
+          </a:fontRef>
+        </p:style>
+        <p:txBody>
+          <a:bodyPr rtlCol="0" anchor="ctr" wrap="square" lIns="73152" rIns="73152" tIns="36576" bIns="36576"/>
+          <a:lstStyle/>
+          <a:p>
+            <a:pPr algn="ctr"/>
+            <a:r>
+              <a:rPr sz="800" b="1" i="0">
+                <a:solidFill>
+                  <a:srgbClr val="1F2D3D"/>
+                </a:solidFill>
+                <a:latin typeface="Calibri"/>
+              </a:rPr>
+              <a:t>G5
+44</a:t>
+            </a:r>
+          </a:p>
+        </p:txBody>
+      </p:sp>
+      <p:sp>
+        <p:nvSpPr>
+          <p:cNvPr id="42" name="Rounded Rectangle 41"/>
+          <p:cNvSpPr/>
+          <p:nvPr/>
+        </p:nvSpPr>
+        <p:spPr>
+          <a:xfrm>
+            <a:off x="8977122" y="5458967"/>
+            <a:ext cx="350672" cy="384048"/>
+          </a:xfrm>
+          <a:prstGeom prst="roundRect">
+            <a:avLst/>
+          </a:prstGeom>
+          <a:solidFill>
+            <a:srgbClr val="E7EFF8"/>
+          </a:solidFill>
+          <a:ln w="12700">
+            <a:solidFill>
+              <a:srgbClr val="4A6EA0"/>
+            </a:solidFill>
+          </a:ln>
+        </p:spPr>
+        <p:style>
+          <a:lnRef idx="1">
+            <a:schemeClr val="accent1"/>
+          </a:lnRef>
+          <a:fillRef idx="3">
+            <a:schemeClr val="accent1"/>
+          </a:fillRef>
+          <a:effectRef idx="2">
+            <a:schemeClr val="accent1"/>
+          </a:effectRef>
+          <a:fontRef idx="minor">
+            <a:schemeClr val="lt1"/>
+          </a:fontRef>
+        </p:style>
+        <p:txBody>
+          <a:bodyPr rtlCol="0" anchor="ctr" wrap="square" lIns="73152" rIns="73152" tIns="36576" bIns="36576"/>
+          <a:lstStyle/>
+          <a:p>
+            <a:pPr algn="ctr"/>
+            <a:r>
+              <a:rPr sz="800" b="1" i="0">
+                <a:solidFill>
+                  <a:srgbClr val="1F2D3D"/>
+                </a:solidFill>
+                <a:latin typeface="Calibri"/>
+              </a:rPr>
+              <a:t>G6
+30</a:t>
+            </a:r>
+          </a:p>
+        </p:txBody>
+      </p:sp>
+      <p:sp>
+        <p:nvSpPr>
+          <p:cNvPr id="43" name="Rounded Rectangle 42"/>
+          <p:cNvSpPr/>
+          <p:nvPr/>
+        </p:nvSpPr>
+        <p:spPr>
+          <a:xfrm>
+            <a:off x="9364370" y="5458967"/>
+            <a:ext cx="350672" cy="384048"/>
+          </a:xfrm>
+          <a:prstGeom prst="roundRect">
+            <a:avLst/>
+          </a:prstGeom>
+          <a:solidFill>
+            <a:srgbClr val="E7EFF8"/>
+          </a:solidFill>
+          <a:ln w="12700">
+            <a:solidFill>
+              <a:srgbClr val="4A6EA0"/>
+            </a:solidFill>
+          </a:ln>
+        </p:spPr>
+        <p:style>
+          <a:lnRef idx="1">
+            <a:schemeClr val="accent1"/>
+          </a:lnRef>
+          <a:fillRef idx="3">
+            <a:schemeClr val="accent1"/>
+          </a:fillRef>
+          <a:effectRef idx="2">
+            <a:schemeClr val="accent1"/>
+          </a:effectRef>
+          <a:fontRef idx="minor">
+            <a:schemeClr val="lt1"/>
+          </a:fontRef>
+        </p:style>
+        <p:txBody>
+          <a:bodyPr rtlCol="0" anchor="ctr" wrap="square" lIns="73152" rIns="73152" tIns="36576" bIns="36576"/>
+          <a:lstStyle/>
+          <a:p>
+            <a:pPr algn="ctr"/>
+            <a:r>
+              <a:rPr sz="800" b="1" i="0">
+                <a:solidFill>
+                  <a:srgbClr val="1F2D3D"/>
+                </a:solidFill>
+                <a:latin typeface="Calibri"/>
+              </a:rPr>
+              <a:t>G7
+38</a:t>
+            </a:r>
+          </a:p>
+        </p:txBody>
+      </p:sp>
+      <p:sp>
+        <p:nvSpPr>
+          <p:cNvPr id="44" name="Rounded Rectangle 43"/>
+          <p:cNvSpPr/>
+          <p:nvPr/>
+        </p:nvSpPr>
+        <p:spPr>
+          <a:xfrm>
+            <a:off x="9751618" y="5458967"/>
+            <a:ext cx="350672" cy="384048"/>
+          </a:xfrm>
+          <a:prstGeom prst="roundRect">
+            <a:avLst/>
+          </a:prstGeom>
+          <a:solidFill>
+            <a:srgbClr val="E7EFF8"/>
+          </a:solidFill>
+          <a:ln w="12700">
+            <a:solidFill>
+              <a:srgbClr val="4A6EA0"/>
+            </a:solidFill>
+          </a:ln>
+        </p:spPr>
+        <p:style>
+          <a:lnRef idx="1">
+            <a:schemeClr val="accent1"/>
+          </a:lnRef>
+          <a:fillRef idx="3">
+            <a:schemeClr val="accent1"/>
+          </a:fillRef>
+          <a:effectRef idx="2">
+            <a:schemeClr val="accent1"/>
+          </a:effectRef>
+          <a:fontRef idx="minor">
+            <a:schemeClr val="lt1"/>
+          </a:fontRef>
+        </p:style>
+        <p:txBody>
+          <a:bodyPr rtlCol="0" anchor="ctr" wrap="square" lIns="73152" rIns="73152" tIns="36576" bIns="36576"/>
+          <a:lstStyle/>
+          <a:p>
+            <a:pPr algn="ctr"/>
+            <a:r>
+              <a:rPr sz="800" b="1" i="0">
+                <a:solidFill>
+                  <a:srgbClr val="1F2D3D"/>
+                </a:solidFill>
+                <a:latin typeface="Calibri"/>
+              </a:rPr>
+              <a:t>G8
+20</a:t>
+            </a:r>
+          </a:p>
+        </p:txBody>
+      </p:sp>
+      <p:sp>
+        <p:nvSpPr>
+          <p:cNvPr id="45" name="Rounded Rectangle 44"/>
+          <p:cNvSpPr/>
+          <p:nvPr/>
+        </p:nvSpPr>
+        <p:spPr>
+          <a:xfrm>
+            <a:off x="10212019" y="5458967"/>
+            <a:ext cx="1642262" cy="384048"/>
+          </a:xfrm>
+          <a:prstGeom prst="roundRect">
+            <a:avLst/>
+          </a:prstGeom>
+          <a:solidFill>
+            <a:srgbClr val="F8E3E3"/>
+          </a:solidFill>
+          <a:ln w="12700">
+            <a:solidFill>
+              <a:srgbClr val="A84A4A"/>
+            </a:solidFill>
+          </a:ln>
+        </p:spPr>
+        <p:style>
+          <a:lnRef idx="1">
+            <a:schemeClr val="accent1"/>
+          </a:lnRef>
+          <a:fillRef idx="3">
+            <a:schemeClr val="accent1"/>
+          </a:fillRef>
+          <a:effectRef idx="2">
+            <a:schemeClr val="accent1"/>
+          </a:effectRef>
+          <a:fontRef idx="minor">
+            <a:schemeClr val="lt1"/>
+          </a:fontRef>
+        </p:style>
+        <p:txBody>
+          <a:bodyPr rtlCol="0" anchor="ctr" wrap="square" lIns="73152" rIns="73152" tIns="36576" bIns="36576"/>
+          <a:lstStyle/>
+          <a:p>
+            <a:pPr algn="ctr"/>
+            <a:r>
+              <a:rPr sz="900" b="1" i="0">
+                <a:solidFill>
+                  <a:srgbClr val="1F2D3D"/>
+                </a:solidFill>
+                <a:latin typeface="Calibri"/>
+              </a:rPr>
+              <a:t>Residual
+123 chunks</a:t>
+            </a:r>
+          </a:p>
+        </p:txBody>
+      </p:sp>
+      <p:sp>
+        <p:nvSpPr>
+          <p:cNvPr id="46" name="TextBox 45"/>
+          <p:cNvSpPr txBox="1"/>
+          <p:nvPr/>
+        </p:nvSpPr>
+        <p:spPr>
+          <a:xfrm>
+            <a:off x="7040880" y="5861303"/>
+            <a:ext cx="3061411" cy="164592"/>
+          </a:xfrm>
+          <a:prstGeom prst="rect">
+            <a:avLst/>
+          </a:prstGeom>
+          <a:noFill/>
+        </p:spPr>
+        <p:txBody>
+          <a:bodyPr wrap="square" anchor="t">
+            <a:spAutoFit/>
+          </a:bodyPr>
+          <a:lstStyle/>
+          <a:p>
+            <a:pPr algn="ctr"/>
+            <a:r>
+              <a:rPr sz="800" b="0" i="1">
                 <a:solidFill>
                   <a:srgbClr val="55606E"/>
                 </a:solidFill>
                 <a:latin typeface="Calibri"/>
               </a:rPr>
-              <a:t>Read this top-down: most categories carry over from Cytology. Two new ones (Susceptibility Testing, Biosafety Containment) earned their place via quorum vote with evidence.</a:t>
-            </a:r>
-          </a:p>
-        </p:txBody>
-      </p:sp>
-      <p:sp>
-        <p:nvSpPr>
-          <p:cNvPr id="37" name="Rectangle 36"/>
+              <a:t>inherited from Cytology (477 chunks total)</a:t>
+            </a:r>
+          </a:p>
+        </p:txBody>
+      </p:sp>
+      <p:sp>
+        <p:nvSpPr>
+          <p:cNvPr id="47" name="TextBox 46"/>
+          <p:cNvSpPr txBox="1"/>
+          <p:nvPr/>
+        </p:nvSpPr>
+        <p:spPr>
+          <a:xfrm>
+            <a:off x="10212019" y="5861303"/>
+            <a:ext cx="1642262" cy="164592"/>
+          </a:xfrm>
+          <a:prstGeom prst="rect">
+            <a:avLst/>
+          </a:prstGeom>
+          <a:noFill/>
+        </p:spPr>
+        <p:txBody>
+          <a:bodyPr wrap="square" anchor="t">
+            <a:spAutoFit/>
+          </a:bodyPr>
+          <a:lstStyle/>
+          <a:p>
+            <a:pPr algn="ctr"/>
+            <a:r>
+              <a:rPr sz="800" b="0" i="1">
+                <a:solidFill>
+                  <a:srgbClr val="A84A4A"/>
+                </a:solidFill>
+                <a:latin typeface="Calibri"/>
+              </a:rPr>
+              <a:t>feeds Pass 2 cluster</a:t>
+            </a:r>
+          </a:p>
+        </p:txBody>
+      </p:sp>
+      <p:sp>
+        <p:nvSpPr>
+          <p:cNvPr id="48" name="Rectangle 47"/>
           <p:cNvSpPr/>
           <p:nvPr/>
         </p:nvSpPr>
@@ -8694,7 +9672,7 @@
       </p:sp>
       <p:sp>
         <p:nvSpPr>
-          <p:cNvPr id="38" name="TextBox 37"/>
+          <p:cNvPr id="49" name="TextBox 48"/>
           <p:cNvSpPr txBox="1"/>
           <p:nvPr/>
         </p:nvSpPr>
@@ -8729,7 +9707,7 @@
       </p:sp>
       <p:sp>
         <p:nvSpPr>
-          <p:cNvPr id="39" name="TextBox 38"/>
+          <p:cNvPr id="50" name="TextBox 49"/>
           <p:cNvSpPr txBox="1"/>
           <p:nvPr/>
         </p:nvSpPr>
@@ -9815,7 +10793,7 @@
         <p:spPr>
           <a:xfrm>
             <a:off x="7040880" y="1417320"/>
-            <a:ext cx="4937760" cy="4114800"/>
+            <a:ext cx="4937760" cy="3566160"/>
           </a:xfrm>
           <a:prstGeom prst="rect">
             <a:avLst/>
@@ -10176,8 +11154,8 @@
         </p:nvSpPr>
         <p:spPr>
           <a:xfrm>
-            <a:off x="7040880" y="5577840"/>
-            <a:ext cx="4937760" cy="777240"/>
+            <a:off x="7040880" y="5074920"/>
+            <a:ext cx="4937760" cy="228600"/>
           </a:xfrm>
           <a:prstGeom prst="rect">
             <a:avLst/>
@@ -10192,20 +11170,456 @@
           <a:p>
             <a:pPr algn="l"/>
             <a:r>
-              <a:rPr sz="1000" b="0" i="1">
-                <a:solidFill>
-                  <a:srgbClr val="55606E"/>
-                </a:solidFill>
-                <a:latin typeface="Calibri"/>
-              </a:rPr>
-              <a:t>Every story carries: shape, tests, role, stage, source citation, and quality verdict. Closed-enum fields are checked against the catalogs — out-of-list values are rejected, no questions asked.</a:t>
-            </a:r>
-          </a:p>
-        </p:txBody>
-      </p:sp>
-      <p:sp>
-        <p:nvSpPr>
-          <p:cNvPr id="28" name="Rectangle 27"/>
+              <a:rPr sz="1100" b="1" i="0">
+                <a:solidFill>
+                  <a:srgbClr val="1F4E79"/>
+                </a:solidFill>
+                <a:latin typeface="Calibri"/>
+              </a:rPr>
+              <a:t>The 4 quality rules — one per story shape</a:t>
+            </a:r>
+          </a:p>
+        </p:txBody>
+      </p:sp>
+      <p:sp>
+        <p:nvSpPr>
+          <p:cNvPr id="28" name="Rounded Rectangle 27"/>
+          <p:cNvSpPr/>
+          <p:nvPr/>
+        </p:nvSpPr>
+        <p:spPr>
+          <a:xfrm>
+            <a:off x="7040880" y="5349240"/>
+            <a:ext cx="1193292" cy="228600"/>
+          </a:xfrm>
+          <a:prstGeom prst="roundRect">
+            <a:avLst/>
+          </a:prstGeom>
+          <a:solidFill>
+            <a:srgbClr val="FAE9CB"/>
+          </a:solidFill>
+          <a:ln w="12700">
+            <a:solidFill>
+              <a:srgbClr val="C9952C"/>
+            </a:solidFill>
+          </a:ln>
+        </p:spPr>
+        <p:style>
+          <a:lnRef idx="1">
+            <a:schemeClr val="accent1"/>
+          </a:lnRef>
+          <a:fillRef idx="3">
+            <a:schemeClr val="accent1"/>
+          </a:fillRef>
+          <a:effectRef idx="2">
+            <a:schemeClr val="accent1"/>
+          </a:effectRef>
+          <a:fontRef idx="minor">
+            <a:schemeClr val="lt1"/>
+          </a:fontRef>
+        </p:style>
+        <p:txBody>
+          <a:bodyPr rtlCol="0" anchor="ctr" wrap="square" lIns="73152" rIns="73152" tIns="36576" bIns="36576"/>
+          <a:lstStyle/>
+          <a:p>
+            <a:pPr algn="ctr"/>
+            <a:r>
+              <a:rPr sz="1000" b="1" i="0">
+                <a:solidFill>
+                  <a:srgbClr val="1F4E79"/>
+                </a:solidFill>
+                <a:latin typeface="Calibri"/>
+              </a:rPr>
+              <a:t>Capability</a:t>
+            </a:r>
+          </a:p>
+        </p:txBody>
+      </p:sp>
+      <p:sp>
+        <p:nvSpPr>
+          <p:cNvPr id="29" name="Rounded Rectangle 28"/>
+          <p:cNvSpPr/>
+          <p:nvPr/>
+        </p:nvSpPr>
+        <p:spPr>
+          <a:xfrm>
+            <a:off x="7040880" y="5577840"/>
+            <a:ext cx="1193292" cy="502920"/>
+          </a:xfrm>
+          <a:prstGeom prst="roundRect">
+            <a:avLst/>
+          </a:prstGeom>
+          <a:solidFill>
+            <a:srgbClr val="FFFFFF"/>
+          </a:solidFill>
+          <a:ln w="12700">
+            <a:solidFill>
+              <a:srgbClr val="C9952C"/>
+            </a:solidFill>
+          </a:ln>
+        </p:spPr>
+        <p:style>
+          <a:lnRef idx="1">
+            <a:schemeClr val="accent1"/>
+          </a:lnRef>
+          <a:fillRef idx="3">
+            <a:schemeClr val="accent1"/>
+          </a:fillRef>
+          <a:effectRef idx="2">
+            <a:schemeClr val="accent1"/>
+          </a:effectRef>
+          <a:fontRef idx="minor">
+            <a:schemeClr val="lt1"/>
+          </a:fontRef>
+        </p:style>
+        <p:txBody>
+          <a:bodyPr rtlCol="0" anchor="ctr" wrap="square" lIns="73152" rIns="73152" tIns="36576" bIns="36576"/>
+          <a:lstStyle/>
+          <a:p>
+            <a:pPr algn="ctr"/>
+            <a:r>
+              <a:rPr sz="800" b="0" i="0">
+                <a:solidFill>
+                  <a:srgbClr val="1F2D3D"/>
+                </a:solidFill>
+                <a:latin typeface="Calibri"/>
+              </a:rPr>
+              <a:t>MUST/SHALL
++ parameters</a:t>
+            </a:r>
+          </a:p>
+        </p:txBody>
+      </p:sp>
+      <p:sp>
+        <p:nvSpPr>
+          <p:cNvPr id="30" name="Rounded Rectangle 29"/>
+          <p:cNvSpPr/>
+          <p:nvPr/>
+        </p:nvSpPr>
+        <p:spPr>
+          <a:xfrm>
+            <a:off x="8289036" y="5349240"/>
+            <a:ext cx="1193292" cy="228600"/>
+          </a:xfrm>
+          <a:prstGeom prst="roundRect">
+            <a:avLst/>
+          </a:prstGeom>
+          <a:solidFill>
+            <a:srgbClr val="FAE9CB"/>
+          </a:solidFill>
+          <a:ln w="12700">
+            <a:solidFill>
+              <a:srgbClr val="C9952C"/>
+            </a:solidFill>
+          </a:ln>
+        </p:spPr>
+        <p:style>
+          <a:lnRef idx="1">
+            <a:schemeClr val="accent1"/>
+          </a:lnRef>
+          <a:fillRef idx="3">
+            <a:schemeClr val="accent1"/>
+          </a:fillRef>
+          <a:effectRef idx="2">
+            <a:schemeClr val="accent1"/>
+          </a:effectRef>
+          <a:fontRef idx="minor">
+            <a:schemeClr val="lt1"/>
+          </a:fontRef>
+        </p:style>
+        <p:txBody>
+          <a:bodyPr rtlCol="0" anchor="ctr" wrap="square" lIns="73152" rIns="73152" tIns="36576" bIns="36576"/>
+          <a:lstStyle/>
+          <a:p>
+            <a:pPr algn="ctr"/>
+            <a:r>
+              <a:rPr sz="1000" b="1" i="0">
+                <a:solidFill>
+                  <a:srgbClr val="1F4E79"/>
+                </a:solidFill>
+                <a:latin typeface="Calibri"/>
+              </a:rPr>
+              <a:t>Stage-split</a:t>
+            </a:r>
+          </a:p>
+        </p:txBody>
+      </p:sp>
+      <p:sp>
+        <p:nvSpPr>
+          <p:cNvPr id="31" name="Rounded Rectangle 30"/>
+          <p:cNvSpPr/>
+          <p:nvPr/>
+        </p:nvSpPr>
+        <p:spPr>
+          <a:xfrm>
+            <a:off x="8289036" y="5577840"/>
+            <a:ext cx="1193292" cy="502920"/>
+          </a:xfrm>
+          <a:prstGeom prst="roundRect">
+            <a:avLst/>
+          </a:prstGeom>
+          <a:solidFill>
+            <a:srgbClr val="FFFFFF"/>
+          </a:solidFill>
+          <a:ln w="12700">
+            <a:solidFill>
+              <a:srgbClr val="C9952C"/>
+            </a:solidFill>
+          </a:ln>
+        </p:spPr>
+        <p:style>
+          <a:lnRef idx="1">
+            <a:schemeClr val="accent1"/>
+          </a:lnRef>
+          <a:fillRef idx="3">
+            <a:schemeClr val="accent1"/>
+          </a:fillRef>
+          <a:effectRef idx="2">
+            <a:schemeClr val="accent1"/>
+          </a:effectRef>
+          <a:fontRef idx="minor">
+            <a:schemeClr val="lt1"/>
+          </a:fontRef>
+        </p:style>
+        <p:txBody>
+          <a:bodyPr rtlCol="0" anchor="ctr" wrap="square" lIns="73152" rIns="73152" tIns="36576" bIns="36576"/>
+          <a:lstStyle/>
+          <a:p>
+            <a:pPr algn="ctr"/>
+            <a:r>
+              <a:rPr sz="800" b="0" i="0">
+                <a:solidFill>
+                  <a:srgbClr val="1F2D3D"/>
+                </a:solidFill>
+                <a:latin typeface="Calibri"/>
+              </a:rPr>
+              <a:t>Stage in title
++ siblings</a:t>
+            </a:r>
+          </a:p>
+        </p:txBody>
+      </p:sp>
+      <p:sp>
+        <p:nvSpPr>
+          <p:cNvPr id="32" name="Rounded Rectangle 31"/>
+          <p:cNvSpPr/>
+          <p:nvPr/>
+        </p:nvSpPr>
+        <p:spPr>
+          <a:xfrm>
+            <a:off x="9537192" y="5349240"/>
+            <a:ext cx="1193292" cy="228600"/>
+          </a:xfrm>
+          <a:prstGeom prst="roundRect">
+            <a:avLst/>
+          </a:prstGeom>
+          <a:solidFill>
+            <a:srgbClr val="FAE9CB"/>
+          </a:solidFill>
+          <a:ln w="12700">
+            <a:solidFill>
+              <a:srgbClr val="C9952C"/>
+            </a:solidFill>
+          </a:ln>
+        </p:spPr>
+        <p:style>
+          <a:lnRef idx="1">
+            <a:schemeClr val="accent1"/>
+          </a:lnRef>
+          <a:fillRef idx="3">
+            <a:schemeClr val="accent1"/>
+          </a:fillRef>
+          <a:effectRef idx="2">
+            <a:schemeClr val="accent1"/>
+          </a:effectRef>
+          <a:fontRef idx="minor">
+            <a:schemeClr val="lt1"/>
+          </a:fontRef>
+        </p:style>
+        <p:txBody>
+          <a:bodyPr rtlCol="0" anchor="ctr" wrap="square" lIns="73152" rIns="73152" tIns="36576" bIns="36576"/>
+          <a:lstStyle/>
+          <a:p>
+            <a:pPr algn="ctr"/>
+            <a:r>
+              <a:rPr sz="1000" b="1" i="0">
+                <a:solidFill>
+                  <a:srgbClr val="1F4E79"/>
+                </a:solidFill>
+                <a:latin typeface="Calibri"/>
+              </a:rPr>
+              <a:t>Config-instance</a:t>
+            </a:r>
+          </a:p>
+        </p:txBody>
+      </p:sp>
+      <p:sp>
+        <p:nvSpPr>
+          <p:cNvPr id="33" name="Rounded Rectangle 32"/>
+          <p:cNvSpPr/>
+          <p:nvPr/>
+        </p:nvSpPr>
+        <p:spPr>
+          <a:xfrm>
+            <a:off x="9537192" y="5577840"/>
+            <a:ext cx="1193292" cy="502920"/>
+          </a:xfrm>
+          <a:prstGeom prst="roundRect">
+            <a:avLst/>
+          </a:prstGeom>
+          <a:solidFill>
+            <a:srgbClr val="FFFFFF"/>
+          </a:solidFill>
+          <a:ln w="12700">
+            <a:solidFill>
+              <a:srgbClr val="C9952C"/>
+            </a:solidFill>
+          </a:ln>
+        </p:spPr>
+        <p:style>
+          <a:lnRef idx="1">
+            <a:schemeClr val="accent1"/>
+          </a:lnRef>
+          <a:fillRef idx="3">
+            <a:schemeClr val="accent1"/>
+          </a:fillRef>
+          <a:effectRef idx="2">
+            <a:schemeClr val="accent1"/>
+          </a:effectRef>
+          <a:fontRef idx="minor">
+            <a:schemeClr val="lt1"/>
+          </a:fontRef>
+        </p:style>
+        <p:txBody>
+          <a:bodyPr rtlCol="0" anchor="ctr" wrap="square" lIns="73152" rIns="73152" tIns="36576" bIns="36576"/>
+          <a:lstStyle/>
+          <a:p>
+            <a:pPr algn="ctr"/>
+            <a:r>
+              <a:rPr sz="800" b="0" i="0">
+                <a:solidFill>
+                  <a:srgbClr val="1F2D3D"/>
+                </a:solidFill>
+                <a:latin typeface="Calibri"/>
+              </a:rPr>
+              <a:t>Concrete typed values
+no MUST/SHALL</a:t>
+            </a:r>
+          </a:p>
+        </p:txBody>
+      </p:sp>
+      <p:sp>
+        <p:nvSpPr>
+          <p:cNvPr id="34" name="Rounded Rectangle 33"/>
+          <p:cNvSpPr/>
+          <p:nvPr/>
+        </p:nvSpPr>
+        <p:spPr>
+          <a:xfrm>
+            <a:off x="10785348" y="5349240"/>
+            <a:ext cx="1193292" cy="228600"/>
+          </a:xfrm>
+          <a:prstGeom prst="roundRect">
+            <a:avLst/>
+          </a:prstGeom>
+          <a:solidFill>
+            <a:srgbClr val="FAE9CB"/>
+          </a:solidFill>
+          <a:ln w="12700">
+            <a:solidFill>
+              <a:srgbClr val="C9952C"/>
+            </a:solidFill>
+          </a:ln>
+        </p:spPr>
+        <p:style>
+          <a:lnRef idx="1">
+            <a:schemeClr val="accent1"/>
+          </a:lnRef>
+          <a:fillRef idx="3">
+            <a:schemeClr val="accent1"/>
+          </a:fillRef>
+          <a:effectRef idx="2">
+            <a:schemeClr val="accent1"/>
+          </a:effectRef>
+          <a:fontRef idx="minor">
+            <a:schemeClr val="lt1"/>
+          </a:fontRef>
+        </p:style>
+        <p:txBody>
+          <a:bodyPr rtlCol="0" anchor="ctr" wrap="square" lIns="73152" rIns="73152" tIns="36576" bIns="36576"/>
+          <a:lstStyle/>
+          <a:p>
+            <a:pPr algn="ctr"/>
+            <a:r>
+              <a:rPr sz="1000" b="1" i="0">
+                <a:solidFill>
+                  <a:srgbClr val="1F4E79"/>
+                </a:solidFill>
+                <a:latin typeface="Calibri"/>
+              </a:rPr>
+              <a:t>Cleanup</a:t>
+            </a:r>
+          </a:p>
+        </p:txBody>
+      </p:sp>
+      <p:sp>
+        <p:nvSpPr>
+          <p:cNvPr id="35" name="Rounded Rectangle 34"/>
+          <p:cNvSpPr/>
+          <p:nvPr/>
+        </p:nvSpPr>
+        <p:spPr>
+          <a:xfrm>
+            <a:off x="10785348" y="5577840"/>
+            <a:ext cx="1193292" cy="502920"/>
+          </a:xfrm>
+          <a:prstGeom prst="roundRect">
+            <a:avLst/>
+          </a:prstGeom>
+          <a:solidFill>
+            <a:srgbClr val="FFFFFF"/>
+          </a:solidFill>
+          <a:ln w="12700">
+            <a:solidFill>
+              <a:srgbClr val="C9952C"/>
+            </a:solidFill>
+          </a:ln>
+        </p:spPr>
+        <p:style>
+          <a:lnRef idx="1">
+            <a:schemeClr val="accent1"/>
+          </a:lnRef>
+          <a:fillRef idx="3">
+            <a:schemeClr val="accent1"/>
+          </a:fillRef>
+          <a:effectRef idx="2">
+            <a:schemeClr val="accent1"/>
+          </a:effectRef>
+          <a:fontRef idx="minor">
+            <a:schemeClr val="lt1"/>
+          </a:fontRef>
+        </p:style>
+        <p:txBody>
+          <a:bodyPr rtlCol="0" anchor="ctr" wrap="square" lIns="73152" rIns="73152" tIns="36576" bIns="36576"/>
+          <a:lstStyle/>
+          <a:p>
+            <a:pPr algn="ctr"/>
+            <a:r>
+              <a:rPr sz="800" b="0" i="0">
+                <a:solidFill>
+                  <a:srgbClr val="1F2D3D"/>
+                </a:solidFill>
+                <a:latin typeface="Calibri"/>
+              </a:rPr>
+              <a:t>Named artifact
++ before/after</a:t>
+            </a:r>
+          </a:p>
+        </p:txBody>
+      </p:sp>
+      <p:sp>
+        <p:nvSpPr>
+          <p:cNvPr id="36" name="Rectangle 35"/>
           <p:cNvSpPr/>
           <p:nvPr/>
         </p:nvSpPr>
@@ -10248,7 +11662,7 @@
       </p:sp>
       <p:sp>
         <p:nvSpPr>
-          <p:cNvPr id="29" name="TextBox 28"/>
+          <p:cNvPr id="37" name="TextBox 36"/>
           <p:cNvSpPr txBox="1"/>
           <p:nvPr/>
         </p:nvSpPr>
@@ -10283,7 +11697,7 @@
       </p:sp>
       <p:sp>
         <p:nvSpPr>
-          <p:cNvPr id="30" name="TextBox 29"/>
+          <p:cNvPr id="38" name="TextBox 37"/>
           <p:cNvSpPr txBox="1"/>
           <p:nvPr/>
         </p:nvSpPr>
@@ -11658,20 +13072,55 @@
       </p:sp>
       <p:sp>
         <p:nvSpPr>
-          <p:cNvPr id="25" name="Rectangle 24"/>
+          <p:cNvPr id="25" name="TextBox 24"/>
+          <p:cNvSpPr txBox="1"/>
+          <p:nvPr/>
+        </p:nvSpPr>
+        <p:spPr>
+          <a:xfrm>
+            <a:off x="7040880" y="5212080"/>
+            <a:ext cx="4937760" cy="228600"/>
+          </a:xfrm>
+          <a:prstGeom prst="rect">
+            <a:avLst/>
+          </a:prstGeom>
+          <a:noFill/>
+        </p:spPr>
+        <p:txBody>
+          <a:bodyPr wrap="square" anchor="t">
+            <a:spAutoFit/>
+          </a:bodyPr>
+          <a:lstStyle/>
+          <a:p>
+            <a:pPr algn="l"/>
+            <a:r>
+              <a:rPr sz="1100" b="1" i="0">
+                <a:solidFill>
+                  <a:srgbClr val="1F4E79"/>
+                </a:solidFill>
+                <a:latin typeface="Calibri"/>
+              </a:rPr>
+              <a:t>What "pattern in ≥ 2 SOPs" produces (worked example)</a:t>
+            </a:r>
+          </a:p>
+        </p:txBody>
+      </p:sp>
+      <p:sp>
+        <p:nvSpPr>
+          <p:cNvPr id="26" name="Rounded Rectangle 25"/>
           <p:cNvSpPr/>
           <p:nvPr/>
         </p:nvSpPr>
         <p:spPr>
           <a:xfrm>
-            <a:off x="7040880" y="5303520"/>
-            <a:ext cx="4937760" cy="640080"/>
-          </a:xfrm>
-          <a:prstGeom prst="rect">
+            <a:off x="7040880" y="5504688"/>
+            <a:ext cx="1188720" cy="320040"/>
+          </a:xfrm>
+          <a:prstGeom prst="roundRect">
             <a:avLst/>
           </a:prstGeom>
           <a:solidFill>
-            <a:srgbClr val="F1F5FA"/>
+            <a:srgbClr val="E7EFF8"/>
           </a:solidFill>
           <a:ln w="12700">
             <a:solidFill>
@@ -11697,22 +13146,295 @@
           <a:bodyPr rtlCol="0" anchor="ctr" wrap="square" lIns="73152" rIns="73152" tIns="36576" bIns="36576"/>
           <a:lstStyle/>
           <a:p>
-            <a:pPr algn="l"/>
-            <a:r>
-              <a:rPr sz="1000" b="0" i="0">
-                <a:solidFill>
-                  <a:srgbClr val="1F2D3D"/>
-                </a:solidFill>
-                <a:latin typeface="Calibri"/>
-              </a:rPr>
-              <a:t>Continuous monitoring (alongside): drift report; alarm when review pile or unclassified bucket &gt; 5%; auto-rerun with looser threshold on alarm.</a:t>
-            </a:r>
-          </a:p>
-        </p:txBody>
-      </p:sp>
-      <p:sp>
-        <p:nvSpPr>
-          <p:cNvPr id="26" name="Rectangle 25"/>
+            <a:pPr algn="ctr"/>
+            <a:r>
+              <a:rPr sz="900" b="1" i="0">
+                <a:solidFill>
+                  <a:srgbClr val="1F2D3D"/>
+                </a:solidFill>
+                <a:latin typeface="Calibri"/>
+              </a:rPr>
+              <a:t>Story · SOP-007</a:t>
+            </a:r>
+          </a:p>
+        </p:txBody>
+      </p:sp>
+      <p:sp>
+        <p:nvSpPr>
+          <p:cNvPr id="27" name="Rounded Rectangle 26"/>
+          <p:cNvSpPr/>
+          <p:nvPr/>
+        </p:nvSpPr>
+        <p:spPr>
+          <a:xfrm>
+            <a:off x="7040880" y="5870448"/>
+            <a:ext cx="1188720" cy="320040"/>
+          </a:xfrm>
+          <a:prstGeom prst="roundRect">
+            <a:avLst/>
+          </a:prstGeom>
+          <a:solidFill>
+            <a:srgbClr val="E7EFF8"/>
+          </a:solidFill>
+          <a:ln w="12700">
+            <a:solidFill>
+              <a:srgbClr val="4A6EA0"/>
+            </a:solidFill>
+          </a:ln>
+        </p:spPr>
+        <p:style>
+          <a:lnRef idx="1">
+            <a:schemeClr val="accent1"/>
+          </a:lnRef>
+          <a:fillRef idx="3">
+            <a:schemeClr val="accent1"/>
+          </a:fillRef>
+          <a:effectRef idx="2">
+            <a:schemeClr val="accent1"/>
+          </a:effectRef>
+          <a:fontRef idx="minor">
+            <a:schemeClr val="lt1"/>
+          </a:fontRef>
+        </p:style>
+        <p:txBody>
+          <a:bodyPr rtlCol="0" anchor="ctr" wrap="square" lIns="73152" rIns="73152" tIns="36576" bIns="36576"/>
+          <a:lstStyle/>
+          <a:p>
+            <a:pPr algn="ctr"/>
+            <a:r>
+              <a:rPr sz="900" b="1" i="0">
+                <a:solidFill>
+                  <a:srgbClr val="1F2D3D"/>
+                </a:solidFill>
+                <a:latin typeface="Calibri"/>
+              </a:rPr>
+              <a:t>Story · SOP-014</a:t>
+            </a:r>
+          </a:p>
+        </p:txBody>
+      </p:sp>
+      <p:sp>
+        <p:nvSpPr>
+          <p:cNvPr id="28" name="Rounded Rectangle 27"/>
+          <p:cNvSpPr/>
+          <p:nvPr/>
+        </p:nvSpPr>
+        <p:spPr>
+          <a:xfrm>
+            <a:off x="8503920" y="5577840"/>
+            <a:ext cx="1417320" cy="539495"/>
+          </a:xfrm>
+          <a:prstGeom prst="roundRect">
+            <a:avLst/>
+          </a:prstGeom>
+          <a:solidFill>
+            <a:srgbClr val="FAE9CB"/>
+          </a:solidFill>
+          <a:ln w="12700">
+            <a:solidFill>
+              <a:srgbClr val="C9952C"/>
+            </a:solidFill>
+          </a:ln>
+        </p:spPr>
+        <p:style>
+          <a:lnRef idx="1">
+            <a:schemeClr val="accent1"/>
+          </a:lnRef>
+          <a:fillRef idx="3">
+            <a:schemeClr val="accent1"/>
+          </a:fillRef>
+          <a:effectRef idx="2">
+            <a:schemeClr val="accent1"/>
+          </a:effectRef>
+          <a:fontRef idx="minor">
+            <a:schemeClr val="lt1"/>
+          </a:fontRef>
+        </p:style>
+        <p:txBody>
+          <a:bodyPr rtlCol="0" anchor="ctr" wrap="square" lIns="73152" rIns="73152" tIns="36576" bIns="36576"/>
+          <a:lstStyle/>
+          <a:p>
+            <a:pPr algn="ctr"/>
+            <a:r>
+              <a:rPr sz="900" b="1" i="0">
+                <a:solidFill>
+                  <a:srgbClr val="1F2D3D"/>
+                </a:solidFill>
+                <a:latin typeface="Calibri"/>
+              </a:rPr>
+              <a:t>Cluster:
+2 distinct SOPs
+≥ 2 → lift</a:t>
+            </a:r>
+          </a:p>
+        </p:txBody>
+      </p:sp>
+      <p:sp>
+        <p:nvSpPr>
+          <p:cNvPr id="29" name="Rounded Rectangle 28"/>
+          <p:cNvSpPr/>
+          <p:nvPr/>
+        </p:nvSpPr>
+        <p:spPr>
+          <a:xfrm>
+            <a:off x="10195560" y="5577840"/>
+            <a:ext cx="1783079" cy="539495"/>
+          </a:xfrm>
+          <a:prstGeom prst="roundRect">
+            <a:avLst/>
+          </a:prstGeom>
+          <a:solidFill>
+            <a:srgbClr val="DCE9D7"/>
+          </a:solidFill>
+          <a:ln w="12700">
+            <a:solidFill>
+              <a:srgbClr val="5C8347"/>
+            </a:solidFill>
+          </a:ln>
+        </p:spPr>
+        <p:style>
+          <a:lnRef idx="1">
+            <a:schemeClr val="accent1"/>
+          </a:lnRef>
+          <a:fillRef idx="3">
+            <a:schemeClr val="accent1"/>
+          </a:fillRef>
+          <a:effectRef idx="2">
+            <a:schemeClr val="accent1"/>
+          </a:effectRef>
+          <a:fontRef idx="minor">
+            <a:schemeClr val="lt1"/>
+          </a:fontRef>
+        </p:style>
+        <p:txBody>
+          <a:bodyPr rtlCol="0" anchor="ctr" wrap="square" lIns="73152" rIns="73152" tIns="36576" bIns="36576"/>
+          <a:lstStyle/>
+          <a:p>
+            <a:pPr algn="ctr"/>
+            <a:r>
+              <a:rPr sz="1000" b="1" i="0">
+                <a:solidFill>
+                  <a:srgbClr val="1F2D3D"/>
+                </a:solidFill>
+                <a:latin typeface="Calibri"/>
+              </a:rPr>
+              <a:t>Capability story
++ parameters</a:t>
+            </a:r>
+          </a:p>
+        </p:txBody>
+      </p:sp>
+      <p:cxnSp>
+        <p:nvCxnSpPr>
+          <p:cNvPr id="30" name="Connector 29"/>
+          <p:cNvCxnSpPr/>
+          <p:nvPr/>
+        </p:nvCxnSpPr>
+        <p:spPr>
+          <a:xfrm>
+            <a:off x="8247888" y="5664708"/>
+            <a:ext cx="237744" cy="101955"/>
+          </a:xfrm>
+          <a:prstGeom prst="line">
+            <a:avLst/>
+          </a:prstGeom>
+          <a:ln w="15240">
+            <a:solidFill>
+              <a:srgbClr val="4A6EA0"/>
+            </a:solidFill>
+            <a:tailEnd type="triangle" w="med" h="med"/>
+          </a:ln>
+        </p:spPr>
+        <p:style>
+          <a:lnRef idx="2">
+            <a:schemeClr val="accent1"/>
+          </a:lnRef>
+          <a:fillRef idx="0">
+            <a:schemeClr val="accent1"/>
+          </a:fillRef>
+          <a:effectRef idx="1">
+            <a:schemeClr val="accent1"/>
+          </a:effectRef>
+          <a:fontRef idx="minor">
+            <a:schemeClr val="tx1"/>
+          </a:fontRef>
+        </p:style>
+      </p:cxnSp>
+      <p:cxnSp>
+        <p:nvCxnSpPr>
+          <p:cNvPr id="31" name="Connector 30"/>
+          <p:cNvCxnSpPr/>
+          <p:nvPr/>
+        </p:nvCxnSpPr>
+        <p:spPr>
+          <a:xfrm flipV="1">
+            <a:off x="8247888" y="5928512"/>
+            <a:ext cx="237744" cy="101956"/>
+          </a:xfrm>
+          <a:prstGeom prst="line">
+            <a:avLst/>
+          </a:prstGeom>
+          <a:ln w="15240">
+            <a:solidFill>
+              <a:srgbClr val="4A6EA0"/>
+            </a:solidFill>
+            <a:tailEnd type="triangle" w="med" h="med"/>
+          </a:ln>
+        </p:spPr>
+        <p:style>
+          <a:lnRef idx="2">
+            <a:schemeClr val="accent1"/>
+          </a:lnRef>
+          <a:fillRef idx="0">
+            <a:schemeClr val="accent1"/>
+          </a:fillRef>
+          <a:effectRef idx="1">
+            <a:schemeClr val="accent1"/>
+          </a:effectRef>
+          <a:fontRef idx="minor">
+            <a:schemeClr val="tx1"/>
+          </a:fontRef>
+        </p:style>
+      </p:cxnSp>
+      <p:cxnSp>
+        <p:nvCxnSpPr>
+          <p:cNvPr id="32" name="Connector 31"/>
+          <p:cNvCxnSpPr/>
+          <p:nvPr/>
+        </p:nvCxnSpPr>
+        <p:spPr>
+          <a:xfrm>
+            <a:off x="9939528" y="5847588"/>
+            <a:ext cx="237744" cy="0"/>
+          </a:xfrm>
+          <a:prstGeom prst="line">
+            <a:avLst/>
+          </a:prstGeom>
+          <a:ln w="19050">
+            <a:solidFill>
+              <a:srgbClr val="4A6EA0"/>
+            </a:solidFill>
+            <a:tailEnd type="triangle" w="med" h="med"/>
+          </a:ln>
+        </p:spPr>
+        <p:style>
+          <a:lnRef idx="2">
+            <a:schemeClr val="accent1"/>
+          </a:lnRef>
+          <a:fillRef idx="0">
+            <a:schemeClr val="accent1"/>
+          </a:fillRef>
+          <a:effectRef idx="1">
+            <a:schemeClr val="accent1"/>
+          </a:effectRef>
+          <a:fontRef idx="minor">
+            <a:schemeClr val="tx1"/>
+          </a:fontRef>
+        </p:style>
+      </p:cxnSp>
+      <p:sp>
+        <p:nvSpPr>
+          <p:cNvPr id="33" name="Rectangle 32"/>
           <p:cNvSpPr/>
           <p:nvPr/>
         </p:nvSpPr>
@@ -11755,7 +13477,7 @@
       </p:sp>
       <p:sp>
         <p:nvSpPr>
-          <p:cNvPr id="27" name="TextBox 26"/>
+          <p:cNvPr id="34" name="TextBox 33"/>
           <p:cNvSpPr txBox="1"/>
           <p:nvPr/>
         </p:nvSpPr>
@@ -11790,7 +13512,7 @@
       </p:sp>
       <p:sp>
         <p:nvSpPr>
-          <p:cNvPr id="28" name="TextBox 27"/>
+          <p:cNvPr id="35" name="TextBox 34"/>
           <p:cNvSpPr txBox="1"/>
           <p:nvPr/>
         </p:nvSpPr>

--- a/client_alignment_deck.pptx
+++ b/client_alignment_deck.pptx
@@ -14,6 +14,7 @@
     <p:sldId id="262" r:id="rId13"/>
     <p:sldId id="263" r:id="rId14"/>
     <p:sldId id="264" r:id="rId15"/>
+    <p:sldId id="265" r:id="rId16"/>
   </p:sldIdLst>
   <p:sldSz cx="12191695" cy="6858000" type="screen4x3"/>
   <p:notesSz cx="6858000" cy="9144000"/>
@@ -4107,7 +4108,796 @@
                 </a:solidFill>
                 <a:latin typeface="Calibri"/>
               </a:rPr>
-              <a:t>1 / 9</a:t>
+              <a:t>1 / 10</a:t>
+            </a:r>
+          </a:p>
+        </p:txBody>
+      </p:sp>
+    </p:spTree>
+  </p:cSld>
+  <p:clrMapOvr>
+    <a:masterClrMapping/>
+  </p:clrMapOvr>
+</p:sld>
+</file>
+
+<file path=ppt/slides/slide10.xml><?xml version="1.0" encoding="utf-8"?>
+<p:sld xmlns:a="http://schemas.openxmlformats.org/drawingml/2006/main" xmlns:p="http://schemas.openxmlformats.org/presentationml/2006/main" xmlns:r="http://schemas.openxmlformats.org/officeDocument/2006/relationships">
+  <p:cSld>
+    <p:spTree>
+      <p:nvGrpSpPr>
+        <p:cNvPr id="1" name=""/>
+        <p:cNvGrpSpPr/>
+        <p:nvPr/>
+      </p:nvGrpSpPr>
+      <p:grpSpPr/>
+      <p:sp>
+        <p:nvSpPr>
+          <p:cNvPr id="2" name="TextBox 1"/>
+          <p:cNvSpPr txBox="1"/>
+          <p:nvPr/>
+        </p:nvSpPr>
+        <p:spPr>
+          <a:xfrm>
+            <a:off x="457200" y="292608"/>
+            <a:ext cx="11430000" cy="548640"/>
+          </a:xfrm>
+          <a:prstGeom prst="rect">
+            <a:avLst/>
+          </a:prstGeom>
+          <a:noFill/>
+        </p:spPr>
+        <p:txBody>
+          <a:bodyPr wrap="square" anchor="t">
+            <a:spAutoFit/>
+          </a:bodyPr>
+          <a:lstStyle/>
+          <a:p>
+            <a:pPr algn="l"/>
+            <a:r>
+              <a:rPr sz="2600" b="1" i="0">
+                <a:solidFill>
+                  <a:srgbClr val="1F4E79"/>
+                </a:solidFill>
+                <a:latin typeface="Calibri"/>
+              </a:rPr>
+              <a:t>What ships and the alignment ask</a:t>
+            </a:r>
+          </a:p>
+        </p:txBody>
+      </p:sp>
+      <p:sp>
+        <p:nvSpPr>
+          <p:cNvPr id="3" name="Rectangle 2"/>
+          <p:cNvSpPr/>
+          <p:nvPr/>
+        </p:nvSpPr>
+        <p:spPr>
+          <a:xfrm>
+            <a:off x="457200" y="868680"/>
+            <a:ext cx="1463040" cy="54864"/>
+          </a:xfrm>
+          <a:prstGeom prst="rect">
+            <a:avLst/>
+          </a:prstGeom>
+          <a:solidFill>
+            <a:srgbClr val="1F4E79"/>
+          </a:solidFill>
+          <a:ln>
+            <a:noFill/>
+          </a:ln>
+        </p:spPr>
+        <p:style>
+          <a:lnRef idx="1">
+            <a:schemeClr val="accent1"/>
+          </a:lnRef>
+          <a:fillRef idx="3">
+            <a:schemeClr val="accent1"/>
+          </a:fillRef>
+          <a:effectRef idx="2">
+            <a:schemeClr val="accent1"/>
+          </a:effectRef>
+          <a:fontRef idx="minor">
+            <a:schemeClr val="lt1"/>
+          </a:fontRef>
+        </p:style>
+        <p:txBody>
+          <a:bodyPr rtlCol="0" anchor="ctr"/>
+          <a:lstStyle/>
+          <a:p>
+            <a:pPr algn="ctr"/>
+          </a:p>
+        </p:txBody>
+      </p:sp>
+      <p:sp>
+        <p:nvSpPr>
+          <p:cNvPr id="4" name="Rounded Rectangle 3"/>
+          <p:cNvSpPr/>
+          <p:nvPr/>
+        </p:nvSpPr>
+        <p:spPr>
+          <a:xfrm>
+            <a:off x="335127" y="1188720"/>
+            <a:ext cx="3657600" cy="502920"/>
+          </a:xfrm>
+          <a:prstGeom prst="roundRect">
+            <a:avLst/>
+          </a:prstGeom>
+          <a:solidFill>
+            <a:srgbClr val="DCE9D7"/>
+          </a:solidFill>
+          <a:ln w="12700">
+            <a:solidFill>
+              <a:srgbClr val="5C8347"/>
+            </a:solidFill>
+          </a:ln>
+        </p:spPr>
+        <p:style>
+          <a:lnRef idx="1">
+            <a:schemeClr val="accent1"/>
+          </a:lnRef>
+          <a:fillRef idx="3">
+            <a:schemeClr val="accent1"/>
+          </a:fillRef>
+          <a:effectRef idx="2">
+            <a:schemeClr val="accent1"/>
+          </a:effectRef>
+          <a:fontRef idx="minor">
+            <a:schemeClr val="lt1"/>
+          </a:fontRef>
+        </p:style>
+        <p:txBody>
+          <a:bodyPr rtlCol="0" anchor="ctr" wrap="square" lIns="73152" rIns="73152" tIns="36576" bIns="36576"/>
+          <a:lstStyle/>
+          <a:p>
+            <a:pPr algn="ctr"/>
+            <a:r>
+              <a:rPr sz="1500" b="1" i="0">
+                <a:solidFill>
+                  <a:srgbClr val="1F2D3D"/>
+                </a:solidFill>
+                <a:latin typeface="Calibri"/>
+              </a:rPr>
+              <a:t>Jira backlog</a:t>
+            </a:r>
+          </a:p>
+        </p:txBody>
+      </p:sp>
+      <p:sp>
+        <p:nvSpPr>
+          <p:cNvPr id="5" name="Rectangle 4"/>
+          <p:cNvSpPr/>
+          <p:nvPr/>
+        </p:nvSpPr>
+        <p:spPr>
+          <a:xfrm>
+            <a:off x="335127" y="1691640"/>
+            <a:ext cx="3657600" cy="868680"/>
+          </a:xfrm>
+          <a:prstGeom prst="rect">
+            <a:avLst/>
+          </a:prstGeom>
+          <a:solidFill>
+            <a:srgbClr val="FFFFFF"/>
+          </a:solidFill>
+          <a:ln w="12700">
+            <a:solidFill>
+              <a:srgbClr val="5C8347"/>
+            </a:solidFill>
+          </a:ln>
+        </p:spPr>
+        <p:style>
+          <a:lnRef idx="1">
+            <a:schemeClr val="accent1"/>
+          </a:lnRef>
+          <a:fillRef idx="3">
+            <a:schemeClr val="accent1"/>
+          </a:fillRef>
+          <a:effectRef idx="2">
+            <a:schemeClr val="accent1"/>
+          </a:effectRef>
+          <a:fontRef idx="minor">
+            <a:schemeClr val="lt1"/>
+          </a:fontRef>
+        </p:style>
+        <p:txBody>
+          <a:bodyPr rtlCol="0" anchor="ctr" wrap="square" lIns="73152" rIns="73152" tIns="36576" bIns="36576"/>
+          <a:lstStyle/>
+          <a:p>
+            <a:pPr algn="ctr"/>
+            <a:r>
+              <a:rPr sz="1100" b="0" i="0">
+                <a:solidFill>
+                  <a:srgbClr val="1F2D3D"/>
+                </a:solidFill>
+                <a:latin typeface="Calibri"/>
+              </a:rPr>
+              <a:t>Epics + Stories
+Ready for the dev team
+Includes traceability to source docs</a:t>
+            </a:r>
+          </a:p>
+        </p:txBody>
+      </p:sp>
+      <p:sp>
+        <p:nvSpPr>
+          <p:cNvPr id="6" name="Rounded Rectangle 5"/>
+          <p:cNvSpPr/>
+          <p:nvPr/>
+        </p:nvSpPr>
+        <p:spPr>
+          <a:xfrm>
+            <a:off x="4267047" y="1188720"/>
+            <a:ext cx="3657600" cy="502920"/>
+          </a:xfrm>
+          <a:prstGeom prst="roundRect">
+            <a:avLst/>
+          </a:prstGeom>
+          <a:solidFill>
+            <a:srgbClr val="DCE9D7"/>
+          </a:solidFill>
+          <a:ln w="12700">
+            <a:solidFill>
+              <a:srgbClr val="5C8347"/>
+            </a:solidFill>
+          </a:ln>
+        </p:spPr>
+        <p:style>
+          <a:lnRef idx="1">
+            <a:schemeClr val="accent1"/>
+          </a:lnRef>
+          <a:fillRef idx="3">
+            <a:schemeClr val="accent1"/>
+          </a:fillRef>
+          <a:effectRef idx="2">
+            <a:schemeClr val="accent1"/>
+          </a:effectRef>
+          <a:fontRef idx="minor">
+            <a:schemeClr val="lt1"/>
+          </a:fontRef>
+        </p:style>
+        <p:txBody>
+          <a:bodyPr rtlCol="0" anchor="ctr" wrap="square" lIns="73152" rIns="73152" tIns="36576" bIns="36576"/>
+          <a:lstStyle/>
+          <a:p>
+            <a:pPr algn="ctr"/>
+            <a:r>
+              <a:rPr sz="1500" b="1" i="0">
+                <a:solidFill>
+                  <a:srgbClr val="1F2D3D"/>
+                </a:solidFill>
+                <a:latin typeface="Calibri"/>
+              </a:rPr>
+              <a:t>Configuration files</a:t>
+            </a:r>
+          </a:p>
+        </p:txBody>
+      </p:sp>
+      <p:sp>
+        <p:nvSpPr>
+          <p:cNvPr id="7" name="Rectangle 6"/>
+          <p:cNvSpPr/>
+          <p:nvPr/>
+        </p:nvSpPr>
+        <p:spPr>
+          <a:xfrm>
+            <a:off x="4267047" y="1691640"/>
+            <a:ext cx="3657600" cy="868680"/>
+          </a:xfrm>
+          <a:prstGeom prst="rect">
+            <a:avLst/>
+          </a:prstGeom>
+          <a:solidFill>
+            <a:srgbClr val="FFFFFF"/>
+          </a:solidFill>
+          <a:ln w="12700">
+            <a:solidFill>
+              <a:srgbClr val="5C8347"/>
+            </a:solidFill>
+          </a:ln>
+        </p:spPr>
+        <p:style>
+          <a:lnRef idx="1">
+            <a:schemeClr val="accent1"/>
+          </a:lnRef>
+          <a:fillRef idx="3">
+            <a:schemeClr val="accent1"/>
+          </a:fillRef>
+          <a:effectRef idx="2">
+            <a:schemeClr val="accent1"/>
+          </a:effectRef>
+          <a:fontRef idx="minor">
+            <a:schemeClr val="lt1"/>
+          </a:fontRef>
+        </p:style>
+        <p:txBody>
+          <a:bodyPr rtlCol="0" anchor="ctr" wrap="square" lIns="73152" rIns="73152" tIns="36576" bIns="36576"/>
+          <a:lstStyle/>
+          <a:p>
+            <a:pPr algn="ctr"/>
+            <a:r>
+              <a:rPr sz="1100" b="0" i="0">
+                <a:solidFill>
+                  <a:srgbClr val="1F2D3D"/>
+                </a:solidFill>
+                <a:latin typeface="Calibri"/>
+              </a:rPr>
+              <a:t>Per-test settings
+(e.g. blood culture parameters)
+Deterministic structure</a:t>
+            </a:r>
+          </a:p>
+        </p:txBody>
+      </p:sp>
+      <p:sp>
+        <p:nvSpPr>
+          <p:cNvPr id="8" name="Rounded Rectangle 7"/>
+          <p:cNvSpPr/>
+          <p:nvPr/>
+        </p:nvSpPr>
+        <p:spPr>
+          <a:xfrm>
+            <a:off x="8198967" y="1188720"/>
+            <a:ext cx="3657600" cy="502920"/>
+          </a:xfrm>
+          <a:prstGeom prst="roundRect">
+            <a:avLst/>
+          </a:prstGeom>
+          <a:solidFill>
+            <a:srgbClr val="DCE9D7"/>
+          </a:solidFill>
+          <a:ln w="12700">
+            <a:solidFill>
+              <a:srgbClr val="5C8347"/>
+            </a:solidFill>
+          </a:ln>
+        </p:spPr>
+        <p:style>
+          <a:lnRef idx="1">
+            <a:schemeClr val="accent1"/>
+          </a:lnRef>
+          <a:fillRef idx="3">
+            <a:schemeClr val="accent1"/>
+          </a:fillRef>
+          <a:effectRef idx="2">
+            <a:schemeClr val="accent1"/>
+          </a:effectRef>
+          <a:fontRef idx="minor">
+            <a:schemeClr val="lt1"/>
+          </a:fontRef>
+        </p:style>
+        <p:txBody>
+          <a:bodyPr rtlCol="0" anchor="ctr" wrap="square" lIns="73152" rIns="73152" tIns="36576" bIns="36576"/>
+          <a:lstStyle/>
+          <a:p>
+            <a:pPr algn="ctr"/>
+            <a:r>
+              <a:rPr sz="1500" b="1" i="0">
+                <a:solidFill>
+                  <a:srgbClr val="1F2D3D"/>
+                </a:solidFill>
+                <a:latin typeface="Calibri"/>
+              </a:rPr>
+              <a:t>Reference + audit</a:t>
+            </a:r>
+          </a:p>
+        </p:txBody>
+      </p:sp>
+      <p:sp>
+        <p:nvSpPr>
+          <p:cNvPr id="9" name="Rectangle 8"/>
+          <p:cNvSpPr/>
+          <p:nvPr/>
+        </p:nvSpPr>
+        <p:spPr>
+          <a:xfrm>
+            <a:off x="8198967" y="1691640"/>
+            <a:ext cx="3657600" cy="868680"/>
+          </a:xfrm>
+          <a:prstGeom prst="rect">
+            <a:avLst/>
+          </a:prstGeom>
+          <a:solidFill>
+            <a:srgbClr val="FFFFFF"/>
+          </a:solidFill>
+          <a:ln w="12700">
+            <a:solidFill>
+              <a:srgbClr val="5C8347"/>
+            </a:solidFill>
+          </a:ln>
+        </p:spPr>
+        <p:style>
+          <a:lnRef idx="1">
+            <a:schemeClr val="accent1"/>
+          </a:lnRef>
+          <a:fillRef idx="3">
+            <a:schemeClr val="accent1"/>
+          </a:fillRef>
+          <a:effectRef idx="2">
+            <a:schemeClr val="accent1"/>
+          </a:effectRef>
+          <a:fontRef idx="minor">
+            <a:schemeClr val="lt1"/>
+          </a:fontRef>
+        </p:style>
+        <p:txBody>
+          <a:bodyPr rtlCol="0" anchor="ctr" wrap="square" lIns="73152" rIns="73152" tIns="36576" bIns="36576"/>
+          <a:lstStyle/>
+          <a:p>
+            <a:pPr algn="ctr"/>
+            <a:r>
+              <a:rPr sz="1100" b="0" i="0">
+                <a:solidFill>
+                  <a:srgbClr val="1F2D3D"/>
+                </a:solidFill>
+                <a:latin typeface="Calibri"/>
+              </a:rPr>
+              <a:t>Theme catalog, epic catalog
+Cross-discipline mapping
+Review pile + decision log</a:t>
+            </a:r>
+          </a:p>
+        </p:txBody>
+      </p:sp>
+      <p:sp>
+        <p:nvSpPr>
+          <p:cNvPr id="10" name="TextBox 9"/>
+          <p:cNvSpPr txBox="1"/>
+          <p:nvPr/>
+        </p:nvSpPr>
+        <p:spPr>
+          <a:xfrm>
+            <a:off x="457200" y="2880360"/>
+            <a:ext cx="11430000" cy="365760"/>
+          </a:xfrm>
+          <a:prstGeom prst="rect">
+            <a:avLst/>
+          </a:prstGeom>
+          <a:noFill/>
+        </p:spPr>
+        <p:txBody>
+          <a:bodyPr wrap="square" anchor="t">
+            <a:spAutoFit/>
+          </a:bodyPr>
+          <a:lstStyle/>
+          <a:p>
+            <a:pPr algn="l"/>
+            <a:r>
+              <a:rPr sz="1500" b="1" i="0">
+                <a:solidFill>
+                  <a:srgbClr val="1F4E79"/>
+                </a:solidFill>
+                <a:latin typeface="Calibri"/>
+              </a:rPr>
+              <a:t>What we need from the client — mandatory</a:t>
+            </a:r>
+          </a:p>
+        </p:txBody>
+      </p:sp>
+      <p:sp>
+        <p:nvSpPr>
+          <p:cNvPr id="11" name="TextBox 10"/>
+          <p:cNvSpPr txBox="1"/>
+          <p:nvPr/>
+        </p:nvSpPr>
+        <p:spPr>
+          <a:xfrm>
+            <a:off x="640080" y="3246120"/>
+            <a:ext cx="10972800" cy="1463040"/>
+          </a:xfrm>
+          <a:prstGeom prst="rect">
+            <a:avLst/>
+          </a:prstGeom>
+          <a:noFill/>
+        </p:spPr>
+        <p:txBody>
+          <a:bodyPr wrap="square" anchor="t">
+            <a:spAutoFit/>
+          </a:bodyPr>
+          <a:lstStyle/>
+          <a:p>
+            <a:pPr algn="l">
+              <a:spcAft>
+                <a:spcPts val="300"/>
+              </a:spcAft>
+            </a:pPr>
+            <a:r>
+              <a:rPr sz="1100">
+                <a:solidFill>
+                  <a:srgbClr val="1F2D3D"/>
+                </a:solidFill>
+                <a:latin typeface="Calibri"/>
+              </a:rPr>
+              <a:t>•  The list of tests for each discipline in scope (blood culture, urine culture, target pathogens for Microbiology).</a:t>
+            </a:r>
+          </a:p>
+          <a:p>
+            <a:pPr algn="l">
+              <a:spcAft>
+                <a:spcPts val="300"/>
+              </a:spcAft>
+            </a:pPr>
+            <a:r>
+              <a:rPr sz="1100">
+                <a:solidFill>
+                  <a:srgbClr val="1F2D3D"/>
+                </a:solidFill>
+                <a:latin typeface="Calibri"/>
+              </a:rPr>
+              <a:t>•  The list of roles in those disciplines (with type: human / system / external).</a:t>
+            </a:r>
+          </a:p>
+          <a:p>
+            <a:pPr algn="l">
+              <a:spcAft>
+                <a:spcPts val="300"/>
+              </a:spcAft>
+            </a:pPr>
+            <a:r>
+              <a:rPr sz="1100">
+                <a:solidFill>
+                  <a:srgbClr val="1F2D3D"/>
+                </a:solidFill>
+                <a:latin typeface="Calibri"/>
+              </a:rPr>
+              <a:t>•  The prior discipline's theme catalog and epic catalog (small structured YAMLs — Cytology for the seminal extension).</a:t>
+            </a:r>
+          </a:p>
+          <a:p>
+            <a:pPr algn="l">
+              <a:spcAft>
+                <a:spcPts val="300"/>
+              </a:spcAft>
+            </a:pPr>
+            <a:r>
+              <a:rPr sz="1100">
+                <a:solidFill>
+                  <a:srgbClr val="1F2D3D"/>
+                </a:solidFill>
+                <a:latin typeface="Calibri"/>
+              </a:rPr>
+              <a:t>•  A sample of ~20 SOPs per new discipline to seed Phase 1.</a:t>
+            </a:r>
+          </a:p>
+        </p:txBody>
+      </p:sp>
+      <p:sp>
+        <p:nvSpPr>
+          <p:cNvPr id="12" name="TextBox 11"/>
+          <p:cNvSpPr txBox="1"/>
+          <p:nvPr/>
+        </p:nvSpPr>
+        <p:spPr>
+          <a:xfrm>
+            <a:off x="457200" y="4709160"/>
+            <a:ext cx="11430000" cy="320040"/>
+          </a:xfrm>
+          <a:prstGeom prst="rect">
+            <a:avLst/>
+          </a:prstGeom>
+          <a:noFill/>
+        </p:spPr>
+        <p:txBody>
+          <a:bodyPr wrap="square" anchor="t">
+            <a:spAutoFit/>
+          </a:bodyPr>
+          <a:lstStyle/>
+          <a:p>
+            <a:pPr algn="l"/>
+            <a:r>
+              <a:rPr sz="1200" b="1" i="1">
+                <a:solidFill>
+                  <a:srgbClr val="55606E"/>
+                </a:solidFill>
+                <a:latin typeface="Calibri"/>
+              </a:rPr>
+              <a:t>Optional — quality enhancement</a:t>
+            </a:r>
+          </a:p>
+        </p:txBody>
+      </p:sp>
+      <p:sp>
+        <p:nvSpPr>
+          <p:cNvPr id="13" name="TextBox 12"/>
+          <p:cNvSpPr txBox="1"/>
+          <p:nvPr/>
+        </p:nvSpPr>
+        <p:spPr>
+          <a:xfrm>
+            <a:off x="640080" y="5029200"/>
+            <a:ext cx="10972800" cy="457200"/>
+          </a:xfrm>
+          <a:prstGeom prst="rect">
+            <a:avLst/>
+          </a:prstGeom>
+          <a:noFill/>
+        </p:spPr>
+        <p:txBody>
+          <a:bodyPr wrap="square" anchor="t">
+            <a:spAutoFit/>
+          </a:bodyPr>
+          <a:lstStyle/>
+          <a:p>
+            <a:pPr algn="l">
+              <a:spcAft>
+                <a:spcPts val="300"/>
+              </a:spcAft>
+            </a:pPr>
+            <a:r>
+              <a:rPr sz="1100">
+                <a:solidFill>
+                  <a:srgbClr val="55606E"/>
+                </a:solidFill>
+                <a:latin typeface="Calibri"/>
+              </a:rPr>
+              <a:t>•  Sanitized prior-discipline Jira export — improves story style fidelity if available; not required for the system to function.</a:t>
+            </a:r>
+          </a:p>
+        </p:txBody>
+      </p:sp>
+      <p:sp>
+        <p:nvSpPr>
+          <p:cNvPr id="14" name="Rounded Rectangle 13"/>
+          <p:cNvSpPr/>
+          <p:nvPr/>
+        </p:nvSpPr>
+        <p:spPr>
+          <a:xfrm>
+            <a:off x="457200" y="5623560"/>
+            <a:ext cx="11475720" cy="777240"/>
+          </a:xfrm>
+          <a:prstGeom prst="roundRect">
+            <a:avLst/>
+          </a:prstGeom>
+          <a:solidFill>
+            <a:srgbClr val="FAE9CB"/>
+          </a:solidFill>
+          <a:ln w="12700">
+            <a:solidFill>
+              <a:srgbClr val="C9952C"/>
+            </a:solidFill>
+          </a:ln>
+        </p:spPr>
+        <p:style>
+          <a:lnRef idx="1">
+            <a:schemeClr val="accent1"/>
+          </a:lnRef>
+          <a:fillRef idx="3">
+            <a:schemeClr val="accent1"/>
+          </a:fillRef>
+          <a:effectRef idx="2">
+            <a:schemeClr val="accent1"/>
+          </a:effectRef>
+          <a:fontRef idx="minor">
+            <a:schemeClr val="lt1"/>
+          </a:fontRef>
+        </p:style>
+        <p:txBody>
+          <a:bodyPr rtlCol="0" anchor="ctr" wrap="square" lIns="73152" rIns="73152" tIns="36576" bIns="36576"/>
+          <a:lstStyle/>
+          <a:p>
+            <a:pPr algn="ctr"/>
+            <a:r>
+              <a:rPr sz="1300" b="1" i="0">
+                <a:solidFill>
+                  <a:srgbClr val="1F4E79"/>
+                </a:solidFill>
+                <a:latin typeface="Calibri"/>
+              </a:rPr>
+              <a:t>Alignment ask: do these inputs match what's available on your side, and does the output match what your dev team would consume?</a:t>
+            </a:r>
+          </a:p>
+        </p:txBody>
+      </p:sp>
+      <p:sp>
+        <p:nvSpPr>
+          <p:cNvPr id="15" name="Rectangle 14"/>
+          <p:cNvSpPr/>
+          <p:nvPr/>
+        </p:nvSpPr>
+        <p:spPr>
+          <a:xfrm>
+            <a:off x="457200" y="6565392"/>
+            <a:ext cx="11274552" cy="10972"/>
+          </a:xfrm>
+          <a:prstGeom prst="rect">
+            <a:avLst/>
+          </a:prstGeom>
+          <a:solidFill>
+            <a:srgbClr val="D0D6DC"/>
+          </a:solidFill>
+          <a:ln>
+            <a:noFill/>
+          </a:ln>
+        </p:spPr>
+        <p:style>
+          <a:lnRef idx="1">
+            <a:schemeClr val="accent1"/>
+          </a:lnRef>
+          <a:fillRef idx="3">
+            <a:schemeClr val="accent1"/>
+          </a:fillRef>
+          <a:effectRef idx="2">
+            <a:schemeClr val="accent1"/>
+          </a:effectRef>
+          <a:fontRef idx="minor">
+            <a:schemeClr val="lt1"/>
+          </a:fontRef>
+        </p:style>
+        <p:txBody>
+          <a:bodyPr rtlCol="0" anchor="ctr"/>
+          <a:lstStyle/>
+          <a:p>
+            <a:pPr algn="ctr"/>
+          </a:p>
+        </p:txBody>
+      </p:sp>
+      <p:sp>
+        <p:nvSpPr>
+          <p:cNvPr id="16" name="TextBox 15"/>
+          <p:cNvSpPr txBox="1"/>
+          <p:nvPr/>
+        </p:nvSpPr>
+        <p:spPr>
+          <a:xfrm>
+            <a:off x="457200" y="6601968"/>
+            <a:ext cx="7315200" cy="228600"/>
+          </a:xfrm>
+          <a:prstGeom prst="rect">
+            <a:avLst/>
+          </a:prstGeom>
+          <a:noFill/>
+        </p:spPr>
+        <p:txBody>
+          <a:bodyPr wrap="square" anchor="t">
+            <a:spAutoFit/>
+          </a:bodyPr>
+          <a:lstStyle/>
+          <a:p>
+            <a:pPr algn="l"/>
+            <a:r>
+              <a:rPr sz="800" b="0" i="1">
+                <a:solidFill>
+                  <a:srgbClr val="90979F"/>
+                </a:solidFill>
+                <a:latin typeface="Calibri"/>
+              </a:rPr>
+              <a:t>LIMS Story Generation — Client Alignment</a:t>
+            </a:r>
+          </a:p>
+        </p:txBody>
+      </p:sp>
+      <p:sp>
+        <p:nvSpPr>
+          <p:cNvPr id="17" name="TextBox 16"/>
+          <p:cNvSpPr txBox="1"/>
+          <p:nvPr/>
+        </p:nvSpPr>
+        <p:spPr>
+          <a:xfrm>
+            <a:off x="10817352" y="6601968"/>
+            <a:ext cx="914400" cy="228600"/>
+          </a:xfrm>
+          <a:prstGeom prst="rect">
+            <a:avLst/>
+          </a:prstGeom>
+          <a:noFill/>
+        </p:spPr>
+        <p:txBody>
+          <a:bodyPr wrap="square" anchor="t">
+            <a:spAutoFit/>
+          </a:bodyPr>
+          <a:lstStyle/>
+          <a:p>
+            <a:pPr algn="r"/>
+            <a:r>
+              <a:rPr sz="800" b="0" i="0">
+                <a:solidFill>
+                  <a:srgbClr val="90979F"/>
+                </a:solidFill>
+                <a:latin typeface="Calibri"/>
+              </a:rPr>
+              <a:t>10 / 10</a:t>
             </a:r>
           </a:p>
         </p:txBody>
@@ -4892,7 +5682,7 @@
                 </a:solidFill>
                 <a:latin typeface="Calibri"/>
               </a:rPr>
-              <a:t>2 / 9</a:t>
+              <a:t>2 / 10</a:t>
             </a:r>
           </a:p>
         </p:txBody>
@@ -6170,7 +6960,7 @@
                 </a:solidFill>
                 <a:latin typeface="Calibri"/>
               </a:rPr>
-              <a:t>3 / 9</a:t>
+              <a:t>3 / 10</a:t>
             </a:r>
           </a:p>
         </p:txBody>
@@ -7021,7 +7811,7 @@
                 </a:solidFill>
                 <a:latin typeface="Calibri"/>
               </a:rPr>
-              <a:t>4 / 9</a:t>
+              <a:t>4 / 10</a:t>
             </a:r>
           </a:p>
         </p:txBody>
@@ -8536,7 +9326,7 @@
               </a:spcAft>
             </a:pPr>
             <a:r>
-              <a:rPr sz="950">
+              <a:rPr sz="850">
                 <a:solidFill>
                   <a:srgbClr val="1F2D3D"/>
                 </a:solidFill>
@@ -8552,7 +9342,7 @@
               </a:spcAft>
             </a:pPr>
             <a:r>
-              <a:rPr sz="950">
+              <a:rPr sz="850">
                 <a:solidFill>
                   <a:srgbClr val="1F2D3D"/>
                 </a:solidFill>
@@ -8568,7 +9358,7 @@
               </a:spcAft>
             </a:pPr>
             <a:r>
-              <a:rPr sz="950">
+              <a:rPr sz="850">
                 <a:solidFill>
                   <a:srgbClr val="1F2D3D"/>
                 </a:solidFill>
@@ -8584,7 +9374,7 @@
               </a:spcAft>
             </a:pPr>
             <a:r>
-              <a:rPr sz="950">
+              <a:rPr sz="850">
                 <a:solidFill>
                   <a:srgbClr val="1F2D3D"/>
                 </a:solidFill>
@@ -8600,7 +9390,7 @@
               </a:spcAft>
             </a:pPr>
             <a:r>
-              <a:rPr sz="950">
+              <a:rPr sz="850">
                 <a:solidFill>
                   <a:srgbClr val="1F2D3D"/>
                 </a:solidFill>
@@ -8616,7 +9406,7 @@
               </a:spcAft>
             </a:pPr>
             <a:r>
-              <a:rPr sz="950">
+              <a:rPr sz="850">
                 <a:solidFill>
                   <a:srgbClr val="1F2D3D"/>
                 </a:solidFill>
@@ -8632,7 +9422,7 @@
               </a:spcAft>
             </a:pPr>
             <a:r>
-              <a:rPr sz="950">
+              <a:rPr sz="850">
                 <a:solidFill>
                   <a:srgbClr val="1F2D3D"/>
                 </a:solidFill>
@@ -8648,7 +9438,7 @@
               </a:spcAft>
             </a:pPr>
             <a:r>
-              <a:rPr sz="950">
+              <a:rPr sz="850">
                 <a:solidFill>
                   <a:srgbClr val="1F2D3D"/>
                 </a:solidFill>
@@ -8664,7 +9454,7 @@
               </a:spcAft>
             </a:pPr>
             <a:r>
-              <a:rPr sz="950">
+              <a:rPr sz="850">
                 <a:solidFill>
                   <a:srgbClr val="1F2D3D"/>
                 </a:solidFill>
@@ -8680,7 +9470,7 @@
               </a:spcAft>
             </a:pPr>
             <a:r>
-              <a:rPr sz="950">
+              <a:rPr sz="850">
                 <a:solidFill>
                   <a:srgbClr val="1F2D3D"/>
                 </a:solidFill>
@@ -8696,7 +9486,7 @@
               </a:spcAft>
             </a:pPr>
             <a:r>
-              <a:rPr sz="950">
+              <a:rPr sz="850">
                 <a:solidFill>
                   <a:srgbClr val="1F2D3D"/>
                 </a:solidFill>
@@ -8712,7 +9502,7 @@
               </a:spcAft>
             </a:pPr>
             <a:r>
-              <a:rPr sz="950">
+              <a:rPr sz="850">
                 <a:solidFill>
                   <a:srgbClr val="1F2D3D"/>
                 </a:solidFill>
@@ -8728,7 +9518,7 @@
               </a:spcAft>
             </a:pPr>
             <a:r>
-              <a:rPr sz="950">
+              <a:rPr sz="850">
                 <a:solidFill>
                   <a:srgbClr val="1F2D3D"/>
                 </a:solidFill>
@@ -8744,7 +9534,7 @@
               </a:spcAft>
             </a:pPr>
             <a:r>
-              <a:rPr sz="950">
+              <a:rPr sz="850">
                 <a:solidFill>
                   <a:srgbClr val="1F2D3D"/>
                 </a:solidFill>
@@ -8760,7 +9550,7 @@
               </a:spcAft>
             </a:pPr>
             <a:r>
-              <a:rPr sz="950">
+              <a:rPr sz="850">
                 <a:solidFill>
                   <a:srgbClr val="1F2D3D"/>
                 </a:solidFill>
@@ -8776,7 +9566,7 @@
               </a:spcAft>
             </a:pPr>
             <a:r>
-              <a:rPr sz="950">
+              <a:rPr sz="850">
                 <a:solidFill>
                   <a:srgbClr val="1F2D3D"/>
                 </a:solidFill>
@@ -8792,7 +9582,7 @@
               </a:spcAft>
             </a:pPr>
             <a:r>
-              <a:rPr sz="950">
+              <a:rPr sz="850">
                 <a:solidFill>
                   <a:srgbClr val="1F2D3D"/>
                 </a:solidFill>
@@ -8808,7 +9598,7 @@
               </a:spcAft>
             </a:pPr>
             <a:r>
-              <a:rPr sz="950">
+              <a:rPr sz="850">
                 <a:solidFill>
                   <a:srgbClr val="1F2D3D"/>
                 </a:solidFill>
@@ -8824,7 +9614,7 @@
               </a:spcAft>
             </a:pPr>
             <a:r>
-              <a:rPr sz="950">
+              <a:rPr sz="850">
                 <a:solidFill>
                   <a:srgbClr val="1F2D3D"/>
                 </a:solidFill>
@@ -8840,7 +9630,7 @@
               </a:spcAft>
             </a:pPr>
             <a:r>
-              <a:rPr sz="950">
+              <a:rPr sz="850">
                 <a:solidFill>
                   <a:srgbClr val="1F2D3D"/>
                 </a:solidFill>
@@ -8856,7 +9646,7 @@
               </a:spcAft>
             </a:pPr>
             <a:r>
-              <a:rPr sz="950">
+              <a:rPr sz="850">
                 <a:solidFill>
                   <a:srgbClr val="1F2D3D"/>
                 </a:solidFill>
@@ -8872,7 +9662,7 @@
               </a:spcAft>
             </a:pPr>
             <a:r>
-              <a:rPr sz="950">
+              <a:rPr sz="850">
                 <a:solidFill>
                   <a:srgbClr val="1F2D3D"/>
                 </a:solidFill>
@@ -8888,7 +9678,7 @@
               </a:spcAft>
             </a:pPr>
             <a:r>
-              <a:rPr sz="950">
+              <a:rPr sz="850">
                 <a:solidFill>
                   <a:srgbClr val="1F2D3D"/>
                 </a:solidFill>
@@ -8904,7 +9694,7 @@
               </a:spcAft>
             </a:pPr>
             <a:r>
-              <a:rPr sz="950">
+              <a:rPr sz="850">
                 <a:solidFill>
                   <a:srgbClr val="1F2D3D"/>
                 </a:solidFill>
@@ -8920,7 +9710,7 @@
               </a:spcAft>
             </a:pPr>
             <a:r>
-              <a:rPr sz="950">
+              <a:rPr sz="850">
                 <a:solidFill>
                   <a:srgbClr val="1F2D3D"/>
                 </a:solidFill>
@@ -8936,7 +9726,7 @@
               </a:spcAft>
             </a:pPr>
             <a:r>
-              <a:rPr sz="950">
+              <a:rPr sz="850">
                 <a:solidFill>
                   <a:srgbClr val="1F2D3D"/>
                 </a:solidFill>
@@ -8952,7 +9742,7 @@
               </a:spcAft>
             </a:pPr>
             <a:r>
-              <a:rPr sz="950">
+              <a:rPr sz="850">
                 <a:solidFill>
                   <a:srgbClr val="1F2D3D"/>
                 </a:solidFill>
@@ -8968,7 +9758,7 @@
               </a:spcAft>
             </a:pPr>
             <a:r>
-              <a:rPr sz="950">
+              <a:rPr sz="850">
                 <a:solidFill>
                   <a:srgbClr val="1F2D3D"/>
                 </a:solidFill>
@@ -8984,7 +9774,7 @@
               </a:spcAft>
             </a:pPr>
             <a:r>
-              <a:rPr sz="950">
+              <a:rPr sz="850">
                 <a:solidFill>
                   <a:srgbClr val="1F2D3D"/>
                 </a:solidFill>
@@ -9000,7 +9790,7 @@
               </a:spcAft>
             </a:pPr>
             <a:r>
-              <a:rPr sz="950">
+              <a:rPr sz="850">
                 <a:solidFill>
                   <a:srgbClr val="1F2D3D"/>
                 </a:solidFill>
@@ -9016,7 +9806,7 @@
               </a:spcAft>
             </a:pPr>
             <a:r>
-              <a:rPr sz="950">
+              <a:rPr sz="850">
                 <a:solidFill>
                   <a:srgbClr val="1F2D3D"/>
                 </a:solidFill>
@@ -9735,7 +10525,7 @@
                 </a:solidFill>
                 <a:latin typeface="Calibri"/>
               </a:rPr>
-              <a:t>5 / 9</a:t>
+              <a:t>5 / 10</a:t>
             </a:r>
           </a:p>
         </p:txBody>
@@ -10831,7 +11621,7 @@
               </a:spcAft>
             </a:pPr>
             <a:r>
-              <a:rPr sz="950">
+              <a:rPr sz="850">
                 <a:solidFill>
                   <a:srgbClr val="1F2D3D"/>
                 </a:solidFill>
@@ -10847,7 +11637,7 @@
               </a:spcAft>
             </a:pPr>
             <a:r>
-              <a:rPr sz="950">
+              <a:rPr sz="850">
                 <a:solidFill>
                   <a:srgbClr val="1F2D3D"/>
                 </a:solidFill>
@@ -10863,7 +11653,7 @@
               </a:spcAft>
             </a:pPr>
             <a:r>
-              <a:rPr sz="950">
+              <a:rPr sz="850">
                 <a:solidFill>
                   <a:srgbClr val="1F2D3D"/>
                 </a:solidFill>
@@ -10879,7 +11669,7 @@
               </a:spcAft>
             </a:pPr>
             <a:r>
-              <a:rPr sz="950">
+              <a:rPr sz="850">
                 <a:solidFill>
                   <a:srgbClr val="1F2D3D"/>
                 </a:solidFill>
@@ -10895,7 +11685,7 @@
               </a:spcAft>
             </a:pPr>
             <a:r>
-              <a:rPr sz="950">
+              <a:rPr sz="850">
                 <a:solidFill>
                   <a:srgbClr val="1F2D3D"/>
                 </a:solidFill>
@@ -10911,7 +11701,7 @@
               </a:spcAft>
             </a:pPr>
             <a:r>
-              <a:rPr sz="950">
+              <a:rPr sz="850">
                 <a:solidFill>
                   <a:srgbClr val="1F2D3D"/>
                 </a:solidFill>
@@ -10927,7 +11717,7 @@
               </a:spcAft>
             </a:pPr>
             <a:r>
-              <a:rPr sz="950">
+              <a:rPr sz="850">
                 <a:solidFill>
                   <a:srgbClr val="1F2D3D"/>
                 </a:solidFill>
@@ -10943,7 +11733,7 @@
               </a:spcAft>
             </a:pPr>
             <a:r>
-              <a:rPr sz="950">
+              <a:rPr sz="850">
                 <a:solidFill>
                   <a:srgbClr val="1F2D3D"/>
                 </a:solidFill>
@@ -10959,7 +11749,7 @@
               </a:spcAft>
             </a:pPr>
             <a:r>
-              <a:rPr sz="950">
+              <a:rPr sz="850">
                 <a:solidFill>
                   <a:srgbClr val="1F2D3D"/>
                 </a:solidFill>
@@ -10975,7 +11765,7 @@
               </a:spcAft>
             </a:pPr>
             <a:r>
-              <a:rPr sz="950">
+              <a:rPr sz="850">
                 <a:solidFill>
                   <a:srgbClr val="1F2D3D"/>
                 </a:solidFill>
@@ -10991,7 +11781,7 @@
               </a:spcAft>
             </a:pPr>
             <a:r>
-              <a:rPr sz="950">
+              <a:rPr sz="850">
                 <a:solidFill>
                   <a:srgbClr val="1F2D3D"/>
                 </a:solidFill>
@@ -11007,7 +11797,7 @@
               </a:spcAft>
             </a:pPr>
             <a:r>
-              <a:rPr sz="950">
+              <a:rPr sz="850">
                 <a:solidFill>
                   <a:srgbClr val="1F2D3D"/>
                 </a:solidFill>
@@ -11023,7 +11813,7 @@
               </a:spcAft>
             </a:pPr>
             <a:r>
-              <a:rPr sz="950">
+              <a:rPr sz="850">
                 <a:solidFill>
                   <a:srgbClr val="1F2D3D"/>
                 </a:solidFill>
@@ -11039,7 +11829,7 @@
               </a:spcAft>
             </a:pPr>
             <a:r>
-              <a:rPr sz="950">
+              <a:rPr sz="850">
                 <a:solidFill>
                   <a:srgbClr val="1F2D3D"/>
                 </a:solidFill>
@@ -11055,7 +11845,7 @@
               </a:spcAft>
             </a:pPr>
             <a:r>
-              <a:rPr sz="950">
+              <a:rPr sz="850">
                 <a:solidFill>
                   <a:srgbClr val="1F2D3D"/>
                 </a:solidFill>
@@ -11071,7 +11861,7 @@
               </a:spcAft>
             </a:pPr>
             <a:r>
-              <a:rPr sz="950">
+              <a:rPr sz="850">
                 <a:solidFill>
                   <a:srgbClr val="1F2D3D"/>
                 </a:solidFill>
@@ -11087,7 +11877,7 @@
               </a:spcAft>
             </a:pPr>
             <a:r>
-              <a:rPr sz="950">
+              <a:rPr sz="850">
                 <a:solidFill>
                   <a:srgbClr val="1F2D3D"/>
                 </a:solidFill>
@@ -11103,7 +11893,7 @@
               </a:spcAft>
             </a:pPr>
             <a:r>
-              <a:rPr sz="950">
+              <a:rPr sz="850">
                 <a:solidFill>
                   <a:srgbClr val="1F2D3D"/>
                 </a:solidFill>
@@ -11119,7 +11909,7 @@
               </a:spcAft>
             </a:pPr>
             <a:r>
-              <a:rPr sz="950">
+              <a:rPr sz="850">
                 <a:solidFill>
                   <a:srgbClr val="1F2D3D"/>
                 </a:solidFill>
@@ -11135,7 +11925,7 @@
               </a:spcAft>
             </a:pPr>
             <a:r>
-              <a:rPr sz="950">
+              <a:rPr sz="850">
                 <a:solidFill>
                   <a:srgbClr val="1F2D3D"/>
                 </a:solidFill>
@@ -11725,7 +12515,7 @@
                 </a:solidFill>
                 <a:latin typeface="Calibri"/>
               </a:rPr>
-              <a:t>6 / 9</a:t>
+              <a:t>6 / 10</a:t>
             </a:r>
           </a:p>
         </p:txBody>
@@ -12739,7 +13529,7 @@
               </a:spcAft>
             </a:pPr>
             <a:r>
-              <a:rPr sz="950">
+              <a:rPr sz="850">
                 <a:solidFill>
                   <a:srgbClr val="1F2D3D"/>
                 </a:solidFill>
@@ -12755,7 +13545,7 @@
               </a:spcAft>
             </a:pPr>
             <a:r>
-              <a:rPr sz="950">
+              <a:rPr sz="850">
                 <a:solidFill>
                   <a:srgbClr val="1F2D3D"/>
                 </a:solidFill>
@@ -12771,7 +13561,7 @@
               </a:spcAft>
             </a:pPr>
             <a:r>
-              <a:rPr sz="950">
+              <a:rPr sz="850">
                 <a:solidFill>
                   <a:srgbClr val="1F2D3D"/>
                 </a:solidFill>
@@ -12787,7 +13577,7 @@
               </a:spcAft>
             </a:pPr>
             <a:r>
-              <a:rPr sz="950">
+              <a:rPr sz="850">
                 <a:solidFill>
                   <a:srgbClr val="1F2D3D"/>
                 </a:solidFill>
@@ -12803,7 +13593,7 @@
               </a:spcAft>
             </a:pPr>
             <a:r>
-              <a:rPr sz="950">
+              <a:rPr sz="850">
                 <a:solidFill>
                   <a:srgbClr val="1F2D3D"/>
                 </a:solidFill>
@@ -12819,7 +13609,7 @@
               </a:spcAft>
             </a:pPr>
             <a:r>
-              <a:rPr sz="950">
+              <a:rPr sz="850">
                 <a:solidFill>
                   <a:srgbClr val="1F2D3D"/>
                 </a:solidFill>
@@ -12835,7 +13625,7 @@
               </a:spcAft>
             </a:pPr>
             <a:r>
-              <a:rPr sz="950">
+              <a:rPr sz="850">
                 <a:solidFill>
                   <a:srgbClr val="1F2D3D"/>
                 </a:solidFill>
@@ -12851,7 +13641,7 @@
               </a:spcAft>
             </a:pPr>
             <a:r>
-              <a:rPr sz="950">
+              <a:rPr sz="850">
                 <a:solidFill>
                   <a:srgbClr val="1F2D3D"/>
                 </a:solidFill>
@@ -12867,7 +13657,7 @@
               </a:spcAft>
             </a:pPr>
             <a:r>
-              <a:rPr sz="950">
+              <a:rPr sz="850">
                 <a:solidFill>
                   <a:srgbClr val="1F2D3D"/>
                 </a:solidFill>
@@ -12883,7 +13673,7 @@
               </a:spcAft>
             </a:pPr>
             <a:r>
-              <a:rPr sz="950">
+              <a:rPr sz="850">
                 <a:solidFill>
                   <a:srgbClr val="1F2D3D"/>
                 </a:solidFill>
@@ -12899,7 +13689,7 @@
               </a:spcAft>
             </a:pPr>
             <a:r>
-              <a:rPr sz="950">
+              <a:rPr sz="850">
                 <a:solidFill>
                   <a:srgbClr val="1F2D3D"/>
                 </a:solidFill>
@@ -12915,7 +13705,7 @@
               </a:spcAft>
             </a:pPr>
             <a:r>
-              <a:rPr sz="950">
+              <a:rPr sz="850">
                 <a:solidFill>
                   <a:srgbClr val="1F2D3D"/>
                 </a:solidFill>
@@ -12931,7 +13721,7 @@
               </a:spcAft>
             </a:pPr>
             <a:r>
-              <a:rPr sz="950">
+              <a:rPr sz="850">
                 <a:solidFill>
                   <a:srgbClr val="1F2D3D"/>
                 </a:solidFill>
@@ -12947,7 +13737,7 @@
               </a:spcAft>
             </a:pPr>
             <a:r>
-              <a:rPr sz="950">
+              <a:rPr sz="850">
                 <a:solidFill>
                   <a:srgbClr val="1F2D3D"/>
                 </a:solidFill>
@@ -12963,7 +13753,7 @@
               </a:spcAft>
             </a:pPr>
             <a:r>
-              <a:rPr sz="950">
+              <a:rPr sz="850">
                 <a:solidFill>
                   <a:srgbClr val="1F2D3D"/>
                 </a:solidFill>
@@ -12979,7 +13769,7 @@
               </a:spcAft>
             </a:pPr>
             <a:r>
-              <a:rPr sz="950">
+              <a:rPr sz="850">
                 <a:solidFill>
                   <a:srgbClr val="1F2D3D"/>
                 </a:solidFill>
@@ -12995,7 +13785,7 @@
               </a:spcAft>
             </a:pPr>
             <a:r>
-              <a:rPr sz="950">
+              <a:rPr sz="850">
                 <a:solidFill>
                   <a:srgbClr val="1F2D3D"/>
                 </a:solidFill>
@@ -13011,7 +13801,7 @@
               </a:spcAft>
             </a:pPr>
             <a:r>
-              <a:rPr sz="950">
+              <a:rPr sz="850">
                 <a:solidFill>
                   <a:srgbClr val="1F2D3D"/>
                 </a:solidFill>
@@ -13027,7 +13817,7 @@
               </a:spcAft>
             </a:pPr>
             <a:r>
-              <a:rPr sz="950">
+              <a:rPr sz="850">
                 <a:solidFill>
                   <a:srgbClr val="1F2D3D"/>
                 </a:solidFill>
@@ -13043,7 +13833,7 @@
               </a:spcAft>
             </a:pPr>
             <a:r>
-              <a:rPr sz="950">
+              <a:rPr sz="850">
                 <a:solidFill>
                   <a:srgbClr val="1F2D3D"/>
                 </a:solidFill>
@@ -13059,7 +13849,7 @@
               </a:spcAft>
             </a:pPr>
             <a:r>
-              <a:rPr sz="950">
+              <a:rPr sz="850">
                 <a:solidFill>
                   <a:srgbClr val="1F2D3D"/>
                 </a:solidFill>
@@ -13540,7 +14330,7 @@
                 </a:solidFill>
                 <a:latin typeface="Calibri"/>
               </a:rPr>
-              <a:t>7 / 9</a:t>
+              <a:t>7 / 10</a:t>
             </a:r>
           </a:p>
         </p:txBody>
@@ -13593,7 +14383,7 @@
                 </a:solidFill>
                 <a:latin typeface="Calibri"/>
               </a:rPr>
-              <a:t>What happens when something fails</a:t>
+              <a:t>Inside two key agents — Validator &amp; Dependency Resolver</a:t>
             </a:r>
           </a:p>
         </p:txBody>
@@ -13650,7 +14440,7 @@
         <p:spPr>
           <a:xfrm>
             <a:off x="457200" y="960120"/>
-            <a:ext cx="11430000" cy="457200"/>
+            <a:ext cx="11430000" cy="365760"/>
           </a:xfrm>
           <a:prstGeom prst="rect">
             <a:avLst/>
@@ -13665,13 +14455,13 @@
           <a:p>
             <a:pPr algn="l"/>
             <a:r>
-              <a:rPr sz="1200" b="0" i="0">
-                <a:solidFill>
-                  <a:srgbClr val="1F2D3D"/>
-                </a:solidFill>
-                <a:latin typeface="Calibri"/>
-              </a:rPr>
-              <a:t>Failures at three levels — each has a deterministic fallback. No human intervention is required at runtime.</a:t>
+              <a:rPr sz="1200" b="0" i="1">
+                <a:solidFill>
+                  <a:srgbClr val="55606E"/>
+                </a:solidFill>
+                <a:latin typeface="Calibri"/>
+              </a:rPr>
+              <a:t>What these two agents actually do, beyond their one-line description on slide 3.</a:t>
             </a:r>
           </a:p>
         </p:txBody>
@@ -13684,8 +14474,8 @@
         </p:nvSpPr>
         <p:spPr>
           <a:xfrm>
-            <a:off x="376275" y="1554480"/>
-            <a:ext cx="3703320" cy="457200"/>
+            <a:off x="365760" y="1417320"/>
+            <a:ext cx="5760720" cy="457200"/>
           </a:xfrm>
           <a:prstGeom prst="roundRect">
             <a:avLst/>
@@ -13719,13 +14509,13 @@
           <a:p>
             <a:pPr algn="ctr"/>
             <a:r>
-              <a:rPr sz="1400" b="1" i="0">
+              <a:rPr sz="1500" b="1" i="0">
                 <a:solidFill>
                   <a:srgbClr val="1F4E79"/>
                 </a:solidFill>
                 <a:latin typeface="Calibri"/>
               </a:rPr>
-              <a:t>Per-call</a:t>
+              <a:t>Validator</a:t>
             </a:r>
           </a:p>
         </p:txBody>
@@ -13738,8 +14528,8 @@
         </p:nvSpPr>
         <p:spPr>
           <a:xfrm>
-            <a:off x="376275" y="2057400"/>
-            <a:ext cx="3703320" cy="228600"/>
+            <a:off x="365760" y="1920240"/>
+            <a:ext cx="5760720" cy="274320"/>
           </a:xfrm>
           <a:prstGeom prst="rect">
             <a:avLst/>
@@ -13760,29 +14550,389 @@
                 </a:solidFill>
                 <a:latin typeface="Calibri"/>
               </a:rPr>
-              <a:t>(LLM error or timeout)</a:t>
-            </a:r>
-          </a:p>
-        </p:txBody>
-      </p:sp>
-      <p:sp>
-        <p:nvSpPr>
-          <p:cNvPr id="7" name="Rectangle 6"/>
+              <a:t>Runs at gate 1 (after Story Extractor) and gate 2 (after Synthesis).</a:t>
+            </a:r>
+          </a:p>
+        </p:txBody>
+      </p:sp>
+      <p:sp>
+        <p:nvSpPr>
+          <p:cNvPr id="7" name="Rounded Rectangle 6"/>
           <p:cNvSpPr/>
           <p:nvPr/>
         </p:nvSpPr>
         <p:spPr>
           <a:xfrm>
-            <a:off x="376275" y="2331720"/>
-            <a:ext cx="3703320" cy="2606040"/>
-          </a:xfrm>
-          <a:prstGeom prst="rect">
+            <a:off x="502920" y="2286000"/>
+            <a:ext cx="5486400" cy="384048"/>
+          </a:xfrm>
+          <a:prstGeom prst="roundRect">
             <a:avLst/>
           </a:prstGeom>
           <a:solidFill>
-            <a:srgbClr val="FFFFFF"/>
+            <a:srgbClr val="E0ECF8"/>
           </a:solidFill>
-          <a:ln w="9525">
+          <a:ln w="12700">
+            <a:solidFill>
+              <a:srgbClr val="4A6EA0"/>
+            </a:solidFill>
+          </a:ln>
+        </p:spPr>
+        <p:style>
+          <a:lnRef idx="1">
+            <a:schemeClr val="accent1"/>
+          </a:lnRef>
+          <a:fillRef idx="3">
+            <a:schemeClr val="accent1"/>
+          </a:fillRef>
+          <a:effectRef idx="2">
+            <a:schemeClr val="accent1"/>
+          </a:effectRef>
+          <a:fontRef idx="minor">
+            <a:schemeClr val="lt1"/>
+          </a:fontRef>
+        </p:style>
+        <p:txBody>
+          <a:bodyPr rtlCol="0" anchor="ctr" wrap="square" lIns="73152" rIns="73152" tIns="36576" bIns="36576"/>
+          <a:lstStyle/>
+          <a:p>
+            <a:pPr algn="ctr"/>
+            <a:r>
+              <a:rPr sz="1000" b="1" i="0">
+                <a:solidFill>
+                  <a:srgbClr val="1F2D3D"/>
+                </a:solidFill>
+                <a:latin typeface="Calibri"/>
+              </a:rPr>
+              <a:t>Receives a draft story</a:t>
+            </a:r>
+          </a:p>
+        </p:txBody>
+      </p:sp>
+      <p:sp>
+        <p:nvSpPr>
+          <p:cNvPr id="8" name="Rounded Rectangle 7"/>
+          <p:cNvSpPr/>
+          <p:nvPr/>
+        </p:nvSpPr>
+        <p:spPr>
+          <a:xfrm>
+            <a:off x="502920" y="2788920"/>
+            <a:ext cx="5486400" cy="384048"/>
+          </a:xfrm>
+          <a:prstGeom prst="roundRect">
+            <a:avLst/>
+          </a:prstGeom>
+          <a:solidFill>
+            <a:srgbClr val="E7EFF8"/>
+          </a:solidFill>
+          <a:ln w="12700">
+            <a:solidFill>
+              <a:srgbClr val="4A6EA0"/>
+            </a:solidFill>
+          </a:ln>
+        </p:spPr>
+        <p:style>
+          <a:lnRef idx="1">
+            <a:schemeClr val="accent1"/>
+          </a:lnRef>
+          <a:fillRef idx="3">
+            <a:schemeClr val="accent1"/>
+          </a:fillRef>
+          <a:effectRef idx="2">
+            <a:schemeClr val="accent1"/>
+          </a:effectRef>
+          <a:fontRef idx="minor">
+            <a:schemeClr val="lt1"/>
+          </a:fontRef>
+        </p:style>
+        <p:txBody>
+          <a:bodyPr rtlCol="0" anchor="ctr" wrap="square" lIns="73152" rIns="73152" tIns="36576" bIns="36576"/>
+          <a:lstStyle/>
+          <a:p>
+            <a:pPr algn="ctr"/>
+            <a:r>
+              <a:rPr sz="1000" b="0" i="0">
+                <a:solidFill>
+                  <a:srgbClr val="1F2D3D"/>
+                </a:solidFill>
+                <a:latin typeface="Calibri"/>
+              </a:rPr>
+              <a:t>1. Closed-enum check  (tests, persona, stage in catalog?)</a:t>
+            </a:r>
+          </a:p>
+        </p:txBody>
+      </p:sp>
+      <p:cxnSp>
+        <p:nvCxnSpPr>
+          <p:cNvPr id="9" name="Connector 8"/>
+          <p:cNvCxnSpPr/>
+          <p:nvPr/>
+        </p:nvCxnSpPr>
+        <p:spPr>
+          <a:xfrm>
+            <a:off x="3246120" y="2670048"/>
+            <a:ext cx="0" cy="118872"/>
+          </a:xfrm>
+          <a:prstGeom prst="line">
+            <a:avLst/>
+          </a:prstGeom>
+          <a:ln w="16510">
+            <a:solidFill>
+              <a:srgbClr val="4A6EA0"/>
+            </a:solidFill>
+            <a:tailEnd type="triangle" w="med" h="med"/>
+          </a:ln>
+        </p:spPr>
+        <p:style>
+          <a:lnRef idx="2">
+            <a:schemeClr val="accent1"/>
+          </a:lnRef>
+          <a:fillRef idx="0">
+            <a:schemeClr val="accent1"/>
+          </a:fillRef>
+          <a:effectRef idx="1">
+            <a:schemeClr val="accent1"/>
+          </a:effectRef>
+          <a:fontRef idx="minor">
+            <a:schemeClr val="tx1"/>
+          </a:fontRef>
+        </p:style>
+      </p:cxnSp>
+      <p:sp>
+        <p:nvSpPr>
+          <p:cNvPr id="10" name="Rounded Rectangle 9"/>
+          <p:cNvSpPr/>
+          <p:nvPr/>
+        </p:nvSpPr>
+        <p:spPr>
+          <a:xfrm>
+            <a:off x="502920" y="3291839"/>
+            <a:ext cx="5486400" cy="384048"/>
+          </a:xfrm>
+          <a:prstGeom prst="roundRect">
+            <a:avLst/>
+          </a:prstGeom>
+          <a:solidFill>
+            <a:srgbClr val="E7EFF8"/>
+          </a:solidFill>
+          <a:ln w="12700">
+            <a:solidFill>
+              <a:srgbClr val="4A6EA0"/>
+            </a:solidFill>
+          </a:ln>
+        </p:spPr>
+        <p:style>
+          <a:lnRef idx="1">
+            <a:schemeClr val="accent1"/>
+          </a:lnRef>
+          <a:fillRef idx="3">
+            <a:schemeClr val="accent1"/>
+          </a:fillRef>
+          <a:effectRef idx="2">
+            <a:schemeClr val="accent1"/>
+          </a:effectRef>
+          <a:fontRef idx="minor">
+            <a:schemeClr val="lt1"/>
+          </a:fontRef>
+        </p:style>
+        <p:txBody>
+          <a:bodyPr rtlCol="0" anchor="ctr" wrap="square" lIns="73152" rIns="73152" tIns="36576" bIns="36576"/>
+          <a:lstStyle/>
+          <a:p>
+            <a:pPr algn="ctr"/>
+            <a:r>
+              <a:rPr sz="1000" b="0" i="0">
+                <a:solidFill>
+                  <a:srgbClr val="1F2D3D"/>
+                </a:solidFill>
+                <a:latin typeface="Calibri"/>
+              </a:rPr>
+              <a:t>2. Shape verification  (declared shape matches content?)</a:t>
+            </a:r>
+          </a:p>
+        </p:txBody>
+      </p:sp>
+      <p:cxnSp>
+        <p:nvCxnSpPr>
+          <p:cNvPr id="11" name="Connector 10"/>
+          <p:cNvCxnSpPr/>
+          <p:nvPr/>
+        </p:nvCxnSpPr>
+        <p:spPr>
+          <a:xfrm>
+            <a:off x="3246120" y="3172968"/>
+            <a:ext cx="0" cy="118871"/>
+          </a:xfrm>
+          <a:prstGeom prst="line">
+            <a:avLst/>
+          </a:prstGeom>
+          <a:ln w="16510">
+            <a:solidFill>
+              <a:srgbClr val="4A6EA0"/>
+            </a:solidFill>
+            <a:tailEnd type="triangle" w="med" h="med"/>
+          </a:ln>
+        </p:spPr>
+        <p:style>
+          <a:lnRef idx="2">
+            <a:schemeClr val="accent1"/>
+          </a:lnRef>
+          <a:fillRef idx="0">
+            <a:schemeClr val="accent1"/>
+          </a:fillRef>
+          <a:effectRef idx="1">
+            <a:schemeClr val="accent1"/>
+          </a:effectRef>
+          <a:fontRef idx="minor">
+            <a:schemeClr val="tx1"/>
+          </a:fontRef>
+        </p:style>
+      </p:cxnSp>
+      <p:sp>
+        <p:nvSpPr>
+          <p:cNvPr id="12" name="Rounded Rectangle 11"/>
+          <p:cNvSpPr/>
+          <p:nvPr/>
+        </p:nvSpPr>
+        <p:spPr>
+          <a:xfrm>
+            <a:off x="502920" y="3794759"/>
+            <a:ext cx="5486400" cy="384048"/>
+          </a:xfrm>
+          <a:prstGeom prst="roundRect">
+            <a:avLst/>
+          </a:prstGeom>
+          <a:solidFill>
+            <a:srgbClr val="E7EFF8"/>
+          </a:solidFill>
+          <a:ln w="12700">
+            <a:solidFill>
+              <a:srgbClr val="4A6EA0"/>
+            </a:solidFill>
+          </a:ln>
+        </p:spPr>
+        <p:style>
+          <a:lnRef idx="1">
+            <a:schemeClr val="accent1"/>
+          </a:lnRef>
+          <a:fillRef idx="3">
+            <a:schemeClr val="accent1"/>
+          </a:fillRef>
+          <a:effectRef idx="2">
+            <a:schemeClr val="accent1"/>
+          </a:effectRef>
+          <a:fontRef idx="minor">
+            <a:schemeClr val="lt1"/>
+          </a:fontRef>
+        </p:style>
+        <p:txBody>
+          <a:bodyPr rtlCol="0" anchor="ctr" wrap="square" lIns="73152" rIns="73152" tIns="36576" bIns="36576"/>
+          <a:lstStyle/>
+          <a:p>
+            <a:pPr algn="ctr"/>
+            <a:r>
+              <a:rPr sz="1000" b="0" i="0">
+                <a:solidFill>
+                  <a:srgbClr val="1F2D3D"/>
+                </a:solidFill>
+                <a:latin typeface="Calibri"/>
+              </a:rPr>
+              <a:t>3. Apply shape-specific rubric  (4 rules — see slide 6)</a:t>
+            </a:r>
+          </a:p>
+        </p:txBody>
+      </p:sp>
+      <p:cxnSp>
+        <p:nvCxnSpPr>
+          <p:cNvPr id="13" name="Connector 12"/>
+          <p:cNvCxnSpPr/>
+          <p:nvPr/>
+        </p:nvCxnSpPr>
+        <p:spPr>
+          <a:xfrm>
+            <a:off x="3246120" y="3675887"/>
+            <a:ext cx="0" cy="118872"/>
+          </a:xfrm>
+          <a:prstGeom prst="line">
+            <a:avLst/>
+          </a:prstGeom>
+          <a:ln w="16510">
+            <a:solidFill>
+              <a:srgbClr val="4A6EA0"/>
+            </a:solidFill>
+            <a:tailEnd type="triangle" w="med" h="med"/>
+          </a:ln>
+        </p:spPr>
+        <p:style>
+          <a:lnRef idx="2">
+            <a:schemeClr val="accent1"/>
+          </a:lnRef>
+          <a:fillRef idx="0">
+            <a:schemeClr val="accent1"/>
+          </a:fillRef>
+          <a:effectRef idx="1">
+            <a:schemeClr val="accent1"/>
+          </a:effectRef>
+          <a:fontRef idx="minor">
+            <a:schemeClr val="tx1"/>
+          </a:fontRef>
+        </p:style>
+      </p:cxnSp>
+      <p:cxnSp>
+        <p:nvCxnSpPr>
+          <p:cNvPr id="14" name="Connector 13"/>
+          <p:cNvCxnSpPr/>
+          <p:nvPr/>
+        </p:nvCxnSpPr>
+        <p:spPr>
+          <a:xfrm>
+            <a:off x="3246120" y="4178807"/>
+            <a:ext cx="0" cy="118872"/>
+          </a:xfrm>
+          <a:prstGeom prst="line">
+            <a:avLst/>
+          </a:prstGeom>
+          <a:ln w="16510">
+            <a:solidFill>
+              <a:srgbClr val="4A6EA0"/>
+            </a:solidFill>
+            <a:tailEnd type="triangle" w="med" h="med"/>
+          </a:ln>
+        </p:spPr>
+        <p:style>
+          <a:lnRef idx="2">
+            <a:schemeClr val="accent1"/>
+          </a:lnRef>
+          <a:fillRef idx="0">
+            <a:schemeClr val="accent1"/>
+          </a:fillRef>
+          <a:effectRef idx="1">
+            <a:schemeClr val="accent1"/>
+          </a:effectRef>
+          <a:fontRef idx="minor">
+            <a:schemeClr val="tx1"/>
+          </a:fontRef>
+        </p:style>
+      </p:cxnSp>
+      <p:sp>
+        <p:nvSpPr>
+          <p:cNvPr id="15" name="Diamond 14"/>
+          <p:cNvSpPr/>
+          <p:nvPr/>
+        </p:nvSpPr>
+        <p:spPr>
+          <a:xfrm>
+            <a:off x="2057400" y="4297679"/>
+            <a:ext cx="2377440" cy="502920"/>
+          </a:xfrm>
+          <a:prstGeom prst="diamond">
+            <a:avLst/>
+          </a:prstGeom>
+          <a:solidFill>
+            <a:srgbClr val="FCE7C4"/>
+          </a:solidFill>
+          <a:ln w="15875">
             <a:solidFill>
               <a:srgbClr val="C9952C"/>
             </a:solidFill>
@@ -13803,351 +14953,32 @@
           </a:fontRef>
         </p:style>
         <p:txBody>
-          <a:bodyPr rtlCol="0" anchor="t" wrap="square" lIns="109728" rIns="109728" tIns="91440" bIns="91440"/>
-          <a:lstStyle/>
-          <a:p>
-            <a:pPr algn="l">
-              <a:spcAft>
-                <a:spcPts val="600"/>
-              </a:spcAft>
-            </a:pPr>
-            <a:r>
-              <a:rPr sz="1000" b="1">
-                <a:solidFill>
-                  <a:srgbClr val="1F4E79"/>
-                </a:solidFill>
-                <a:latin typeface="Calibri"/>
-              </a:rPr>
-              <a:t>Trigger: </a:t>
-            </a:r>
-            <a:r>
-              <a:rPr sz="1000">
-                <a:solidFill>
-                  <a:srgbClr val="1F2D3D"/>
-                </a:solidFill>
-                <a:latin typeface="Calibri"/>
-              </a:rPr>
-              <a:t>An agent's LLM call returns an error or times out.</a:t>
-            </a:r>
-          </a:p>
-          <a:p>
-            <a:pPr algn="l">
-              <a:spcAft>
-                <a:spcPts val="600"/>
-              </a:spcAft>
-            </a:pPr>
-            <a:r>
-              <a:rPr sz="1000" b="1">
-                <a:solidFill>
-                  <a:srgbClr val="1F4E79"/>
-                </a:solidFill>
-                <a:latin typeface="Calibri"/>
-              </a:rPr>
-              <a:t>Fallback: </a:t>
-            </a:r>
-            <a:r>
-              <a:rPr sz="1000">
-                <a:solidFill>
-                  <a:srgbClr val="1F2D3D"/>
-                </a:solidFill>
-                <a:latin typeface="Calibri"/>
-              </a:rPr>
-              <a:t>Retry with exponential backoff (3 attempts).</a:t>
-            </a:r>
-          </a:p>
-          <a:p>
-            <a:pPr algn="l">
-              <a:spcAft>
-                <a:spcPts val="600"/>
-              </a:spcAft>
-            </a:pPr>
-            <a:r>
-              <a:rPr sz="1000" b="1">
-                <a:solidFill>
-                  <a:srgbClr val="1F4E79"/>
-                </a:solidFill>
-                <a:latin typeface="Calibri"/>
-              </a:rPr>
-              <a:t>If persistent: </a:t>
-            </a:r>
-            <a:r>
-              <a:rPr sz="1000">
-                <a:solidFill>
-                  <a:srgbClr val="1F2D3D"/>
-                </a:solidFill>
-                <a:latin typeface="Calibri"/>
-              </a:rPr>
-              <a:t>Defer the item to the next batch; log the failure to the audit trail.</a:t>
-            </a:r>
-          </a:p>
-          <a:p>
-            <a:pPr algn="l">
-              <a:spcAft>
-                <a:spcPts val="600"/>
-              </a:spcAft>
-            </a:pPr>
-            <a:r>
-              <a:rPr sz="1000" b="1">
-                <a:solidFill>
-                  <a:srgbClr val="1F4E79"/>
-                </a:solidFill>
-                <a:latin typeface="Calibri"/>
-              </a:rPr>
-              <a:t>Pipeline impact: </a:t>
-            </a:r>
-            <a:r>
-              <a:rPr sz="1000">
-                <a:solidFill>
-                  <a:srgbClr val="1F2D3D"/>
-                </a:solidFill>
-                <a:latin typeface="Calibri"/>
-              </a:rPr>
-              <a:t>Other items continue. No block.</a:t>
-            </a:r>
-          </a:p>
-        </p:txBody>
-      </p:sp>
-      <p:sp>
-        <p:nvSpPr>
-          <p:cNvPr id="8" name="Rounded Rectangle 7"/>
+          <a:bodyPr rtlCol="0" anchor="ctr" wrap="square" lIns="73152" rIns="73152" tIns="36576" bIns="36576"/>
+          <a:lstStyle/>
+          <a:p>
+            <a:pPr algn="ctr"/>
+            <a:r>
+              <a:rPr sz="1000" b="1" i="0">
+                <a:solidFill>
+                  <a:srgbClr val="1F2D3D"/>
+                </a:solidFill>
+                <a:latin typeface="Calibri"/>
+              </a:rPr>
+              <a:t>Pass all checks?</a:t>
+            </a:r>
+          </a:p>
+        </p:txBody>
+      </p:sp>
+      <p:sp>
+        <p:nvSpPr>
+          <p:cNvPr id="16" name="Rounded Rectangle 15"/>
           <p:cNvSpPr/>
           <p:nvPr/>
         </p:nvSpPr>
         <p:spPr>
           <a:xfrm>
-            <a:off x="4244187" y="1554480"/>
-            <a:ext cx="3703320" cy="457200"/>
-          </a:xfrm>
-          <a:prstGeom prst="roundRect">
-            <a:avLst/>
-          </a:prstGeom>
-          <a:solidFill>
-            <a:srgbClr val="ECF4E8"/>
-          </a:solidFill>
-          <a:ln w="12700">
-            <a:solidFill>
-              <a:srgbClr val="5C8347"/>
-            </a:solidFill>
-          </a:ln>
-        </p:spPr>
-        <p:style>
-          <a:lnRef idx="1">
-            <a:schemeClr val="accent1"/>
-          </a:lnRef>
-          <a:fillRef idx="3">
-            <a:schemeClr val="accent1"/>
-          </a:fillRef>
-          <a:effectRef idx="2">
-            <a:schemeClr val="accent1"/>
-          </a:effectRef>
-          <a:fontRef idx="minor">
-            <a:schemeClr val="lt1"/>
-          </a:fontRef>
-        </p:style>
-        <p:txBody>
-          <a:bodyPr rtlCol="0" anchor="ctr" wrap="square" lIns="73152" rIns="73152" tIns="36576" bIns="36576"/>
-          <a:lstStyle/>
-          <a:p>
-            <a:pPr algn="ctr"/>
-            <a:r>
-              <a:rPr sz="1400" b="1" i="0">
-                <a:solidFill>
-                  <a:srgbClr val="1F4E79"/>
-                </a:solidFill>
-                <a:latin typeface="Calibri"/>
-              </a:rPr>
-              <a:t>Per-story</a:t>
-            </a:r>
-          </a:p>
-        </p:txBody>
-      </p:sp>
-      <p:sp>
-        <p:nvSpPr>
-          <p:cNvPr id="9" name="TextBox 8"/>
-          <p:cNvSpPr txBox="1"/>
-          <p:nvPr/>
-        </p:nvSpPr>
-        <p:spPr>
-          <a:xfrm>
-            <a:off x="4244187" y="2057400"/>
-            <a:ext cx="3703320" cy="228600"/>
-          </a:xfrm>
-          <a:prstGeom prst="rect">
-            <a:avLst/>
-          </a:prstGeom>
-          <a:noFill/>
-        </p:spPr>
-        <p:txBody>
-          <a:bodyPr wrap="square" anchor="t">
-            <a:spAutoFit/>
-          </a:bodyPr>
-          <a:lstStyle/>
-          <a:p>
-            <a:pPr algn="ctr"/>
-            <a:r>
-              <a:rPr sz="1000" b="0" i="1">
-                <a:solidFill>
-                  <a:srgbClr val="55606E"/>
-                </a:solidFill>
-                <a:latin typeface="Calibri"/>
-              </a:rPr>
-              <a:t>(quality check fails)</a:t>
-            </a:r>
-          </a:p>
-        </p:txBody>
-      </p:sp>
-      <p:sp>
-        <p:nvSpPr>
-          <p:cNvPr id="10" name="Rectangle 9"/>
-          <p:cNvSpPr/>
-          <p:nvPr/>
-        </p:nvSpPr>
-        <p:spPr>
-          <a:xfrm>
-            <a:off x="4244187" y="2331720"/>
-            <a:ext cx="3703320" cy="2606040"/>
-          </a:xfrm>
-          <a:prstGeom prst="rect">
-            <a:avLst/>
-          </a:prstGeom>
-          <a:solidFill>
-            <a:srgbClr val="FFFFFF"/>
-          </a:solidFill>
-          <a:ln w="9525">
-            <a:solidFill>
-              <a:srgbClr val="5C8347"/>
-            </a:solidFill>
-          </a:ln>
-        </p:spPr>
-        <p:style>
-          <a:lnRef idx="1">
-            <a:schemeClr val="accent1"/>
-          </a:lnRef>
-          <a:fillRef idx="3">
-            <a:schemeClr val="accent1"/>
-          </a:fillRef>
-          <a:effectRef idx="2">
-            <a:schemeClr val="accent1"/>
-          </a:effectRef>
-          <a:fontRef idx="minor">
-            <a:schemeClr val="lt1"/>
-          </a:fontRef>
-        </p:style>
-        <p:txBody>
-          <a:bodyPr rtlCol="0" anchor="t" wrap="square" lIns="109728" rIns="109728" tIns="91440" bIns="91440"/>
-          <a:lstStyle/>
-          <a:p>
-            <a:pPr algn="l">
-              <a:spcAft>
-                <a:spcPts val="600"/>
-              </a:spcAft>
-            </a:pPr>
-            <a:r>
-              <a:rPr sz="1000" b="1">
-                <a:solidFill>
-                  <a:srgbClr val="1F4E79"/>
-                </a:solidFill>
-                <a:latin typeface="Calibri"/>
-              </a:rPr>
-              <a:t>Trigger: </a:t>
-            </a:r>
-            <a:r>
-              <a:rPr sz="1000">
-                <a:solidFill>
-                  <a:srgbClr val="1F2D3D"/>
-                </a:solidFill>
-                <a:latin typeface="Calibri"/>
-              </a:rPr>
-              <a:t>Validator rejects a story.</a:t>
-            </a:r>
-          </a:p>
-          <a:p>
-            <a:pPr algn="l">
-              <a:spcAft>
-                <a:spcPts val="600"/>
-              </a:spcAft>
-            </a:pPr>
-            <a:r>
-              <a:rPr sz="1000" b="1">
-                <a:solidFill>
-                  <a:srgbClr val="1F4E79"/>
-                </a:solidFill>
-                <a:latin typeface="Calibri"/>
-              </a:rPr>
-              <a:t>Fallback: </a:t>
-            </a:r>
-            <a:r>
-              <a:rPr sz="1000">
-                <a:solidFill>
-                  <a:srgbClr val="1F2D3D"/>
-                </a:solidFill>
-                <a:latin typeface="Calibri"/>
-              </a:rPr>
-              <a:t>Up to 2 revision attempts; the Validator drives revisions with the failed-checks list.</a:t>
-            </a:r>
-          </a:p>
-          <a:p>
-            <a:pPr algn="l">
-              <a:spcAft>
-                <a:spcPts val="600"/>
-              </a:spcAft>
-            </a:pPr>
-            <a:r>
-              <a:rPr sz="1000" b="1">
-                <a:solidFill>
-                  <a:srgbClr val="1F4E79"/>
-                </a:solidFill>
-                <a:latin typeface="Calibri"/>
-              </a:rPr>
-              <a:t>If persistent: </a:t>
-            </a:r>
-            <a:r>
-              <a:rPr sz="1000">
-                <a:solidFill>
-                  <a:srgbClr val="1F2D3D"/>
-                </a:solidFill>
-                <a:latin typeface="Calibri"/>
-              </a:rPr>
-              <a:t>Auto-park to the review pile. Story does not reach Output A in strict mode.</a:t>
-            </a:r>
-          </a:p>
-          <a:p>
-            <a:pPr algn="l">
-              <a:spcAft>
-                <a:spcPts val="600"/>
-              </a:spcAft>
-            </a:pPr>
-            <a:r>
-              <a:rPr sz="1000" b="1">
-                <a:solidFill>
-                  <a:srgbClr val="1F4E79"/>
-                </a:solidFill>
-                <a:latin typeface="Calibri"/>
-              </a:rPr>
-              <a:t>Pipeline impact: </a:t>
-            </a:r>
-            <a:r>
-              <a:rPr sz="1000">
-                <a:solidFill>
-                  <a:srgbClr val="1F2D3D"/>
-                </a:solidFill>
-                <a:latin typeface="Calibri"/>
-              </a:rPr>
-              <a:t>Subsequent stories continue. No block.</a:t>
-            </a:r>
-          </a:p>
-        </p:txBody>
-      </p:sp>
-      <p:sp>
-        <p:nvSpPr>
-          <p:cNvPr id="11" name="Rounded Rectangle 10"/>
-          <p:cNvSpPr/>
-          <p:nvPr/>
-        </p:nvSpPr>
-        <p:spPr>
-          <a:xfrm>
-            <a:off x="8112099" y="1554480"/>
-            <a:ext cx="3703320" cy="457200"/>
+            <a:off x="4206240" y="4343399"/>
+            <a:ext cx="1691640" cy="338328"/>
           </a:xfrm>
           <a:prstGeom prst="roundRect">
             <a:avLst/>
@@ -14181,27 +15012,278 @@
           <a:p>
             <a:pPr algn="ctr"/>
             <a:r>
-              <a:rPr sz="1400" b="1" i="0">
+              <a:rPr sz="800" b="1" i="0">
+                <a:solidFill>
+                  <a:srgbClr val="1F2D3D"/>
+                </a:solidFill>
+                <a:latin typeface="Calibri"/>
+              </a:rPr>
+              <a:t>no:  revise (≤2)
+then auto-park</a:t>
+            </a:r>
+          </a:p>
+        </p:txBody>
+      </p:sp>
+      <p:cxnSp>
+        <p:nvCxnSpPr>
+          <p:cNvPr id="17" name="Connector 16"/>
+          <p:cNvCxnSpPr/>
+          <p:nvPr/>
+        </p:nvCxnSpPr>
+        <p:spPr>
+          <a:xfrm flipH="1" flipV="1">
+            <a:off x="4206240" y="4512563"/>
+            <a:ext cx="228600" cy="36577"/>
+          </a:xfrm>
+          <a:prstGeom prst="line">
+            <a:avLst/>
+          </a:prstGeom>
+          <a:ln w="25400">
+            <a:solidFill>
+              <a:srgbClr val="4A6EA0"/>
+            </a:solidFill>
+            <a:tailEnd type="triangle" w="med" h="med"/>
+          </a:ln>
+        </p:spPr>
+        <p:style>
+          <a:lnRef idx="2">
+            <a:schemeClr val="accent1"/>
+          </a:lnRef>
+          <a:fillRef idx="0">
+            <a:schemeClr val="accent1"/>
+          </a:fillRef>
+          <a:effectRef idx="1">
+            <a:schemeClr val="accent1"/>
+          </a:effectRef>
+          <a:fontRef idx="minor">
+            <a:schemeClr val="tx1"/>
+          </a:fontRef>
+        </p:style>
+      </p:cxnSp>
+      <p:sp>
+        <p:nvSpPr>
+          <p:cNvPr id="18" name="TextBox 17"/>
+          <p:cNvSpPr txBox="1"/>
+          <p:nvPr/>
+        </p:nvSpPr>
+        <p:spPr>
+          <a:xfrm>
+            <a:off x="4366259" y="4366259"/>
+            <a:ext cx="822960" cy="274320"/>
+          </a:xfrm>
+          <a:prstGeom prst="rect">
+            <a:avLst/>
+          </a:prstGeom>
+          <a:noFill/>
+        </p:spPr>
+        <p:txBody>
+          <a:bodyPr wrap="none" lIns="36576" rIns="36576" tIns="0" bIns="0">
+            <a:spAutoFit/>
+          </a:bodyPr>
+          <a:lstStyle/>
+          <a:p>
+            <a:pPr algn="ctr"/>
+            <a:r>
+              <a:rPr sz="1000" b="1">
+                <a:solidFill>
+                  <a:srgbClr val="A84A4A"/>
+                </a:solidFill>
+                <a:latin typeface="Calibri"/>
+              </a:rPr>
+              <a:t>no</a:t>
+            </a:r>
+          </a:p>
+        </p:txBody>
+      </p:sp>
+      <p:cxnSp>
+        <p:nvCxnSpPr>
+          <p:cNvPr id="19" name="Connector 18"/>
+          <p:cNvCxnSpPr/>
+          <p:nvPr/>
+        </p:nvCxnSpPr>
+        <p:spPr>
+          <a:xfrm>
+            <a:off x="3246120" y="4800599"/>
+            <a:ext cx="0" cy="274320"/>
+          </a:xfrm>
+          <a:prstGeom prst="line">
+            <a:avLst/>
+          </a:prstGeom>
+          <a:ln w="25400">
+            <a:solidFill>
+              <a:srgbClr val="4A6EA0"/>
+            </a:solidFill>
+            <a:tailEnd type="triangle" w="med" h="med"/>
+          </a:ln>
+        </p:spPr>
+        <p:style>
+          <a:lnRef idx="2">
+            <a:schemeClr val="accent1"/>
+          </a:lnRef>
+          <a:fillRef idx="0">
+            <a:schemeClr val="accent1"/>
+          </a:fillRef>
+          <a:effectRef idx="1">
+            <a:schemeClr val="accent1"/>
+          </a:effectRef>
+          <a:fontRef idx="minor">
+            <a:schemeClr val="tx1"/>
+          </a:fontRef>
+        </p:style>
+      </p:cxnSp>
+      <p:sp>
+        <p:nvSpPr>
+          <p:cNvPr id="20" name="TextBox 19"/>
+          <p:cNvSpPr txBox="1"/>
+          <p:nvPr/>
+        </p:nvSpPr>
+        <p:spPr>
+          <a:xfrm>
+            <a:off x="3291839" y="4773167"/>
+            <a:ext cx="822960" cy="274320"/>
+          </a:xfrm>
+          <a:prstGeom prst="rect">
+            <a:avLst/>
+          </a:prstGeom>
+          <a:noFill/>
+        </p:spPr>
+        <p:txBody>
+          <a:bodyPr wrap="none" lIns="36576" rIns="36576" tIns="0" bIns="0">
+            <a:spAutoFit/>
+          </a:bodyPr>
+          <a:lstStyle/>
+          <a:p>
+            <a:pPr algn="ctr"/>
+            <a:r>
+              <a:rPr sz="1000" b="1">
+                <a:solidFill>
+                  <a:srgbClr val="5C8347"/>
+                </a:solidFill>
+                <a:latin typeface="Calibri"/>
+              </a:rPr>
+              <a:t>yes</a:t>
+            </a:r>
+          </a:p>
+        </p:txBody>
+      </p:sp>
+      <p:sp>
+        <p:nvSpPr>
+          <p:cNvPr id="21" name="Rounded Rectangle 20"/>
+          <p:cNvSpPr/>
+          <p:nvPr/>
+        </p:nvSpPr>
+        <p:spPr>
+          <a:xfrm>
+            <a:off x="502920" y="5074919"/>
+            <a:ext cx="5486400" cy="384048"/>
+          </a:xfrm>
+          <a:prstGeom prst="roundRect">
+            <a:avLst/>
+          </a:prstGeom>
+          <a:solidFill>
+            <a:srgbClr val="DCE9D7"/>
+          </a:solidFill>
+          <a:ln w="12700">
+            <a:solidFill>
+              <a:srgbClr val="5C8347"/>
+            </a:solidFill>
+          </a:ln>
+        </p:spPr>
+        <p:style>
+          <a:lnRef idx="1">
+            <a:schemeClr val="accent1"/>
+          </a:lnRef>
+          <a:fillRef idx="3">
+            <a:schemeClr val="accent1"/>
+          </a:fillRef>
+          <a:effectRef idx="2">
+            <a:schemeClr val="accent1"/>
+          </a:effectRef>
+          <a:fontRef idx="minor">
+            <a:schemeClr val="lt1"/>
+          </a:fontRef>
+        </p:style>
+        <p:txBody>
+          <a:bodyPr rtlCol="0" anchor="ctr" wrap="square" lIns="73152" rIns="73152" tIns="36576" bIns="36576"/>
+          <a:lstStyle/>
+          <a:p>
+            <a:pPr algn="ctr"/>
+            <a:r>
+              <a:rPr sz="1000" b="1" i="0">
+                <a:solidFill>
+                  <a:srgbClr val="1F2D3D"/>
+                </a:solidFill>
+                <a:latin typeface="Calibri"/>
+              </a:rPr>
+              <a:t>Story kept (validated) → Output A</a:t>
+            </a:r>
+          </a:p>
+        </p:txBody>
+      </p:sp>
+      <p:sp>
+        <p:nvSpPr>
+          <p:cNvPr id="22" name="Rounded Rectangle 21"/>
+          <p:cNvSpPr/>
+          <p:nvPr/>
+        </p:nvSpPr>
+        <p:spPr>
+          <a:xfrm>
+            <a:off x="6355080" y="1417320"/>
+            <a:ext cx="5486400" cy="457200"/>
+          </a:xfrm>
+          <a:prstGeom prst="roundRect">
+            <a:avLst/>
+          </a:prstGeom>
+          <a:solidFill>
+            <a:srgbClr val="FAE9CB"/>
+          </a:solidFill>
+          <a:ln w="12700">
+            <a:solidFill>
+              <a:srgbClr val="C9952C"/>
+            </a:solidFill>
+          </a:ln>
+        </p:spPr>
+        <p:style>
+          <a:lnRef idx="1">
+            <a:schemeClr val="accent1"/>
+          </a:lnRef>
+          <a:fillRef idx="3">
+            <a:schemeClr val="accent1"/>
+          </a:fillRef>
+          <a:effectRef idx="2">
+            <a:schemeClr val="accent1"/>
+          </a:effectRef>
+          <a:fontRef idx="minor">
+            <a:schemeClr val="lt1"/>
+          </a:fontRef>
+        </p:style>
+        <p:txBody>
+          <a:bodyPr rtlCol="0" anchor="ctr" wrap="square" lIns="73152" rIns="73152" tIns="36576" bIns="36576"/>
+          <a:lstStyle/>
+          <a:p>
+            <a:pPr algn="ctr"/>
+            <a:r>
+              <a:rPr sz="1500" b="1" i="0">
                 <a:solidFill>
                   <a:srgbClr val="1F4E79"/>
                 </a:solidFill>
                 <a:latin typeface="Calibri"/>
               </a:rPr>
-              <a:t>Per-batch</a:t>
-            </a:r>
-          </a:p>
-        </p:txBody>
-      </p:sp>
-      <p:sp>
-        <p:nvSpPr>
-          <p:cNvPr id="12" name="TextBox 11"/>
+              <a:t>Dependency Resolver</a:t>
+            </a:r>
+          </a:p>
+        </p:txBody>
+      </p:sp>
+      <p:sp>
+        <p:nvSpPr>
+          <p:cNvPr id="23" name="TextBox 22"/>
           <p:cNvSpPr txBox="1"/>
           <p:nvPr/>
         </p:nvSpPr>
         <p:spPr>
           <a:xfrm>
-            <a:off x="8112099" y="2057400"/>
-            <a:ext cx="3703320" cy="228600"/>
+            <a:off x="6355080" y="1920240"/>
+            <a:ext cx="5486400" cy="274320"/>
           </a:xfrm>
           <a:prstGeom prst="rect">
             <a:avLst/>
@@ -14222,163 +15304,21 @@
                 </a:solidFill>
                 <a:latin typeface="Calibri"/>
               </a:rPr>
-              <a:t>(drift / catalog issues)</a:t>
-            </a:r>
-          </a:p>
-        </p:txBody>
-      </p:sp>
-      <p:sp>
-        <p:nvSpPr>
-          <p:cNvPr id="13" name="Rectangle 12"/>
-          <p:cNvSpPr/>
-          <p:nvPr/>
-        </p:nvSpPr>
-        <p:spPr>
-          <a:xfrm>
-            <a:off x="8112099" y="2331720"/>
-            <a:ext cx="3703320" cy="2606040"/>
-          </a:xfrm>
-          <a:prstGeom prst="rect">
-            <a:avLst/>
-          </a:prstGeom>
-          <a:solidFill>
-            <a:srgbClr val="FFFFFF"/>
-          </a:solidFill>
-          <a:ln w="9525">
-            <a:solidFill>
-              <a:srgbClr val="A84A4A"/>
-            </a:solidFill>
-          </a:ln>
-        </p:spPr>
-        <p:style>
-          <a:lnRef idx="1">
-            <a:schemeClr val="accent1"/>
-          </a:lnRef>
-          <a:fillRef idx="3">
-            <a:schemeClr val="accent1"/>
-          </a:fillRef>
-          <a:effectRef idx="2">
-            <a:schemeClr val="accent1"/>
-          </a:effectRef>
-          <a:fontRef idx="minor">
-            <a:schemeClr val="lt1"/>
-          </a:fontRef>
-        </p:style>
-        <p:txBody>
-          <a:bodyPr rtlCol="0" anchor="t" wrap="square" lIns="109728" rIns="109728" tIns="91440" bIns="91440"/>
-          <a:lstStyle/>
-          <a:p>
-            <a:pPr algn="l">
-              <a:spcAft>
-                <a:spcPts val="600"/>
-              </a:spcAft>
-            </a:pPr>
-            <a:r>
-              <a:rPr sz="1000" b="1">
-                <a:solidFill>
-                  <a:srgbClr val="1F4E79"/>
-                </a:solidFill>
-                <a:latin typeface="Calibri"/>
-              </a:rPr>
-              <a:t>Trigger: </a:t>
-            </a:r>
-            <a:r>
-              <a:rPr sz="1000">
-                <a:solidFill>
-                  <a:srgbClr val="1F2D3D"/>
-                </a:solidFill>
-                <a:latin typeface="Calibri"/>
-              </a:rPr>
-              <a:t>G0 / E0 bucket &gt; 5% rolling, or auto-park rate &gt; 15% sustained.</a:t>
-            </a:r>
-          </a:p>
-          <a:p>
-            <a:pPr algn="l">
-              <a:spcAft>
-                <a:spcPts val="600"/>
-              </a:spcAft>
-            </a:pPr>
-            <a:r>
-              <a:rPr sz="1000" b="1">
-                <a:solidFill>
-                  <a:srgbClr val="1F4E79"/>
-                </a:solidFill>
-                <a:latin typeface="Calibri"/>
-              </a:rPr>
-              <a:t>Fallback: </a:t>
-            </a:r>
-            <a:r>
-              <a:rPr sz="1000">
-                <a:solidFill>
-                  <a:srgbClr val="1F2D3D"/>
-                </a:solidFill>
-                <a:latin typeface="Calibri"/>
-              </a:rPr>
-              <a:t>Auto-rerun discovery with τ_match −0.05 (more permissive); re-cluster G0; quorum re-evaluates.</a:t>
-            </a:r>
-          </a:p>
-          <a:p>
-            <a:pPr algn="l">
-              <a:spcAft>
-                <a:spcPts val="600"/>
-              </a:spcAft>
-            </a:pPr>
-            <a:r>
-              <a:rPr sz="1000" b="1">
-                <a:solidFill>
-                  <a:srgbClr val="1F4E79"/>
-                </a:solidFill>
-                <a:latin typeface="Calibri"/>
-              </a:rPr>
-              <a:t>If τ_match floor (0.50) hit: </a:t>
-            </a:r>
-            <a:r>
-              <a:rPr sz="1000">
-                <a:solidFill>
-                  <a:srgbClr val="1F2D3D"/>
-                </a:solidFill>
-                <a:latin typeface="Calibri"/>
-              </a:rPr>
-              <a:t>Drift report flags the discipline for manual catalog re-curation (one-time architect action).</a:t>
-            </a:r>
-          </a:p>
-          <a:p>
-            <a:pPr algn="l">
-              <a:spcAft>
-                <a:spcPts val="600"/>
-              </a:spcAft>
-            </a:pPr>
-            <a:r>
-              <a:rPr sz="1000" b="1">
-                <a:solidFill>
-                  <a:srgbClr val="1F4E79"/>
-                </a:solidFill>
-                <a:latin typeface="Calibri"/>
-              </a:rPr>
-              <a:t>Pipeline impact: </a:t>
-            </a:r>
-            <a:r>
-              <a:rPr sz="1000">
-                <a:solidFill>
-                  <a:srgbClr val="1F2D3D"/>
-                </a:solidFill>
-                <a:latin typeface="Calibri"/>
-              </a:rPr>
-              <a:t>Pipeline continues. The drift report is informational.</a:t>
-            </a:r>
-          </a:p>
-        </p:txBody>
-      </p:sp>
-      <p:sp>
-        <p:nvSpPr>
-          <p:cNvPr id="14" name="TextBox 13"/>
+              <a:t>Takes all kept stories; outputs a topological order for sprint planning.</a:t>
+            </a:r>
+          </a:p>
+        </p:txBody>
+      </p:sp>
+      <p:sp>
+        <p:nvSpPr>
+          <p:cNvPr id="24" name="TextBox 23"/>
           <p:cNvSpPr txBox="1"/>
           <p:nvPr/>
         </p:nvSpPr>
         <p:spPr>
           <a:xfrm>
-            <a:off x="457200" y="5120640"/>
-            <a:ext cx="11430000" cy="320040"/>
+            <a:off x="6355080" y="2212848"/>
+            <a:ext cx="5486400" cy="274320"/>
           </a:xfrm>
           <a:prstGeom prst="rect">
             <a:avLst/>
@@ -14391,37 +15331,37 @@
           </a:bodyPr>
           <a:lstStyle/>
           <a:p>
-            <a:pPr algn="l"/>
-            <a:r>
-              <a:rPr sz="1400" b="1" i="0">
-                <a:solidFill>
-                  <a:srgbClr val="1F4E79"/>
-                </a:solidFill>
-                <a:latin typeface="Calibri"/>
-              </a:rPr>
-              <a:t>Three queues collect different kinds of failures</a:t>
-            </a:r>
-          </a:p>
-        </p:txBody>
-      </p:sp>
-      <p:sp>
-        <p:nvSpPr>
-          <p:cNvPr id="15" name="Rounded Rectangle 14"/>
+            <a:pPr algn="ctr"/>
+            <a:r>
+              <a:rPr sz="900" b="0" i="1">
+                <a:solidFill>
+                  <a:srgbClr val="55606E"/>
+                </a:solidFill>
+                <a:latin typeface="Calibri"/>
+              </a:rPr>
+              <a:t>Each story has dependencies[] and cross_links[] — the resolver builds a DAG and sorts it.</a:t>
+            </a:r>
+          </a:p>
+        </p:txBody>
+      </p:sp>
+      <p:sp>
+        <p:nvSpPr>
+          <p:cNvPr id="25" name="Rounded Rectangle 24"/>
           <p:cNvSpPr/>
           <p:nvPr/>
         </p:nvSpPr>
         <p:spPr>
           <a:xfrm>
-            <a:off x="376275" y="5532120"/>
-            <a:ext cx="3703320" cy="914399"/>
+            <a:off x="8618219" y="2606040"/>
+            <a:ext cx="960120" cy="365760"/>
           </a:xfrm>
           <a:prstGeom prst="roundRect">
             <a:avLst/>
           </a:prstGeom>
           <a:solidFill>
-            <a:srgbClr val="F1F5FA"/>
+            <a:srgbClr val="E7EFF8"/>
           </a:solidFill>
-          <a:ln w="9525">
+          <a:ln w="12700">
             <a:solidFill>
               <a:srgbClr val="4A6EA0"/>
             </a:solidFill>
@@ -14442,64 +15382,40 @@
           </a:fontRef>
         </p:style>
         <p:txBody>
-          <a:bodyPr rtlCol="0" anchor="ctr" wrap="square" lIns="109728" rIns="109728" tIns="73152" bIns="73152"/>
-          <a:lstStyle/>
-          <a:p>
-            <a:pPr algn="l"/>
-            <a:r>
-              <a:rPr sz="1200" b="1">
-                <a:solidFill>
-                  <a:srgbClr val="1F4E79"/>
-                </a:solidFill>
-                <a:latin typeface="Calibri"/>
-              </a:rPr>
-              <a:t>Review pile</a:t>
-            </a:r>
-          </a:p>
-          <a:p>
-            <a:pPr algn="l"/>
-            <a:r>
-              <a:rPr sz="1000" i="1">
-                <a:solidFill>
-                  <a:srgbClr val="55606E"/>
-                </a:solidFill>
-                <a:latin typeface="Calibri"/>
-              </a:rPr>
-              <a:t>Quality / rubric failures</a:t>
-            </a:r>
-          </a:p>
-          <a:p>
-            <a:pPr algn="l"/>
-            <a:r>
-              <a:rPr sz="1000">
-                <a:solidFill>
-                  <a:srgbClr val="1F2D3D"/>
-                </a:solidFill>
-                <a:latin typeface="Calibri"/>
-              </a:rPr>
-              <a:t>Stories that failed Validator after 2 revisions.</a:t>
-            </a:r>
-          </a:p>
-        </p:txBody>
-      </p:sp>
-      <p:sp>
-        <p:nvSpPr>
-          <p:cNvPr id="16" name="Rounded Rectangle 15"/>
+          <a:bodyPr rtlCol="0" anchor="ctr" wrap="square" lIns="73152" rIns="73152" tIns="36576" bIns="36576"/>
+          <a:lstStyle/>
+          <a:p>
+            <a:pPr algn="ctr"/>
+            <a:r>
+              <a:rPr sz="1000" b="1" i="0">
+                <a:solidFill>
+                  <a:srgbClr val="1F2D3D"/>
+                </a:solidFill>
+                <a:latin typeface="Calibri"/>
+              </a:rPr>
+              <a:t>Story A</a:t>
+            </a:r>
+          </a:p>
+        </p:txBody>
+      </p:sp>
+      <p:sp>
+        <p:nvSpPr>
+          <p:cNvPr id="26" name="Rounded Rectangle 25"/>
           <p:cNvSpPr/>
           <p:nvPr/>
         </p:nvSpPr>
         <p:spPr>
           <a:xfrm>
-            <a:off x="4244187" y="5532120"/>
-            <a:ext cx="3703320" cy="914399"/>
+            <a:off x="6812280" y="3337560"/>
+            <a:ext cx="960120" cy="365760"/>
           </a:xfrm>
           <a:prstGeom prst="roundRect">
             <a:avLst/>
           </a:prstGeom>
           <a:solidFill>
-            <a:srgbClr val="F1F5FA"/>
+            <a:srgbClr val="E7EFF8"/>
           </a:solidFill>
-          <a:ln w="9525">
+          <a:ln w="12700">
             <a:solidFill>
               <a:srgbClr val="4A6EA0"/>
             </a:solidFill>
@@ -14520,64 +15436,40 @@
           </a:fontRef>
         </p:style>
         <p:txBody>
-          <a:bodyPr rtlCol="0" anchor="ctr" wrap="square" lIns="109728" rIns="109728" tIns="73152" bIns="73152"/>
-          <a:lstStyle/>
-          <a:p>
-            <a:pPr algn="l"/>
-            <a:r>
-              <a:rPr sz="1200" b="1">
-                <a:solidFill>
-                  <a:srgbClr val="1F4E79"/>
-                </a:solidFill>
-                <a:latin typeface="Calibri"/>
-              </a:rPr>
-              <a:t>G0 / E0 buckets</a:t>
-            </a:r>
-          </a:p>
-          <a:p>
-            <a:pPr algn="l"/>
-            <a:r>
-              <a:rPr sz="1000" i="1">
-                <a:solidFill>
-                  <a:srgbClr val="55606E"/>
-                </a:solidFill>
-                <a:latin typeface="Calibri"/>
-              </a:rPr>
-              <a:t>Classification failures</a:t>
-            </a:r>
-          </a:p>
-          <a:p>
-            <a:pPr algn="l"/>
-            <a:r>
-              <a:rPr sz="1000">
-                <a:solidFill>
-                  <a:srgbClr val="1F2D3D"/>
-                </a:solidFill>
-                <a:latin typeface="Calibri"/>
-              </a:rPr>
-              <a:t>Chunks (G0) and draft epics (E0) that didn't classify or cluster.</a:t>
-            </a:r>
-          </a:p>
-        </p:txBody>
-      </p:sp>
-      <p:sp>
-        <p:nvSpPr>
-          <p:cNvPr id="17" name="Rounded Rectangle 16"/>
+          <a:bodyPr rtlCol="0" anchor="ctr" wrap="square" lIns="73152" rIns="73152" tIns="36576" bIns="36576"/>
+          <a:lstStyle/>
+          <a:p>
+            <a:pPr algn="ctr"/>
+            <a:r>
+              <a:rPr sz="1000" b="1" i="0">
+                <a:solidFill>
+                  <a:srgbClr val="1F2D3D"/>
+                </a:solidFill>
+                <a:latin typeface="Calibri"/>
+              </a:rPr>
+              <a:t>Story B</a:t>
+            </a:r>
+          </a:p>
+        </p:txBody>
+      </p:sp>
+      <p:sp>
+        <p:nvSpPr>
+          <p:cNvPr id="27" name="Rounded Rectangle 26"/>
           <p:cNvSpPr/>
           <p:nvPr/>
         </p:nvSpPr>
         <p:spPr>
           <a:xfrm>
-            <a:off x="8112099" y="5532120"/>
-            <a:ext cx="3703320" cy="914399"/>
+            <a:off x="10424159" y="3337560"/>
+            <a:ext cx="960120" cy="365760"/>
           </a:xfrm>
           <a:prstGeom prst="roundRect">
             <a:avLst/>
           </a:prstGeom>
           <a:solidFill>
-            <a:srgbClr val="F1F5FA"/>
+            <a:srgbClr val="E7EFF8"/>
           </a:solidFill>
-          <a:ln w="9525">
+          <a:ln w="12700">
             <a:solidFill>
               <a:srgbClr val="4A6EA0"/>
             </a:solidFill>
@@ -14598,49 +15490,367 @@
           </a:fontRef>
         </p:style>
         <p:txBody>
-          <a:bodyPr rtlCol="0" anchor="ctr" wrap="square" lIns="109728" rIns="109728" tIns="73152" bIns="73152"/>
-          <a:lstStyle/>
-          <a:p>
-            <a:pPr algn="l"/>
-            <a:r>
-              <a:rPr sz="1200" b="1">
+          <a:bodyPr rtlCol="0" anchor="ctr" wrap="square" lIns="73152" rIns="73152" tIns="36576" bIns="36576"/>
+          <a:lstStyle/>
+          <a:p>
+            <a:pPr algn="ctr"/>
+            <a:r>
+              <a:rPr sz="1000" b="1" i="0">
+                <a:solidFill>
+                  <a:srgbClr val="1F2D3D"/>
+                </a:solidFill>
+                <a:latin typeface="Calibri"/>
+              </a:rPr>
+              <a:t>Story C</a:t>
+            </a:r>
+          </a:p>
+        </p:txBody>
+      </p:sp>
+      <p:sp>
+        <p:nvSpPr>
+          <p:cNvPr id="28" name="Rounded Rectangle 27"/>
+          <p:cNvSpPr/>
+          <p:nvPr/>
+        </p:nvSpPr>
+        <p:spPr>
+          <a:xfrm>
+            <a:off x="8618219" y="4069080"/>
+            <a:ext cx="960120" cy="365760"/>
+          </a:xfrm>
+          <a:prstGeom prst="roundRect">
+            <a:avLst/>
+          </a:prstGeom>
+          <a:solidFill>
+            <a:srgbClr val="E7EFF8"/>
+          </a:solidFill>
+          <a:ln w="12700">
+            <a:solidFill>
+              <a:srgbClr val="4A6EA0"/>
+            </a:solidFill>
+          </a:ln>
+        </p:spPr>
+        <p:style>
+          <a:lnRef idx="1">
+            <a:schemeClr val="accent1"/>
+          </a:lnRef>
+          <a:fillRef idx="3">
+            <a:schemeClr val="accent1"/>
+          </a:fillRef>
+          <a:effectRef idx="2">
+            <a:schemeClr val="accent1"/>
+          </a:effectRef>
+          <a:fontRef idx="minor">
+            <a:schemeClr val="lt1"/>
+          </a:fontRef>
+        </p:style>
+        <p:txBody>
+          <a:bodyPr rtlCol="0" anchor="ctr" wrap="square" lIns="73152" rIns="73152" tIns="36576" bIns="36576"/>
+          <a:lstStyle/>
+          <a:p>
+            <a:pPr algn="ctr"/>
+            <a:r>
+              <a:rPr sz="1000" b="1" i="0">
+                <a:solidFill>
+                  <a:srgbClr val="1F2D3D"/>
+                </a:solidFill>
+                <a:latin typeface="Calibri"/>
+              </a:rPr>
+              <a:t>Story D</a:t>
+            </a:r>
+          </a:p>
+        </p:txBody>
+      </p:sp>
+      <p:sp>
+        <p:nvSpPr>
+          <p:cNvPr id="29" name="Rounded Rectangle 28"/>
+          <p:cNvSpPr/>
+          <p:nvPr/>
+        </p:nvSpPr>
+        <p:spPr>
+          <a:xfrm>
+            <a:off x="8618219" y="4800600"/>
+            <a:ext cx="960120" cy="365760"/>
+          </a:xfrm>
+          <a:prstGeom prst="roundRect">
+            <a:avLst/>
+          </a:prstGeom>
+          <a:solidFill>
+            <a:srgbClr val="E7EFF8"/>
+          </a:solidFill>
+          <a:ln w="12700">
+            <a:solidFill>
+              <a:srgbClr val="4A6EA0"/>
+            </a:solidFill>
+          </a:ln>
+        </p:spPr>
+        <p:style>
+          <a:lnRef idx="1">
+            <a:schemeClr val="accent1"/>
+          </a:lnRef>
+          <a:fillRef idx="3">
+            <a:schemeClr val="accent1"/>
+          </a:fillRef>
+          <a:effectRef idx="2">
+            <a:schemeClr val="accent1"/>
+          </a:effectRef>
+          <a:fontRef idx="minor">
+            <a:schemeClr val="lt1"/>
+          </a:fontRef>
+        </p:style>
+        <p:txBody>
+          <a:bodyPr rtlCol="0" anchor="ctr" wrap="square" lIns="73152" rIns="73152" tIns="36576" bIns="36576"/>
+          <a:lstStyle/>
+          <a:p>
+            <a:pPr algn="ctr"/>
+            <a:r>
+              <a:rPr sz="1000" b="1" i="0">
+                <a:solidFill>
+                  <a:srgbClr val="1F2D3D"/>
+                </a:solidFill>
+                <a:latin typeface="Calibri"/>
+              </a:rPr>
+              <a:t>Story E</a:t>
+            </a:r>
+          </a:p>
+        </p:txBody>
+      </p:sp>
+      <p:cxnSp>
+        <p:nvCxnSpPr>
+          <p:cNvPr id="30" name="Connector 29"/>
+          <p:cNvCxnSpPr/>
+          <p:nvPr/>
+        </p:nvCxnSpPr>
+        <p:spPr>
+          <a:xfrm flipH="1">
+            <a:off x="7292340" y="2971800"/>
+            <a:ext cx="1805940" cy="365760"/>
+          </a:xfrm>
+          <a:prstGeom prst="line">
+            <a:avLst/>
+          </a:prstGeom>
+          <a:ln w="15240">
+            <a:solidFill>
+              <a:srgbClr val="4A6EA0"/>
+            </a:solidFill>
+            <a:tailEnd type="triangle" w="med" h="med"/>
+          </a:ln>
+        </p:spPr>
+        <p:style>
+          <a:lnRef idx="2">
+            <a:schemeClr val="accent1"/>
+          </a:lnRef>
+          <a:fillRef idx="0">
+            <a:schemeClr val="accent1"/>
+          </a:fillRef>
+          <a:effectRef idx="1">
+            <a:schemeClr val="accent1"/>
+          </a:effectRef>
+          <a:fontRef idx="minor">
+            <a:schemeClr val="tx1"/>
+          </a:fontRef>
+        </p:style>
+      </p:cxnSp>
+      <p:cxnSp>
+        <p:nvCxnSpPr>
+          <p:cNvPr id="31" name="Connector 30"/>
+          <p:cNvCxnSpPr/>
+          <p:nvPr/>
+        </p:nvCxnSpPr>
+        <p:spPr>
+          <a:xfrm>
+            <a:off x="9098280" y="2971800"/>
+            <a:ext cx="1805939" cy="365760"/>
+          </a:xfrm>
+          <a:prstGeom prst="line">
+            <a:avLst/>
+          </a:prstGeom>
+          <a:ln w="15240">
+            <a:solidFill>
+              <a:srgbClr val="4A6EA0"/>
+            </a:solidFill>
+            <a:tailEnd type="triangle" w="med" h="med"/>
+          </a:ln>
+        </p:spPr>
+        <p:style>
+          <a:lnRef idx="2">
+            <a:schemeClr val="accent1"/>
+          </a:lnRef>
+          <a:fillRef idx="0">
+            <a:schemeClr val="accent1"/>
+          </a:fillRef>
+          <a:effectRef idx="1">
+            <a:schemeClr val="accent1"/>
+          </a:effectRef>
+          <a:fontRef idx="minor">
+            <a:schemeClr val="tx1"/>
+          </a:fontRef>
+        </p:style>
+      </p:cxnSp>
+      <p:cxnSp>
+        <p:nvCxnSpPr>
+          <p:cNvPr id="32" name="Connector 31"/>
+          <p:cNvCxnSpPr/>
+          <p:nvPr/>
+        </p:nvCxnSpPr>
+        <p:spPr>
+          <a:xfrm>
+            <a:off x="7292340" y="3703320"/>
+            <a:ext cx="1805940" cy="365760"/>
+          </a:xfrm>
+          <a:prstGeom prst="line">
+            <a:avLst/>
+          </a:prstGeom>
+          <a:ln w="15240">
+            <a:solidFill>
+              <a:srgbClr val="4A6EA0"/>
+            </a:solidFill>
+            <a:tailEnd type="triangle" w="med" h="med"/>
+          </a:ln>
+        </p:spPr>
+        <p:style>
+          <a:lnRef idx="2">
+            <a:schemeClr val="accent1"/>
+          </a:lnRef>
+          <a:fillRef idx="0">
+            <a:schemeClr val="accent1"/>
+          </a:fillRef>
+          <a:effectRef idx="1">
+            <a:schemeClr val="accent1"/>
+          </a:effectRef>
+          <a:fontRef idx="minor">
+            <a:schemeClr val="tx1"/>
+          </a:fontRef>
+        </p:style>
+      </p:cxnSp>
+      <p:cxnSp>
+        <p:nvCxnSpPr>
+          <p:cNvPr id="33" name="Connector 32"/>
+          <p:cNvCxnSpPr/>
+          <p:nvPr/>
+        </p:nvCxnSpPr>
+        <p:spPr>
+          <a:xfrm flipH="1">
+            <a:off x="9098280" y="3703320"/>
+            <a:ext cx="1805939" cy="365760"/>
+          </a:xfrm>
+          <a:prstGeom prst="line">
+            <a:avLst/>
+          </a:prstGeom>
+          <a:ln w="15240">
+            <a:solidFill>
+              <a:srgbClr val="4A6EA0"/>
+            </a:solidFill>
+            <a:tailEnd type="triangle" w="med" h="med"/>
+          </a:ln>
+        </p:spPr>
+        <p:style>
+          <a:lnRef idx="2">
+            <a:schemeClr val="accent1"/>
+          </a:lnRef>
+          <a:fillRef idx="0">
+            <a:schemeClr val="accent1"/>
+          </a:fillRef>
+          <a:effectRef idx="1">
+            <a:schemeClr val="accent1"/>
+          </a:effectRef>
+          <a:fontRef idx="minor">
+            <a:schemeClr val="tx1"/>
+          </a:fontRef>
+        </p:style>
+      </p:cxnSp>
+      <p:cxnSp>
+        <p:nvCxnSpPr>
+          <p:cNvPr id="34" name="Connector 33"/>
+          <p:cNvCxnSpPr/>
+          <p:nvPr/>
+        </p:nvCxnSpPr>
+        <p:spPr>
+          <a:xfrm>
+            <a:off x="9098280" y="4434840"/>
+            <a:ext cx="0" cy="365760"/>
+          </a:xfrm>
+          <a:prstGeom prst="line">
+            <a:avLst/>
+          </a:prstGeom>
+          <a:ln w="15240">
+            <a:solidFill>
+              <a:srgbClr val="4A6EA0"/>
+            </a:solidFill>
+            <a:tailEnd type="triangle" w="med" h="med"/>
+          </a:ln>
+        </p:spPr>
+        <p:style>
+          <a:lnRef idx="2">
+            <a:schemeClr val="accent1"/>
+          </a:lnRef>
+          <a:fillRef idx="0">
+            <a:schemeClr val="accent1"/>
+          </a:fillRef>
+          <a:effectRef idx="1">
+            <a:schemeClr val="accent1"/>
+          </a:effectRef>
+          <a:fontRef idx="minor">
+            <a:schemeClr val="tx1"/>
+          </a:fontRef>
+        </p:style>
+      </p:cxnSp>
+      <p:sp>
+        <p:nvSpPr>
+          <p:cNvPr id="35" name="Rounded Rectangle 34"/>
+          <p:cNvSpPr/>
+          <p:nvPr/>
+        </p:nvSpPr>
+        <p:spPr>
+          <a:xfrm>
+            <a:off x="6355080" y="5349240"/>
+            <a:ext cx="5486400" cy="411480"/>
+          </a:xfrm>
+          <a:prstGeom prst="roundRect">
+            <a:avLst/>
+          </a:prstGeom>
+          <a:solidFill>
+            <a:srgbClr val="DCE9D7"/>
+          </a:solidFill>
+          <a:ln w="12700">
+            <a:solidFill>
+              <a:srgbClr val="5C8347"/>
+            </a:solidFill>
+          </a:ln>
+        </p:spPr>
+        <p:style>
+          <a:lnRef idx="1">
+            <a:schemeClr val="accent1"/>
+          </a:lnRef>
+          <a:fillRef idx="3">
+            <a:schemeClr val="accent1"/>
+          </a:fillRef>
+          <a:effectRef idx="2">
+            <a:schemeClr val="accent1"/>
+          </a:effectRef>
+          <a:fontRef idx="minor">
+            <a:schemeClr val="lt1"/>
+          </a:fontRef>
+        </p:style>
+        <p:txBody>
+          <a:bodyPr rtlCol="0" anchor="ctr" wrap="square" lIns="73152" rIns="73152" tIns="36576" bIns="36576"/>
+          <a:lstStyle/>
+          <a:p>
+            <a:pPr algn="ctr"/>
+            <a:r>
+              <a:rPr sz="1100" b="1" i="0">
                 <a:solidFill>
                   <a:srgbClr val="1F4E79"/>
                 </a:solidFill>
                 <a:latin typeface="Calibri"/>
               </a:rPr>
-              <a:t>Audit trail</a:t>
-            </a:r>
-          </a:p>
-          <a:p>
-            <a:pPr algn="l"/>
-            <a:r>
-              <a:rPr sz="1000" i="1">
-                <a:solidFill>
-                  <a:srgbClr val="55606E"/>
-                </a:solidFill>
-                <a:latin typeface="Calibri"/>
-              </a:rPr>
-              <a:t>Call-level errors</a:t>
-            </a:r>
-          </a:p>
-          <a:p>
-            <a:pPr algn="l"/>
-            <a:r>
-              <a:rPr sz="1000">
-                <a:solidFill>
-                  <a:srgbClr val="1F2D3D"/>
-                </a:solidFill>
-                <a:latin typeface="Calibri"/>
-              </a:rPr>
-              <a:t>LLM-call failures after retry exhaustion. For diagnostics.</a:t>
-            </a:r>
-          </a:p>
-        </p:txBody>
-      </p:sp>
-      <p:sp>
-        <p:nvSpPr>
-          <p:cNvPr id="18" name="Rectangle 17"/>
+              <a:t>Output:   1. A  →  2. B  →  3. C  →  4. D  →  5. E</a:t>
+            </a:r>
+          </a:p>
+        </p:txBody>
+      </p:sp>
+      <p:sp>
+        <p:nvSpPr>
+          <p:cNvPr id="36" name="Rectangle 35"/>
           <p:cNvSpPr/>
           <p:nvPr/>
         </p:nvSpPr>
@@ -14683,7 +15893,7 @@
       </p:sp>
       <p:sp>
         <p:nvSpPr>
-          <p:cNvPr id="19" name="TextBox 18"/>
+          <p:cNvPr id="37" name="TextBox 36"/>
           <p:cNvSpPr txBox="1"/>
           <p:nvPr/>
         </p:nvSpPr>
@@ -14718,7 +15928,7 @@
       </p:sp>
       <p:sp>
         <p:nvSpPr>
-          <p:cNvPr id="20" name="TextBox 19"/>
+          <p:cNvPr id="38" name="TextBox 37"/>
           <p:cNvSpPr txBox="1"/>
           <p:nvPr/>
         </p:nvSpPr>
@@ -14746,7 +15956,7 @@
                 </a:solidFill>
                 <a:latin typeface="Calibri"/>
               </a:rPr>
-              <a:t>8 / 9</a:t>
+              <a:t>8 / 10</a:t>
             </a:r>
           </a:p>
         </p:txBody>
@@ -14799,7 +16009,7 @@
                 </a:solidFill>
                 <a:latin typeface="Calibri"/>
               </a:rPr>
-              <a:t>What ships and the alignment ask</a:t>
+              <a:t>What happens when something fails</a:t>
             </a:r>
           </a:p>
         </p:txBody>
@@ -14849,344 +16059,14 @@
       </p:sp>
       <p:sp>
         <p:nvSpPr>
-          <p:cNvPr id="4" name="Rounded Rectangle 3"/>
-          <p:cNvSpPr/>
-          <p:nvPr/>
-        </p:nvSpPr>
-        <p:spPr>
-          <a:xfrm>
-            <a:off x="335127" y="1188720"/>
-            <a:ext cx="3657600" cy="502920"/>
-          </a:xfrm>
-          <a:prstGeom prst="roundRect">
-            <a:avLst/>
-          </a:prstGeom>
-          <a:solidFill>
-            <a:srgbClr val="DCE9D7"/>
-          </a:solidFill>
-          <a:ln w="12700">
-            <a:solidFill>
-              <a:srgbClr val="5C8347"/>
-            </a:solidFill>
-          </a:ln>
-        </p:spPr>
-        <p:style>
-          <a:lnRef idx="1">
-            <a:schemeClr val="accent1"/>
-          </a:lnRef>
-          <a:fillRef idx="3">
-            <a:schemeClr val="accent1"/>
-          </a:fillRef>
-          <a:effectRef idx="2">
-            <a:schemeClr val="accent1"/>
-          </a:effectRef>
-          <a:fontRef idx="minor">
-            <a:schemeClr val="lt1"/>
-          </a:fontRef>
-        </p:style>
-        <p:txBody>
-          <a:bodyPr rtlCol="0" anchor="ctr" wrap="square" lIns="73152" rIns="73152" tIns="36576" bIns="36576"/>
-          <a:lstStyle/>
-          <a:p>
-            <a:pPr algn="ctr"/>
-            <a:r>
-              <a:rPr sz="1500" b="1" i="0">
-                <a:solidFill>
-                  <a:srgbClr val="1F2D3D"/>
-                </a:solidFill>
-                <a:latin typeface="Calibri"/>
-              </a:rPr>
-              <a:t>Jira backlog</a:t>
-            </a:r>
-          </a:p>
-        </p:txBody>
-      </p:sp>
-      <p:sp>
-        <p:nvSpPr>
-          <p:cNvPr id="5" name="Rectangle 4"/>
-          <p:cNvSpPr/>
-          <p:nvPr/>
-        </p:nvSpPr>
-        <p:spPr>
-          <a:xfrm>
-            <a:off x="335127" y="1691640"/>
-            <a:ext cx="3657600" cy="868680"/>
-          </a:xfrm>
-          <a:prstGeom prst="rect">
-            <a:avLst/>
-          </a:prstGeom>
-          <a:solidFill>
-            <a:srgbClr val="FFFFFF"/>
-          </a:solidFill>
-          <a:ln w="12700">
-            <a:solidFill>
-              <a:srgbClr val="5C8347"/>
-            </a:solidFill>
-          </a:ln>
-        </p:spPr>
-        <p:style>
-          <a:lnRef idx="1">
-            <a:schemeClr val="accent1"/>
-          </a:lnRef>
-          <a:fillRef idx="3">
-            <a:schemeClr val="accent1"/>
-          </a:fillRef>
-          <a:effectRef idx="2">
-            <a:schemeClr val="accent1"/>
-          </a:effectRef>
-          <a:fontRef idx="minor">
-            <a:schemeClr val="lt1"/>
-          </a:fontRef>
-        </p:style>
-        <p:txBody>
-          <a:bodyPr rtlCol="0" anchor="ctr" wrap="square" lIns="73152" rIns="73152" tIns="36576" bIns="36576"/>
-          <a:lstStyle/>
-          <a:p>
-            <a:pPr algn="ctr"/>
-            <a:r>
-              <a:rPr sz="1100" b="0" i="0">
-                <a:solidFill>
-                  <a:srgbClr val="1F2D3D"/>
-                </a:solidFill>
-                <a:latin typeface="Calibri"/>
-              </a:rPr>
-              <a:t>Epics + Stories
-Ready for the dev team
-Includes traceability to source docs</a:t>
-            </a:r>
-          </a:p>
-        </p:txBody>
-      </p:sp>
-      <p:sp>
-        <p:nvSpPr>
-          <p:cNvPr id="6" name="Rounded Rectangle 5"/>
-          <p:cNvSpPr/>
-          <p:nvPr/>
-        </p:nvSpPr>
-        <p:spPr>
-          <a:xfrm>
-            <a:off x="4267047" y="1188720"/>
-            <a:ext cx="3657600" cy="502920"/>
-          </a:xfrm>
-          <a:prstGeom prst="roundRect">
-            <a:avLst/>
-          </a:prstGeom>
-          <a:solidFill>
-            <a:srgbClr val="DCE9D7"/>
-          </a:solidFill>
-          <a:ln w="12700">
-            <a:solidFill>
-              <a:srgbClr val="5C8347"/>
-            </a:solidFill>
-          </a:ln>
-        </p:spPr>
-        <p:style>
-          <a:lnRef idx="1">
-            <a:schemeClr val="accent1"/>
-          </a:lnRef>
-          <a:fillRef idx="3">
-            <a:schemeClr val="accent1"/>
-          </a:fillRef>
-          <a:effectRef idx="2">
-            <a:schemeClr val="accent1"/>
-          </a:effectRef>
-          <a:fontRef idx="minor">
-            <a:schemeClr val="lt1"/>
-          </a:fontRef>
-        </p:style>
-        <p:txBody>
-          <a:bodyPr rtlCol="0" anchor="ctr" wrap="square" lIns="73152" rIns="73152" tIns="36576" bIns="36576"/>
-          <a:lstStyle/>
-          <a:p>
-            <a:pPr algn="ctr"/>
-            <a:r>
-              <a:rPr sz="1500" b="1" i="0">
-                <a:solidFill>
-                  <a:srgbClr val="1F2D3D"/>
-                </a:solidFill>
-                <a:latin typeface="Calibri"/>
-              </a:rPr>
-              <a:t>Configuration files</a:t>
-            </a:r>
-          </a:p>
-        </p:txBody>
-      </p:sp>
-      <p:sp>
-        <p:nvSpPr>
-          <p:cNvPr id="7" name="Rectangle 6"/>
-          <p:cNvSpPr/>
-          <p:nvPr/>
-        </p:nvSpPr>
-        <p:spPr>
-          <a:xfrm>
-            <a:off x="4267047" y="1691640"/>
-            <a:ext cx="3657600" cy="868680"/>
-          </a:xfrm>
-          <a:prstGeom prst="rect">
-            <a:avLst/>
-          </a:prstGeom>
-          <a:solidFill>
-            <a:srgbClr val="FFFFFF"/>
-          </a:solidFill>
-          <a:ln w="12700">
-            <a:solidFill>
-              <a:srgbClr val="5C8347"/>
-            </a:solidFill>
-          </a:ln>
-        </p:spPr>
-        <p:style>
-          <a:lnRef idx="1">
-            <a:schemeClr val="accent1"/>
-          </a:lnRef>
-          <a:fillRef idx="3">
-            <a:schemeClr val="accent1"/>
-          </a:fillRef>
-          <a:effectRef idx="2">
-            <a:schemeClr val="accent1"/>
-          </a:effectRef>
-          <a:fontRef idx="minor">
-            <a:schemeClr val="lt1"/>
-          </a:fontRef>
-        </p:style>
-        <p:txBody>
-          <a:bodyPr rtlCol="0" anchor="ctr" wrap="square" lIns="73152" rIns="73152" tIns="36576" bIns="36576"/>
-          <a:lstStyle/>
-          <a:p>
-            <a:pPr algn="ctr"/>
-            <a:r>
-              <a:rPr sz="1100" b="0" i="0">
-                <a:solidFill>
-                  <a:srgbClr val="1F2D3D"/>
-                </a:solidFill>
-                <a:latin typeface="Calibri"/>
-              </a:rPr>
-              <a:t>Per-test settings
-(e.g. blood culture parameters)
-Deterministic structure</a:t>
-            </a:r>
-          </a:p>
-        </p:txBody>
-      </p:sp>
-      <p:sp>
-        <p:nvSpPr>
-          <p:cNvPr id="8" name="Rounded Rectangle 7"/>
-          <p:cNvSpPr/>
-          <p:nvPr/>
-        </p:nvSpPr>
-        <p:spPr>
-          <a:xfrm>
-            <a:off x="8198967" y="1188720"/>
-            <a:ext cx="3657600" cy="502920"/>
-          </a:xfrm>
-          <a:prstGeom prst="roundRect">
-            <a:avLst/>
-          </a:prstGeom>
-          <a:solidFill>
-            <a:srgbClr val="DCE9D7"/>
-          </a:solidFill>
-          <a:ln w="12700">
-            <a:solidFill>
-              <a:srgbClr val="5C8347"/>
-            </a:solidFill>
-          </a:ln>
-        </p:spPr>
-        <p:style>
-          <a:lnRef idx="1">
-            <a:schemeClr val="accent1"/>
-          </a:lnRef>
-          <a:fillRef idx="3">
-            <a:schemeClr val="accent1"/>
-          </a:fillRef>
-          <a:effectRef idx="2">
-            <a:schemeClr val="accent1"/>
-          </a:effectRef>
-          <a:fontRef idx="minor">
-            <a:schemeClr val="lt1"/>
-          </a:fontRef>
-        </p:style>
-        <p:txBody>
-          <a:bodyPr rtlCol="0" anchor="ctr" wrap="square" lIns="73152" rIns="73152" tIns="36576" bIns="36576"/>
-          <a:lstStyle/>
-          <a:p>
-            <a:pPr algn="ctr"/>
-            <a:r>
-              <a:rPr sz="1500" b="1" i="0">
-                <a:solidFill>
-                  <a:srgbClr val="1F2D3D"/>
-                </a:solidFill>
-                <a:latin typeface="Calibri"/>
-              </a:rPr>
-              <a:t>Reference + audit</a:t>
-            </a:r>
-          </a:p>
-        </p:txBody>
-      </p:sp>
-      <p:sp>
-        <p:nvSpPr>
-          <p:cNvPr id="9" name="Rectangle 8"/>
-          <p:cNvSpPr/>
-          <p:nvPr/>
-        </p:nvSpPr>
-        <p:spPr>
-          <a:xfrm>
-            <a:off x="8198967" y="1691640"/>
-            <a:ext cx="3657600" cy="868680"/>
-          </a:xfrm>
-          <a:prstGeom prst="rect">
-            <a:avLst/>
-          </a:prstGeom>
-          <a:solidFill>
-            <a:srgbClr val="FFFFFF"/>
-          </a:solidFill>
-          <a:ln w="12700">
-            <a:solidFill>
-              <a:srgbClr val="5C8347"/>
-            </a:solidFill>
-          </a:ln>
-        </p:spPr>
-        <p:style>
-          <a:lnRef idx="1">
-            <a:schemeClr val="accent1"/>
-          </a:lnRef>
-          <a:fillRef idx="3">
-            <a:schemeClr val="accent1"/>
-          </a:fillRef>
-          <a:effectRef idx="2">
-            <a:schemeClr val="accent1"/>
-          </a:effectRef>
-          <a:fontRef idx="minor">
-            <a:schemeClr val="lt1"/>
-          </a:fontRef>
-        </p:style>
-        <p:txBody>
-          <a:bodyPr rtlCol="0" anchor="ctr" wrap="square" lIns="73152" rIns="73152" tIns="36576" bIns="36576"/>
-          <a:lstStyle/>
-          <a:p>
-            <a:pPr algn="ctr"/>
-            <a:r>
-              <a:rPr sz="1100" b="0" i="0">
-                <a:solidFill>
-                  <a:srgbClr val="1F2D3D"/>
-                </a:solidFill>
-                <a:latin typeface="Calibri"/>
-              </a:rPr>
-              <a:t>Theme catalog, epic catalog
-Cross-discipline mapping
-Review pile + decision log</a:t>
-            </a:r>
-          </a:p>
-        </p:txBody>
-      </p:sp>
-      <p:sp>
-        <p:nvSpPr>
-          <p:cNvPr id="10" name="TextBox 9"/>
+          <p:cNvPr id="4" name="TextBox 3"/>
           <p:cNvSpPr txBox="1"/>
           <p:nvPr/>
         </p:nvSpPr>
         <p:spPr>
           <a:xfrm>
-            <a:off x="457200" y="2880360"/>
-            <a:ext cx="11430000" cy="365760"/>
+            <a:off x="457200" y="960120"/>
+            <a:ext cx="11430000" cy="457200"/>
           </a:xfrm>
           <a:prstGeom prst="rect">
             <a:avLst/>
@@ -15201,188 +16081,27 @@
           <a:p>
             <a:pPr algn="l"/>
             <a:r>
-              <a:rPr sz="1500" b="1" i="0">
-                <a:solidFill>
-                  <a:srgbClr val="1F4E79"/>
-                </a:solidFill>
-                <a:latin typeface="Calibri"/>
-              </a:rPr>
-              <a:t>What we need from the client — mandatory</a:t>
-            </a:r>
-          </a:p>
-        </p:txBody>
-      </p:sp>
-      <p:sp>
-        <p:nvSpPr>
-          <p:cNvPr id="11" name="TextBox 10"/>
-          <p:cNvSpPr txBox="1"/>
-          <p:nvPr/>
-        </p:nvSpPr>
-        <p:spPr>
-          <a:xfrm>
-            <a:off x="640080" y="3246120"/>
-            <a:ext cx="10972800" cy="1463040"/>
-          </a:xfrm>
-          <a:prstGeom prst="rect">
-            <a:avLst/>
-          </a:prstGeom>
-          <a:noFill/>
-        </p:spPr>
-        <p:txBody>
-          <a:bodyPr wrap="square" anchor="t">
-            <a:spAutoFit/>
-          </a:bodyPr>
-          <a:lstStyle/>
-          <a:p>
-            <a:pPr algn="l">
-              <a:spcAft>
-                <a:spcPts val="300"/>
-              </a:spcAft>
-            </a:pPr>
-            <a:r>
-              <a:rPr sz="1100">
-                <a:solidFill>
-                  <a:srgbClr val="1F2D3D"/>
-                </a:solidFill>
-                <a:latin typeface="Calibri"/>
-              </a:rPr>
-              <a:t>•  The list of tests for each discipline in scope (blood culture, urine culture, target pathogens for Microbiology).</a:t>
-            </a:r>
-          </a:p>
-          <a:p>
-            <a:pPr algn="l">
-              <a:spcAft>
-                <a:spcPts val="300"/>
-              </a:spcAft>
-            </a:pPr>
-            <a:r>
-              <a:rPr sz="1100">
-                <a:solidFill>
-                  <a:srgbClr val="1F2D3D"/>
-                </a:solidFill>
-                <a:latin typeface="Calibri"/>
-              </a:rPr>
-              <a:t>•  The list of roles in those disciplines (with type: human / system / external).</a:t>
-            </a:r>
-          </a:p>
-          <a:p>
-            <a:pPr algn="l">
-              <a:spcAft>
-                <a:spcPts val="300"/>
-              </a:spcAft>
-            </a:pPr>
-            <a:r>
-              <a:rPr sz="1100">
-                <a:solidFill>
-                  <a:srgbClr val="1F2D3D"/>
-                </a:solidFill>
-                <a:latin typeface="Calibri"/>
-              </a:rPr>
-              <a:t>•  The prior discipline's theme catalog and epic catalog (small structured YAMLs — Cytology for the seminal extension).</a:t>
-            </a:r>
-          </a:p>
-          <a:p>
-            <a:pPr algn="l">
-              <a:spcAft>
-                <a:spcPts val="300"/>
-              </a:spcAft>
-            </a:pPr>
-            <a:r>
-              <a:rPr sz="1100">
-                <a:solidFill>
-                  <a:srgbClr val="1F2D3D"/>
-                </a:solidFill>
-                <a:latin typeface="Calibri"/>
-              </a:rPr>
-              <a:t>•  A sample of ~20 SOPs per new discipline to seed Phase 1.</a:t>
-            </a:r>
-          </a:p>
-        </p:txBody>
-      </p:sp>
-      <p:sp>
-        <p:nvSpPr>
-          <p:cNvPr id="12" name="TextBox 11"/>
-          <p:cNvSpPr txBox="1"/>
-          <p:nvPr/>
-        </p:nvSpPr>
-        <p:spPr>
-          <a:xfrm>
-            <a:off x="457200" y="4709160"/>
-            <a:ext cx="11430000" cy="320040"/>
-          </a:xfrm>
-          <a:prstGeom prst="rect">
-            <a:avLst/>
-          </a:prstGeom>
-          <a:noFill/>
-        </p:spPr>
-        <p:txBody>
-          <a:bodyPr wrap="square" anchor="t">
-            <a:spAutoFit/>
-          </a:bodyPr>
-          <a:lstStyle/>
-          <a:p>
-            <a:pPr algn="l"/>
-            <a:r>
-              <a:rPr sz="1200" b="1" i="1">
-                <a:solidFill>
-                  <a:srgbClr val="55606E"/>
-                </a:solidFill>
-                <a:latin typeface="Calibri"/>
-              </a:rPr>
-              <a:t>Optional — quality enhancement</a:t>
-            </a:r>
-          </a:p>
-        </p:txBody>
-      </p:sp>
-      <p:sp>
-        <p:nvSpPr>
-          <p:cNvPr id="13" name="TextBox 12"/>
-          <p:cNvSpPr txBox="1"/>
-          <p:nvPr/>
-        </p:nvSpPr>
-        <p:spPr>
-          <a:xfrm>
-            <a:off x="640080" y="5029200"/>
-            <a:ext cx="10972800" cy="457200"/>
-          </a:xfrm>
-          <a:prstGeom prst="rect">
-            <a:avLst/>
-          </a:prstGeom>
-          <a:noFill/>
-        </p:spPr>
-        <p:txBody>
-          <a:bodyPr wrap="square" anchor="t">
-            <a:spAutoFit/>
-          </a:bodyPr>
-          <a:lstStyle/>
-          <a:p>
-            <a:pPr algn="l">
-              <a:spcAft>
-                <a:spcPts val="300"/>
-              </a:spcAft>
-            </a:pPr>
-            <a:r>
-              <a:rPr sz="1100">
-                <a:solidFill>
-                  <a:srgbClr val="55606E"/>
-                </a:solidFill>
-                <a:latin typeface="Calibri"/>
-              </a:rPr>
-              <a:t>•  Sanitized prior-discipline Jira export — improves story style fidelity if available; not required for the system to function.</a:t>
-            </a:r>
-          </a:p>
-        </p:txBody>
-      </p:sp>
-      <p:sp>
-        <p:nvSpPr>
-          <p:cNvPr id="14" name="Rounded Rectangle 13"/>
+              <a:rPr sz="1200" b="0" i="0">
+                <a:solidFill>
+                  <a:srgbClr val="1F2D3D"/>
+                </a:solidFill>
+                <a:latin typeface="Calibri"/>
+              </a:rPr>
+              <a:t>Failures at three levels — each has a deterministic fallback. No human intervention is required at runtime.</a:t>
+            </a:r>
+          </a:p>
+        </p:txBody>
+      </p:sp>
+      <p:sp>
+        <p:nvSpPr>
+          <p:cNvPr id="5" name="Rounded Rectangle 4"/>
           <p:cNvSpPr/>
           <p:nvPr/>
         </p:nvSpPr>
         <p:spPr>
           <a:xfrm>
-            <a:off x="457200" y="5623560"/>
-            <a:ext cx="11475720" cy="777240"/>
+            <a:off x="376275" y="1554480"/>
+            <a:ext cx="3703320" cy="457200"/>
           </a:xfrm>
           <a:prstGeom prst="roundRect">
             <a:avLst/>
@@ -15416,20 +16135,928 @@
           <a:p>
             <a:pPr algn="ctr"/>
             <a:r>
-              <a:rPr sz="1300" b="1" i="0">
+              <a:rPr sz="1400" b="1" i="0">
                 <a:solidFill>
                   <a:srgbClr val="1F4E79"/>
                 </a:solidFill>
                 <a:latin typeface="Calibri"/>
               </a:rPr>
-              <a:t>Alignment ask: do these inputs match what's available on your side, and does the output match what your dev team would consume?</a:t>
-            </a:r>
-          </a:p>
-        </p:txBody>
-      </p:sp>
-      <p:sp>
-        <p:nvSpPr>
-          <p:cNvPr id="15" name="Rectangle 14"/>
+              <a:t>Per-call</a:t>
+            </a:r>
+          </a:p>
+        </p:txBody>
+      </p:sp>
+      <p:sp>
+        <p:nvSpPr>
+          <p:cNvPr id="6" name="TextBox 5"/>
+          <p:cNvSpPr txBox="1"/>
+          <p:nvPr/>
+        </p:nvSpPr>
+        <p:spPr>
+          <a:xfrm>
+            <a:off x="376275" y="2057400"/>
+            <a:ext cx="3703320" cy="228600"/>
+          </a:xfrm>
+          <a:prstGeom prst="rect">
+            <a:avLst/>
+          </a:prstGeom>
+          <a:noFill/>
+        </p:spPr>
+        <p:txBody>
+          <a:bodyPr wrap="square" anchor="t">
+            <a:spAutoFit/>
+          </a:bodyPr>
+          <a:lstStyle/>
+          <a:p>
+            <a:pPr algn="ctr"/>
+            <a:r>
+              <a:rPr sz="1000" b="0" i="1">
+                <a:solidFill>
+                  <a:srgbClr val="55606E"/>
+                </a:solidFill>
+                <a:latin typeface="Calibri"/>
+              </a:rPr>
+              <a:t>(LLM error or timeout)</a:t>
+            </a:r>
+          </a:p>
+        </p:txBody>
+      </p:sp>
+      <p:sp>
+        <p:nvSpPr>
+          <p:cNvPr id="7" name="Rectangle 6"/>
+          <p:cNvSpPr/>
+          <p:nvPr/>
+        </p:nvSpPr>
+        <p:spPr>
+          <a:xfrm>
+            <a:off x="376275" y="2331720"/>
+            <a:ext cx="3703320" cy="2606040"/>
+          </a:xfrm>
+          <a:prstGeom prst="rect">
+            <a:avLst/>
+          </a:prstGeom>
+          <a:solidFill>
+            <a:srgbClr val="FFFFFF"/>
+          </a:solidFill>
+          <a:ln w="9525">
+            <a:solidFill>
+              <a:srgbClr val="C9952C"/>
+            </a:solidFill>
+          </a:ln>
+        </p:spPr>
+        <p:style>
+          <a:lnRef idx="1">
+            <a:schemeClr val="accent1"/>
+          </a:lnRef>
+          <a:fillRef idx="3">
+            <a:schemeClr val="accent1"/>
+          </a:fillRef>
+          <a:effectRef idx="2">
+            <a:schemeClr val="accent1"/>
+          </a:effectRef>
+          <a:fontRef idx="minor">
+            <a:schemeClr val="lt1"/>
+          </a:fontRef>
+        </p:style>
+        <p:txBody>
+          <a:bodyPr rtlCol="0" anchor="t" wrap="square" lIns="109728" rIns="109728" tIns="91440" bIns="91440"/>
+          <a:lstStyle/>
+          <a:p>
+            <a:pPr algn="l">
+              <a:spcAft>
+                <a:spcPts val="600"/>
+              </a:spcAft>
+            </a:pPr>
+            <a:r>
+              <a:rPr sz="1000" b="1">
+                <a:solidFill>
+                  <a:srgbClr val="1F4E79"/>
+                </a:solidFill>
+                <a:latin typeface="Calibri"/>
+              </a:rPr>
+              <a:t>Trigger: </a:t>
+            </a:r>
+            <a:r>
+              <a:rPr sz="1000">
+                <a:solidFill>
+                  <a:srgbClr val="1F2D3D"/>
+                </a:solidFill>
+                <a:latin typeface="Calibri"/>
+              </a:rPr>
+              <a:t>An agent's LLM call returns an error or times out.</a:t>
+            </a:r>
+          </a:p>
+          <a:p>
+            <a:pPr algn="l">
+              <a:spcAft>
+                <a:spcPts val="600"/>
+              </a:spcAft>
+            </a:pPr>
+            <a:r>
+              <a:rPr sz="1000" b="1">
+                <a:solidFill>
+                  <a:srgbClr val="1F4E79"/>
+                </a:solidFill>
+                <a:latin typeface="Calibri"/>
+              </a:rPr>
+              <a:t>Fallback: </a:t>
+            </a:r>
+            <a:r>
+              <a:rPr sz="1000">
+                <a:solidFill>
+                  <a:srgbClr val="1F2D3D"/>
+                </a:solidFill>
+                <a:latin typeface="Calibri"/>
+              </a:rPr>
+              <a:t>Retry with exponential backoff (3 attempts).</a:t>
+            </a:r>
+          </a:p>
+          <a:p>
+            <a:pPr algn="l">
+              <a:spcAft>
+                <a:spcPts val="600"/>
+              </a:spcAft>
+            </a:pPr>
+            <a:r>
+              <a:rPr sz="1000" b="1">
+                <a:solidFill>
+                  <a:srgbClr val="1F4E79"/>
+                </a:solidFill>
+                <a:latin typeface="Calibri"/>
+              </a:rPr>
+              <a:t>If persistent: </a:t>
+            </a:r>
+            <a:r>
+              <a:rPr sz="1000">
+                <a:solidFill>
+                  <a:srgbClr val="1F2D3D"/>
+                </a:solidFill>
+                <a:latin typeface="Calibri"/>
+              </a:rPr>
+              <a:t>Defer the item to the next batch; log the failure to the audit trail.</a:t>
+            </a:r>
+          </a:p>
+          <a:p>
+            <a:pPr algn="l">
+              <a:spcAft>
+                <a:spcPts val="600"/>
+              </a:spcAft>
+            </a:pPr>
+            <a:r>
+              <a:rPr sz="1000" b="1">
+                <a:solidFill>
+                  <a:srgbClr val="1F4E79"/>
+                </a:solidFill>
+                <a:latin typeface="Calibri"/>
+              </a:rPr>
+              <a:t>Pipeline impact: </a:t>
+            </a:r>
+            <a:r>
+              <a:rPr sz="1000">
+                <a:solidFill>
+                  <a:srgbClr val="1F2D3D"/>
+                </a:solidFill>
+                <a:latin typeface="Calibri"/>
+              </a:rPr>
+              <a:t>Other items continue. No block.</a:t>
+            </a:r>
+          </a:p>
+        </p:txBody>
+      </p:sp>
+      <p:sp>
+        <p:nvSpPr>
+          <p:cNvPr id="8" name="Rounded Rectangle 7"/>
+          <p:cNvSpPr/>
+          <p:nvPr/>
+        </p:nvSpPr>
+        <p:spPr>
+          <a:xfrm>
+            <a:off x="4244187" y="1554480"/>
+            <a:ext cx="3703320" cy="457200"/>
+          </a:xfrm>
+          <a:prstGeom prst="roundRect">
+            <a:avLst/>
+          </a:prstGeom>
+          <a:solidFill>
+            <a:srgbClr val="ECF4E8"/>
+          </a:solidFill>
+          <a:ln w="12700">
+            <a:solidFill>
+              <a:srgbClr val="5C8347"/>
+            </a:solidFill>
+          </a:ln>
+        </p:spPr>
+        <p:style>
+          <a:lnRef idx="1">
+            <a:schemeClr val="accent1"/>
+          </a:lnRef>
+          <a:fillRef idx="3">
+            <a:schemeClr val="accent1"/>
+          </a:fillRef>
+          <a:effectRef idx="2">
+            <a:schemeClr val="accent1"/>
+          </a:effectRef>
+          <a:fontRef idx="minor">
+            <a:schemeClr val="lt1"/>
+          </a:fontRef>
+        </p:style>
+        <p:txBody>
+          <a:bodyPr rtlCol="0" anchor="ctr" wrap="square" lIns="73152" rIns="73152" tIns="36576" bIns="36576"/>
+          <a:lstStyle/>
+          <a:p>
+            <a:pPr algn="ctr"/>
+            <a:r>
+              <a:rPr sz="1400" b="1" i="0">
+                <a:solidFill>
+                  <a:srgbClr val="1F4E79"/>
+                </a:solidFill>
+                <a:latin typeface="Calibri"/>
+              </a:rPr>
+              <a:t>Per-story</a:t>
+            </a:r>
+          </a:p>
+        </p:txBody>
+      </p:sp>
+      <p:sp>
+        <p:nvSpPr>
+          <p:cNvPr id="9" name="TextBox 8"/>
+          <p:cNvSpPr txBox="1"/>
+          <p:nvPr/>
+        </p:nvSpPr>
+        <p:spPr>
+          <a:xfrm>
+            <a:off x="4244187" y="2057400"/>
+            <a:ext cx="3703320" cy="228600"/>
+          </a:xfrm>
+          <a:prstGeom prst="rect">
+            <a:avLst/>
+          </a:prstGeom>
+          <a:noFill/>
+        </p:spPr>
+        <p:txBody>
+          <a:bodyPr wrap="square" anchor="t">
+            <a:spAutoFit/>
+          </a:bodyPr>
+          <a:lstStyle/>
+          <a:p>
+            <a:pPr algn="ctr"/>
+            <a:r>
+              <a:rPr sz="1000" b="0" i="1">
+                <a:solidFill>
+                  <a:srgbClr val="55606E"/>
+                </a:solidFill>
+                <a:latin typeface="Calibri"/>
+              </a:rPr>
+              <a:t>(quality check fails)</a:t>
+            </a:r>
+          </a:p>
+        </p:txBody>
+      </p:sp>
+      <p:sp>
+        <p:nvSpPr>
+          <p:cNvPr id="10" name="Rectangle 9"/>
+          <p:cNvSpPr/>
+          <p:nvPr/>
+        </p:nvSpPr>
+        <p:spPr>
+          <a:xfrm>
+            <a:off x="4244187" y="2331720"/>
+            <a:ext cx="3703320" cy="2606040"/>
+          </a:xfrm>
+          <a:prstGeom prst="rect">
+            <a:avLst/>
+          </a:prstGeom>
+          <a:solidFill>
+            <a:srgbClr val="FFFFFF"/>
+          </a:solidFill>
+          <a:ln w="9525">
+            <a:solidFill>
+              <a:srgbClr val="5C8347"/>
+            </a:solidFill>
+          </a:ln>
+        </p:spPr>
+        <p:style>
+          <a:lnRef idx="1">
+            <a:schemeClr val="accent1"/>
+          </a:lnRef>
+          <a:fillRef idx="3">
+            <a:schemeClr val="accent1"/>
+          </a:fillRef>
+          <a:effectRef idx="2">
+            <a:schemeClr val="accent1"/>
+          </a:effectRef>
+          <a:fontRef idx="minor">
+            <a:schemeClr val="lt1"/>
+          </a:fontRef>
+        </p:style>
+        <p:txBody>
+          <a:bodyPr rtlCol="0" anchor="t" wrap="square" lIns="109728" rIns="109728" tIns="91440" bIns="91440"/>
+          <a:lstStyle/>
+          <a:p>
+            <a:pPr algn="l">
+              <a:spcAft>
+                <a:spcPts val="600"/>
+              </a:spcAft>
+            </a:pPr>
+            <a:r>
+              <a:rPr sz="1000" b="1">
+                <a:solidFill>
+                  <a:srgbClr val="1F4E79"/>
+                </a:solidFill>
+                <a:latin typeface="Calibri"/>
+              </a:rPr>
+              <a:t>Trigger: </a:t>
+            </a:r>
+            <a:r>
+              <a:rPr sz="1000">
+                <a:solidFill>
+                  <a:srgbClr val="1F2D3D"/>
+                </a:solidFill>
+                <a:latin typeface="Calibri"/>
+              </a:rPr>
+              <a:t>Validator rejects a story.</a:t>
+            </a:r>
+          </a:p>
+          <a:p>
+            <a:pPr algn="l">
+              <a:spcAft>
+                <a:spcPts val="600"/>
+              </a:spcAft>
+            </a:pPr>
+            <a:r>
+              <a:rPr sz="1000" b="1">
+                <a:solidFill>
+                  <a:srgbClr val="1F4E79"/>
+                </a:solidFill>
+                <a:latin typeface="Calibri"/>
+              </a:rPr>
+              <a:t>Fallback: </a:t>
+            </a:r>
+            <a:r>
+              <a:rPr sz="1000">
+                <a:solidFill>
+                  <a:srgbClr val="1F2D3D"/>
+                </a:solidFill>
+                <a:latin typeface="Calibri"/>
+              </a:rPr>
+              <a:t>Up to 2 revision attempts; the Validator drives revisions with the failed-checks list.</a:t>
+            </a:r>
+          </a:p>
+          <a:p>
+            <a:pPr algn="l">
+              <a:spcAft>
+                <a:spcPts val="600"/>
+              </a:spcAft>
+            </a:pPr>
+            <a:r>
+              <a:rPr sz="1000" b="1">
+                <a:solidFill>
+                  <a:srgbClr val="1F4E79"/>
+                </a:solidFill>
+                <a:latin typeface="Calibri"/>
+              </a:rPr>
+              <a:t>If persistent: </a:t>
+            </a:r>
+            <a:r>
+              <a:rPr sz="1000">
+                <a:solidFill>
+                  <a:srgbClr val="1F2D3D"/>
+                </a:solidFill>
+                <a:latin typeface="Calibri"/>
+              </a:rPr>
+              <a:t>Auto-park to the review pile. Story does not reach Output A in strict mode.</a:t>
+            </a:r>
+          </a:p>
+          <a:p>
+            <a:pPr algn="l">
+              <a:spcAft>
+                <a:spcPts val="600"/>
+              </a:spcAft>
+            </a:pPr>
+            <a:r>
+              <a:rPr sz="1000" b="1">
+                <a:solidFill>
+                  <a:srgbClr val="1F4E79"/>
+                </a:solidFill>
+                <a:latin typeface="Calibri"/>
+              </a:rPr>
+              <a:t>Pipeline impact: </a:t>
+            </a:r>
+            <a:r>
+              <a:rPr sz="1000">
+                <a:solidFill>
+                  <a:srgbClr val="1F2D3D"/>
+                </a:solidFill>
+                <a:latin typeface="Calibri"/>
+              </a:rPr>
+              <a:t>Subsequent stories continue. No block.</a:t>
+            </a:r>
+          </a:p>
+        </p:txBody>
+      </p:sp>
+      <p:sp>
+        <p:nvSpPr>
+          <p:cNvPr id="11" name="Rounded Rectangle 10"/>
+          <p:cNvSpPr/>
+          <p:nvPr/>
+        </p:nvSpPr>
+        <p:spPr>
+          <a:xfrm>
+            <a:off x="8112099" y="1554480"/>
+            <a:ext cx="3703320" cy="457200"/>
+          </a:xfrm>
+          <a:prstGeom prst="roundRect">
+            <a:avLst/>
+          </a:prstGeom>
+          <a:solidFill>
+            <a:srgbClr val="F8E3E3"/>
+          </a:solidFill>
+          <a:ln w="12700">
+            <a:solidFill>
+              <a:srgbClr val="A84A4A"/>
+            </a:solidFill>
+          </a:ln>
+        </p:spPr>
+        <p:style>
+          <a:lnRef idx="1">
+            <a:schemeClr val="accent1"/>
+          </a:lnRef>
+          <a:fillRef idx="3">
+            <a:schemeClr val="accent1"/>
+          </a:fillRef>
+          <a:effectRef idx="2">
+            <a:schemeClr val="accent1"/>
+          </a:effectRef>
+          <a:fontRef idx="minor">
+            <a:schemeClr val="lt1"/>
+          </a:fontRef>
+        </p:style>
+        <p:txBody>
+          <a:bodyPr rtlCol="0" anchor="ctr" wrap="square" lIns="73152" rIns="73152" tIns="36576" bIns="36576"/>
+          <a:lstStyle/>
+          <a:p>
+            <a:pPr algn="ctr"/>
+            <a:r>
+              <a:rPr sz="1400" b="1" i="0">
+                <a:solidFill>
+                  <a:srgbClr val="1F4E79"/>
+                </a:solidFill>
+                <a:latin typeface="Calibri"/>
+              </a:rPr>
+              <a:t>Per-batch</a:t>
+            </a:r>
+          </a:p>
+        </p:txBody>
+      </p:sp>
+      <p:sp>
+        <p:nvSpPr>
+          <p:cNvPr id="12" name="TextBox 11"/>
+          <p:cNvSpPr txBox="1"/>
+          <p:nvPr/>
+        </p:nvSpPr>
+        <p:spPr>
+          <a:xfrm>
+            <a:off x="8112099" y="2057400"/>
+            <a:ext cx="3703320" cy="228600"/>
+          </a:xfrm>
+          <a:prstGeom prst="rect">
+            <a:avLst/>
+          </a:prstGeom>
+          <a:noFill/>
+        </p:spPr>
+        <p:txBody>
+          <a:bodyPr wrap="square" anchor="t">
+            <a:spAutoFit/>
+          </a:bodyPr>
+          <a:lstStyle/>
+          <a:p>
+            <a:pPr algn="ctr"/>
+            <a:r>
+              <a:rPr sz="1000" b="0" i="1">
+                <a:solidFill>
+                  <a:srgbClr val="55606E"/>
+                </a:solidFill>
+                <a:latin typeface="Calibri"/>
+              </a:rPr>
+              <a:t>(drift / catalog issues)</a:t>
+            </a:r>
+          </a:p>
+        </p:txBody>
+      </p:sp>
+      <p:sp>
+        <p:nvSpPr>
+          <p:cNvPr id="13" name="Rectangle 12"/>
+          <p:cNvSpPr/>
+          <p:nvPr/>
+        </p:nvSpPr>
+        <p:spPr>
+          <a:xfrm>
+            <a:off x="8112099" y="2331720"/>
+            <a:ext cx="3703320" cy="2606040"/>
+          </a:xfrm>
+          <a:prstGeom prst="rect">
+            <a:avLst/>
+          </a:prstGeom>
+          <a:solidFill>
+            <a:srgbClr val="FFFFFF"/>
+          </a:solidFill>
+          <a:ln w="9525">
+            <a:solidFill>
+              <a:srgbClr val="A84A4A"/>
+            </a:solidFill>
+          </a:ln>
+        </p:spPr>
+        <p:style>
+          <a:lnRef idx="1">
+            <a:schemeClr val="accent1"/>
+          </a:lnRef>
+          <a:fillRef idx="3">
+            <a:schemeClr val="accent1"/>
+          </a:fillRef>
+          <a:effectRef idx="2">
+            <a:schemeClr val="accent1"/>
+          </a:effectRef>
+          <a:fontRef idx="minor">
+            <a:schemeClr val="lt1"/>
+          </a:fontRef>
+        </p:style>
+        <p:txBody>
+          <a:bodyPr rtlCol="0" anchor="t" wrap="square" lIns="109728" rIns="109728" tIns="91440" bIns="91440"/>
+          <a:lstStyle/>
+          <a:p>
+            <a:pPr algn="l">
+              <a:spcAft>
+                <a:spcPts val="600"/>
+              </a:spcAft>
+            </a:pPr>
+            <a:r>
+              <a:rPr sz="1000" b="1">
+                <a:solidFill>
+                  <a:srgbClr val="1F4E79"/>
+                </a:solidFill>
+                <a:latin typeface="Calibri"/>
+              </a:rPr>
+              <a:t>Trigger: </a:t>
+            </a:r>
+            <a:r>
+              <a:rPr sz="1000">
+                <a:solidFill>
+                  <a:srgbClr val="1F2D3D"/>
+                </a:solidFill>
+                <a:latin typeface="Calibri"/>
+              </a:rPr>
+              <a:t>G0 / E0 bucket &gt; 5% rolling, or auto-park rate &gt; 15% sustained.</a:t>
+            </a:r>
+          </a:p>
+          <a:p>
+            <a:pPr algn="l">
+              <a:spcAft>
+                <a:spcPts val="600"/>
+              </a:spcAft>
+            </a:pPr>
+            <a:r>
+              <a:rPr sz="1000" b="1">
+                <a:solidFill>
+                  <a:srgbClr val="1F4E79"/>
+                </a:solidFill>
+                <a:latin typeface="Calibri"/>
+              </a:rPr>
+              <a:t>Fallback: </a:t>
+            </a:r>
+            <a:r>
+              <a:rPr sz="1000">
+                <a:solidFill>
+                  <a:srgbClr val="1F2D3D"/>
+                </a:solidFill>
+                <a:latin typeface="Calibri"/>
+              </a:rPr>
+              <a:t>Auto-rerun discovery with τ_match −0.05 (more permissive); re-cluster G0; quorum re-evaluates.</a:t>
+            </a:r>
+          </a:p>
+          <a:p>
+            <a:pPr algn="l">
+              <a:spcAft>
+                <a:spcPts val="600"/>
+              </a:spcAft>
+            </a:pPr>
+            <a:r>
+              <a:rPr sz="1000" b="1">
+                <a:solidFill>
+                  <a:srgbClr val="1F4E79"/>
+                </a:solidFill>
+                <a:latin typeface="Calibri"/>
+              </a:rPr>
+              <a:t>If τ_match floor (0.50) hit: </a:t>
+            </a:r>
+            <a:r>
+              <a:rPr sz="1000">
+                <a:solidFill>
+                  <a:srgbClr val="1F2D3D"/>
+                </a:solidFill>
+                <a:latin typeface="Calibri"/>
+              </a:rPr>
+              <a:t>Drift report flags the discipline for manual catalog re-curation (one-time architect action).</a:t>
+            </a:r>
+          </a:p>
+          <a:p>
+            <a:pPr algn="l">
+              <a:spcAft>
+                <a:spcPts val="600"/>
+              </a:spcAft>
+            </a:pPr>
+            <a:r>
+              <a:rPr sz="1000" b="1">
+                <a:solidFill>
+                  <a:srgbClr val="1F4E79"/>
+                </a:solidFill>
+                <a:latin typeface="Calibri"/>
+              </a:rPr>
+              <a:t>Pipeline impact: </a:t>
+            </a:r>
+            <a:r>
+              <a:rPr sz="1000">
+                <a:solidFill>
+                  <a:srgbClr val="1F2D3D"/>
+                </a:solidFill>
+                <a:latin typeface="Calibri"/>
+              </a:rPr>
+              <a:t>Pipeline continues. The drift report is informational.</a:t>
+            </a:r>
+          </a:p>
+        </p:txBody>
+      </p:sp>
+      <p:sp>
+        <p:nvSpPr>
+          <p:cNvPr id="14" name="TextBox 13"/>
+          <p:cNvSpPr txBox="1"/>
+          <p:nvPr/>
+        </p:nvSpPr>
+        <p:spPr>
+          <a:xfrm>
+            <a:off x="457200" y="5120640"/>
+            <a:ext cx="11430000" cy="320040"/>
+          </a:xfrm>
+          <a:prstGeom prst="rect">
+            <a:avLst/>
+          </a:prstGeom>
+          <a:noFill/>
+        </p:spPr>
+        <p:txBody>
+          <a:bodyPr wrap="square" anchor="t">
+            <a:spAutoFit/>
+          </a:bodyPr>
+          <a:lstStyle/>
+          <a:p>
+            <a:pPr algn="l"/>
+            <a:r>
+              <a:rPr sz="1400" b="1" i="0">
+                <a:solidFill>
+                  <a:srgbClr val="1F4E79"/>
+                </a:solidFill>
+                <a:latin typeface="Calibri"/>
+              </a:rPr>
+              <a:t>Three queues collect different kinds of failures</a:t>
+            </a:r>
+          </a:p>
+        </p:txBody>
+      </p:sp>
+      <p:sp>
+        <p:nvSpPr>
+          <p:cNvPr id="15" name="Rounded Rectangle 14"/>
+          <p:cNvSpPr/>
+          <p:nvPr/>
+        </p:nvSpPr>
+        <p:spPr>
+          <a:xfrm>
+            <a:off x="376275" y="5532120"/>
+            <a:ext cx="3703320" cy="914399"/>
+          </a:xfrm>
+          <a:prstGeom prst="roundRect">
+            <a:avLst/>
+          </a:prstGeom>
+          <a:solidFill>
+            <a:srgbClr val="F1F5FA"/>
+          </a:solidFill>
+          <a:ln w="9525">
+            <a:solidFill>
+              <a:srgbClr val="4A6EA0"/>
+            </a:solidFill>
+          </a:ln>
+        </p:spPr>
+        <p:style>
+          <a:lnRef idx="1">
+            <a:schemeClr val="accent1"/>
+          </a:lnRef>
+          <a:fillRef idx="3">
+            <a:schemeClr val="accent1"/>
+          </a:fillRef>
+          <a:effectRef idx="2">
+            <a:schemeClr val="accent1"/>
+          </a:effectRef>
+          <a:fontRef idx="minor">
+            <a:schemeClr val="lt1"/>
+          </a:fontRef>
+        </p:style>
+        <p:txBody>
+          <a:bodyPr rtlCol="0" anchor="ctr" wrap="square" lIns="109728" rIns="109728" tIns="73152" bIns="73152"/>
+          <a:lstStyle/>
+          <a:p>
+            <a:pPr algn="l"/>
+            <a:r>
+              <a:rPr sz="1200" b="1">
+                <a:solidFill>
+                  <a:srgbClr val="1F4E79"/>
+                </a:solidFill>
+                <a:latin typeface="Calibri"/>
+              </a:rPr>
+              <a:t>Review pile</a:t>
+            </a:r>
+          </a:p>
+          <a:p>
+            <a:pPr algn="l"/>
+            <a:r>
+              <a:rPr sz="1000" i="1">
+                <a:solidFill>
+                  <a:srgbClr val="55606E"/>
+                </a:solidFill>
+                <a:latin typeface="Calibri"/>
+              </a:rPr>
+              <a:t>Quality / rubric failures</a:t>
+            </a:r>
+          </a:p>
+          <a:p>
+            <a:pPr algn="l"/>
+            <a:r>
+              <a:rPr sz="1000">
+                <a:solidFill>
+                  <a:srgbClr val="1F2D3D"/>
+                </a:solidFill>
+                <a:latin typeface="Calibri"/>
+              </a:rPr>
+              <a:t>Stories that failed Validator after 2 revisions.</a:t>
+            </a:r>
+          </a:p>
+        </p:txBody>
+      </p:sp>
+      <p:sp>
+        <p:nvSpPr>
+          <p:cNvPr id="16" name="Rounded Rectangle 15"/>
+          <p:cNvSpPr/>
+          <p:nvPr/>
+        </p:nvSpPr>
+        <p:spPr>
+          <a:xfrm>
+            <a:off x="4244187" y="5532120"/>
+            <a:ext cx="3703320" cy="914399"/>
+          </a:xfrm>
+          <a:prstGeom prst="roundRect">
+            <a:avLst/>
+          </a:prstGeom>
+          <a:solidFill>
+            <a:srgbClr val="F1F5FA"/>
+          </a:solidFill>
+          <a:ln w="9525">
+            <a:solidFill>
+              <a:srgbClr val="4A6EA0"/>
+            </a:solidFill>
+          </a:ln>
+        </p:spPr>
+        <p:style>
+          <a:lnRef idx="1">
+            <a:schemeClr val="accent1"/>
+          </a:lnRef>
+          <a:fillRef idx="3">
+            <a:schemeClr val="accent1"/>
+          </a:fillRef>
+          <a:effectRef idx="2">
+            <a:schemeClr val="accent1"/>
+          </a:effectRef>
+          <a:fontRef idx="minor">
+            <a:schemeClr val="lt1"/>
+          </a:fontRef>
+        </p:style>
+        <p:txBody>
+          <a:bodyPr rtlCol="0" anchor="ctr" wrap="square" lIns="109728" rIns="109728" tIns="73152" bIns="73152"/>
+          <a:lstStyle/>
+          <a:p>
+            <a:pPr algn="l"/>
+            <a:r>
+              <a:rPr sz="1200" b="1">
+                <a:solidFill>
+                  <a:srgbClr val="1F4E79"/>
+                </a:solidFill>
+                <a:latin typeface="Calibri"/>
+              </a:rPr>
+              <a:t>G0 / E0 buckets</a:t>
+            </a:r>
+          </a:p>
+          <a:p>
+            <a:pPr algn="l"/>
+            <a:r>
+              <a:rPr sz="1000" i="1">
+                <a:solidFill>
+                  <a:srgbClr val="55606E"/>
+                </a:solidFill>
+                <a:latin typeface="Calibri"/>
+              </a:rPr>
+              <a:t>Classification failures</a:t>
+            </a:r>
+          </a:p>
+          <a:p>
+            <a:pPr algn="l"/>
+            <a:r>
+              <a:rPr sz="1000">
+                <a:solidFill>
+                  <a:srgbClr val="1F2D3D"/>
+                </a:solidFill>
+                <a:latin typeface="Calibri"/>
+              </a:rPr>
+              <a:t>Chunks (G0) and draft epics (E0) that didn't classify or cluster.</a:t>
+            </a:r>
+          </a:p>
+        </p:txBody>
+      </p:sp>
+      <p:sp>
+        <p:nvSpPr>
+          <p:cNvPr id="17" name="Rounded Rectangle 16"/>
+          <p:cNvSpPr/>
+          <p:nvPr/>
+        </p:nvSpPr>
+        <p:spPr>
+          <a:xfrm>
+            <a:off x="8112099" y="5532120"/>
+            <a:ext cx="3703320" cy="914399"/>
+          </a:xfrm>
+          <a:prstGeom prst="roundRect">
+            <a:avLst/>
+          </a:prstGeom>
+          <a:solidFill>
+            <a:srgbClr val="F1F5FA"/>
+          </a:solidFill>
+          <a:ln w="9525">
+            <a:solidFill>
+              <a:srgbClr val="4A6EA0"/>
+            </a:solidFill>
+          </a:ln>
+        </p:spPr>
+        <p:style>
+          <a:lnRef idx="1">
+            <a:schemeClr val="accent1"/>
+          </a:lnRef>
+          <a:fillRef idx="3">
+            <a:schemeClr val="accent1"/>
+          </a:fillRef>
+          <a:effectRef idx="2">
+            <a:schemeClr val="accent1"/>
+          </a:effectRef>
+          <a:fontRef idx="minor">
+            <a:schemeClr val="lt1"/>
+          </a:fontRef>
+        </p:style>
+        <p:txBody>
+          <a:bodyPr rtlCol="0" anchor="ctr" wrap="square" lIns="109728" rIns="109728" tIns="73152" bIns="73152"/>
+          <a:lstStyle/>
+          <a:p>
+            <a:pPr algn="l"/>
+            <a:r>
+              <a:rPr sz="1200" b="1">
+                <a:solidFill>
+                  <a:srgbClr val="1F4E79"/>
+                </a:solidFill>
+                <a:latin typeface="Calibri"/>
+              </a:rPr>
+              <a:t>Audit trail</a:t>
+            </a:r>
+          </a:p>
+          <a:p>
+            <a:pPr algn="l"/>
+            <a:r>
+              <a:rPr sz="1000" i="1">
+                <a:solidFill>
+                  <a:srgbClr val="55606E"/>
+                </a:solidFill>
+                <a:latin typeface="Calibri"/>
+              </a:rPr>
+              <a:t>Call-level errors</a:t>
+            </a:r>
+          </a:p>
+          <a:p>
+            <a:pPr algn="l"/>
+            <a:r>
+              <a:rPr sz="1000">
+                <a:solidFill>
+                  <a:srgbClr val="1F2D3D"/>
+                </a:solidFill>
+                <a:latin typeface="Calibri"/>
+              </a:rPr>
+              <a:t>LLM-call failures after retry exhaustion. For diagnostics.</a:t>
+            </a:r>
+          </a:p>
+        </p:txBody>
+      </p:sp>
+      <p:sp>
+        <p:nvSpPr>
+          <p:cNvPr id="18" name="Rectangle 17"/>
           <p:cNvSpPr/>
           <p:nvPr/>
         </p:nvSpPr>
@@ -15472,7 +17099,7 @@
       </p:sp>
       <p:sp>
         <p:nvSpPr>
-          <p:cNvPr id="16" name="TextBox 15"/>
+          <p:cNvPr id="19" name="TextBox 18"/>
           <p:cNvSpPr txBox="1"/>
           <p:nvPr/>
         </p:nvSpPr>
@@ -15507,7 +17134,7 @@
       </p:sp>
       <p:sp>
         <p:nvSpPr>
-          <p:cNvPr id="17" name="TextBox 16"/>
+          <p:cNvPr id="20" name="TextBox 19"/>
           <p:cNvSpPr txBox="1"/>
           <p:nvPr/>
         </p:nvSpPr>
@@ -15535,7 +17162,7 @@
                 </a:solidFill>
                 <a:latin typeface="Calibri"/>
               </a:rPr>
-              <a:t>9 / 9</a:t>
+              <a:t>9 / 10</a:t>
             </a:r>
           </a:p>
         </p:txBody>

--- a/client_alignment_deck.pptx
+++ b/client_alignment_deck.pptx
@@ -15,6 +15,8 @@
     <p:sldId id="263" r:id="rId14"/>
     <p:sldId id="264" r:id="rId15"/>
     <p:sldId id="265" r:id="rId16"/>
+    <p:sldId id="266" r:id="rId17"/>
+    <p:sldId id="267" r:id="rId18"/>
   </p:sldIdLst>
   <p:sldSz cx="12191695" cy="6858000" type="screen4x3"/>
   <p:notesSz cx="6858000" cy="9144000"/>
@@ -4108,7 +4110,7 @@
                 </a:solidFill>
                 <a:latin typeface="Calibri"/>
               </a:rPr>
-              <a:t>1 / 10</a:t>
+              <a:t>1 / 12</a:t>
             </a:r>
           </a:p>
         </p:txBody>
@@ -4161,7 +4163,7 @@
                 </a:solidFill>
                 <a:latin typeface="Calibri"/>
               </a:rPr>
-              <a:t>What ships and the alignment ask</a:t>
+              <a:t>Validator at work — a sample story walks through the checks</a:t>
             </a:r>
           </a:p>
         </p:txBody>
@@ -4211,14 +4213,483 @@
       </p:sp>
       <p:sp>
         <p:nvSpPr>
-          <p:cNvPr id="4" name="Rounded Rectangle 3"/>
+          <p:cNvPr id="4" name="TextBox 3"/>
+          <p:cNvSpPr txBox="1"/>
+          <p:nvPr/>
+        </p:nvSpPr>
+        <p:spPr>
+          <a:xfrm>
+            <a:off x="457200" y="960120"/>
+            <a:ext cx="11430000" cy="365760"/>
+          </a:xfrm>
+          <a:prstGeom prst="rect">
+            <a:avLst/>
+          </a:prstGeom>
+          <a:noFill/>
+        </p:spPr>
+        <p:txBody>
+          <a:bodyPr wrap="square" anchor="t">
+            <a:spAutoFit/>
+          </a:bodyPr>
+          <a:lstStyle/>
+          <a:p>
+            <a:pPr algn="l"/>
+            <a:r>
+              <a:rPr sz="1200" b="0" i="1">
+                <a:solidFill>
+                  <a:srgbClr val="55606E"/>
+                </a:solidFill>
+                <a:latin typeface="Calibri"/>
+              </a:rPr>
+              <a:t>Each check is explicit. Failure on attempt 1; pass on revise (attempt 2).</a:t>
+            </a:r>
+          </a:p>
+        </p:txBody>
+      </p:sp>
+      <p:sp>
+        <p:nvSpPr>
+          <p:cNvPr id="5" name="Rounded Rectangle 4"/>
           <p:cNvSpPr/>
           <p:nvPr/>
         </p:nvSpPr>
         <p:spPr>
           <a:xfrm>
-            <a:off x="335127" y="1188720"/>
-            <a:ext cx="3657600" cy="502920"/>
+            <a:off x="365760" y="1417320"/>
+            <a:ext cx="5638647" cy="365760"/>
+          </a:xfrm>
+          <a:prstGeom prst="roundRect">
+            <a:avLst/>
+          </a:prstGeom>
+          <a:solidFill>
+            <a:srgbClr val="F8E3E3"/>
+          </a:solidFill>
+          <a:ln w="12700">
+            <a:solidFill>
+              <a:srgbClr val="A84A4A"/>
+            </a:solidFill>
+          </a:ln>
+        </p:spPr>
+        <p:style>
+          <a:lnRef idx="1">
+            <a:schemeClr val="accent1"/>
+          </a:lnRef>
+          <a:fillRef idx="3">
+            <a:schemeClr val="accent1"/>
+          </a:fillRef>
+          <a:effectRef idx="2">
+            <a:schemeClr val="accent1"/>
+          </a:effectRef>
+          <a:fontRef idx="minor">
+            <a:schemeClr val="lt1"/>
+          </a:fontRef>
+        </p:style>
+        <p:txBody>
+          <a:bodyPr rtlCol="0" anchor="ctr" wrap="square" lIns="73152" rIns="73152" tIns="36576" bIns="36576"/>
+          <a:lstStyle/>
+          <a:p>
+            <a:pPr algn="ctr"/>
+            <a:r>
+              <a:rPr sz="1400" b="1" i="0">
+                <a:solidFill>
+                  <a:srgbClr val="A84A4A"/>
+                </a:solidFill>
+                <a:latin typeface="Calibri"/>
+              </a:rPr>
+              <a:t>ATTEMPT 1   ✗   draft</a:t>
+            </a:r>
+          </a:p>
+        </p:txBody>
+      </p:sp>
+      <p:sp>
+        <p:nvSpPr>
+          <p:cNvPr id="6" name="Rectangle 5"/>
+          <p:cNvSpPr/>
+          <p:nvPr/>
+        </p:nvSpPr>
+        <p:spPr>
+          <a:xfrm>
+            <a:off x="365760" y="1828800"/>
+            <a:ext cx="5638647" cy="1417320"/>
+          </a:xfrm>
+          <a:prstGeom prst="rect">
+            <a:avLst/>
+          </a:prstGeom>
+          <a:solidFill>
+            <a:srgbClr val="F6F6F6"/>
+          </a:solidFill>
+          <a:ln w="9525">
+            <a:solidFill>
+              <a:srgbClr val="C0C8D0"/>
+            </a:solidFill>
+          </a:ln>
+        </p:spPr>
+        <p:style>
+          <a:lnRef idx="1">
+            <a:schemeClr val="accent1"/>
+          </a:lnRef>
+          <a:fillRef idx="3">
+            <a:schemeClr val="accent1"/>
+          </a:fillRef>
+          <a:effectRef idx="2">
+            <a:schemeClr val="accent1"/>
+          </a:effectRef>
+          <a:fontRef idx="minor">
+            <a:schemeClr val="lt1"/>
+          </a:fontRef>
+        </p:style>
+        <p:txBody>
+          <a:bodyPr rtlCol="0" anchor="t" wrap="none" lIns="109728" rIns="109728" tIns="73152" bIns="73152"/>
+          <a:lstStyle/>
+          <a:p>
+            <a:pPr algn="l">
+              <a:spcAft>
+                <a:spcPts val="0"/>
+              </a:spcAft>
+            </a:pPr>
+            <a:r>
+              <a:rPr sz="850">
+                <a:solidFill>
+                  <a:srgbClr val="1F2D3D"/>
+                </a:solidFill>
+                <a:latin typeface="Consolas"/>
+              </a:rPr>
+              <a:t>story (draft):</a:t>
+            </a:r>
+          </a:p>
+          <a:p>
+            <a:pPr algn="l">
+              <a:spcAft>
+                <a:spcPts val="0"/>
+              </a:spcAft>
+            </a:pPr>
+            <a:r>
+              <a:rPr sz="850">
+                <a:solidFill>
+                  <a:srgbClr val="1F2D3D"/>
+                </a:solidFill>
+                <a:latin typeface="Consolas"/>
+              </a:rPr>
+              <a:t>  shape:   capability</a:t>
+            </a:r>
+          </a:p>
+          <a:p>
+            <a:pPr algn="l">
+              <a:spcAft>
+                <a:spcPts val="0"/>
+              </a:spcAft>
+            </a:pPr>
+            <a:r>
+              <a:rPr sz="850">
+                <a:solidFill>
+                  <a:srgbClr val="1F2D3D"/>
+                </a:solidFill>
+                <a:latin typeface="Consolas"/>
+              </a:rPr>
+              <a:t>  title:   "Validate accession appropriately"</a:t>
+            </a:r>
+          </a:p>
+          <a:p>
+            <a:pPr algn="l">
+              <a:spcAft>
+                <a:spcPts val="0"/>
+              </a:spcAft>
+            </a:pPr>
+            <a:r>
+              <a:rPr sz="850">
+                <a:solidFill>
+                  <a:srgbClr val="1F2D3D"/>
+                </a:solidFill>
+                <a:latin typeface="Consolas"/>
+              </a:rPr>
+              <a:t>  persona: lims</a:t>
+            </a:r>
+          </a:p>
+          <a:p>
+            <a:pPr algn="l">
+              <a:spcAft>
+                <a:spcPts val="0"/>
+              </a:spcAft>
+            </a:pPr>
+            <a:r>
+              <a:rPr sz="850">
+                <a:solidFill>
+                  <a:srgbClr val="1F2D3D"/>
+                </a:solidFill>
+                <a:latin typeface="Consolas"/>
+              </a:rPr>
+              <a:t>  tests:   [gram_stain]</a:t>
+            </a:r>
+          </a:p>
+          <a:p>
+            <a:pPr algn="l">
+              <a:spcAft>
+                <a:spcPts val="0"/>
+              </a:spcAft>
+            </a:pPr>
+            <a:r>
+              <a:rPr sz="850">
+                <a:solidFill>
+                  <a:srgbClr val="1F2D3D"/>
+                </a:solidFill>
+                <a:latin typeface="Consolas"/>
+              </a:rPr>
+              <a:t>  stage:   accessioning_verification</a:t>
+            </a:r>
+          </a:p>
+          <a:p>
+            <a:pPr algn="l">
+              <a:spcAft>
+                <a:spcPts val="0"/>
+              </a:spcAft>
+            </a:pPr>
+            <a:r>
+              <a:rPr sz="850">
+                <a:solidFill>
+                  <a:srgbClr val="1F2D3D"/>
+                </a:solidFill>
+                <a:latin typeface="Consolas"/>
+              </a:rPr>
+              <a:t>  AC: "When specimen received, system MUST</a:t>
+            </a:r>
+          </a:p>
+          <a:p>
+            <a:pPr algn="l">
+              <a:spcAft>
+                <a:spcPts val="0"/>
+              </a:spcAft>
+            </a:pPr>
+            <a:r>
+              <a:rPr sz="850">
+                <a:solidFill>
+                  <a:srgbClr val="1F2D3D"/>
+                </a:solidFill>
+                <a:latin typeface="Consolas"/>
+              </a:rPr>
+              <a:t>       validate appropriately"</a:t>
+            </a:r>
+          </a:p>
+          <a:p>
+            <a:pPr algn="l">
+              <a:spcAft>
+                <a:spcPts val="0"/>
+              </a:spcAft>
+            </a:pPr>
+            <a:r>
+              <a:rPr sz="850">
+                <a:solidFill>
+                  <a:srgbClr val="1F2D3D"/>
+                </a:solidFill>
+                <a:latin typeface="Consolas"/>
+              </a:rPr>
+              <a:t>  source:  SOP-MICRO-014, lines 23-31</a:t>
+            </a:r>
+          </a:p>
+        </p:txBody>
+      </p:sp>
+      <p:sp>
+        <p:nvSpPr>
+          <p:cNvPr id="7" name="TextBox 6"/>
+          <p:cNvSpPr txBox="1"/>
+          <p:nvPr/>
+        </p:nvSpPr>
+        <p:spPr>
+          <a:xfrm>
+            <a:off x="411480" y="3337560"/>
+            <a:ext cx="5547207" cy="228600"/>
+          </a:xfrm>
+          <a:prstGeom prst="rect">
+            <a:avLst/>
+          </a:prstGeom>
+          <a:noFill/>
+        </p:spPr>
+        <p:txBody>
+          <a:bodyPr wrap="square" anchor="t">
+            <a:spAutoFit/>
+          </a:bodyPr>
+          <a:lstStyle/>
+          <a:p>
+            <a:pPr algn="l"/>
+            <a:r>
+              <a:rPr sz="1100" b="1" i="0">
+                <a:solidFill>
+                  <a:srgbClr val="1F4E79"/>
+                </a:solidFill>
+                <a:latin typeface="Calibri"/>
+              </a:rPr>
+              <a:t>Validator checks:</a:t>
+            </a:r>
+          </a:p>
+        </p:txBody>
+      </p:sp>
+      <p:sp>
+        <p:nvSpPr>
+          <p:cNvPr id="8" name="TextBox 7"/>
+          <p:cNvSpPr txBox="1"/>
+          <p:nvPr/>
+        </p:nvSpPr>
+        <p:spPr>
+          <a:xfrm>
+            <a:off x="457200" y="3630168"/>
+            <a:ext cx="5455767" cy="274320"/>
+          </a:xfrm>
+          <a:prstGeom prst="rect">
+            <a:avLst/>
+          </a:prstGeom>
+          <a:noFill/>
+        </p:spPr>
+        <p:txBody>
+          <a:bodyPr wrap="square" anchor="t">
+            <a:spAutoFit/>
+          </a:bodyPr>
+          <a:lstStyle/>
+          <a:p>
+            <a:pPr algn="l"/>
+            <a:r>
+              <a:rPr sz="1000" b="0" i="0">
+                <a:solidFill>
+                  <a:srgbClr val="5C8347"/>
+                </a:solidFill>
+                <a:latin typeface="Calibri"/>
+              </a:rPr>
+              <a:t>✓    1. Closed-enum check  —  tests, persona, stage all in catalog</a:t>
+            </a:r>
+          </a:p>
+        </p:txBody>
+      </p:sp>
+      <p:sp>
+        <p:nvSpPr>
+          <p:cNvPr id="9" name="TextBox 8"/>
+          <p:cNvSpPr txBox="1"/>
+          <p:nvPr/>
+        </p:nvSpPr>
+        <p:spPr>
+          <a:xfrm>
+            <a:off x="457200" y="3922776"/>
+            <a:ext cx="5455767" cy="274320"/>
+          </a:xfrm>
+          <a:prstGeom prst="rect">
+            <a:avLst/>
+          </a:prstGeom>
+          <a:noFill/>
+        </p:spPr>
+        <p:txBody>
+          <a:bodyPr wrap="square" anchor="t">
+            <a:spAutoFit/>
+          </a:bodyPr>
+          <a:lstStyle/>
+          <a:p>
+            <a:pPr algn="l"/>
+            <a:r>
+              <a:rPr sz="1000" b="0" i="0">
+                <a:solidFill>
+                  <a:srgbClr val="5C8347"/>
+                </a:solidFill>
+                <a:latin typeface="Calibri"/>
+              </a:rPr>
+              <a:t>✓    2. Shape verification  —  declared 'capability' matches content</a:t>
+            </a:r>
+          </a:p>
+        </p:txBody>
+      </p:sp>
+      <p:sp>
+        <p:nvSpPr>
+          <p:cNvPr id="10" name="TextBox 9"/>
+          <p:cNvSpPr txBox="1"/>
+          <p:nvPr/>
+        </p:nvSpPr>
+        <p:spPr>
+          <a:xfrm>
+            <a:off x="457200" y="4215384"/>
+            <a:ext cx="5455767" cy="274320"/>
+          </a:xfrm>
+          <a:prstGeom prst="rect">
+            <a:avLst/>
+          </a:prstGeom>
+          <a:noFill/>
+        </p:spPr>
+        <p:txBody>
+          <a:bodyPr wrap="square" anchor="t">
+            <a:spAutoFit/>
+          </a:bodyPr>
+          <a:lstStyle/>
+          <a:p>
+            <a:pPr algn="l"/>
+            <a:r>
+              <a:rPr sz="1000" b="1" i="0">
+                <a:solidFill>
+                  <a:srgbClr val="A84A4A"/>
+                </a:solidFill>
+                <a:latin typeface="Calibri"/>
+              </a:rPr>
+              <a:t>✗    3. Shape rubric  —  capability:no_ambiguous_quantifiers fails on 'appropriately'</a:t>
+            </a:r>
+          </a:p>
+        </p:txBody>
+      </p:sp>
+      <p:sp>
+        <p:nvSpPr>
+          <p:cNvPr id="11" name="Rounded Rectangle 10"/>
+          <p:cNvSpPr/>
+          <p:nvPr/>
+        </p:nvSpPr>
+        <p:spPr>
+          <a:xfrm>
+            <a:off x="365760" y="4599432"/>
+            <a:ext cx="5638647" cy="365760"/>
+          </a:xfrm>
+          <a:prstGeom prst="roundRect">
+            <a:avLst/>
+          </a:prstGeom>
+          <a:solidFill>
+            <a:srgbClr val="F8E3E3"/>
+          </a:solidFill>
+          <a:ln w="12700">
+            <a:solidFill>
+              <a:srgbClr val="A84A4A"/>
+            </a:solidFill>
+          </a:ln>
+        </p:spPr>
+        <p:style>
+          <a:lnRef idx="1">
+            <a:schemeClr val="accent1"/>
+          </a:lnRef>
+          <a:fillRef idx="3">
+            <a:schemeClr val="accent1"/>
+          </a:fillRef>
+          <a:effectRef idx="2">
+            <a:schemeClr val="accent1"/>
+          </a:effectRef>
+          <a:fontRef idx="minor">
+            <a:schemeClr val="lt1"/>
+          </a:fontRef>
+        </p:style>
+        <p:txBody>
+          <a:bodyPr rtlCol="0" anchor="ctr" wrap="square" lIns="73152" rIns="73152" tIns="36576" bIns="36576"/>
+          <a:lstStyle/>
+          <a:p>
+            <a:pPr algn="ctr"/>
+            <a:r>
+              <a:rPr sz="1100" b="1" i="0">
+                <a:solidFill>
+                  <a:srgbClr val="A84A4A"/>
+                </a:solidFill>
+                <a:latin typeface="Calibri"/>
+              </a:rPr>
+              <a:t>→ Revise  (attempt 1 of 2)  —  Story Extractor reworks the AC</a:t>
+            </a:r>
+          </a:p>
+        </p:txBody>
+      </p:sp>
+      <p:sp>
+        <p:nvSpPr>
+          <p:cNvPr id="12" name="Rounded Rectangle 11"/>
+          <p:cNvSpPr/>
+          <p:nvPr/>
+        </p:nvSpPr>
+        <p:spPr>
+          <a:xfrm>
+            <a:off x="6187287" y="1417320"/>
+            <a:ext cx="5638647" cy="365760"/>
           </a:xfrm>
           <a:prstGeom prst="roundRect">
             <a:avLst/>
@@ -4252,6 +4723,1922 @@
           <a:p>
             <a:pPr algn="ctr"/>
             <a:r>
+              <a:rPr sz="1400" b="1" i="0">
+                <a:solidFill>
+                  <a:srgbClr val="5C8347"/>
+                </a:solidFill>
+                <a:latin typeface="Calibri"/>
+              </a:rPr>
+              <a:t>ATTEMPT 2   ✓   revised</a:t>
+            </a:r>
+          </a:p>
+        </p:txBody>
+      </p:sp>
+      <p:sp>
+        <p:nvSpPr>
+          <p:cNvPr id="13" name="Rectangle 12"/>
+          <p:cNvSpPr/>
+          <p:nvPr/>
+        </p:nvSpPr>
+        <p:spPr>
+          <a:xfrm>
+            <a:off x="6187287" y="1828800"/>
+            <a:ext cx="5638647" cy="1417320"/>
+          </a:xfrm>
+          <a:prstGeom prst="rect">
+            <a:avLst/>
+          </a:prstGeom>
+          <a:solidFill>
+            <a:srgbClr val="F6F6F6"/>
+          </a:solidFill>
+          <a:ln w="9525">
+            <a:solidFill>
+              <a:srgbClr val="C0C8D0"/>
+            </a:solidFill>
+          </a:ln>
+        </p:spPr>
+        <p:style>
+          <a:lnRef idx="1">
+            <a:schemeClr val="accent1"/>
+          </a:lnRef>
+          <a:fillRef idx="3">
+            <a:schemeClr val="accent1"/>
+          </a:fillRef>
+          <a:effectRef idx="2">
+            <a:schemeClr val="accent1"/>
+          </a:effectRef>
+          <a:fontRef idx="minor">
+            <a:schemeClr val="lt1"/>
+          </a:fontRef>
+        </p:style>
+        <p:txBody>
+          <a:bodyPr rtlCol="0" anchor="t" wrap="none" lIns="109728" rIns="109728" tIns="73152" bIns="73152"/>
+          <a:lstStyle/>
+          <a:p>
+            <a:pPr algn="l">
+              <a:spcAft>
+                <a:spcPts val="0"/>
+              </a:spcAft>
+            </a:pPr>
+            <a:r>
+              <a:rPr sz="850">
+                <a:solidFill>
+                  <a:srgbClr val="1F2D3D"/>
+                </a:solidFill>
+                <a:latin typeface="Consolas"/>
+              </a:rPr>
+              <a:t>story (revised):</a:t>
+            </a:r>
+          </a:p>
+          <a:p>
+            <a:pPr algn="l">
+              <a:spcAft>
+                <a:spcPts val="0"/>
+              </a:spcAft>
+            </a:pPr>
+            <a:r>
+              <a:rPr sz="850">
+                <a:solidFill>
+                  <a:srgbClr val="1F2D3D"/>
+                </a:solidFill>
+                <a:latin typeface="Consolas"/>
+              </a:rPr>
+              <a:t>  shape:   capability</a:t>
+            </a:r>
+          </a:p>
+          <a:p>
+            <a:pPr algn="l">
+              <a:spcAft>
+                <a:spcPts val="0"/>
+              </a:spcAft>
+            </a:pPr>
+            <a:r>
+              <a:rPr sz="850">
+                <a:solidFill>
+                  <a:srgbClr val="1F2D3D"/>
+                </a:solidFill>
+                <a:latin typeface="Consolas"/>
+              </a:rPr>
+              <a:t>  title:   "Validate accession against open order"</a:t>
+            </a:r>
+          </a:p>
+          <a:p>
+            <a:pPr algn="l">
+              <a:spcAft>
+                <a:spcPts val="0"/>
+              </a:spcAft>
+            </a:pPr>
+            <a:r>
+              <a:rPr sz="850">
+                <a:solidFill>
+                  <a:srgbClr val="1F2D3D"/>
+                </a:solidFill>
+                <a:latin typeface="Consolas"/>
+              </a:rPr>
+              <a:t>  persona: lims</a:t>
+            </a:r>
+          </a:p>
+          <a:p>
+            <a:pPr algn="l">
+              <a:spcAft>
+                <a:spcPts val="0"/>
+              </a:spcAft>
+            </a:pPr>
+            <a:r>
+              <a:rPr sz="850">
+                <a:solidFill>
+                  <a:srgbClr val="1F2D3D"/>
+                </a:solidFill>
+                <a:latin typeface="Consolas"/>
+              </a:rPr>
+              <a:t>  tests:   [gram_stain]</a:t>
+            </a:r>
+          </a:p>
+          <a:p>
+            <a:pPr algn="l">
+              <a:spcAft>
+                <a:spcPts val="0"/>
+              </a:spcAft>
+            </a:pPr>
+            <a:r>
+              <a:rPr sz="850">
+                <a:solidFill>
+                  <a:srgbClr val="1F2D3D"/>
+                </a:solidFill>
+                <a:latin typeface="Consolas"/>
+              </a:rPr>
+              <a:t>  stage:   accessioning_verification</a:t>
+            </a:r>
+          </a:p>
+          <a:p>
+            <a:pPr algn="l">
+              <a:spcAft>
+                <a:spcPts val="0"/>
+              </a:spcAft>
+            </a:pPr>
+            <a:r>
+              <a:rPr sz="850">
+                <a:solidFill>
+                  <a:srgbClr val="1F2D3D"/>
+                </a:solidFill>
+                <a:latin typeface="Consolas"/>
+              </a:rPr>
+              <a:t>  AC: "When specimen received with accession,</a:t>
+            </a:r>
+          </a:p>
+          <a:p>
+            <a:pPr algn="l">
+              <a:spcAft>
+                <a:spcPts val="0"/>
+              </a:spcAft>
+            </a:pPr>
+            <a:r>
+              <a:rPr sz="850">
+                <a:solidFill>
+                  <a:srgbClr val="1F2D3D"/>
+                </a:solidFill>
+                <a:latin typeface="Consolas"/>
+              </a:rPr>
+              <a:t>       system MUST match against open order;</a:t>
+            </a:r>
+          </a:p>
+          <a:p>
+            <a:pPr algn="l">
+              <a:spcAft>
+                <a:spcPts val="0"/>
+              </a:spcAft>
+            </a:pPr>
+            <a:r>
+              <a:rPr sz="850">
+                <a:solidFill>
+                  <a:srgbClr val="1F2D3D"/>
+                </a:solidFill>
+                <a:latin typeface="Consolas"/>
+              </a:rPr>
+              <a:t>       if no match within 24h, MUST flag for</a:t>
+            </a:r>
+          </a:p>
+          <a:p>
+            <a:pPr algn="l">
+              <a:spcAft>
+                <a:spcPts val="0"/>
+              </a:spcAft>
+            </a:pPr>
+            <a:r>
+              <a:rPr sz="850">
+                <a:solidFill>
+                  <a:srgbClr val="1F2D3D"/>
+                </a:solidFill>
+                <a:latin typeface="Consolas"/>
+              </a:rPr>
+              <a:t>       accessioning review"</a:t>
+            </a:r>
+          </a:p>
+          <a:p>
+            <a:pPr algn="l">
+              <a:spcAft>
+                <a:spcPts val="0"/>
+              </a:spcAft>
+            </a:pPr>
+            <a:r>
+              <a:rPr sz="850">
+                <a:solidFill>
+                  <a:srgbClr val="1F2D3D"/>
+                </a:solidFill>
+                <a:latin typeface="Consolas"/>
+              </a:rPr>
+              <a:t>  source:  SOP-MICRO-014, lines 23-31</a:t>
+            </a:r>
+          </a:p>
+        </p:txBody>
+      </p:sp>
+      <p:sp>
+        <p:nvSpPr>
+          <p:cNvPr id="14" name="TextBox 13"/>
+          <p:cNvSpPr txBox="1"/>
+          <p:nvPr/>
+        </p:nvSpPr>
+        <p:spPr>
+          <a:xfrm>
+            <a:off x="6233007" y="3337560"/>
+            <a:ext cx="5547207" cy="228600"/>
+          </a:xfrm>
+          <a:prstGeom prst="rect">
+            <a:avLst/>
+          </a:prstGeom>
+          <a:noFill/>
+        </p:spPr>
+        <p:txBody>
+          <a:bodyPr wrap="square" anchor="t">
+            <a:spAutoFit/>
+          </a:bodyPr>
+          <a:lstStyle/>
+          <a:p>
+            <a:pPr algn="l"/>
+            <a:r>
+              <a:rPr sz="1100" b="1" i="0">
+                <a:solidFill>
+                  <a:srgbClr val="1F4E79"/>
+                </a:solidFill>
+                <a:latin typeface="Calibri"/>
+              </a:rPr>
+              <a:t>Validator checks:</a:t>
+            </a:r>
+          </a:p>
+        </p:txBody>
+      </p:sp>
+      <p:sp>
+        <p:nvSpPr>
+          <p:cNvPr id="15" name="TextBox 14"/>
+          <p:cNvSpPr txBox="1"/>
+          <p:nvPr/>
+        </p:nvSpPr>
+        <p:spPr>
+          <a:xfrm>
+            <a:off x="6278727" y="3630168"/>
+            <a:ext cx="5455767" cy="274320"/>
+          </a:xfrm>
+          <a:prstGeom prst="rect">
+            <a:avLst/>
+          </a:prstGeom>
+          <a:noFill/>
+        </p:spPr>
+        <p:txBody>
+          <a:bodyPr wrap="square" anchor="t">
+            <a:spAutoFit/>
+          </a:bodyPr>
+          <a:lstStyle/>
+          <a:p>
+            <a:pPr algn="l"/>
+            <a:r>
+              <a:rPr sz="1000" b="0" i="0">
+                <a:solidFill>
+                  <a:srgbClr val="5C8347"/>
+                </a:solidFill>
+                <a:latin typeface="Calibri"/>
+              </a:rPr>
+              <a:t>✓    1. Closed-enum check  —  passes (unchanged)</a:t>
+            </a:r>
+          </a:p>
+        </p:txBody>
+      </p:sp>
+      <p:sp>
+        <p:nvSpPr>
+          <p:cNvPr id="16" name="TextBox 15"/>
+          <p:cNvSpPr txBox="1"/>
+          <p:nvPr/>
+        </p:nvSpPr>
+        <p:spPr>
+          <a:xfrm>
+            <a:off x="6278727" y="3922776"/>
+            <a:ext cx="5455767" cy="274320"/>
+          </a:xfrm>
+          <a:prstGeom prst="rect">
+            <a:avLst/>
+          </a:prstGeom>
+          <a:noFill/>
+        </p:spPr>
+        <p:txBody>
+          <a:bodyPr wrap="square" anchor="t">
+            <a:spAutoFit/>
+          </a:bodyPr>
+          <a:lstStyle/>
+          <a:p>
+            <a:pPr algn="l"/>
+            <a:r>
+              <a:rPr sz="1000" b="0" i="0">
+                <a:solidFill>
+                  <a:srgbClr val="5C8347"/>
+                </a:solidFill>
+                <a:latin typeface="Calibri"/>
+              </a:rPr>
+              <a:t>✓    2. Shape verification  —  passes</a:t>
+            </a:r>
+          </a:p>
+        </p:txBody>
+      </p:sp>
+      <p:sp>
+        <p:nvSpPr>
+          <p:cNvPr id="17" name="TextBox 16"/>
+          <p:cNvSpPr txBox="1"/>
+          <p:nvPr/>
+        </p:nvSpPr>
+        <p:spPr>
+          <a:xfrm>
+            <a:off x="6278727" y="4215384"/>
+            <a:ext cx="5455767" cy="274320"/>
+          </a:xfrm>
+          <a:prstGeom prst="rect">
+            <a:avLst/>
+          </a:prstGeom>
+          <a:noFill/>
+        </p:spPr>
+        <p:txBody>
+          <a:bodyPr wrap="square" anchor="t">
+            <a:spAutoFit/>
+          </a:bodyPr>
+          <a:lstStyle/>
+          <a:p>
+            <a:pPr algn="l"/>
+            <a:r>
+              <a:rPr sz="1000" b="1" i="0">
+                <a:solidFill>
+                  <a:srgbClr val="5C8347"/>
+                </a:solidFill>
+                <a:latin typeface="Calibri"/>
+              </a:rPr>
+              <a:t>✓    3. Shape rubric  —  concrete, observable, parameterized (24h)</a:t>
+            </a:r>
+          </a:p>
+        </p:txBody>
+      </p:sp>
+      <p:sp>
+        <p:nvSpPr>
+          <p:cNvPr id="18" name="Rounded Rectangle 17"/>
+          <p:cNvSpPr/>
+          <p:nvPr/>
+        </p:nvSpPr>
+        <p:spPr>
+          <a:xfrm>
+            <a:off x="6187287" y="4599432"/>
+            <a:ext cx="5638647" cy="365760"/>
+          </a:xfrm>
+          <a:prstGeom prst="roundRect">
+            <a:avLst/>
+          </a:prstGeom>
+          <a:solidFill>
+            <a:srgbClr val="DCE9D7"/>
+          </a:solidFill>
+          <a:ln w="12700">
+            <a:solidFill>
+              <a:srgbClr val="5C8347"/>
+            </a:solidFill>
+          </a:ln>
+        </p:spPr>
+        <p:style>
+          <a:lnRef idx="1">
+            <a:schemeClr val="accent1"/>
+          </a:lnRef>
+          <a:fillRef idx="3">
+            <a:schemeClr val="accent1"/>
+          </a:fillRef>
+          <a:effectRef idx="2">
+            <a:schemeClr val="accent1"/>
+          </a:effectRef>
+          <a:fontRef idx="minor">
+            <a:schemeClr val="lt1"/>
+          </a:fontRef>
+        </p:style>
+        <p:txBody>
+          <a:bodyPr rtlCol="0" anchor="ctr" wrap="square" lIns="73152" rIns="73152" tIns="36576" bIns="36576"/>
+          <a:lstStyle/>
+          <a:p>
+            <a:pPr algn="ctr"/>
+            <a:r>
+              <a:rPr sz="1100" b="1" i="0">
+                <a:solidFill>
+                  <a:srgbClr val="5C8347"/>
+                </a:solidFill>
+                <a:latin typeface="Calibri"/>
+              </a:rPr>
+              <a:t>→ Story kept (validated)  →  Output A</a:t>
+            </a:r>
+          </a:p>
+        </p:txBody>
+      </p:sp>
+      <p:sp>
+        <p:nvSpPr>
+          <p:cNvPr id="19" name="TextBox 18"/>
+          <p:cNvSpPr txBox="1"/>
+          <p:nvPr/>
+        </p:nvSpPr>
+        <p:spPr>
+          <a:xfrm>
+            <a:off x="457200" y="5102352"/>
+            <a:ext cx="11430000" cy="457200"/>
+          </a:xfrm>
+          <a:prstGeom prst="rect">
+            <a:avLst/>
+          </a:prstGeom>
+          <a:noFill/>
+        </p:spPr>
+        <p:txBody>
+          <a:bodyPr wrap="square" anchor="t">
+            <a:spAutoFit/>
+          </a:bodyPr>
+          <a:lstStyle/>
+          <a:p>
+            <a:pPr algn="ctr"/>
+            <a:r>
+              <a:rPr sz="1000" b="0" i="1">
+                <a:solidFill>
+                  <a:srgbClr val="55606E"/>
+                </a:solidFill>
+                <a:latin typeface="Calibri"/>
+              </a:rPr>
+              <a:t>Note:  closed-enum violations (e.g. invalid persona name) hard-reject without entering the revise loop. Only shape/AC issues consume revision attempts. Failures after 2 revisions auto-park to the review pile (see slide 11).</a:t>
+            </a:r>
+          </a:p>
+        </p:txBody>
+      </p:sp>
+      <p:sp>
+        <p:nvSpPr>
+          <p:cNvPr id="20" name="Rectangle 19"/>
+          <p:cNvSpPr/>
+          <p:nvPr/>
+        </p:nvSpPr>
+        <p:spPr>
+          <a:xfrm>
+            <a:off x="457200" y="6565392"/>
+            <a:ext cx="11274552" cy="10972"/>
+          </a:xfrm>
+          <a:prstGeom prst="rect">
+            <a:avLst/>
+          </a:prstGeom>
+          <a:solidFill>
+            <a:srgbClr val="D0D6DC"/>
+          </a:solidFill>
+          <a:ln>
+            <a:noFill/>
+          </a:ln>
+        </p:spPr>
+        <p:style>
+          <a:lnRef idx="1">
+            <a:schemeClr val="accent1"/>
+          </a:lnRef>
+          <a:fillRef idx="3">
+            <a:schemeClr val="accent1"/>
+          </a:fillRef>
+          <a:effectRef idx="2">
+            <a:schemeClr val="accent1"/>
+          </a:effectRef>
+          <a:fontRef idx="minor">
+            <a:schemeClr val="lt1"/>
+          </a:fontRef>
+        </p:style>
+        <p:txBody>
+          <a:bodyPr rtlCol="0" anchor="ctr"/>
+          <a:lstStyle/>
+          <a:p>
+            <a:pPr algn="ctr"/>
+          </a:p>
+        </p:txBody>
+      </p:sp>
+      <p:sp>
+        <p:nvSpPr>
+          <p:cNvPr id="21" name="TextBox 20"/>
+          <p:cNvSpPr txBox="1"/>
+          <p:nvPr/>
+        </p:nvSpPr>
+        <p:spPr>
+          <a:xfrm>
+            <a:off x="457200" y="6601968"/>
+            <a:ext cx="7315200" cy="228600"/>
+          </a:xfrm>
+          <a:prstGeom prst="rect">
+            <a:avLst/>
+          </a:prstGeom>
+          <a:noFill/>
+        </p:spPr>
+        <p:txBody>
+          <a:bodyPr wrap="square" anchor="t">
+            <a:spAutoFit/>
+          </a:bodyPr>
+          <a:lstStyle/>
+          <a:p>
+            <a:pPr algn="l"/>
+            <a:r>
+              <a:rPr sz="800" b="0" i="1">
+                <a:solidFill>
+                  <a:srgbClr val="90979F"/>
+                </a:solidFill>
+                <a:latin typeface="Calibri"/>
+              </a:rPr>
+              <a:t>LIMS Story Generation — Client Alignment</a:t>
+            </a:r>
+          </a:p>
+        </p:txBody>
+      </p:sp>
+      <p:sp>
+        <p:nvSpPr>
+          <p:cNvPr id="22" name="TextBox 21"/>
+          <p:cNvSpPr txBox="1"/>
+          <p:nvPr/>
+        </p:nvSpPr>
+        <p:spPr>
+          <a:xfrm>
+            <a:off x="10817352" y="6601968"/>
+            <a:ext cx="914400" cy="228600"/>
+          </a:xfrm>
+          <a:prstGeom prst="rect">
+            <a:avLst/>
+          </a:prstGeom>
+          <a:noFill/>
+        </p:spPr>
+        <p:txBody>
+          <a:bodyPr wrap="square" anchor="t">
+            <a:spAutoFit/>
+          </a:bodyPr>
+          <a:lstStyle/>
+          <a:p>
+            <a:pPr algn="r"/>
+            <a:r>
+              <a:rPr sz="800" b="0" i="0">
+                <a:solidFill>
+                  <a:srgbClr val="90979F"/>
+                </a:solidFill>
+                <a:latin typeface="Calibri"/>
+              </a:rPr>
+              <a:t>10 / 12</a:t>
+            </a:r>
+          </a:p>
+        </p:txBody>
+      </p:sp>
+    </p:spTree>
+  </p:cSld>
+  <p:clrMapOvr>
+    <a:masterClrMapping/>
+  </p:clrMapOvr>
+</p:sld>
+</file>
+
+<file path=ppt/slides/slide11.xml><?xml version="1.0" encoding="utf-8"?>
+<p:sld xmlns:a="http://schemas.openxmlformats.org/drawingml/2006/main" xmlns:p="http://schemas.openxmlformats.org/presentationml/2006/main" xmlns:r="http://schemas.openxmlformats.org/officeDocument/2006/relationships">
+  <p:cSld>
+    <p:spTree>
+      <p:nvGrpSpPr>
+        <p:cNvPr id="1" name=""/>
+        <p:cNvGrpSpPr/>
+        <p:nvPr/>
+      </p:nvGrpSpPr>
+      <p:grpSpPr/>
+      <p:sp>
+        <p:nvSpPr>
+          <p:cNvPr id="2" name="TextBox 1"/>
+          <p:cNvSpPr txBox="1"/>
+          <p:nvPr/>
+        </p:nvSpPr>
+        <p:spPr>
+          <a:xfrm>
+            <a:off x="457200" y="292608"/>
+            <a:ext cx="11430000" cy="548640"/>
+          </a:xfrm>
+          <a:prstGeom prst="rect">
+            <a:avLst/>
+          </a:prstGeom>
+          <a:noFill/>
+        </p:spPr>
+        <p:txBody>
+          <a:bodyPr wrap="square" anchor="t">
+            <a:spAutoFit/>
+          </a:bodyPr>
+          <a:lstStyle/>
+          <a:p>
+            <a:pPr algn="l"/>
+            <a:r>
+              <a:rPr sz="2600" b="1" i="0">
+                <a:solidFill>
+                  <a:srgbClr val="1F4E79"/>
+                </a:solidFill>
+                <a:latin typeface="Calibri"/>
+              </a:rPr>
+              <a:t>What happens when something fails</a:t>
+            </a:r>
+          </a:p>
+        </p:txBody>
+      </p:sp>
+      <p:sp>
+        <p:nvSpPr>
+          <p:cNvPr id="3" name="Rectangle 2"/>
+          <p:cNvSpPr/>
+          <p:nvPr/>
+        </p:nvSpPr>
+        <p:spPr>
+          <a:xfrm>
+            <a:off x="457200" y="868680"/>
+            <a:ext cx="1463040" cy="54864"/>
+          </a:xfrm>
+          <a:prstGeom prst="rect">
+            <a:avLst/>
+          </a:prstGeom>
+          <a:solidFill>
+            <a:srgbClr val="1F4E79"/>
+          </a:solidFill>
+          <a:ln>
+            <a:noFill/>
+          </a:ln>
+        </p:spPr>
+        <p:style>
+          <a:lnRef idx="1">
+            <a:schemeClr val="accent1"/>
+          </a:lnRef>
+          <a:fillRef idx="3">
+            <a:schemeClr val="accent1"/>
+          </a:fillRef>
+          <a:effectRef idx="2">
+            <a:schemeClr val="accent1"/>
+          </a:effectRef>
+          <a:fontRef idx="minor">
+            <a:schemeClr val="lt1"/>
+          </a:fontRef>
+        </p:style>
+        <p:txBody>
+          <a:bodyPr rtlCol="0" anchor="ctr"/>
+          <a:lstStyle/>
+          <a:p>
+            <a:pPr algn="ctr"/>
+          </a:p>
+        </p:txBody>
+      </p:sp>
+      <p:sp>
+        <p:nvSpPr>
+          <p:cNvPr id="4" name="TextBox 3"/>
+          <p:cNvSpPr txBox="1"/>
+          <p:nvPr/>
+        </p:nvSpPr>
+        <p:spPr>
+          <a:xfrm>
+            <a:off x="457200" y="960120"/>
+            <a:ext cx="11430000" cy="457200"/>
+          </a:xfrm>
+          <a:prstGeom prst="rect">
+            <a:avLst/>
+          </a:prstGeom>
+          <a:noFill/>
+        </p:spPr>
+        <p:txBody>
+          <a:bodyPr wrap="square" anchor="t">
+            <a:spAutoFit/>
+          </a:bodyPr>
+          <a:lstStyle/>
+          <a:p>
+            <a:pPr algn="l"/>
+            <a:r>
+              <a:rPr sz="1200" b="0" i="0">
+                <a:solidFill>
+                  <a:srgbClr val="1F2D3D"/>
+                </a:solidFill>
+                <a:latin typeface="Calibri"/>
+              </a:rPr>
+              <a:t>Failures at three levels — each has a deterministic fallback. No human intervention is required at runtime.</a:t>
+            </a:r>
+          </a:p>
+        </p:txBody>
+      </p:sp>
+      <p:sp>
+        <p:nvSpPr>
+          <p:cNvPr id="5" name="Rounded Rectangle 4"/>
+          <p:cNvSpPr/>
+          <p:nvPr/>
+        </p:nvSpPr>
+        <p:spPr>
+          <a:xfrm>
+            <a:off x="376275" y="1554480"/>
+            <a:ext cx="3703320" cy="457200"/>
+          </a:xfrm>
+          <a:prstGeom prst="roundRect">
+            <a:avLst/>
+          </a:prstGeom>
+          <a:solidFill>
+            <a:srgbClr val="FAE9CB"/>
+          </a:solidFill>
+          <a:ln w="12700">
+            <a:solidFill>
+              <a:srgbClr val="C9952C"/>
+            </a:solidFill>
+          </a:ln>
+        </p:spPr>
+        <p:style>
+          <a:lnRef idx="1">
+            <a:schemeClr val="accent1"/>
+          </a:lnRef>
+          <a:fillRef idx="3">
+            <a:schemeClr val="accent1"/>
+          </a:fillRef>
+          <a:effectRef idx="2">
+            <a:schemeClr val="accent1"/>
+          </a:effectRef>
+          <a:fontRef idx="minor">
+            <a:schemeClr val="lt1"/>
+          </a:fontRef>
+        </p:style>
+        <p:txBody>
+          <a:bodyPr rtlCol="0" anchor="ctr" wrap="square" lIns="73152" rIns="73152" tIns="36576" bIns="36576"/>
+          <a:lstStyle/>
+          <a:p>
+            <a:pPr algn="ctr"/>
+            <a:r>
+              <a:rPr sz="1400" b="1" i="0">
+                <a:solidFill>
+                  <a:srgbClr val="1F4E79"/>
+                </a:solidFill>
+                <a:latin typeface="Calibri"/>
+              </a:rPr>
+              <a:t>Per-call</a:t>
+            </a:r>
+          </a:p>
+        </p:txBody>
+      </p:sp>
+      <p:sp>
+        <p:nvSpPr>
+          <p:cNvPr id="6" name="TextBox 5"/>
+          <p:cNvSpPr txBox="1"/>
+          <p:nvPr/>
+        </p:nvSpPr>
+        <p:spPr>
+          <a:xfrm>
+            <a:off x="376275" y="2057400"/>
+            <a:ext cx="3703320" cy="228600"/>
+          </a:xfrm>
+          <a:prstGeom prst="rect">
+            <a:avLst/>
+          </a:prstGeom>
+          <a:noFill/>
+        </p:spPr>
+        <p:txBody>
+          <a:bodyPr wrap="square" anchor="t">
+            <a:spAutoFit/>
+          </a:bodyPr>
+          <a:lstStyle/>
+          <a:p>
+            <a:pPr algn="ctr"/>
+            <a:r>
+              <a:rPr sz="1000" b="0" i="1">
+                <a:solidFill>
+                  <a:srgbClr val="55606E"/>
+                </a:solidFill>
+                <a:latin typeface="Calibri"/>
+              </a:rPr>
+              <a:t>(LLM error or timeout)</a:t>
+            </a:r>
+          </a:p>
+        </p:txBody>
+      </p:sp>
+      <p:sp>
+        <p:nvSpPr>
+          <p:cNvPr id="7" name="Rectangle 6"/>
+          <p:cNvSpPr/>
+          <p:nvPr/>
+        </p:nvSpPr>
+        <p:spPr>
+          <a:xfrm>
+            <a:off x="376275" y="2331720"/>
+            <a:ext cx="3703320" cy="2606040"/>
+          </a:xfrm>
+          <a:prstGeom prst="rect">
+            <a:avLst/>
+          </a:prstGeom>
+          <a:solidFill>
+            <a:srgbClr val="FFFFFF"/>
+          </a:solidFill>
+          <a:ln w="9525">
+            <a:solidFill>
+              <a:srgbClr val="C9952C"/>
+            </a:solidFill>
+          </a:ln>
+        </p:spPr>
+        <p:style>
+          <a:lnRef idx="1">
+            <a:schemeClr val="accent1"/>
+          </a:lnRef>
+          <a:fillRef idx="3">
+            <a:schemeClr val="accent1"/>
+          </a:fillRef>
+          <a:effectRef idx="2">
+            <a:schemeClr val="accent1"/>
+          </a:effectRef>
+          <a:fontRef idx="minor">
+            <a:schemeClr val="lt1"/>
+          </a:fontRef>
+        </p:style>
+        <p:txBody>
+          <a:bodyPr rtlCol="0" anchor="t" wrap="square" lIns="109728" rIns="109728" tIns="91440" bIns="91440"/>
+          <a:lstStyle/>
+          <a:p>
+            <a:pPr algn="l">
+              <a:spcAft>
+                <a:spcPts val="600"/>
+              </a:spcAft>
+            </a:pPr>
+            <a:r>
+              <a:rPr sz="1000" b="1">
+                <a:solidFill>
+                  <a:srgbClr val="1F4E79"/>
+                </a:solidFill>
+                <a:latin typeface="Calibri"/>
+              </a:rPr>
+              <a:t>Trigger: </a:t>
+            </a:r>
+            <a:r>
+              <a:rPr sz="1000">
+                <a:solidFill>
+                  <a:srgbClr val="1F2D3D"/>
+                </a:solidFill>
+                <a:latin typeface="Calibri"/>
+              </a:rPr>
+              <a:t>An agent's LLM call returns an error or times out.</a:t>
+            </a:r>
+          </a:p>
+          <a:p>
+            <a:pPr algn="l">
+              <a:spcAft>
+                <a:spcPts val="600"/>
+              </a:spcAft>
+            </a:pPr>
+            <a:r>
+              <a:rPr sz="1000" b="1">
+                <a:solidFill>
+                  <a:srgbClr val="1F4E79"/>
+                </a:solidFill>
+                <a:latin typeface="Calibri"/>
+              </a:rPr>
+              <a:t>Fallback: </a:t>
+            </a:r>
+            <a:r>
+              <a:rPr sz="1000">
+                <a:solidFill>
+                  <a:srgbClr val="1F2D3D"/>
+                </a:solidFill>
+                <a:latin typeface="Calibri"/>
+              </a:rPr>
+              <a:t>Retry with exponential backoff (3 attempts).</a:t>
+            </a:r>
+          </a:p>
+          <a:p>
+            <a:pPr algn="l">
+              <a:spcAft>
+                <a:spcPts val="600"/>
+              </a:spcAft>
+            </a:pPr>
+            <a:r>
+              <a:rPr sz="1000" b="1">
+                <a:solidFill>
+                  <a:srgbClr val="1F4E79"/>
+                </a:solidFill>
+                <a:latin typeface="Calibri"/>
+              </a:rPr>
+              <a:t>If persistent: </a:t>
+            </a:r>
+            <a:r>
+              <a:rPr sz="1000">
+                <a:solidFill>
+                  <a:srgbClr val="1F2D3D"/>
+                </a:solidFill>
+                <a:latin typeface="Calibri"/>
+              </a:rPr>
+              <a:t>Defer the item to the next batch; log the failure to the audit trail.</a:t>
+            </a:r>
+          </a:p>
+          <a:p>
+            <a:pPr algn="l">
+              <a:spcAft>
+                <a:spcPts val="600"/>
+              </a:spcAft>
+            </a:pPr>
+            <a:r>
+              <a:rPr sz="1000" b="1">
+                <a:solidFill>
+                  <a:srgbClr val="1F4E79"/>
+                </a:solidFill>
+                <a:latin typeface="Calibri"/>
+              </a:rPr>
+              <a:t>Pipeline impact: </a:t>
+            </a:r>
+            <a:r>
+              <a:rPr sz="1000">
+                <a:solidFill>
+                  <a:srgbClr val="1F2D3D"/>
+                </a:solidFill>
+                <a:latin typeface="Calibri"/>
+              </a:rPr>
+              <a:t>Other items continue. No block.</a:t>
+            </a:r>
+          </a:p>
+        </p:txBody>
+      </p:sp>
+      <p:sp>
+        <p:nvSpPr>
+          <p:cNvPr id="8" name="Rounded Rectangle 7"/>
+          <p:cNvSpPr/>
+          <p:nvPr/>
+        </p:nvSpPr>
+        <p:spPr>
+          <a:xfrm>
+            <a:off x="4244187" y="1554480"/>
+            <a:ext cx="3703320" cy="457200"/>
+          </a:xfrm>
+          <a:prstGeom prst="roundRect">
+            <a:avLst/>
+          </a:prstGeom>
+          <a:solidFill>
+            <a:srgbClr val="ECF4E8"/>
+          </a:solidFill>
+          <a:ln w="12700">
+            <a:solidFill>
+              <a:srgbClr val="5C8347"/>
+            </a:solidFill>
+          </a:ln>
+        </p:spPr>
+        <p:style>
+          <a:lnRef idx="1">
+            <a:schemeClr val="accent1"/>
+          </a:lnRef>
+          <a:fillRef idx="3">
+            <a:schemeClr val="accent1"/>
+          </a:fillRef>
+          <a:effectRef idx="2">
+            <a:schemeClr val="accent1"/>
+          </a:effectRef>
+          <a:fontRef idx="minor">
+            <a:schemeClr val="lt1"/>
+          </a:fontRef>
+        </p:style>
+        <p:txBody>
+          <a:bodyPr rtlCol="0" anchor="ctr" wrap="square" lIns="73152" rIns="73152" tIns="36576" bIns="36576"/>
+          <a:lstStyle/>
+          <a:p>
+            <a:pPr algn="ctr"/>
+            <a:r>
+              <a:rPr sz="1400" b="1" i="0">
+                <a:solidFill>
+                  <a:srgbClr val="1F4E79"/>
+                </a:solidFill>
+                <a:latin typeface="Calibri"/>
+              </a:rPr>
+              <a:t>Per-story</a:t>
+            </a:r>
+          </a:p>
+        </p:txBody>
+      </p:sp>
+      <p:sp>
+        <p:nvSpPr>
+          <p:cNvPr id="9" name="TextBox 8"/>
+          <p:cNvSpPr txBox="1"/>
+          <p:nvPr/>
+        </p:nvSpPr>
+        <p:spPr>
+          <a:xfrm>
+            <a:off x="4244187" y="2057400"/>
+            <a:ext cx="3703320" cy="228600"/>
+          </a:xfrm>
+          <a:prstGeom prst="rect">
+            <a:avLst/>
+          </a:prstGeom>
+          <a:noFill/>
+        </p:spPr>
+        <p:txBody>
+          <a:bodyPr wrap="square" anchor="t">
+            <a:spAutoFit/>
+          </a:bodyPr>
+          <a:lstStyle/>
+          <a:p>
+            <a:pPr algn="ctr"/>
+            <a:r>
+              <a:rPr sz="1000" b="0" i="1">
+                <a:solidFill>
+                  <a:srgbClr val="55606E"/>
+                </a:solidFill>
+                <a:latin typeface="Calibri"/>
+              </a:rPr>
+              <a:t>(quality check fails)</a:t>
+            </a:r>
+          </a:p>
+        </p:txBody>
+      </p:sp>
+      <p:sp>
+        <p:nvSpPr>
+          <p:cNvPr id="10" name="Rectangle 9"/>
+          <p:cNvSpPr/>
+          <p:nvPr/>
+        </p:nvSpPr>
+        <p:spPr>
+          <a:xfrm>
+            <a:off x="4244187" y="2331720"/>
+            <a:ext cx="3703320" cy="2606040"/>
+          </a:xfrm>
+          <a:prstGeom prst="rect">
+            <a:avLst/>
+          </a:prstGeom>
+          <a:solidFill>
+            <a:srgbClr val="FFFFFF"/>
+          </a:solidFill>
+          <a:ln w="9525">
+            <a:solidFill>
+              <a:srgbClr val="5C8347"/>
+            </a:solidFill>
+          </a:ln>
+        </p:spPr>
+        <p:style>
+          <a:lnRef idx="1">
+            <a:schemeClr val="accent1"/>
+          </a:lnRef>
+          <a:fillRef idx="3">
+            <a:schemeClr val="accent1"/>
+          </a:fillRef>
+          <a:effectRef idx="2">
+            <a:schemeClr val="accent1"/>
+          </a:effectRef>
+          <a:fontRef idx="minor">
+            <a:schemeClr val="lt1"/>
+          </a:fontRef>
+        </p:style>
+        <p:txBody>
+          <a:bodyPr rtlCol="0" anchor="t" wrap="square" lIns="109728" rIns="109728" tIns="91440" bIns="91440"/>
+          <a:lstStyle/>
+          <a:p>
+            <a:pPr algn="l">
+              <a:spcAft>
+                <a:spcPts val="600"/>
+              </a:spcAft>
+            </a:pPr>
+            <a:r>
+              <a:rPr sz="1000" b="1">
+                <a:solidFill>
+                  <a:srgbClr val="1F4E79"/>
+                </a:solidFill>
+                <a:latin typeface="Calibri"/>
+              </a:rPr>
+              <a:t>Trigger: </a:t>
+            </a:r>
+            <a:r>
+              <a:rPr sz="1000">
+                <a:solidFill>
+                  <a:srgbClr val="1F2D3D"/>
+                </a:solidFill>
+                <a:latin typeface="Calibri"/>
+              </a:rPr>
+              <a:t>Validator rejects a story.</a:t>
+            </a:r>
+          </a:p>
+          <a:p>
+            <a:pPr algn="l">
+              <a:spcAft>
+                <a:spcPts val="600"/>
+              </a:spcAft>
+            </a:pPr>
+            <a:r>
+              <a:rPr sz="1000" b="1">
+                <a:solidFill>
+                  <a:srgbClr val="1F4E79"/>
+                </a:solidFill>
+                <a:latin typeface="Calibri"/>
+              </a:rPr>
+              <a:t>Fallback: </a:t>
+            </a:r>
+            <a:r>
+              <a:rPr sz="1000">
+                <a:solidFill>
+                  <a:srgbClr val="1F2D3D"/>
+                </a:solidFill>
+                <a:latin typeface="Calibri"/>
+              </a:rPr>
+              <a:t>Up to 2 revision attempts; the Validator drives revisions with the failed-checks list.</a:t>
+            </a:r>
+          </a:p>
+          <a:p>
+            <a:pPr algn="l">
+              <a:spcAft>
+                <a:spcPts val="600"/>
+              </a:spcAft>
+            </a:pPr>
+            <a:r>
+              <a:rPr sz="1000" b="1">
+                <a:solidFill>
+                  <a:srgbClr val="1F4E79"/>
+                </a:solidFill>
+                <a:latin typeface="Calibri"/>
+              </a:rPr>
+              <a:t>If persistent: </a:t>
+            </a:r>
+            <a:r>
+              <a:rPr sz="1000">
+                <a:solidFill>
+                  <a:srgbClr val="1F2D3D"/>
+                </a:solidFill>
+                <a:latin typeface="Calibri"/>
+              </a:rPr>
+              <a:t>Auto-park to the review pile. Story does not reach Output A in strict mode.</a:t>
+            </a:r>
+          </a:p>
+          <a:p>
+            <a:pPr algn="l">
+              <a:spcAft>
+                <a:spcPts val="600"/>
+              </a:spcAft>
+            </a:pPr>
+            <a:r>
+              <a:rPr sz="1000" b="1">
+                <a:solidFill>
+                  <a:srgbClr val="1F4E79"/>
+                </a:solidFill>
+                <a:latin typeface="Calibri"/>
+              </a:rPr>
+              <a:t>Pipeline impact: </a:t>
+            </a:r>
+            <a:r>
+              <a:rPr sz="1000">
+                <a:solidFill>
+                  <a:srgbClr val="1F2D3D"/>
+                </a:solidFill>
+                <a:latin typeface="Calibri"/>
+              </a:rPr>
+              <a:t>Subsequent stories continue. No block.</a:t>
+            </a:r>
+          </a:p>
+        </p:txBody>
+      </p:sp>
+      <p:sp>
+        <p:nvSpPr>
+          <p:cNvPr id="11" name="Rounded Rectangle 10"/>
+          <p:cNvSpPr/>
+          <p:nvPr/>
+        </p:nvSpPr>
+        <p:spPr>
+          <a:xfrm>
+            <a:off x="8112099" y="1554480"/>
+            <a:ext cx="3703320" cy="457200"/>
+          </a:xfrm>
+          <a:prstGeom prst="roundRect">
+            <a:avLst/>
+          </a:prstGeom>
+          <a:solidFill>
+            <a:srgbClr val="F8E3E3"/>
+          </a:solidFill>
+          <a:ln w="12700">
+            <a:solidFill>
+              <a:srgbClr val="A84A4A"/>
+            </a:solidFill>
+          </a:ln>
+        </p:spPr>
+        <p:style>
+          <a:lnRef idx="1">
+            <a:schemeClr val="accent1"/>
+          </a:lnRef>
+          <a:fillRef idx="3">
+            <a:schemeClr val="accent1"/>
+          </a:fillRef>
+          <a:effectRef idx="2">
+            <a:schemeClr val="accent1"/>
+          </a:effectRef>
+          <a:fontRef idx="minor">
+            <a:schemeClr val="lt1"/>
+          </a:fontRef>
+        </p:style>
+        <p:txBody>
+          <a:bodyPr rtlCol="0" anchor="ctr" wrap="square" lIns="73152" rIns="73152" tIns="36576" bIns="36576"/>
+          <a:lstStyle/>
+          <a:p>
+            <a:pPr algn="ctr"/>
+            <a:r>
+              <a:rPr sz="1400" b="1" i="0">
+                <a:solidFill>
+                  <a:srgbClr val="1F4E79"/>
+                </a:solidFill>
+                <a:latin typeface="Calibri"/>
+              </a:rPr>
+              <a:t>Per-batch</a:t>
+            </a:r>
+          </a:p>
+        </p:txBody>
+      </p:sp>
+      <p:sp>
+        <p:nvSpPr>
+          <p:cNvPr id="12" name="TextBox 11"/>
+          <p:cNvSpPr txBox="1"/>
+          <p:nvPr/>
+        </p:nvSpPr>
+        <p:spPr>
+          <a:xfrm>
+            <a:off x="8112099" y="2057400"/>
+            <a:ext cx="3703320" cy="228600"/>
+          </a:xfrm>
+          <a:prstGeom prst="rect">
+            <a:avLst/>
+          </a:prstGeom>
+          <a:noFill/>
+        </p:spPr>
+        <p:txBody>
+          <a:bodyPr wrap="square" anchor="t">
+            <a:spAutoFit/>
+          </a:bodyPr>
+          <a:lstStyle/>
+          <a:p>
+            <a:pPr algn="ctr"/>
+            <a:r>
+              <a:rPr sz="1000" b="0" i="1">
+                <a:solidFill>
+                  <a:srgbClr val="55606E"/>
+                </a:solidFill>
+                <a:latin typeface="Calibri"/>
+              </a:rPr>
+              <a:t>(drift / catalog issues)</a:t>
+            </a:r>
+          </a:p>
+        </p:txBody>
+      </p:sp>
+      <p:sp>
+        <p:nvSpPr>
+          <p:cNvPr id="13" name="Rectangle 12"/>
+          <p:cNvSpPr/>
+          <p:nvPr/>
+        </p:nvSpPr>
+        <p:spPr>
+          <a:xfrm>
+            <a:off x="8112099" y="2331720"/>
+            <a:ext cx="3703320" cy="2606040"/>
+          </a:xfrm>
+          <a:prstGeom prst="rect">
+            <a:avLst/>
+          </a:prstGeom>
+          <a:solidFill>
+            <a:srgbClr val="FFFFFF"/>
+          </a:solidFill>
+          <a:ln w="9525">
+            <a:solidFill>
+              <a:srgbClr val="A84A4A"/>
+            </a:solidFill>
+          </a:ln>
+        </p:spPr>
+        <p:style>
+          <a:lnRef idx="1">
+            <a:schemeClr val="accent1"/>
+          </a:lnRef>
+          <a:fillRef idx="3">
+            <a:schemeClr val="accent1"/>
+          </a:fillRef>
+          <a:effectRef idx="2">
+            <a:schemeClr val="accent1"/>
+          </a:effectRef>
+          <a:fontRef idx="minor">
+            <a:schemeClr val="lt1"/>
+          </a:fontRef>
+        </p:style>
+        <p:txBody>
+          <a:bodyPr rtlCol="0" anchor="t" wrap="square" lIns="109728" rIns="109728" tIns="91440" bIns="91440"/>
+          <a:lstStyle/>
+          <a:p>
+            <a:pPr algn="l">
+              <a:spcAft>
+                <a:spcPts val="600"/>
+              </a:spcAft>
+            </a:pPr>
+            <a:r>
+              <a:rPr sz="1000" b="1">
+                <a:solidFill>
+                  <a:srgbClr val="1F4E79"/>
+                </a:solidFill>
+                <a:latin typeface="Calibri"/>
+              </a:rPr>
+              <a:t>Trigger: </a:t>
+            </a:r>
+            <a:r>
+              <a:rPr sz="1000">
+                <a:solidFill>
+                  <a:srgbClr val="1F2D3D"/>
+                </a:solidFill>
+                <a:latin typeface="Calibri"/>
+              </a:rPr>
+              <a:t>G0 / E0 bucket &gt; 5% rolling, or auto-park rate &gt; 15% sustained.</a:t>
+            </a:r>
+          </a:p>
+          <a:p>
+            <a:pPr algn="l">
+              <a:spcAft>
+                <a:spcPts val="600"/>
+              </a:spcAft>
+            </a:pPr>
+            <a:r>
+              <a:rPr sz="1000" b="1">
+                <a:solidFill>
+                  <a:srgbClr val="1F4E79"/>
+                </a:solidFill>
+                <a:latin typeface="Calibri"/>
+              </a:rPr>
+              <a:t>Fallback: </a:t>
+            </a:r>
+            <a:r>
+              <a:rPr sz="1000">
+                <a:solidFill>
+                  <a:srgbClr val="1F2D3D"/>
+                </a:solidFill>
+                <a:latin typeface="Calibri"/>
+              </a:rPr>
+              <a:t>Auto-rerun discovery with τ_match −0.05 (more permissive); re-cluster G0; quorum re-evaluates.</a:t>
+            </a:r>
+          </a:p>
+          <a:p>
+            <a:pPr algn="l">
+              <a:spcAft>
+                <a:spcPts val="600"/>
+              </a:spcAft>
+            </a:pPr>
+            <a:r>
+              <a:rPr sz="1000" b="1">
+                <a:solidFill>
+                  <a:srgbClr val="1F4E79"/>
+                </a:solidFill>
+                <a:latin typeface="Calibri"/>
+              </a:rPr>
+              <a:t>If τ_match floor (0.50) hit: </a:t>
+            </a:r>
+            <a:r>
+              <a:rPr sz="1000">
+                <a:solidFill>
+                  <a:srgbClr val="1F2D3D"/>
+                </a:solidFill>
+                <a:latin typeface="Calibri"/>
+              </a:rPr>
+              <a:t>Drift report flags the discipline for manual catalog re-curation (one-time architect action).</a:t>
+            </a:r>
+          </a:p>
+          <a:p>
+            <a:pPr algn="l">
+              <a:spcAft>
+                <a:spcPts val="600"/>
+              </a:spcAft>
+            </a:pPr>
+            <a:r>
+              <a:rPr sz="1000" b="1">
+                <a:solidFill>
+                  <a:srgbClr val="1F4E79"/>
+                </a:solidFill>
+                <a:latin typeface="Calibri"/>
+              </a:rPr>
+              <a:t>Pipeline impact: </a:t>
+            </a:r>
+            <a:r>
+              <a:rPr sz="1000">
+                <a:solidFill>
+                  <a:srgbClr val="1F2D3D"/>
+                </a:solidFill>
+                <a:latin typeface="Calibri"/>
+              </a:rPr>
+              <a:t>Pipeline continues. The drift report is informational.</a:t>
+            </a:r>
+          </a:p>
+        </p:txBody>
+      </p:sp>
+      <p:sp>
+        <p:nvSpPr>
+          <p:cNvPr id="14" name="TextBox 13"/>
+          <p:cNvSpPr txBox="1"/>
+          <p:nvPr/>
+        </p:nvSpPr>
+        <p:spPr>
+          <a:xfrm>
+            <a:off x="457200" y="5120640"/>
+            <a:ext cx="11430000" cy="320040"/>
+          </a:xfrm>
+          <a:prstGeom prst="rect">
+            <a:avLst/>
+          </a:prstGeom>
+          <a:noFill/>
+        </p:spPr>
+        <p:txBody>
+          <a:bodyPr wrap="square" anchor="t">
+            <a:spAutoFit/>
+          </a:bodyPr>
+          <a:lstStyle/>
+          <a:p>
+            <a:pPr algn="l"/>
+            <a:r>
+              <a:rPr sz="1400" b="1" i="0">
+                <a:solidFill>
+                  <a:srgbClr val="1F4E79"/>
+                </a:solidFill>
+                <a:latin typeface="Calibri"/>
+              </a:rPr>
+              <a:t>Three queues collect different kinds of failures</a:t>
+            </a:r>
+          </a:p>
+        </p:txBody>
+      </p:sp>
+      <p:sp>
+        <p:nvSpPr>
+          <p:cNvPr id="15" name="Rounded Rectangle 14"/>
+          <p:cNvSpPr/>
+          <p:nvPr/>
+        </p:nvSpPr>
+        <p:spPr>
+          <a:xfrm>
+            <a:off x="376275" y="5532120"/>
+            <a:ext cx="3703320" cy="914399"/>
+          </a:xfrm>
+          <a:prstGeom prst="roundRect">
+            <a:avLst/>
+          </a:prstGeom>
+          <a:solidFill>
+            <a:srgbClr val="F1F5FA"/>
+          </a:solidFill>
+          <a:ln w="9525">
+            <a:solidFill>
+              <a:srgbClr val="4A6EA0"/>
+            </a:solidFill>
+          </a:ln>
+        </p:spPr>
+        <p:style>
+          <a:lnRef idx="1">
+            <a:schemeClr val="accent1"/>
+          </a:lnRef>
+          <a:fillRef idx="3">
+            <a:schemeClr val="accent1"/>
+          </a:fillRef>
+          <a:effectRef idx="2">
+            <a:schemeClr val="accent1"/>
+          </a:effectRef>
+          <a:fontRef idx="minor">
+            <a:schemeClr val="lt1"/>
+          </a:fontRef>
+        </p:style>
+        <p:txBody>
+          <a:bodyPr rtlCol="0" anchor="ctr" wrap="square" lIns="109728" rIns="109728" tIns="73152" bIns="73152"/>
+          <a:lstStyle/>
+          <a:p>
+            <a:pPr algn="l"/>
+            <a:r>
+              <a:rPr sz="1200" b="1">
+                <a:solidFill>
+                  <a:srgbClr val="1F4E79"/>
+                </a:solidFill>
+                <a:latin typeface="Calibri"/>
+              </a:rPr>
+              <a:t>Review pile</a:t>
+            </a:r>
+          </a:p>
+          <a:p>
+            <a:pPr algn="l"/>
+            <a:r>
+              <a:rPr sz="1000" i="1">
+                <a:solidFill>
+                  <a:srgbClr val="55606E"/>
+                </a:solidFill>
+                <a:latin typeface="Calibri"/>
+              </a:rPr>
+              <a:t>Quality / rubric failures</a:t>
+            </a:r>
+          </a:p>
+          <a:p>
+            <a:pPr algn="l"/>
+            <a:r>
+              <a:rPr sz="1000">
+                <a:solidFill>
+                  <a:srgbClr val="1F2D3D"/>
+                </a:solidFill>
+                <a:latin typeface="Calibri"/>
+              </a:rPr>
+              <a:t>Stories that failed Validator after 2 revisions.</a:t>
+            </a:r>
+          </a:p>
+        </p:txBody>
+      </p:sp>
+      <p:sp>
+        <p:nvSpPr>
+          <p:cNvPr id="16" name="Rounded Rectangle 15"/>
+          <p:cNvSpPr/>
+          <p:nvPr/>
+        </p:nvSpPr>
+        <p:spPr>
+          <a:xfrm>
+            <a:off x="4244187" y="5532120"/>
+            <a:ext cx="3703320" cy="914399"/>
+          </a:xfrm>
+          <a:prstGeom prst="roundRect">
+            <a:avLst/>
+          </a:prstGeom>
+          <a:solidFill>
+            <a:srgbClr val="F1F5FA"/>
+          </a:solidFill>
+          <a:ln w="9525">
+            <a:solidFill>
+              <a:srgbClr val="4A6EA0"/>
+            </a:solidFill>
+          </a:ln>
+        </p:spPr>
+        <p:style>
+          <a:lnRef idx="1">
+            <a:schemeClr val="accent1"/>
+          </a:lnRef>
+          <a:fillRef idx="3">
+            <a:schemeClr val="accent1"/>
+          </a:fillRef>
+          <a:effectRef idx="2">
+            <a:schemeClr val="accent1"/>
+          </a:effectRef>
+          <a:fontRef idx="minor">
+            <a:schemeClr val="lt1"/>
+          </a:fontRef>
+        </p:style>
+        <p:txBody>
+          <a:bodyPr rtlCol="0" anchor="ctr" wrap="square" lIns="109728" rIns="109728" tIns="73152" bIns="73152"/>
+          <a:lstStyle/>
+          <a:p>
+            <a:pPr algn="l"/>
+            <a:r>
+              <a:rPr sz="1200" b="1">
+                <a:solidFill>
+                  <a:srgbClr val="1F4E79"/>
+                </a:solidFill>
+                <a:latin typeface="Calibri"/>
+              </a:rPr>
+              <a:t>G0 / E0 buckets</a:t>
+            </a:r>
+          </a:p>
+          <a:p>
+            <a:pPr algn="l"/>
+            <a:r>
+              <a:rPr sz="1000" i="1">
+                <a:solidFill>
+                  <a:srgbClr val="55606E"/>
+                </a:solidFill>
+                <a:latin typeface="Calibri"/>
+              </a:rPr>
+              <a:t>Classification failures</a:t>
+            </a:r>
+          </a:p>
+          <a:p>
+            <a:pPr algn="l"/>
+            <a:r>
+              <a:rPr sz="1000">
+                <a:solidFill>
+                  <a:srgbClr val="1F2D3D"/>
+                </a:solidFill>
+                <a:latin typeface="Calibri"/>
+              </a:rPr>
+              <a:t>Chunks (G0) and draft epics (E0) that didn't classify or cluster.</a:t>
+            </a:r>
+          </a:p>
+        </p:txBody>
+      </p:sp>
+      <p:sp>
+        <p:nvSpPr>
+          <p:cNvPr id="17" name="Rounded Rectangle 16"/>
+          <p:cNvSpPr/>
+          <p:nvPr/>
+        </p:nvSpPr>
+        <p:spPr>
+          <a:xfrm>
+            <a:off x="8112099" y="5532120"/>
+            <a:ext cx="3703320" cy="914399"/>
+          </a:xfrm>
+          <a:prstGeom prst="roundRect">
+            <a:avLst/>
+          </a:prstGeom>
+          <a:solidFill>
+            <a:srgbClr val="F1F5FA"/>
+          </a:solidFill>
+          <a:ln w="9525">
+            <a:solidFill>
+              <a:srgbClr val="4A6EA0"/>
+            </a:solidFill>
+          </a:ln>
+        </p:spPr>
+        <p:style>
+          <a:lnRef idx="1">
+            <a:schemeClr val="accent1"/>
+          </a:lnRef>
+          <a:fillRef idx="3">
+            <a:schemeClr val="accent1"/>
+          </a:fillRef>
+          <a:effectRef idx="2">
+            <a:schemeClr val="accent1"/>
+          </a:effectRef>
+          <a:fontRef idx="minor">
+            <a:schemeClr val="lt1"/>
+          </a:fontRef>
+        </p:style>
+        <p:txBody>
+          <a:bodyPr rtlCol="0" anchor="ctr" wrap="square" lIns="109728" rIns="109728" tIns="73152" bIns="73152"/>
+          <a:lstStyle/>
+          <a:p>
+            <a:pPr algn="l"/>
+            <a:r>
+              <a:rPr sz="1200" b="1">
+                <a:solidFill>
+                  <a:srgbClr val="1F4E79"/>
+                </a:solidFill>
+                <a:latin typeface="Calibri"/>
+              </a:rPr>
+              <a:t>Audit trail</a:t>
+            </a:r>
+          </a:p>
+          <a:p>
+            <a:pPr algn="l"/>
+            <a:r>
+              <a:rPr sz="1000" i="1">
+                <a:solidFill>
+                  <a:srgbClr val="55606E"/>
+                </a:solidFill>
+                <a:latin typeface="Calibri"/>
+              </a:rPr>
+              <a:t>Call-level errors</a:t>
+            </a:r>
+          </a:p>
+          <a:p>
+            <a:pPr algn="l"/>
+            <a:r>
+              <a:rPr sz="1000">
+                <a:solidFill>
+                  <a:srgbClr val="1F2D3D"/>
+                </a:solidFill>
+                <a:latin typeface="Calibri"/>
+              </a:rPr>
+              <a:t>LLM-call failures after retry exhaustion. For diagnostics.</a:t>
+            </a:r>
+          </a:p>
+        </p:txBody>
+      </p:sp>
+      <p:sp>
+        <p:nvSpPr>
+          <p:cNvPr id="18" name="Rectangle 17"/>
+          <p:cNvSpPr/>
+          <p:nvPr/>
+        </p:nvSpPr>
+        <p:spPr>
+          <a:xfrm>
+            <a:off x="457200" y="6565392"/>
+            <a:ext cx="11274552" cy="10972"/>
+          </a:xfrm>
+          <a:prstGeom prst="rect">
+            <a:avLst/>
+          </a:prstGeom>
+          <a:solidFill>
+            <a:srgbClr val="D0D6DC"/>
+          </a:solidFill>
+          <a:ln>
+            <a:noFill/>
+          </a:ln>
+        </p:spPr>
+        <p:style>
+          <a:lnRef idx="1">
+            <a:schemeClr val="accent1"/>
+          </a:lnRef>
+          <a:fillRef idx="3">
+            <a:schemeClr val="accent1"/>
+          </a:fillRef>
+          <a:effectRef idx="2">
+            <a:schemeClr val="accent1"/>
+          </a:effectRef>
+          <a:fontRef idx="minor">
+            <a:schemeClr val="lt1"/>
+          </a:fontRef>
+        </p:style>
+        <p:txBody>
+          <a:bodyPr rtlCol="0" anchor="ctr"/>
+          <a:lstStyle/>
+          <a:p>
+            <a:pPr algn="ctr"/>
+          </a:p>
+        </p:txBody>
+      </p:sp>
+      <p:sp>
+        <p:nvSpPr>
+          <p:cNvPr id="19" name="TextBox 18"/>
+          <p:cNvSpPr txBox="1"/>
+          <p:nvPr/>
+        </p:nvSpPr>
+        <p:spPr>
+          <a:xfrm>
+            <a:off x="457200" y="6601968"/>
+            <a:ext cx="7315200" cy="228600"/>
+          </a:xfrm>
+          <a:prstGeom prst="rect">
+            <a:avLst/>
+          </a:prstGeom>
+          <a:noFill/>
+        </p:spPr>
+        <p:txBody>
+          <a:bodyPr wrap="square" anchor="t">
+            <a:spAutoFit/>
+          </a:bodyPr>
+          <a:lstStyle/>
+          <a:p>
+            <a:pPr algn="l"/>
+            <a:r>
+              <a:rPr sz="800" b="0" i="1">
+                <a:solidFill>
+                  <a:srgbClr val="90979F"/>
+                </a:solidFill>
+                <a:latin typeface="Calibri"/>
+              </a:rPr>
+              <a:t>LIMS Story Generation — Client Alignment</a:t>
+            </a:r>
+          </a:p>
+        </p:txBody>
+      </p:sp>
+      <p:sp>
+        <p:nvSpPr>
+          <p:cNvPr id="20" name="TextBox 19"/>
+          <p:cNvSpPr txBox="1"/>
+          <p:nvPr/>
+        </p:nvSpPr>
+        <p:spPr>
+          <a:xfrm>
+            <a:off x="10817352" y="6601968"/>
+            <a:ext cx="914400" cy="228600"/>
+          </a:xfrm>
+          <a:prstGeom prst="rect">
+            <a:avLst/>
+          </a:prstGeom>
+          <a:noFill/>
+        </p:spPr>
+        <p:txBody>
+          <a:bodyPr wrap="square" anchor="t">
+            <a:spAutoFit/>
+          </a:bodyPr>
+          <a:lstStyle/>
+          <a:p>
+            <a:pPr algn="r"/>
+            <a:r>
+              <a:rPr sz="800" b="0" i="0">
+                <a:solidFill>
+                  <a:srgbClr val="90979F"/>
+                </a:solidFill>
+                <a:latin typeface="Calibri"/>
+              </a:rPr>
+              <a:t>11 / 12</a:t>
+            </a:r>
+          </a:p>
+        </p:txBody>
+      </p:sp>
+    </p:spTree>
+  </p:cSld>
+  <p:clrMapOvr>
+    <a:masterClrMapping/>
+  </p:clrMapOvr>
+</p:sld>
+</file>
+
+<file path=ppt/slides/slide12.xml><?xml version="1.0" encoding="utf-8"?>
+<p:sld xmlns:a="http://schemas.openxmlformats.org/drawingml/2006/main" xmlns:p="http://schemas.openxmlformats.org/presentationml/2006/main" xmlns:r="http://schemas.openxmlformats.org/officeDocument/2006/relationships">
+  <p:cSld>
+    <p:spTree>
+      <p:nvGrpSpPr>
+        <p:cNvPr id="1" name=""/>
+        <p:cNvGrpSpPr/>
+        <p:nvPr/>
+      </p:nvGrpSpPr>
+      <p:grpSpPr/>
+      <p:sp>
+        <p:nvSpPr>
+          <p:cNvPr id="2" name="TextBox 1"/>
+          <p:cNvSpPr txBox="1"/>
+          <p:nvPr/>
+        </p:nvSpPr>
+        <p:spPr>
+          <a:xfrm>
+            <a:off x="457200" y="292608"/>
+            <a:ext cx="11430000" cy="548640"/>
+          </a:xfrm>
+          <a:prstGeom prst="rect">
+            <a:avLst/>
+          </a:prstGeom>
+          <a:noFill/>
+        </p:spPr>
+        <p:txBody>
+          <a:bodyPr wrap="square" anchor="t">
+            <a:spAutoFit/>
+          </a:bodyPr>
+          <a:lstStyle/>
+          <a:p>
+            <a:pPr algn="l"/>
+            <a:r>
+              <a:rPr sz="2600" b="1" i="0">
+                <a:solidFill>
+                  <a:srgbClr val="1F4E79"/>
+                </a:solidFill>
+                <a:latin typeface="Calibri"/>
+              </a:rPr>
+              <a:t>What ships and the alignment ask</a:t>
+            </a:r>
+          </a:p>
+        </p:txBody>
+      </p:sp>
+      <p:sp>
+        <p:nvSpPr>
+          <p:cNvPr id="3" name="Rectangle 2"/>
+          <p:cNvSpPr/>
+          <p:nvPr/>
+        </p:nvSpPr>
+        <p:spPr>
+          <a:xfrm>
+            <a:off x="457200" y="868680"/>
+            <a:ext cx="1463040" cy="54864"/>
+          </a:xfrm>
+          <a:prstGeom prst="rect">
+            <a:avLst/>
+          </a:prstGeom>
+          <a:solidFill>
+            <a:srgbClr val="1F4E79"/>
+          </a:solidFill>
+          <a:ln>
+            <a:noFill/>
+          </a:ln>
+        </p:spPr>
+        <p:style>
+          <a:lnRef idx="1">
+            <a:schemeClr val="accent1"/>
+          </a:lnRef>
+          <a:fillRef idx="3">
+            <a:schemeClr val="accent1"/>
+          </a:fillRef>
+          <a:effectRef idx="2">
+            <a:schemeClr val="accent1"/>
+          </a:effectRef>
+          <a:fontRef idx="minor">
+            <a:schemeClr val="lt1"/>
+          </a:fontRef>
+        </p:style>
+        <p:txBody>
+          <a:bodyPr rtlCol="0" anchor="ctr"/>
+          <a:lstStyle/>
+          <a:p>
+            <a:pPr algn="ctr"/>
+          </a:p>
+        </p:txBody>
+      </p:sp>
+      <p:sp>
+        <p:nvSpPr>
+          <p:cNvPr id="4" name="Rounded Rectangle 3"/>
+          <p:cNvSpPr/>
+          <p:nvPr/>
+        </p:nvSpPr>
+        <p:spPr>
+          <a:xfrm>
+            <a:off x="335127" y="1188720"/>
+            <a:ext cx="3657600" cy="502920"/>
+          </a:xfrm>
+          <a:prstGeom prst="roundRect">
+            <a:avLst/>
+          </a:prstGeom>
+          <a:solidFill>
+            <a:srgbClr val="DCE9D7"/>
+          </a:solidFill>
+          <a:ln w="12700">
+            <a:solidFill>
+              <a:srgbClr val="5C8347"/>
+            </a:solidFill>
+          </a:ln>
+        </p:spPr>
+        <p:style>
+          <a:lnRef idx="1">
+            <a:schemeClr val="accent1"/>
+          </a:lnRef>
+          <a:fillRef idx="3">
+            <a:schemeClr val="accent1"/>
+          </a:fillRef>
+          <a:effectRef idx="2">
+            <a:schemeClr val="accent1"/>
+          </a:effectRef>
+          <a:fontRef idx="minor">
+            <a:schemeClr val="lt1"/>
+          </a:fontRef>
+        </p:style>
+        <p:txBody>
+          <a:bodyPr rtlCol="0" anchor="ctr" wrap="square" lIns="73152" rIns="73152" tIns="36576" bIns="36576"/>
+          <a:lstStyle/>
+          <a:p>
+            <a:pPr algn="ctr"/>
+            <a:r>
               <a:rPr sz="1500" b="1" i="0">
                 <a:solidFill>
                   <a:srgbClr val="1F2D3D"/>
@@ -4897,7 +7284,7 @@
                 </a:solidFill>
                 <a:latin typeface="Calibri"/>
               </a:rPr>
-              <a:t>10 / 10</a:t>
+              <a:t>12 / 12</a:t>
             </a:r>
           </a:p>
         </p:txBody>
@@ -5682,7 +8069,7 @@
                 </a:solidFill>
                 <a:latin typeface="Calibri"/>
               </a:rPr>
-              <a:t>2 / 10</a:t>
+              <a:t>2 / 12</a:t>
             </a:r>
           </a:p>
         </p:txBody>
@@ -6960,7 +9347,7 @@
                 </a:solidFill>
                 <a:latin typeface="Calibri"/>
               </a:rPr>
-              <a:t>3 / 10</a:t>
+              <a:t>3 / 12</a:t>
             </a:r>
           </a:p>
         </p:txBody>
@@ -7811,7 +10198,7 @@
                 </a:solidFill>
                 <a:latin typeface="Calibri"/>
               </a:rPr>
-              <a:t>4 / 10</a:t>
+              <a:t>4 / 12</a:t>
             </a:r>
           </a:p>
         </p:txBody>
@@ -10525,7 +12912,7 @@
                 </a:solidFill>
                 <a:latin typeface="Calibri"/>
               </a:rPr>
-              <a:t>5 / 10</a:t>
+              <a:t>5 / 12</a:t>
             </a:r>
           </a:p>
         </p:txBody>
@@ -12515,7 +14902,7 @@
                 </a:solidFill>
                 <a:latin typeface="Calibri"/>
               </a:rPr>
-              <a:t>6 / 10</a:t>
+              <a:t>6 / 12</a:t>
             </a:r>
           </a:p>
         </p:txBody>
@@ -14330,7 +16717,7 @@
                 </a:solidFill>
                 <a:latin typeface="Calibri"/>
               </a:rPr>
-              <a:t>7 / 10</a:t>
+              <a:t>7 / 12</a:t>
             </a:r>
           </a:p>
         </p:txBody>
@@ -14383,7 +16770,7 @@
                 </a:solidFill>
                 <a:latin typeface="Calibri"/>
               </a:rPr>
-              <a:t>Inside two key agents — Validator &amp; Dependency Resolver</a:t>
+              <a:t>The 4 story shapes — one example each</a:t>
             </a:r>
           </a:p>
         </p:txBody>
@@ -14461,7 +16848,7 @@
                 </a:solidFill>
                 <a:latin typeface="Calibri"/>
               </a:rPr>
-              <a:t>What these two agents actually do, beyond their one-line description on slide 3.</a:t>
+              <a:t>Different shapes have different quality rules (slide 6). These examples show what makes each shape that shape.</a:t>
             </a:r>
           </a:p>
         </p:txBody>
@@ -14475,7 +16862,7 @@
         <p:spPr>
           <a:xfrm>
             <a:off x="365760" y="1417320"/>
-            <a:ext cx="5760720" cy="457200"/>
+            <a:ext cx="5647791" cy="329184"/>
           </a:xfrm>
           <a:prstGeom prst="roundRect">
             <a:avLst/>
@@ -14509,13 +16896,13 @@
           <a:p>
             <a:pPr algn="ctr"/>
             <a:r>
-              <a:rPr sz="1500" b="1" i="0">
+              <a:rPr sz="1300" b="1" i="0">
                 <a:solidFill>
                   <a:srgbClr val="1F4E79"/>
                 </a:solidFill>
                 <a:latin typeface="Calibri"/>
               </a:rPr>
-              <a:t>Validator</a:t>
+              <a:t>CAPABILITY</a:t>
             </a:r>
           </a:p>
         </p:txBody>
@@ -14528,8 +16915,8 @@
         </p:nvSpPr>
         <p:spPr>
           <a:xfrm>
-            <a:off x="365760" y="1920240"/>
-            <a:ext cx="5760720" cy="274320"/>
+            <a:off x="411480" y="1764792"/>
+            <a:ext cx="5556351" cy="201168"/>
           </a:xfrm>
           <a:prstGeom prst="rect">
             <a:avLst/>
@@ -14550,31 +16937,31 @@
                 </a:solidFill>
                 <a:latin typeface="Calibri"/>
               </a:rPr>
-              <a:t>Runs at gate 1 (after Story Extractor) and gate 2 (after Synthesis).</a:t>
-            </a:r>
-          </a:p>
-        </p:txBody>
-      </p:sp>
-      <p:sp>
-        <p:nvSpPr>
-          <p:cNvPr id="7" name="Rounded Rectangle 6"/>
+              <a:t>MUST/SHALL  +  configurable parameters</a:t>
+            </a:r>
+          </a:p>
+        </p:txBody>
+      </p:sp>
+      <p:sp>
+        <p:nvSpPr>
+          <p:cNvPr id="7" name="Rectangle 6"/>
           <p:cNvSpPr/>
           <p:nvPr/>
         </p:nvSpPr>
         <p:spPr>
           <a:xfrm>
-            <a:off x="502920" y="2286000"/>
-            <a:ext cx="5486400" cy="384048"/>
-          </a:xfrm>
-          <a:prstGeom prst="roundRect">
+            <a:off x="365760" y="2020824"/>
+            <a:ext cx="5647791" cy="1828800"/>
+          </a:xfrm>
+          <a:prstGeom prst="rect">
             <a:avLst/>
           </a:prstGeom>
           <a:solidFill>
-            <a:srgbClr val="E0ECF8"/>
+            <a:srgbClr val="F6F6F6"/>
           </a:solidFill>
-          <a:ln w="12700">
+          <a:ln w="9525">
             <a:solidFill>
-              <a:srgbClr val="4A6EA0"/>
+              <a:srgbClr val="C0C8D0"/>
             </a:solidFill>
           </a:ln>
         </p:spPr>
@@ -14593,18 +16980,198 @@
           </a:fontRef>
         </p:style>
         <p:txBody>
-          <a:bodyPr rtlCol="0" anchor="ctr" wrap="square" lIns="73152" rIns="73152" tIns="36576" bIns="36576"/>
-          <a:lstStyle/>
-          <a:p>
-            <a:pPr algn="ctr"/>
-            <a:r>
-              <a:rPr sz="1000" b="1" i="0">
-                <a:solidFill>
-                  <a:srgbClr val="1F2D3D"/>
-                </a:solidFill>
-                <a:latin typeface="Calibri"/>
-              </a:rPr>
-              <a:t>Receives a draft story</a:t>
+          <a:bodyPr rtlCol="0" anchor="t" wrap="none" lIns="109728" rIns="109728" tIns="73152" bIns="73152"/>
+          <a:lstStyle/>
+          <a:p>
+            <a:pPr algn="l">
+              <a:spcAft>
+                <a:spcPts val="0"/>
+              </a:spcAft>
+            </a:pPr>
+            <a:r>
+              <a:rPr sz="850">
+                <a:solidFill>
+                  <a:srgbClr val="1F2D3D"/>
+                </a:solidFill>
+                <a:latin typeface="Consolas"/>
+              </a:rPr>
+              <a:t>title:  "Validate received specimens</a:t>
+            </a:r>
+          </a:p>
+          <a:p>
+            <a:pPr algn="l">
+              <a:spcAft>
+                <a:spcPts val="0"/>
+              </a:spcAft>
+            </a:pPr>
+            <a:r>
+              <a:rPr sz="850">
+                <a:solidFill>
+                  <a:srgbClr val="1F2D3D"/>
+                </a:solidFill>
+                <a:latin typeface="Consolas"/>
+              </a:rPr>
+              <a:t>        against open orders"</a:t>
+            </a:r>
+          </a:p>
+          <a:p>
+            <a:pPr algn="l">
+              <a:spcAft>
+                <a:spcPts val="0"/>
+              </a:spcAft>
+            </a:pPr>
+            <a:r>
+              <a:rPr sz="850">
+                <a:solidFill>
+                  <a:srgbClr val="1F2D3D"/>
+                </a:solidFill>
+                <a:latin typeface="Consolas"/>
+              </a:rPr>
+              <a:t>shape:   capability</a:t>
+            </a:r>
+          </a:p>
+          <a:p>
+            <a:pPr algn="l">
+              <a:spcAft>
+                <a:spcPts val="0"/>
+              </a:spcAft>
+            </a:pPr>
+            <a:r>
+              <a:rPr sz="850">
+                <a:solidFill>
+                  <a:srgbClr val="1F2D3D"/>
+                </a:solidFill>
+                <a:latin typeface="Consolas"/>
+              </a:rPr>
+              <a:t>persona: lims</a:t>
+            </a:r>
+          </a:p>
+          <a:p>
+            <a:pPr algn="l">
+              <a:spcAft>
+                <a:spcPts val="0"/>
+              </a:spcAft>
+            </a:pPr>
+            <a:r>
+              <a:rPr sz="850">
+                <a:solidFill>
+                  <a:srgbClr val="1F2D3D"/>
+                </a:solidFill>
+                <a:latin typeface="Consolas"/>
+              </a:rPr>
+              <a:t>stage:   accessioning_verification</a:t>
+            </a:r>
+          </a:p>
+          <a:p>
+            <a:pPr algn="l">
+              <a:spcAft>
+                <a:spcPts val="0"/>
+              </a:spcAft>
+            </a:pPr>
+            <a:r>
+              <a:rPr sz="850">
+                <a:solidFill>
+                  <a:srgbClr val="1F2D3D"/>
+                </a:solidFill>
+                <a:latin typeface="Consolas"/>
+              </a:rPr>
+              <a:t>tests:   [gram_stain, blood_culture]</a:t>
+            </a:r>
+          </a:p>
+          <a:p>
+            <a:pPr algn="l">
+              <a:spcAft>
+                <a:spcPts val="0"/>
+              </a:spcAft>
+            </a:pPr>
+            <a:r>
+              <a:rPr sz="850">
+                <a:solidFill>
+                  <a:srgbClr val="1F2D3D"/>
+                </a:solidFill>
+                <a:latin typeface="Consolas"/>
+              </a:rPr>
+              <a:t/>
+            </a:r>
+          </a:p>
+          <a:p>
+            <a:pPr algn="l">
+              <a:spcAft>
+                <a:spcPts val="0"/>
+              </a:spcAft>
+            </a:pPr>
+            <a:r>
+              <a:rPr sz="850">
+                <a:solidFill>
+                  <a:srgbClr val="1F2D3D"/>
+                </a:solidFill>
+                <a:latin typeface="Consolas"/>
+              </a:rPr>
+              <a:t>AC1:  When specimen received with</a:t>
+            </a:r>
+          </a:p>
+          <a:p>
+            <a:pPr algn="l">
+              <a:spcAft>
+                <a:spcPts val="0"/>
+              </a:spcAft>
+            </a:pPr>
+            <a:r>
+              <a:rPr sz="850">
+                <a:solidFill>
+                  <a:srgbClr val="1F2D3D"/>
+                </a:solidFill>
+                <a:latin typeface="Consolas"/>
+              </a:rPr>
+              <a:t>      accession, system MUST match</a:t>
+            </a:r>
+          </a:p>
+          <a:p>
+            <a:pPr algn="l">
+              <a:spcAft>
+                <a:spcPts val="0"/>
+              </a:spcAft>
+            </a:pPr>
+            <a:r>
+              <a:rPr sz="850">
+                <a:solidFill>
+                  <a:srgbClr val="1F2D3D"/>
+                </a:solidFill>
+                <a:latin typeface="Consolas"/>
+              </a:rPr>
+              <a:t>      against open order</a:t>
+            </a:r>
+          </a:p>
+          <a:p>
+            <a:pPr algn="l">
+              <a:spcAft>
+                <a:spcPts val="0"/>
+              </a:spcAft>
+            </a:pPr>
+            <a:r>
+              <a:rPr sz="850">
+                <a:solidFill>
+                  <a:srgbClr val="1F2D3D"/>
+                </a:solidFill>
+                <a:latin typeface="Consolas"/>
+              </a:rPr>
+              <a:t>AC2:  When no match found within 24h,</a:t>
+            </a:r>
+          </a:p>
+          <a:p>
+            <a:pPr algn="l">
+              <a:spcAft>
+                <a:spcPts val="0"/>
+              </a:spcAft>
+            </a:pPr>
+            <a:r>
+              <a:rPr sz="850">
+                <a:solidFill>
+                  <a:srgbClr val="1F2D3D"/>
+                </a:solidFill>
+                <a:latin typeface="Consolas"/>
+              </a:rPr>
+              <a:t>      system MUST flag for review</a:t>
             </a:r>
           </a:p>
         </p:txBody>
@@ -14617,619 +17184,8 @@
         </p:nvSpPr>
         <p:spPr>
           <a:xfrm>
-            <a:off x="502920" y="2788920"/>
-            <a:ext cx="5486400" cy="384048"/>
-          </a:xfrm>
-          <a:prstGeom prst="roundRect">
-            <a:avLst/>
-          </a:prstGeom>
-          <a:solidFill>
-            <a:srgbClr val="E7EFF8"/>
-          </a:solidFill>
-          <a:ln w="12700">
-            <a:solidFill>
-              <a:srgbClr val="4A6EA0"/>
-            </a:solidFill>
-          </a:ln>
-        </p:spPr>
-        <p:style>
-          <a:lnRef idx="1">
-            <a:schemeClr val="accent1"/>
-          </a:lnRef>
-          <a:fillRef idx="3">
-            <a:schemeClr val="accent1"/>
-          </a:fillRef>
-          <a:effectRef idx="2">
-            <a:schemeClr val="accent1"/>
-          </a:effectRef>
-          <a:fontRef idx="minor">
-            <a:schemeClr val="lt1"/>
-          </a:fontRef>
-        </p:style>
-        <p:txBody>
-          <a:bodyPr rtlCol="0" anchor="ctr" wrap="square" lIns="73152" rIns="73152" tIns="36576" bIns="36576"/>
-          <a:lstStyle/>
-          <a:p>
-            <a:pPr algn="ctr"/>
-            <a:r>
-              <a:rPr sz="1000" b="0" i="0">
-                <a:solidFill>
-                  <a:srgbClr val="1F2D3D"/>
-                </a:solidFill>
-                <a:latin typeface="Calibri"/>
-              </a:rPr>
-              <a:t>1. Closed-enum check  (tests, persona, stage in catalog?)</a:t>
-            </a:r>
-          </a:p>
-        </p:txBody>
-      </p:sp>
-      <p:cxnSp>
-        <p:nvCxnSpPr>
-          <p:cNvPr id="9" name="Connector 8"/>
-          <p:cNvCxnSpPr/>
-          <p:nvPr/>
-        </p:nvCxnSpPr>
-        <p:spPr>
-          <a:xfrm>
-            <a:off x="3246120" y="2670048"/>
-            <a:ext cx="0" cy="118872"/>
-          </a:xfrm>
-          <a:prstGeom prst="line">
-            <a:avLst/>
-          </a:prstGeom>
-          <a:ln w="16510">
-            <a:solidFill>
-              <a:srgbClr val="4A6EA0"/>
-            </a:solidFill>
-            <a:tailEnd type="triangle" w="med" h="med"/>
-          </a:ln>
-        </p:spPr>
-        <p:style>
-          <a:lnRef idx="2">
-            <a:schemeClr val="accent1"/>
-          </a:lnRef>
-          <a:fillRef idx="0">
-            <a:schemeClr val="accent1"/>
-          </a:fillRef>
-          <a:effectRef idx="1">
-            <a:schemeClr val="accent1"/>
-          </a:effectRef>
-          <a:fontRef idx="minor">
-            <a:schemeClr val="tx1"/>
-          </a:fontRef>
-        </p:style>
-      </p:cxnSp>
-      <p:sp>
-        <p:nvSpPr>
-          <p:cNvPr id="10" name="Rounded Rectangle 9"/>
-          <p:cNvSpPr/>
-          <p:nvPr/>
-        </p:nvSpPr>
-        <p:spPr>
-          <a:xfrm>
-            <a:off x="502920" y="3291839"/>
-            <a:ext cx="5486400" cy="384048"/>
-          </a:xfrm>
-          <a:prstGeom prst="roundRect">
-            <a:avLst/>
-          </a:prstGeom>
-          <a:solidFill>
-            <a:srgbClr val="E7EFF8"/>
-          </a:solidFill>
-          <a:ln w="12700">
-            <a:solidFill>
-              <a:srgbClr val="4A6EA0"/>
-            </a:solidFill>
-          </a:ln>
-        </p:spPr>
-        <p:style>
-          <a:lnRef idx="1">
-            <a:schemeClr val="accent1"/>
-          </a:lnRef>
-          <a:fillRef idx="3">
-            <a:schemeClr val="accent1"/>
-          </a:fillRef>
-          <a:effectRef idx="2">
-            <a:schemeClr val="accent1"/>
-          </a:effectRef>
-          <a:fontRef idx="minor">
-            <a:schemeClr val="lt1"/>
-          </a:fontRef>
-        </p:style>
-        <p:txBody>
-          <a:bodyPr rtlCol="0" anchor="ctr" wrap="square" lIns="73152" rIns="73152" tIns="36576" bIns="36576"/>
-          <a:lstStyle/>
-          <a:p>
-            <a:pPr algn="ctr"/>
-            <a:r>
-              <a:rPr sz="1000" b="0" i="0">
-                <a:solidFill>
-                  <a:srgbClr val="1F2D3D"/>
-                </a:solidFill>
-                <a:latin typeface="Calibri"/>
-              </a:rPr>
-              <a:t>2. Shape verification  (declared shape matches content?)</a:t>
-            </a:r>
-          </a:p>
-        </p:txBody>
-      </p:sp>
-      <p:cxnSp>
-        <p:nvCxnSpPr>
-          <p:cNvPr id="11" name="Connector 10"/>
-          <p:cNvCxnSpPr/>
-          <p:nvPr/>
-        </p:nvCxnSpPr>
-        <p:spPr>
-          <a:xfrm>
-            <a:off x="3246120" y="3172968"/>
-            <a:ext cx="0" cy="118871"/>
-          </a:xfrm>
-          <a:prstGeom prst="line">
-            <a:avLst/>
-          </a:prstGeom>
-          <a:ln w="16510">
-            <a:solidFill>
-              <a:srgbClr val="4A6EA0"/>
-            </a:solidFill>
-            <a:tailEnd type="triangle" w="med" h="med"/>
-          </a:ln>
-        </p:spPr>
-        <p:style>
-          <a:lnRef idx="2">
-            <a:schemeClr val="accent1"/>
-          </a:lnRef>
-          <a:fillRef idx="0">
-            <a:schemeClr val="accent1"/>
-          </a:fillRef>
-          <a:effectRef idx="1">
-            <a:schemeClr val="accent1"/>
-          </a:effectRef>
-          <a:fontRef idx="minor">
-            <a:schemeClr val="tx1"/>
-          </a:fontRef>
-        </p:style>
-      </p:cxnSp>
-      <p:sp>
-        <p:nvSpPr>
-          <p:cNvPr id="12" name="Rounded Rectangle 11"/>
-          <p:cNvSpPr/>
-          <p:nvPr/>
-        </p:nvSpPr>
-        <p:spPr>
-          <a:xfrm>
-            <a:off x="502920" y="3794759"/>
-            <a:ext cx="5486400" cy="384048"/>
-          </a:xfrm>
-          <a:prstGeom prst="roundRect">
-            <a:avLst/>
-          </a:prstGeom>
-          <a:solidFill>
-            <a:srgbClr val="E7EFF8"/>
-          </a:solidFill>
-          <a:ln w="12700">
-            <a:solidFill>
-              <a:srgbClr val="4A6EA0"/>
-            </a:solidFill>
-          </a:ln>
-        </p:spPr>
-        <p:style>
-          <a:lnRef idx="1">
-            <a:schemeClr val="accent1"/>
-          </a:lnRef>
-          <a:fillRef idx="3">
-            <a:schemeClr val="accent1"/>
-          </a:fillRef>
-          <a:effectRef idx="2">
-            <a:schemeClr val="accent1"/>
-          </a:effectRef>
-          <a:fontRef idx="minor">
-            <a:schemeClr val="lt1"/>
-          </a:fontRef>
-        </p:style>
-        <p:txBody>
-          <a:bodyPr rtlCol="0" anchor="ctr" wrap="square" lIns="73152" rIns="73152" tIns="36576" bIns="36576"/>
-          <a:lstStyle/>
-          <a:p>
-            <a:pPr algn="ctr"/>
-            <a:r>
-              <a:rPr sz="1000" b="0" i="0">
-                <a:solidFill>
-                  <a:srgbClr val="1F2D3D"/>
-                </a:solidFill>
-                <a:latin typeface="Calibri"/>
-              </a:rPr>
-              <a:t>3. Apply shape-specific rubric  (4 rules — see slide 6)</a:t>
-            </a:r>
-          </a:p>
-        </p:txBody>
-      </p:sp>
-      <p:cxnSp>
-        <p:nvCxnSpPr>
-          <p:cNvPr id="13" name="Connector 12"/>
-          <p:cNvCxnSpPr/>
-          <p:nvPr/>
-        </p:nvCxnSpPr>
-        <p:spPr>
-          <a:xfrm>
-            <a:off x="3246120" y="3675887"/>
-            <a:ext cx="0" cy="118872"/>
-          </a:xfrm>
-          <a:prstGeom prst="line">
-            <a:avLst/>
-          </a:prstGeom>
-          <a:ln w="16510">
-            <a:solidFill>
-              <a:srgbClr val="4A6EA0"/>
-            </a:solidFill>
-            <a:tailEnd type="triangle" w="med" h="med"/>
-          </a:ln>
-        </p:spPr>
-        <p:style>
-          <a:lnRef idx="2">
-            <a:schemeClr val="accent1"/>
-          </a:lnRef>
-          <a:fillRef idx="0">
-            <a:schemeClr val="accent1"/>
-          </a:fillRef>
-          <a:effectRef idx="1">
-            <a:schemeClr val="accent1"/>
-          </a:effectRef>
-          <a:fontRef idx="minor">
-            <a:schemeClr val="tx1"/>
-          </a:fontRef>
-        </p:style>
-      </p:cxnSp>
-      <p:cxnSp>
-        <p:nvCxnSpPr>
-          <p:cNvPr id="14" name="Connector 13"/>
-          <p:cNvCxnSpPr/>
-          <p:nvPr/>
-        </p:nvCxnSpPr>
-        <p:spPr>
-          <a:xfrm>
-            <a:off x="3246120" y="4178807"/>
-            <a:ext cx="0" cy="118872"/>
-          </a:xfrm>
-          <a:prstGeom prst="line">
-            <a:avLst/>
-          </a:prstGeom>
-          <a:ln w="16510">
-            <a:solidFill>
-              <a:srgbClr val="4A6EA0"/>
-            </a:solidFill>
-            <a:tailEnd type="triangle" w="med" h="med"/>
-          </a:ln>
-        </p:spPr>
-        <p:style>
-          <a:lnRef idx="2">
-            <a:schemeClr val="accent1"/>
-          </a:lnRef>
-          <a:fillRef idx="0">
-            <a:schemeClr val="accent1"/>
-          </a:fillRef>
-          <a:effectRef idx="1">
-            <a:schemeClr val="accent1"/>
-          </a:effectRef>
-          <a:fontRef idx="minor">
-            <a:schemeClr val="tx1"/>
-          </a:fontRef>
-        </p:style>
-      </p:cxnSp>
-      <p:sp>
-        <p:nvSpPr>
-          <p:cNvPr id="15" name="Diamond 14"/>
-          <p:cNvSpPr/>
-          <p:nvPr/>
-        </p:nvSpPr>
-        <p:spPr>
-          <a:xfrm>
-            <a:off x="2057400" y="4297679"/>
-            <a:ext cx="2377440" cy="502920"/>
-          </a:xfrm>
-          <a:prstGeom prst="diamond">
-            <a:avLst/>
-          </a:prstGeom>
-          <a:solidFill>
-            <a:srgbClr val="FCE7C4"/>
-          </a:solidFill>
-          <a:ln w="15875">
-            <a:solidFill>
-              <a:srgbClr val="C9952C"/>
-            </a:solidFill>
-          </a:ln>
-        </p:spPr>
-        <p:style>
-          <a:lnRef idx="1">
-            <a:schemeClr val="accent1"/>
-          </a:lnRef>
-          <a:fillRef idx="3">
-            <a:schemeClr val="accent1"/>
-          </a:fillRef>
-          <a:effectRef idx="2">
-            <a:schemeClr val="accent1"/>
-          </a:effectRef>
-          <a:fontRef idx="minor">
-            <a:schemeClr val="lt1"/>
-          </a:fontRef>
-        </p:style>
-        <p:txBody>
-          <a:bodyPr rtlCol="0" anchor="ctr" wrap="square" lIns="73152" rIns="73152" tIns="36576" bIns="36576"/>
-          <a:lstStyle/>
-          <a:p>
-            <a:pPr algn="ctr"/>
-            <a:r>
-              <a:rPr sz="1000" b="1" i="0">
-                <a:solidFill>
-                  <a:srgbClr val="1F2D3D"/>
-                </a:solidFill>
-                <a:latin typeface="Calibri"/>
-              </a:rPr>
-              <a:t>Pass all checks?</a:t>
-            </a:r>
-          </a:p>
-        </p:txBody>
-      </p:sp>
-      <p:sp>
-        <p:nvSpPr>
-          <p:cNvPr id="16" name="Rounded Rectangle 15"/>
-          <p:cNvSpPr/>
-          <p:nvPr/>
-        </p:nvSpPr>
-        <p:spPr>
-          <a:xfrm>
-            <a:off x="4206240" y="4343399"/>
-            <a:ext cx="1691640" cy="338328"/>
-          </a:xfrm>
-          <a:prstGeom prst="roundRect">
-            <a:avLst/>
-          </a:prstGeom>
-          <a:solidFill>
-            <a:srgbClr val="F8E3E3"/>
-          </a:solidFill>
-          <a:ln w="12700">
-            <a:solidFill>
-              <a:srgbClr val="A84A4A"/>
-            </a:solidFill>
-          </a:ln>
-        </p:spPr>
-        <p:style>
-          <a:lnRef idx="1">
-            <a:schemeClr val="accent1"/>
-          </a:lnRef>
-          <a:fillRef idx="3">
-            <a:schemeClr val="accent1"/>
-          </a:fillRef>
-          <a:effectRef idx="2">
-            <a:schemeClr val="accent1"/>
-          </a:effectRef>
-          <a:fontRef idx="minor">
-            <a:schemeClr val="lt1"/>
-          </a:fontRef>
-        </p:style>
-        <p:txBody>
-          <a:bodyPr rtlCol="0" anchor="ctr" wrap="square" lIns="73152" rIns="73152" tIns="36576" bIns="36576"/>
-          <a:lstStyle/>
-          <a:p>
-            <a:pPr algn="ctr"/>
-            <a:r>
-              <a:rPr sz="800" b="1" i="0">
-                <a:solidFill>
-                  <a:srgbClr val="1F2D3D"/>
-                </a:solidFill>
-                <a:latin typeface="Calibri"/>
-              </a:rPr>
-              <a:t>no:  revise (≤2)
-then auto-park</a:t>
-            </a:r>
-          </a:p>
-        </p:txBody>
-      </p:sp>
-      <p:cxnSp>
-        <p:nvCxnSpPr>
-          <p:cNvPr id="17" name="Connector 16"/>
-          <p:cNvCxnSpPr/>
-          <p:nvPr/>
-        </p:nvCxnSpPr>
-        <p:spPr>
-          <a:xfrm flipH="1" flipV="1">
-            <a:off x="4206240" y="4512563"/>
-            <a:ext cx="228600" cy="36577"/>
-          </a:xfrm>
-          <a:prstGeom prst="line">
-            <a:avLst/>
-          </a:prstGeom>
-          <a:ln w="25400">
-            <a:solidFill>
-              <a:srgbClr val="4A6EA0"/>
-            </a:solidFill>
-            <a:tailEnd type="triangle" w="med" h="med"/>
-          </a:ln>
-        </p:spPr>
-        <p:style>
-          <a:lnRef idx="2">
-            <a:schemeClr val="accent1"/>
-          </a:lnRef>
-          <a:fillRef idx="0">
-            <a:schemeClr val="accent1"/>
-          </a:fillRef>
-          <a:effectRef idx="1">
-            <a:schemeClr val="accent1"/>
-          </a:effectRef>
-          <a:fontRef idx="minor">
-            <a:schemeClr val="tx1"/>
-          </a:fontRef>
-        </p:style>
-      </p:cxnSp>
-      <p:sp>
-        <p:nvSpPr>
-          <p:cNvPr id="18" name="TextBox 17"/>
-          <p:cNvSpPr txBox="1"/>
-          <p:nvPr/>
-        </p:nvSpPr>
-        <p:spPr>
-          <a:xfrm>
-            <a:off x="4366259" y="4366259"/>
-            <a:ext cx="822960" cy="274320"/>
-          </a:xfrm>
-          <a:prstGeom prst="rect">
-            <a:avLst/>
-          </a:prstGeom>
-          <a:noFill/>
-        </p:spPr>
-        <p:txBody>
-          <a:bodyPr wrap="none" lIns="36576" rIns="36576" tIns="0" bIns="0">
-            <a:spAutoFit/>
-          </a:bodyPr>
-          <a:lstStyle/>
-          <a:p>
-            <a:pPr algn="ctr"/>
-            <a:r>
-              <a:rPr sz="1000" b="1">
-                <a:solidFill>
-                  <a:srgbClr val="A84A4A"/>
-                </a:solidFill>
-                <a:latin typeface="Calibri"/>
-              </a:rPr>
-              <a:t>no</a:t>
-            </a:r>
-          </a:p>
-        </p:txBody>
-      </p:sp>
-      <p:cxnSp>
-        <p:nvCxnSpPr>
-          <p:cNvPr id="19" name="Connector 18"/>
-          <p:cNvCxnSpPr/>
-          <p:nvPr/>
-        </p:nvCxnSpPr>
-        <p:spPr>
-          <a:xfrm>
-            <a:off x="3246120" y="4800599"/>
-            <a:ext cx="0" cy="274320"/>
-          </a:xfrm>
-          <a:prstGeom prst="line">
-            <a:avLst/>
-          </a:prstGeom>
-          <a:ln w="25400">
-            <a:solidFill>
-              <a:srgbClr val="4A6EA0"/>
-            </a:solidFill>
-            <a:tailEnd type="triangle" w="med" h="med"/>
-          </a:ln>
-        </p:spPr>
-        <p:style>
-          <a:lnRef idx="2">
-            <a:schemeClr val="accent1"/>
-          </a:lnRef>
-          <a:fillRef idx="0">
-            <a:schemeClr val="accent1"/>
-          </a:fillRef>
-          <a:effectRef idx="1">
-            <a:schemeClr val="accent1"/>
-          </a:effectRef>
-          <a:fontRef idx="minor">
-            <a:schemeClr val="tx1"/>
-          </a:fontRef>
-        </p:style>
-      </p:cxnSp>
-      <p:sp>
-        <p:nvSpPr>
-          <p:cNvPr id="20" name="TextBox 19"/>
-          <p:cNvSpPr txBox="1"/>
-          <p:nvPr/>
-        </p:nvSpPr>
-        <p:spPr>
-          <a:xfrm>
-            <a:off x="3291839" y="4773167"/>
-            <a:ext cx="822960" cy="274320"/>
-          </a:xfrm>
-          <a:prstGeom prst="rect">
-            <a:avLst/>
-          </a:prstGeom>
-          <a:noFill/>
-        </p:spPr>
-        <p:txBody>
-          <a:bodyPr wrap="none" lIns="36576" rIns="36576" tIns="0" bIns="0">
-            <a:spAutoFit/>
-          </a:bodyPr>
-          <a:lstStyle/>
-          <a:p>
-            <a:pPr algn="ctr"/>
-            <a:r>
-              <a:rPr sz="1000" b="1">
-                <a:solidFill>
-                  <a:srgbClr val="5C8347"/>
-                </a:solidFill>
-                <a:latin typeface="Calibri"/>
-              </a:rPr>
-              <a:t>yes</a:t>
-            </a:r>
-          </a:p>
-        </p:txBody>
-      </p:sp>
-      <p:sp>
-        <p:nvSpPr>
-          <p:cNvPr id="21" name="Rounded Rectangle 20"/>
-          <p:cNvSpPr/>
-          <p:nvPr/>
-        </p:nvSpPr>
-        <p:spPr>
-          <a:xfrm>
-            <a:off x="502920" y="5074919"/>
-            <a:ext cx="5486400" cy="384048"/>
-          </a:xfrm>
-          <a:prstGeom prst="roundRect">
-            <a:avLst/>
-          </a:prstGeom>
-          <a:solidFill>
-            <a:srgbClr val="DCE9D7"/>
-          </a:solidFill>
-          <a:ln w="12700">
-            <a:solidFill>
-              <a:srgbClr val="5C8347"/>
-            </a:solidFill>
-          </a:ln>
-        </p:spPr>
-        <p:style>
-          <a:lnRef idx="1">
-            <a:schemeClr val="accent1"/>
-          </a:lnRef>
-          <a:fillRef idx="3">
-            <a:schemeClr val="accent1"/>
-          </a:fillRef>
-          <a:effectRef idx="2">
-            <a:schemeClr val="accent1"/>
-          </a:effectRef>
-          <a:fontRef idx="minor">
-            <a:schemeClr val="lt1"/>
-          </a:fontRef>
-        </p:style>
-        <p:txBody>
-          <a:bodyPr rtlCol="0" anchor="ctr" wrap="square" lIns="73152" rIns="73152" tIns="36576" bIns="36576"/>
-          <a:lstStyle/>
-          <a:p>
-            <a:pPr algn="ctr"/>
-            <a:r>
-              <a:rPr sz="1000" b="1" i="0">
-                <a:solidFill>
-                  <a:srgbClr val="1F2D3D"/>
-                </a:solidFill>
-                <a:latin typeface="Calibri"/>
-              </a:rPr>
-              <a:t>Story kept (validated) → Output A</a:t>
-            </a:r>
-          </a:p>
-        </p:txBody>
-      </p:sp>
-      <p:sp>
-        <p:nvSpPr>
-          <p:cNvPr id="22" name="Rounded Rectangle 21"/>
-          <p:cNvSpPr/>
-          <p:nvPr/>
-        </p:nvSpPr>
-        <p:spPr>
-          <a:xfrm>
-            <a:off x="6355080" y="1417320"/>
-            <a:ext cx="5486400" cy="457200"/>
+            <a:off x="6178143" y="1417320"/>
+            <a:ext cx="5647791" cy="329184"/>
           </a:xfrm>
           <a:prstGeom prst="roundRect">
             <a:avLst/>
@@ -15263,27 +17219,27 @@
           <a:p>
             <a:pPr algn="ctr"/>
             <a:r>
-              <a:rPr sz="1500" b="1" i="0">
+              <a:rPr sz="1300" b="1" i="0">
                 <a:solidFill>
                   <a:srgbClr val="1F4E79"/>
                 </a:solidFill>
                 <a:latin typeface="Calibri"/>
               </a:rPr>
-              <a:t>Dependency Resolver</a:t>
-            </a:r>
-          </a:p>
-        </p:txBody>
-      </p:sp>
-      <p:sp>
-        <p:nvSpPr>
-          <p:cNvPr id="23" name="TextBox 22"/>
+              <a:t>WORKFLOW-STAGE-SPLIT</a:t>
+            </a:r>
+          </a:p>
+        </p:txBody>
+      </p:sp>
+      <p:sp>
+        <p:nvSpPr>
+          <p:cNvPr id="9" name="TextBox 8"/>
           <p:cNvSpPr txBox="1"/>
           <p:nvPr/>
         </p:nvSpPr>
         <p:spPr>
           <a:xfrm>
-            <a:off x="6355080" y="1920240"/>
-            <a:ext cx="5486400" cy="274320"/>
+            <a:off x="6223863" y="1764792"/>
+            <a:ext cx="5556351" cy="201168"/>
           </a:xfrm>
           <a:prstGeom prst="rect">
             <a:avLst/>
@@ -15304,66 +17260,31 @@
                 </a:solidFill>
                 <a:latin typeface="Calibri"/>
               </a:rPr>
-              <a:t>Takes all kept stories; outputs a topological order for sprint planning.</a:t>
-            </a:r>
-          </a:p>
-        </p:txBody>
-      </p:sp>
-      <p:sp>
-        <p:nvSpPr>
-          <p:cNvPr id="24" name="TextBox 23"/>
-          <p:cNvSpPr txBox="1"/>
-          <p:nvPr/>
-        </p:nvSpPr>
-        <p:spPr>
-          <a:xfrm>
-            <a:off x="6355080" y="2212848"/>
-            <a:ext cx="5486400" cy="274320"/>
+              <a:t>Stage in title  +  sibling stories enumerated</a:t>
+            </a:r>
+          </a:p>
+        </p:txBody>
+      </p:sp>
+      <p:sp>
+        <p:nvSpPr>
+          <p:cNvPr id="10" name="Rectangle 9"/>
+          <p:cNvSpPr/>
+          <p:nvPr/>
+        </p:nvSpPr>
+        <p:spPr>
+          <a:xfrm>
+            <a:off x="6178143" y="2020824"/>
+            <a:ext cx="5647791" cy="1828800"/>
           </a:xfrm>
           <a:prstGeom prst="rect">
             <a:avLst/>
           </a:prstGeom>
-          <a:noFill/>
-        </p:spPr>
-        <p:txBody>
-          <a:bodyPr wrap="square" anchor="t">
-            <a:spAutoFit/>
-          </a:bodyPr>
-          <a:lstStyle/>
-          <a:p>
-            <a:pPr algn="ctr"/>
-            <a:r>
-              <a:rPr sz="900" b="0" i="1">
-                <a:solidFill>
-                  <a:srgbClr val="55606E"/>
-                </a:solidFill>
-                <a:latin typeface="Calibri"/>
-              </a:rPr>
-              <a:t>Each story has dependencies[] and cross_links[] — the resolver builds a DAG and sorts it.</a:t>
-            </a:r>
-          </a:p>
-        </p:txBody>
-      </p:sp>
-      <p:sp>
-        <p:nvSpPr>
-          <p:cNvPr id="25" name="Rounded Rectangle 24"/>
-          <p:cNvSpPr/>
-          <p:nvPr/>
-        </p:nvSpPr>
-        <p:spPr>
-          <a:xfrm>
-            <a:off x="8618219" y="2606040"/>
-            <a:ext cx="960120" cy="365760"/>
-          </a:xfrm>
-          <a:prstGeom prst="roundRect">
-            <a:avLst/>
-          </a:prstGeom>
           <a:solidFill>
-            <a:srgbClr val="E7EFF8"/>
+            <a:srgbClr val="F6F6F6"/>
           </a:solidFill>
-          <a:ln w="12700">
+          <a:ln w="9525">
             <a:solidFill>
-              <a:srgbClr val="4A6EA0"/>
+              <a:srgbClr val="C0C8D0"/>
             </a:solidFill>
           </a:ln>
         </p:spPr>
@@ -15382,42 +17303,254 @@
           </a:fontRef>
         </p:style>
         <p:txBody>
-          <a:bodyPr rtlCol="0" anchor="ctr" wrap="square" lIns="73152" rIns="73152" tIns="36576" bIns="36576"/>
-          <a:lstStyle/>
-          <a:p>
-            <a:pPr algn="ctr"/>
-            <a:r>
-              <a:rPr sz="1000" b="1" i="0">
-                <a:solidFill>
-                  <a:srgbClr val="1F2D3D"/>
-                </a:solidFill>
-                <a:latin typeface="Calibri"/>
-              </a:rPr>
-              <a:t>Story A</a:t>
-            </a:r>
-          </a:p>
-        </p:txBody>
-      </p:sp>
-      <p:sp>
-        <p:nvSpPr>
-          <p:cNvPr id="26" name="Rounded Rectangle 25"/>
+          <a:bodyPr rtlCol="0" anchor="t" wrap="none" lIns="109728" rIns="109728" tIns="73152" bIns="73152"/>
+          <a:lstStyle/>
+          <a:p>
+            <a:pPr algn="l">
+              <a:spcAft>
+                <a:spcPts val="0"/>
+              </a:spcAft>
+            </a:pPr>
+            <a:r>
+              <a:rPr sz="850">
+                <a:solidFill>
+                  <a:srgbClr val="1F2D3D"/>
+                </a:solidFill>
+                <a:latin typeface="Consolas"/>
+              </a:rPr>
+              <a:t>title:  "PHI update — after results</a:t>
+            </a:r>
+          </a:p>
+          <a:p>
+            <a:pPr algn="l">
+              <a:spcAft>
+                <a:spcPts val="0"/>
+              </a:spcAft>
+            </a:pPr>
+            <a:r>
+              <a:rPr sz="850">
+                <a:solidFill>
+                  <a:srgbClr val="1F2D3D"/>
+                </a:solidFill>
+                <a:latin typeface="Consolas"/>
+              </a:rPr>
+              <a:t>        are reported"</a:t>
+            </a:r>
+          </a:p>
+          <a:p>
+            <a:pPr algn="l">
+              <a:spcAft>
+                <a:spcPts val="0"/>
+              </a:spcAft>
+            </a:pPr>
+            <a:r>
+              <a:rPr sz="850">
+                <a:solidFill>
+                  <a:srgbClr val="1F2D3D"/>
+                </a:solidFill>
+                <a:latin typeface="Consolas"/>
+              </a:rPr>
+              <a:t>shape:   workflow-stage-split</a:t>
+            </a:r>
+          </a:p>
+          <a:p>
+            <a:pPr algn="l">
+              <a:spcAft>
+                <a:spcPts val="0"/>
+              </a:spcAft>
+            </a:pPr>
+            <a:r>
+              <a:rPr sz="850">
+                <a:solidFill>
+                  <a:srgbClr val="1F2D3D"/>
+                </a:solidFill>
+                <a:latin typeface="Consolas"/>
+              </a:rPr>
+              <a:t>persona: supervisor</a:t>
+            </a:r>
+          </a:p>
+          <a:p>
+            <a:pPr algn="l">
+              <a:spcAft>
+                <a:spcPts val="0"/>
+              </a:spcAft>
+            </a:pPr>
+            <a:r>
+              <a:rPr sz="850">
+                <a:solidFill>
+                  <a:srgbClr val="1F2D3D"/>
+                </a:solidFill>
+                <a:latin typeface="Consolas"/>
+              </a:rPr>
+              <a:t>stage:   reporting_case_closure</a:t>
+            </a:r>
+          </a:p>
+          <a:p>
+            <a:pPr algn="l">
+              <a:spcAft>
+                <a:spcPts val="0"/>
+              </a:spcAft>
+            </a:pPr>
+            <a:r>
+              <a:rPr sz="850">
+                <a:solidFill>
+                  <a:srgbClr val="1F2D3D"/>
+                </a:solidFill>
+                <a:latin typeface="Consolas"/>
+              </a:rPr>
+              <a:t/>
+            </a:r>
+          </a:p>
+          <a:p>
+            <a:pPr algn="l">
+              <a:spcAft>
+                <a:spcPts val="0"/>
+              </a:spcAft>
+            </a:pPr>
+            <a:r>
+              <a:rPr sz="850">
+                <a:solidFill>
+                  <a:srgbClr val="1F2D3D"/>
+                </a:solidFill>
+                <a:latin typeface="Consolas"/>
+              </a:rPr>
+              <a:t>AC1:  When PHI corrected on finalised</a:t>
+            </a:r>
+          </a:p>
+          <a:p>
+            <a:pPr algn="l">
+              <a:spcAft>
+                <a:spcPts val="0"/>
+              </a:spcAft>
+            </a:pPr>
+            <a:r>
+              <a:rPr sz="850">
+                <a:solidFill>
+                  <a:srgbClr val="1F2D3D"/>
+                </a:solidFill>
+                <a:latin typeface="Consolas"/>
+              </a:rPr>
+              <a:t>      report, system MUST regenerate</a:t>
+            </a:r>
+          </a:p>
+          <a:p>
+            <a:pPr algn="l">
+              <a:spcAft>
+                <a:spcPts val="0"/>
+              </a:spcAft>
+            </a:pPr>
+            <a:r>
+              <a:rPr sz="850">
+                <a:solidFill>
+                  <a:srgbClr val="1F2D3D"/>
+                </a:solidFill>
+                <a:latin typeface="Consolas"/>
+              </a:rPr>
+              <a:t>      with audit trail entry</a:t>
+            </a:r>
+          </a:p>
+          <a:p>
+            <a:pPr algn="l">
+              <a:spcAft>
+                <a:spcPts val="0"/>
+              </a:spcAft>
+            </a:pPr>
+            <a:r>
+              <a:rPr sz="850">
+                <a:solidFill>
+                  <a:srgbClr val="1F2D3D"/>
+                </a:solidFill>
+                <a:latin typeface="Consolas"/>
+              </a:rPr>
+              <a:t>AC2:  When EHR has report, system MUST</a:t>
+            </a:r>
+          </a:p>
+          <a:p>
+            <a:pPr algn="l">
+              <a:spcAft>
+                <a:spcPts val="0"/>
+              </a:spcAft>
+            </a:pPr>
+            <a:r>
+              <a:rPr sz="850">
+                <a:solidFill>
+                  <a:srgbClr val="1F2D3D"/>
+                </a:solidFill>
+                <a:latin typeface="Consolas"/>
+              </a:rPr>
+              <a:t>      send corrected-result message</a:t>
+            </a:r>
+          </a:p>
+          <a:p>
+            <a:pPr algn="l">
+              <a:spcAft>
+                <a:spcPts val="0"/>
+              </a:spcAft>
+            </a:pPr>
+            <a:r>
+              <a:rPr sz="850">
+                <a:solidFill>
+                  <a:srgbClr val="1F2D3D"/>
+                </a:solidFill>
+                <a:latin typeface="Consolas"/>
+              </a:rPr>
+              <a:t/>
+            </a:r>
+          </a:p>
+          <a:p>
+            <a:pPr algn="l">
+              <a:spcAft>
+                <a:spcPts val="0"/>
+              </a:spcAft>
+            </a:pPr>
+            <a:r>
+              <a:rPr sz="850">
+                <a:solidFill>
+                  <a:srgbClr val="1F2D3D"/>
+                </a:solidFill>
+                <a:latin typeface="Consolas"/>
+              </a:rPr>
+              <a:t>cross_links: STORY-0076 (before work),</a:t>
+            </a:r>
+          </a:p>
+          <a:p>
+            <a:pPr algn="l">
+              <a:spcAft>
+                <a:spcPts val="0"/>
+              </a:spcAft>
+            </a:pPr>
+            <a:r>
+              <a:rPr sz="850">
+                <a:solidFill>
+                  <a:srgbClr val="1F2D3D"/>
+                </a:solidFill>
+                <a:latin typeface="Consolas"/>
+              </a:rPr>
+              <a:t>             STORY-0077 (after work started)</a:t>
+            </a:r>
+          </a:p>
+        </p:txBody>
+      </p:sp>
+      <p:sp>
+        <p:nvSpPr>
+          <p:cNvPr id="11" name="Rounded Rectangle 10"/>
           <p:cNvSpPr/>
           <p:nvPr/>
         </p:nvSpPr>
         <p:spPr>
           <a:xfrm>
-            <a:off x="6812280" y="3337560"/>
-            <a:ext cx="960120" cy="365760"/>
+            <a:off x="365760" y="4014216"/>
+            <a:ext cx="5647791" cy="329184"/>
           </a:xfrm>
           <a:prstGeom prst="roundRect">
             <a:avLst/>
           </a:prstGeom>
           <a:solidFill>
-            <a:srgbClr val="E7EFF8"/>
+            <a:srgbClr val="FAE9CB"/>
           </a:solidFill>
           <a:ln w="12700">
             <a:solidFill>
-              <a:srgbClr val="4A6EA0"/>
+              <a:srgbClr val="C9952C"/>
             </a:solidFill>
           </a:ln>
         </p:spPr>
@@ -15441,37 +17574,72 @@
           <a:p>
             <a:pPr algn="ctr"/>
             <a:r>
-              <a:rPr sz="1000" b="1" i="0">
-                <a:solidFill>
-                  <a:srgbClr val="1F2D3D"/>
-                </a:solidFill>
-                <a:latin typeface="Calibri"/>
-              </a:rPr>
-              <a:t>Story B</a:t>
-            </a:r>
-          </a:p>
-        </p:txBody>
-      </p:sp>
-      <p:sp>
-        <p:nvSpPr>
-          <p:cNvPr id="27" name="Rounded Rectangle 26"/>
+              <a:rPr sz="1300" b="1" i="0">
+                <a:solidFill>
+                  <a:srgbClr val="1F4E79"/>
+                </a:solidFill>
+                <a:latin typeface="Calibri"/>
+              </a:rPr>
+              <a:t>CONFIGURATION-INSTANCE</a:t>
+            </a:r>
+          </a:p>
+        </p:txBody>
+      </p:sp>
+      <p:sp>
+        <p:nvSpPr>
+          <p:cNvPr id="12" name="TextBox 11"/>
+          <p:cNvSpPr txBox="1"/>
+          <p:nvPr/>
+        </p:nvSpPr>
+        <p:spPr>
+          <a:xfrm>
+            <a:off x="411480" y="4361688"/>
+            <a:ext cx="5556351" cy="201168"/>
+          </a:xfrm>
+          <a:prstGeom prst="rect">
+            <a:avLst/>
+          </a:prstGeom>
+          <a:noFill/>
+        </p:spPr>
+        <p:txBody>
+          <a:bodyPr wrap="square" anchor="t">
+            <a:spAutoFit/>
+          </a:bodyPr>
+          <a:lstStyle/>
+          <a:p>
+            <a:pPr algn="ctr"/>
+            <a:r>
+              <a:rPr sz="1000" b="0" i="1">
+                <a:solidFill>
+                  <a:srgbClr val="55606E"/>
+                </a:solidFill>
+                <a:latin typeface="Calibri"/>
+              </a:rPr>
+              <a:t>Concrete typed values  ·  no MUST/SHALL pretense</a:t>
+            </a:r>
+          </a:p>
+        </p:txBody>
+      </p:sp>
+      <p:sp>
+        <p:nvSpPr>
+          <p:cNvPr id="13" name="Rectangle 12"/>
           <p:cNvSpPr/>
           <p:nvPr/>
         </p:nvSpPr>
         <p:spPr>
           <a:xfrm>
-            <a:off x="10424159" y="3337560"/>
-            <a:ext cx="960120" cy="365760"/>
-          </a:xfrm>
-          <a:prstGeom prst="roundRect">
+            <a:off x="365760" y="4617720"/>
+            <a:ext cx="5647791" cy="1828800"/>
+          </a:xfrm>
+          <a:prstGeom prst="rect">
             <a:avLst/>
           </a:prstGeom>
           <a:solidFill>
-            <a:srgbClr val="E7EFF8"/>
+            <a:srgbClr val="F6F6F6"/>
           </a:solidFill>
-          <a:ln w="12700">
+          <a:ln w="9525">
             <a:solidFill>
-              <a:srgbClr val="4A6EA0"/>
+              <a:srgbClr val="C0C8D0"/>
             </a:solidFill>
           </a:ln>
         </p:spPr>
@@ -15490,42 +17658,238 @@
           </a:fontRef>
         </p:style>
         <p:txBody>
-          <a:bodyPr rtlCol="0" anchor="ctr" wrap="square" lIns="73152" rIns="73152" tIns="36576" bIns="36576"/>
-          <a:lstStyle/>
-          <a:p>
-            <a:pPr algn="ctr"/>
-            <a:r>
-              <a:rPr sz="1000" b="1" i="0">
-                <a:solidFill>
-                  <a:srgbClr val="1F2D3D"/>
-                </a:solidFill>
-                <a:latin typeface="Calibri"/>
-              </a:rPr>
-              <a:t>Story C</a:t>
-            </a:r>
-          </a:p>
-        </p:txBody>
-      </p:sp>
-      <p:sp>
-        <p:nvSpPr>
-          <p:cNvPr id="28" name="Rounded Rectangle 27"/>
+          <a:bodyPr rtlCol="0" anchor="t" wrap="none" lIns="109728" rIns="109728" tIns="73152" bIns="73152"/>
+          <a:lstStyle/>
+          <a:p>
+            <a:pPr algn="l">
+              <a:spcAft>
+                <a:spcPts val="0"/>
+              </a:spcAft>
+            </a:pPr>
+            <a:r>
+              <a:rPr sz="850">
+                <a:solidFill>
+                  <a:srgbClr val="1F2D3D"/>
+                </a:solidFill>
+                <a:latin typeface="Consolas"/>
+              </a:rPr>
+              <a:t>title:  "Blood culture incubation</a:t>
+            </a:r>
+          </a:p>
+          <a:p>
+            <a:pPr algn="l">
+              <a:spcAft>
+                <a:spcPts val="0"/>
+              </a:spcAft>
+            </a:pPr>
+            <a:r>
+              <a:rPr sz="850">
+                <a:solidFill>
+                  <a:srgbClr val="1F2D3D"/>
+                </a:solidFill>
+                <a:latin typeface="Consolas"/>
+              </a:rPr>
+              <a:t>        — bottle parameters"</a:t>
+            </a:r>
+          </a:p>
+          <a:p>
+            <a:pPr algn="l">
+              <a:spcAft>
+                <a:spcPts val="0"/>
+              </a:spcAft>
+            </a:pPr>
+            <a:r>
+              <a:rPr sz="850">
+                <a:solidFill>
+                  <a:srgbClr val="1F2D3D"/>
+                </a:solidFill>
+                <a:latin typeface="Consolas"/>
+              </a:rPr>
+              <a:t>shape:   configuration-instance</a:t>
+            </a:r>
+          </a:p>
+          <a:p>
+            <a:pPr algn="l">
+              <a:spcAft>
+                <a:spcPts val="0"/>
+              </a:spcAft>
+            </a:pPr>
+            <a:r>
+              <a:rPr sz="850">
+                <a:solidFill>
+                  <a:srgbClr val="1F2D3D"/>
+                </a:solidFill>
+                <a:latin typeface="Consolas"/>
+              </a:rPr>
+              <a:t>tests:   [blood_culture_incubation]</a:t>
+            </a:r>
+          </a:p>
+          <a:p>
+            <a:pPr algn="l">
+              <a:spcAft>
+                <a:spcPts val="0"/>
+              </a:spcAft>
+            </a:pPr>
+            <a:r>
+              <a:rPr sz="850">
+                <a:solidFill>
+                  <a:srgbClr val="1F2D3D"/>
+                </a:solidFill>
+                <a:latin typeface="Consolas"/>
+              </a:rPr>
+              <a:t>persona: null     stage: null</a:t>
+            </a:r>
+          </a:p>
+          <a:p>
+            <a:pPr algn="l">
+              <a:spcAft>
+                <a:spcPts val="0"/>
+              </a:spcAft>
+            </a:pPr>
+            <a:r>
+              <a:rPr sz="850">
+                <a:solidFill>
+                  <a:srgbClr val="1F2D3D"/>
+                </a:solidFill>
+                <a:latin typeface="Consolas"/>
+              </a:rPr>
+              <a:t/>
+            </a:r>
+          </a:p>
+          <a:p>
+            <a:pPr algn="l">
+              <a:spcAft>
+                <a:spcPts val="0"/>
+              </a:spcAft>
+            </a:pPr>
+            <a:r>
+              <a:rPr sz="850">
+                <a:solidFill>
+                  <a:srgbClr val="1F2D3D"/>
+                </a:solidFill>
+                <a:latin typeface="Consolas"/>
+              </a:rPr>
+              <a:t>AC1:  When bottle received, configure</a:t>
+            </a:r>
+          </a:p>
+          <a:p>
+            <a:pPr algn="l">
+              <a:spcAft>
+                <a:spcPts val="0"/>
+              </a:spcAft>
+            </a:pPr>
+            <a:r>
+              <a:rPr sz="850">
+                <a:solidFill>
+                  <a:srgbClr val="1F2D3D"/>
+                </a:solidFill>
+                <a:latin typeface="Consolas"/>
+              </a:rPr>
+              <a:t>      incubation</a:t>
+            </a:r>
+          </a:p>
+          <a:p>
+            <a:pPr algn="l">
+              <a:spcAft>
+                <a:spcPts val="0"/>
+              </a:spcAft>
+            </a:pPr>
+            <a:r>
+              <a:rPr sz="850">
+                <a:solidFill>
+                  <a:srgbClr val="1F2D3D"/>
+                </a:solidFill>
+                <a:latin typeface="Consolas"/>
+              </a:rPr>
+              <a:t>      expected_value:</a:t>
+            </a:r>
+          </a:p>
+          <a:p>
+            <a:pPr algn="l">
+              <a:spcAft>
+                <a:spcPts val="0"/>
+              </a:spcAft>
+            </a:pPr>
+            <a:r>
+              <a:rPr sz="850">
+                <a:solidFill>
+                  <a:srgbClr val="1F2D3D"/>
+                </a:solidFill>
+                <a:latin typeface="Consolas"/>
+              </a:rPr>
+              <a:t>        temperature_c:    35</a:t>
+            </a:r>
+          </a:p>
+          <a:p>
+            <a:pPr algn="l">
+              <a:spcAft>
+                <a:spcPts val="0"/>
+              </a:spcAft>
+            </a:pPr>
+            <a:r>
+              <a:rPr sz="850">
+                <a:solidFill>
+                  <a:srgbClr val="1F2D3D"/>
+                </a:solidFill>
+                <a:latin typeface="Consolas"/>
+              </a:rPr>
+              <a:t>        duration_h:       120</a:t>
+            </a:r>
+          </a:p>
+          <a:p>
+            <a:pPr algn="l">
+              <a:spcAft>
+                <a:spcPts val="0"/>
+              </a:spcAft>
+            </a:pPr>
+            <a:r>
+              <a:rPr sz="850">
+                <a:solidFill>
+                  <a:srgbClr val="1F2D3D"/>
+                </a:solidFill>
+                <a:latin typeface="Consolas"/>
+              </a:rPr>
+              <a:t>        agitation_rpm:    220</a:t>
+            </a:r>
+          </a:p>
+          <a:p>
+            <a:pPr algn="l">
+              <a:spcAft>
+                <a:spcPts val="0"/>
+              </a:spcAft>
+            </a:pPr>
+            <a:r>
+              <a:rPr sz="850">
+                <a:solidFill>
+                  <a:srgbClr val="1F2D3D"/>
+                </a:solidFill>
+                <a:latin typeface="Consolas"/>
+              </a:rPr>
+              <a:t>        alert_threshold_h: 24</a:t>
+            </a:r>
+          </a:p>
+        </p:txBody>
+      </p:sp>
+      <p:sp>
+        <p:nvSpPr>
+          <p:cNvPr id="14" name="Rounded Rectangle 13"/>
           <p:cNvSpPr/>
           <p:nvPr/>
         </p:nvSpPr>
         <p:spPr>
           <a:xfrm>
-            <a:off x="8618219" y="4069080"/>
-            <a:ext cx="960120" cy="365760"/>
+            <a:off x="6178143" y="4014216"/>
+            <a:ext cx="5647791" cy="329184"/>
           </a:xfrm>
           <a:prstGeom prst="roundRect">
             <a:avLst/>
           </a:prstGeom>
           <a:solidFill>
-            <a:srgbClr val="E7EFF8"/>
+            <a:srgbClr val="FAE9CB"/>
           </a:solidFill>
           <a:ln w="12700">
             <a:solidFill>
-              <a:srgbClr val="4A6EA0"/>
+              <a:srgbClr val="C9952C"/>
             </a:solidFill>
           </a:ln>
         </p:spPr>
@@ -15549,37 +17913,72 @@
           <a:p>
             <a:pPr algn="ctr"/>
             <a:r>
-              <a:rPr sz="1000" b="1" i="0">
-                <a:solidFill>
-                  <a:srgbClr val="1F2D3D"/>
-                </a:solidFill>
-                <a:latin typeface="Calibri"/>
-              </a:rPr>
-              <a:t>Story D</a:t>
-            </a:r>
-          </a:p>
-        </p:txBody>
-      </p:sp>
-      <p:sp>
-        <p:nvSpPr>
-          <p:cNvPr id="29" name="Rounded Rectangle 28"/>
+              <a:rPr sz="1300" b="1" i="0">
+                <a:solidFill>
+                  <a:srgbClr val="1F4E79"/>
+                </a:solidFill>
+                <a:latin typeface="Calibri"/>
+              </a:rPr>
+              <a:t>CLEANUP</a:t>
+            </a:r>
+          </a:p>
+        </p:txBody>
+      </p:sp>
+      <p:sp>
+        <p:nvSpPr>
+          <p:cNvPr id="15" name="TextBox 14"/>
+          <p:cNvSpPr txBox="1"/>
+          <p:nvPr/>
+        </p:nvSpPr>
+        <p:spPr>
+          <a:xfrm>
+            <a:off x="6223863" y="4361688"/>
+            <a:ext cx="5556351" cy="201168"/>
+          </a:xfrm>
+          <a:prstGeom prst="rect">
+            <a:avLst/>
+          </a:prstGeom>
+          <a:noFill/>
+        </p:spPr>
+        <p:txBody>
+          <a:bodyPr wrap="square" anchor="t">
+            <a:spAutoFit/>
+          </a:bodyPr>
+          <a:lstStyle/>
+          <a:p>
+            <a:pPr algn="ctr"/>
+            <a:r>
+              <a:rPr sz="1000" b="0" i="1">
+                <a:solidFill>
+                  <a:srgbClr val="55606E"/>
+                </a:solidFill>
+                <a:latin typeface="Calibri"/>
+              </a:rPr>
+              <a:t>Named artifact  +  before/after observable</a:t>
+            </a:r>
+          </a:p>
+        </p:txBody>
+      </p:sp>
+      <p:sp>
+        <p:nvSpPr>
+          <p:cNvPr id="16" name="Rectangle 15"/>
           <p:cNvSpPr/>
           <p:nvPr/>
         </p:nvSpPr>
         <p:spPr>
           <a:xfrm>
-            <a:off x="8618219" y="4800600"/>
-            <a:ext cx="960120" cy="365760"/>
-          </a:xfrm>
-          <a:prstGeom prst="roundRect">
+            <a:off x="6178143" y="4617720"/>
+            <a:ext cx="5647791" cy="1828800"/>
+          </a:xfrm>
+          <a:prstGeom prst="rect">
             <a:avLst/>
           </a:prstGeom>
           <a:solidFill>
-            <a:srgbClr val="E7EFF8"/>
+            <a:srgbClr val="F6F6F6"/>
           </a:solidFill>
-          <a:ln w="12700">
+          <a:ln w="9525">
             <a:solidFill>
-              <a:srgbClr val="4A6EA0"/>
+              <a:srgbClr val="C0C8D0"/>
             </a:solidFill>
           </a:ln>
         </p:spPr>
@@ -15598,259 +17997,253 @@
           </a:fontRef>
         </p:style>
         <p:txBody>
-          <a:bodyPr rtlCol="0" anchor="ctr" wrap="square" lIns="73152" rIns="73152" tIns="36576" bIns="36576"/>
-          <a:lstStyle/>
-          <a:p>
-            <a:pPr algn="ctr"/>
-            <a:r>
-              <a:rPr sz="1000" b="1" i="0">
-                <a:solidFill>
-                  <a:srgbClr val="1F2D3D"/>
-                </a:solidFill>
-                <a:latin typeface="Calibri"/>
-              </a:rPr>
-              <a:t>Story E</a:t>
-            </a:r>
-          </a:p>
-        </p:txBody>
-      </p:sp>
-      <p:cxnSp>
-        <p:nvCxnSpPr>
-          <p:cNvPr id="30" name="Connector 29"/>
-          <p:cNvCxnSpPr/>
-          <p:nvPr/>
-        </p:nvCxnSpPr>
-        <p:spPr>
-          <a:xfrm flipH="1">
-            <a:off x="7292340" y="2971800"/>
-            <a:ext cx="1805940" cy="365760"/>
-          </a:xfrm>
-          <a:prstGeom prst="line">
-            <a:avLst/>
-          </a:prstGeom>
-          <a:ln w="15240">
-            <a:solidFill>
-              <a:srgbClr val="4A6EA0"/>
-            </a:solidFill>
-            <a:tailEnd type="triangle" w="med" h="med"/>
-          </a:ln>
-        </p:spPr>
-        <p:style>
-          <a:lnRef idx="2">
-            <a:schemeClr val="accent1"/>
-          </a:lnRef>
-          <a:fillRef idx="0">
-            <a:schemeClr val="accent1"/>
-          </a:fillRef>
-          <a:effectRef idx="1">
-            <a:schemeClr val="accent1"/>
-          </a:effectRef>
-          <a:fontRef idx="minor">
-            <a:schemeClr val="tx1"/>
-          </a:fontRef>
-        </p:style>
-      </p:cxnSp>
-      <p:cxnSp>
-        <p:nvCxnSpPr>
-          <p:cNvPr id="31" name="Connector 30"/>
-          <p:cNvCxnSpPr/>
-          <p:nvPr/>
-        </p:nvCxnSpPr>
-        <p:spPr>
-          <a:xfrm>
-            <a:off x="9098280" y="2971800"/>
-            <a:ext cx="1805939" cy="365760"/>
-          </a:xfrm>
-          <a:prstGeom prst="line">
-            <a:avLst/>
-          </a:prstGeom>
-          <a:ln w="15240">
-            <a:solidFill>
-              <a:srgbClr val="4A6EA0"/>
-            </a:solidFill>
-            <a:tailEnd type="triangle" w="med" h="med"/>
-          </a:ln>
-        </p:spPr>
-        <p:style>
-          <a:lnRef idx="2">
-            <a:schemeClr val="accent1"/>
-          </a:lnRef>
-          <a:fillRef idx="0">
-            <a:schemeClr val="accent1"/>
-          </a:fillRef>
-          <a:effectRef idx="1">
-            <a:schemeClr val="accent1"/>
-          </a:effectRef>
-          <a:fontRef idx="minor">
-            <a:schemeClr val="tx1"/>
-          </a:fontRef>
-        </p:style>
-      </p:cxnSp>
-      <p:cxnSp>
-        <p:nvCxnSpPr>
-          <p:cNvPr id="32" name="Connector 31"/>
-          <p:cNvCxnSpPr/>
-          <p:nvPr/>
-        </p:nvCxnSpPr>
-        <p:spPr>
-          <a:xfrm>
-            <a:off x="7292340" y="3703320"/>
-            <a:ext cx="1805940" cy="365760"/>
-          </a:xfrm>
-          <a:prstGeom prst="line">
-            <a:avLst/>
-          </a:prstGeom>
-          <a:ln w="15240">
-            <a:solidFill>
-              <a:srgbClr val="4A6EA0"/>
-            </a:solidFill>
-            <a:tailEnd type="triangle" w="med" h="med"/>
-          </a:ln>
-        </p:spPr>
-        <p:style>
-          <a:lnRef idx="2">
-            <a:schemeClr val="accent1"/>
-          </a:lnRef>
-          <a:fillRef idx="0">
-            <a:schemeClr val="accent1"/>
-          </a:fillRef>
-          <a:effectRef idx="1">
-            <a:schemeClr val="accent1"/>
-          </a:effectRef>
-          <a:fontRef idx="minor">
-            <a:schemeClr val="tx1"/>
-          </a:fontRef>
-        </p:style>
-      </p:cxnSp>
-      <p:cxnSp>
-        <p:nvCxnSpPr>
-          <p:cNvPr id="33" name="Connector 32"/>
-          <p:cNvCxnSpPr/>
-          <p:nvPr/>
-        </p:nvCxnSpPr>
-        <p:spPr>
-          <a:xfrm flipH="1">
-            <a:off x="9098280" y="3703320"/>
-            <a:ext cx="1805939" cy="365760"/>
-          </a:xfrm>
-          <a:prstGeom prst="line">
-            <a:avLst/>
-          </a:prstGeom>
-          <a:ln w="15240">
-            <a:solidFill>
-              <a:srgbClr val="4A6EA0"/>
-            </a:solidFill>
-            <a:tailEnd type="triangle" w="med" h="med"/>
-          </a:ln>
-        </p:spPr>
-        <p:style>
-          <a:lnRef idx="2">
-            <a:schemeClr val="accent1"/>
-          </a:lnRef>
-          <a:fillRef idx="0">
-            <a:schemeClr val="accent1"/>
-          </a:fillRef>
-          <a:effectRef idx="1">
-            <a:schemeClr val="accent1"/>
-          </a:effectRef>
-          <a:fontRef idx="minor">
-            <a:schemeClr val="tx1"/>
-          </a:fontRef>
-        </p:style>
-      </p:cxnSp>
-      <p:cxnSp>
-        <p:nvCxnSpPr>
-          <p:cNvPr id="34" name="Connector 33"/>
-          <p:cNvCxnSpPr/>
-          <p:nvPr/>
-        </p:nvCxnSpPr>
-        <p:spPr>
-          <a:xfrm>
-            <a:off x="9098280" y="4434840"/>
-            <a:ext cx="0" cy="365760"/>
-          </a:xfrm>
-          <a:prstGeom prst="line">
-            <a:avLst/>
-          </a:prstGeom>
-          <a:ln w="15240">
-            <a:solidFill>
-              <a:srgbClr val="4A6EA0"/>
-            </a:solidFill>
-            <a:tailEnd type="triangle" w="med" h="med"/>
-          </a:ln>
-        </p:spPr>
-        <p:style>
-          <a:lnRef idx="2">
-            <a:schemeClr val="accent1"/>
-          </a:lnRef>
-          <a:fillRef idx="0">
-            <a:schemeClr val="accent1"/>
-          </a:fillRef>
-          <a:effectRef idx="1">
-            <a:schemeClr val="accent1"/>
-          </a:effectRef>
-          <a:fontRef idx="minor">
-            <a:schemeClr val="tx1"/>
-          </a:fontRef>
-        </p:style>
-      </p:cxnSp>
-      <p:sp>
-        <p:nvSpPr>
-          <p:cNvPr id="35" name="Rounded Rectangle 34"/>
-          <p:cNvSpPr/>
-          <p:nvPr/>
-        </p:nvSpPr>
-        <p:spPr>
-          <a:xfrm>
-            <a:off x="6355080" y="5349240"/>
-            <a:ext cx="5486400" cy="411480"/>
-          </a:xfrm>
-          <a:prstGeom prst="roundRect">
-            <a:avLst/>
-          </a:prstGeom>
-          <a:solidFill>
-            <a:srgbClr val="DCE9D7"/>
-          </a:solidFill>
-          <a:ln w="12700">
-            <a:solidFill>
-              <a:srgbClr val="5C8347"/>
-            </a:solidFill>
-          </a:ln>
-        </p:spPr>
-        <p:style>
-          <a:lnRef idx="1">
-            <a:schemeClr val="accent1"/>
-          </a:lnRef>
-          <a:fillRef idx="3">
-            <a:schemeClr val="accent1"/>
-          </a:fillRef>
-          <a:effectRef idx="2">
-            <a:schemeClr val="accent1"/>
-          </a:effectRef>
-          <a:fontRef idx="minor">
-            <a:schemeClr val="lt1"/>
-          </a:fontRef>
-        </p:style>
-        <p:txBody>
-          <a:bodyPr rtlCol="0" anchor="ctr" wrap="square" lIns="73152" rIns="73152" tIns="36576" bIns="36576"/>
-          <a:lstStyle/>
-          <a:p>
-            <a:pPr algn="ctr"/>
-            <a:r>
-              <a:rPr sz="1100" b="1" i="0">
-                <a:solidFill>
-                  <a:srgbClr val="1F4E79"/>
-                </a:solidFill>
-                <a:latin typeface="Calibri"/>
-              </a:rPr>
-              <a:t>Output:   1. A  →  2. B  →  3. C  →  4. D  →  5. E</a:t>
-            </a:r>
-          </a:p>
-        </p:txBody>
-      </p:sp>
-      <p:sp>
-        <p:nvSpPr>
-          <p:cNvPr id="36" name="Rectangle 35"/>
+          <a:bodyPr rtlCol="0" anchor="t" wrap="none" lIns="109728" rIns="109728" tIns="73152" bIns="73152"/>
+          <a:lstStyle/>
+          <a:p>
+            <a:pPr algn="l">
+              <a:spcAft>
+                <a:spcPts val="0"/>
+              </a:spcAft>
+            </a:pPr>
+            <a:r>
+              <a:rPr sz="850">
+                <a:solidFill>
+                  <a:srgbClr val="1F2D3D"/>
+                </a:solidFill>
+                <a:latin typeface="Consolas"/>
+              </a:rPr>
+              <a:t>title:  "Remove obsolete</a:t>
+            </a:r>
+          </a:p>
+          <a:p>
+            <a:pPr algn="l">
+              <a:spcAft>
+                <a:spcPts val="0"/>
+              </a:spcAft>
+            </a:pPr>
+            <a:r>
+              <a:rPr sz="850">
+                <a:solidFill>
+                  <a:srgbClr val="1F2D3D"/>
+                </a:solidFill>
+                <a:latin typeface="Consolas"/>
+              </a:rPr>
+              <a:t>        'Pending Pathologist Review'</a:t>
+            </a:r>
+          </a:p>
+          <a:p>
+            <a:pPr algn="l">
+              <a:spcAft>
+                <a:spcPts val="0"/>
+              </a:spcAft>
+            </a:pPr>
+            <a:r>
+              <a:rPr sz="850">
+                <a:solidFill>
+                  <a:srgbClr val="1F2D3D"/>
+                </a:solidFill>
+                <a:latin typeface="Consolas"/>
+              </a:rPr>
+              <a:t>        status from results screen"</a:t>
+            </a:r>
+          </a:p>
+          <a:p>
+            <a:pPr algn="l">
+              <a:spcAft>
+                <a:spcPts val="0"/>
+              </a:spcAft>
+            </a:pPr>
+            <a:r>
+              <a:rPr sz="850">
+                <a:solidFill>
+                  <a:srgbClr val="1F2D3D"/>
+                </a:solidFill>
+                <a:latin typeface="Consolas"/>
+              </a:rPr>
+              <a:t>shape:   cleanup</a:t>
+            </a:r>
+          </a:p>
+          <a:p>
+            <a:pPr algn="l">
+              <a:spcAft>
+                <a:spcPts val="0"/>
+              </a:spcAft>
+            </a:pPr>
+            <a:r>
+              <a:rPr sz="850">
+                <a:solidFill>
+                  <a:srgbClr val="1F2D3D"/>
+                </a:solidFill>
+                <a:latin typeface="Consolas"/>
+              </a:rPr>
+              <a:t>persona: null     stage: null</a:t>
+            </a:r>
+          </a:p>
+          <a:p>
+            <a:pPr algn="l">
+              <a:spcAft>
+                <a:spcPts val="0"/>
+              </a:spcAft>
+            </a:pPr>
+            <a:r>
+              <a:rPr sz="850">
+                <a:solidFill>
+                  <a:srgbClr val="1F2D3D"/>
+                </a:solidFill>
+                <a:latin typeface="Consolas"/>
+              </a:rPr>
+              <a:t/>
+            </a:r>
+          </a:p>
+          <a:p>
+            <a:pPr algn="l">
+              <a:spcAft>
+                <a:spcPts val="0"/>
+              </a:spcAft>
+            </a:pPr>
+            <a:r>
+              <a:rPr sz="850">
+                <a:solidFill>
+                  <a:srgbClr val="1F2D3D"/>
+                </a:solidFill>
+                <a:latin typeface="Consolas"/>
+              </a:rPr>
+              <a:t>AC1:  When viewing the results screen,</a:t>
+            </a:r>
+          </a:p>
+          <a:p>
+            <a:pPr algn="l">
+              <a:spcAft>
+                <a:spcPts val="0"/>
+              </a:spcAft>
+            </a:pPr>
+            <a:r>
+              <a:rPr sz="850">
+                <a:solidFill>
+                  <a:srgbClr val="1F2D3D"/>
+                </a:solidFill>
+                <a:latin typeface="Consolas"/>
+              </a:rPr>
+              <a:t>      the option MUST NOT appear</a:t>
+            </a:r>
+          </a:p>
+          <a:p>
+            <a:pPr algn="l">
+              <a:spcAft>
+                <a:spcPts val="0"/>
+              </a:spcAft>
+            </a:pPr>
+            <a:r>
+              <a:rPr sz="850">
+                <a:solidFill>
+                  <a:srgbClr val="1F2D3D"/>
+                </a:solidFill>
+                <a:latin typeface="Consolas"/>
+              </a:rPr>
+              <a:t>AC2:  When existing case has the status,</a:t>
+            </a:r>
+          </a:p>
+          <a:p>
+            <a:pPr algn="l">
+              <a:spcAft>
+                <a:spcPts val="0"/>
+              </a:spcAft>
+            </a:pPr>
+            <a:r>
+              <a:rPr sz="850">
+                <a:solidFill>
+                  <a:srgbClr val="1F2D3D"/>
+                </a:solidFill>
+                <a:latin typeface="Consolas"/>
+              </a:rPr>
+              <a:t>      MUST migrate to 'Pending Review'</a:t>
+            </a:r>
+          </a:p>
+          <a:p>
+            <a:pPr algn="l">
+              <a:spcAft>
+                <a:spcPts val="0"/>
+              </a:spcAft>
+            </a:pPr>
+            <a:r>
+              <a:rPr sz="850">
+                <a:solidFill>
+                  <a:srgbClr val="1F2D3D"/>
+                </a:solidFill>
+                <a:latin typeface="Consolas"/>
+              </a:rPr>
+              <a:t>      with audit trail</a:t>
+            </a:r>
+          </a:p>
+          <a:p>
+            <a:pPr algn="l">
+              <a:spcAft>
+                <a:spcPts val="0"/>
+              </a:spcAft>
+            </a:pPr>
+            <a:r>
+              <a:rPr sz="850">
+                <a:solidFill>
+                  <a:srgbClr val="1F2D3D"/>
+                </a:solidFill>
+                <a:latin typeface="Consolas"/>
+              </a:rPr>
+              <a:t/>
+            </a:r>
+          </a:p>
+          <a:p>
+            <a:pPr algn="l">
+              <a:spcAft>
+                <a:spcPts val="0"/>
+              </a:spcAft>
+            </a:pPr>
+            <a:r>
+              <a:rPr sz="850">
+                <a:solidFill>
+                  <a:srgbClr val="1F2D3D"/>
+                </a:solidFill>
+                <a:latin typeface="Consolas"/>
+              </a:rPr>
+              <a:t>edge_cases_handled:</a:t>
+            </a:r>
+          </a:p>
+          <a:p>
+            <a:pPr algn="l">
+              <a:spcAft>
+                <a:spcPts val="0"/>
+              </a:spcAft>
+            </a:pPr>
+            <a:r>
+              <a:rPr sz="850">
+                <a:solidFill>
+                  <a:srgbClr val="1F2D3D"/>
+                </a:solidFill>
+                <a:latin typeface="Consolas"/>
+              </a:rPr>
+              <a:t>  - existing case with the status</a:t>
+            </a:r>
+          </a:p>
+          <a:p>
+            <a:pPr algn="l">
+              <a:spcAft>
+                <a:spcPts val="0"/>
+              </a:spcAft>
+            </a:pPr>
+            <a:r>
+              <a:rPr sz="850">
+                <a:solidFill>
+                  <a:srgbClr val="1F2D3D"/>
+                </a:solidFill>
+                <a:latin typeface="Consolas"/>
+              </a:rPr>
+              <a:t>  - in-flight orders with the status</a:t>
+            </a:r>
+          </a:p>
+        </p:txBody>
+      </p:sp>
+      <p:sp>
+        <p:nvSpPr>
+          <p:cNvPr id="17" name="Rectangle 16"/>
           <p:cNvSpPr/>
           <p:nvPr/>
         </p:nvSpPr>
@@ -15893,7 +18286,7 @@
       </p:sp>
       <p:sp>
         <p:nvSpPr>
-          <p:cNvPr id="37" name="TextBox 36"/>
+          <p:cNvPr id="18" name="TextBox 17"/>
           <p:cNvSpPr txBox="1"/>
           <p:nvPr/>
         </p:nvSpPr>
@@ -15928,7 +18321,7 @@
       </p:sp>
       <p:sp>
         <p:nvSpPr>
-          <p:cNvPr id="38" name="TextBox 37"/>
+          <p:cNvPr id="19" name="TextBox 18"/>
           <p:cNvSpPr txBox="1"/>
           <p:nvPr/>
         </p:nvSpPr>
@@ -15956,7 +18349,7 @@
                 </a:solidFill>
                 <a:latin typeface="Calibri"/>
               </a:rPr>
-              <a:t>8 / 10</a:t>
+              <a:t>8 / 12</a:t>
             </a:r>
           </a:p>
         </p:txBody>
@@ -16009,7 +18402,7 @@
                 </a:solidFill>
                 <a:latin typeface="Calibri"/>
               </a:rPr>
-              <a:t>What happens when something fails</a:t>
+              <a:t>Inside two key agents — Validator &amp; Dependency Resolver</a:t>
             </a:r>
           </a:p>
         </p:txBody>
@@ -16066,7 +18459,7 @@
         <p:spPr>
           <a:xfrm>
             <a:off x="457200" y="960120"/>
-            <a:ext cx="11430000" cy="457200"/>
+            <a:ext cx="11430000" cy="365760"/>
           </a:xfrm>
           <a:prstGeom prst="rect">
             <a:avLst/>
@@ -16081,13 +18474,13 @@
           <a:p>
             <a:pPr algn="l"/>
             <a:r>
-              <a:rPr sz="1200" b="0" i="0">
-                <a:solidFill>
-                  <a:srgbClr val="1F2D3D"/>
-                </a:solidFill>
-                <a:latin typeface="Calibri"/>
-              </a:rPr>
-              <a:t>Failures at three levels — each has a deterministic fallback. No human intervention is required at runtime.</a:t>
+              <a:rPr sz="1200" b="0" i="1">
+                <a:solidFill>
+                  <a:srgbClr val="55606E"/>
+                </a:solidFill>
+                <a:latin typeface="Calibri"/>
+              </a:rPr>
+              <a:t>What these two agents actually do, beyond their one-line description on slide 3.</a:t>
             </a:r>
           </a:p>
         </p:txBody>
@@ -16100,8 +18493,8 @@
         </p:nvSpPr>
         <p:spPr>
           <a:xfrm>
-            <a:off x="376275" y="1554480"/>
-            <a:ext cx="3703320" cy="457200"/>
+            <a:off x="365760" y="1417320"/>
+            <a:ext cx="5760720" cy="457200"/>
           </a:xfrm>
           <a:prstGeom prst="roundRect">
             <a:avLst/>
@@ -16135,13 +18528,13 @@
           <a:p>
             <a:pPr algn="ctr"/>
             <a:r>
-              <a:rPr sz="1400" b="1" i="0">
+              <a:rPr sz="1500" b="1" i="0">
                 <a:solidFill>
                   <a:srgbClr val="1F4E79"/>
                 </a:solidFill>
                 <a:latin typeface="Calibri"/>
               </a:rPr>
-              <a:t>Per-call</a:t>
+              <a:t>Validator</a:t>
             </a:r>
           </a:p>
         </p:txBody>
@@ -16154,8 +18547,8 @@
         </p:nvSpPr>
         <p:spPr>
           <a:xfrm>
-            <a:off x="376275" y="2057400"/>
-            <a:ext cx="3703320" cy="228600"/>
+            <a:off x="365760" y="1920240"/>
+            <a:ext cx="5760720" cy="274320"/>
           </a:xfrm>
           <a:prstGeom prst="rect">
             <a:avLst/>
@@ -16176,31 +18569,31 @@
                 </a:solidFill>
                 <a:latin typeface="Calibri"/>
               </a:rPr>
-              <a:t>(LLM error or timeout)</a:t>
-            </a:r>
-          </a:p>
-        </p:txBody>
-      </p:sp>
-      <p:sp>
-        <p:nvSpPr>
-          <p:cNvPr id="7" name="Rectangle 6"/>
+              <a:t>Runs at gate 1 (after Story Extractor) and gate 2 (after Synthesis).</a:t>
+            </a:r>
+          </a:p>
+        </p:txBody>
+      </p:sp>
+      <p:sp>
+        <p:nvSpPr>
+          <p:cNvPr id="7" name="Rounded Rectangle 6"/>
           <p:cNvSpPr/>
           <p:nvPr/>
         </p:nvSpPr>
         <p:spPr>
           <a:xfrm>
-            <a:off x="376275" y="2331720"/>
-            <a:ext cx="3703320" cy="2606040"/>
-          </a:xfrm>
-          <a:prstGeom prst="rect">
+            <a:off x="502920" y="2286000"/>
+            <a:ext cx="5486400" cy="384048"/>
+          </a:xfrm>
+          <a:prstGeom prst="roundRect">
             <a:avLst/>
           </a:prstGeom>
           <a:solidFill>
-            <a:srgbClr val="FFFFFF"/>
+            <a:srgbClr val="E0ECF8"/>
           </a:solidFill>
-          <a:ln w="9525">
+          <a:ln w="12700">
             <a:solidFill>
-              <a:srgbClr val="C9952C"/>
+              <a:srgbClr val="4A6EA0"/>
             </a:solidFill>
           </a:ln>
         </p:spPr>
@@ -16219,106 +18612,18 @@
           </a:fontRef>
         </p:style>
         <p:txBody>
-          <a:bodyPr rtlCol="0" anchor="t" wrap="square" lIns="109728" rIns="109728" tIns="91440" bIns="91440"/>
-          <a:lstStyle/>
-          <a:p>
-            <a:pPr algn="l">
-              <a:spcAft>
-                <a:spcPts val="600"/>
-              </a:spcAft>
-            </a:pPr>
-            <a:r>
-              <a:rPr sz="1000" b="1">
-                <a:solidFill>
-                  <a:srgbClr val="1F4E79"/>
-                </a:solidFill>
-                <a:latin typeface="Calibri"/>
-              </a:rPr>
-              <a:t>Trigger: </a:t>
-            </a:r>
-            <a:r>
-              <a:rPr sz="1000">
-                <a:solidFill>
-                  <a:srgbClr val="1F2D3D"/>
-                </a:solidFill>
-                <a:latin typeface="Calibri"/>
-              </a:rPr>
-              <a:t>An agent's LLM call returns an error or times out.</a:t>
-            </a:r>
-          </a:p>
-          <a:p>
-            <a:pPr algn="l">
-              <a:spcAft>
-                <a:spcPts val="600"/>
-              </a:spcAft>
-            </a:pPr>
-            <a:r>
-              <a:rPr sz="1000" b="1">
-                <a:solidFill>
-                  <a:srgbClr val="1F4E79"/>
-                </a:solidFill>
-                <a:latin typeface="Calibri"/>
-              </a:rPr>
-              <a:t>Fallback: </a:t>
-            </a:r>
-            <a:r>
-              <a:rPr sz="1000">
-                <a:solidFill>
-                  <a:srgbClr val="1F2D3D"/>
-                </a:solidFill>
-                <a:latin typeface="Calibri"/>
-              </a:rPr>
-              <a:t>Retry with exponential backoff (3 attempts).</a:t>
-            </a:r>
-          </a:p>
-          <a:p>
-            <a:pPr algn="l">
-              <a:spcAft>
-                <a:spcPts val="600"/>
-              </a:spcAft>
-            </a:pPr>
-            <a:r>
-              <a:rPr sz="1000" b="1">
-                <a:solidFill>
-                  <a:srgbClr val="1F4E79"/>
-                </a:solidFill>
-                <a:latin typeface="Calibri"/>
-              </a:rPr>
-              <a:t>If persistent: </a:t>
-            </a:r>
-            <a:r>
-              <a:rPr sz="1000">
-                <a:solidFill>
-                  <a:srgbClr val="1F2D3D"/>
-                </a:solidFill>
-                <a:latin typeface="Calibri"/>
-              </a:rPr>
-              <a:t>Defer the item to the next batch; log the failure to the audit trail.</a:t>
-            </a:r>
-          </a:p>
-          <a:p>
-            <a:pPr algn="l">
-              <a:spcAft>
-                <a:spcPts val="600"/>
-              </a:spcAft>
-            </a:pPr>
-            <a:r>
-              <a:rPr sz="1000" b="1">
-                <a:solidFill>
-                  <a:srgbClr val="1F4E79"/>
-                </a:solidFill>
-                <a:latin typeface="Calibri"/>
-              </a:rPr>
-              <a:t>Pipeline impact: </a:t>
-            </a:r>
-            <a:r>
-              <a:rPr sz="1000">
-                <a:solidFill>
-                  <a:srgbClr val="1F2D3D"/>
-                </a:solidFill>
-                <a:latin typeface="Calibri"/>
-              </a:rPr>
-              <a:t>Other items continue. No block.</a:t>
+          <a:bodyPr rtlCol="0" anchor="ctr" wrap="square" lIns="73152" rIns="73152" tIns="36576" bIns="36576"/>
+          <a:lstStyle/>
+          <a:p>
+            <a:pPr algn="ctr"/>
+            <a:r>
+              <a:rPr sz="1000" b="1" i="0">
+                <a:solidFill>
+                  <a:srgbClr val="1F2D3D"/>
+                </a:solidFill>
+                <a:latin typeface="Calibri"/>
+              </a:rPr>
+              <a:t>Receives a draft story</a:t>
             </a:r>
           </a:p>
         </p:txBody>
@@ -16331,18 +18636,18 @@
         </p:nvSpPr>
         <p:spPr>
           <a:xfrm>
-            <a:off x="4244187" y="1554480"/>
-            <a:ext cx="3703320" cy="457200"/>
+            <a:off x="502920" y="2788920"/>
+            <a:ext cx="5486400" cy="384048"/>
           </a:xfrm>
           <a:prstGeom prst="roundRect">
             <a:avLst/>
           </a:prstGeom>
           <a:solidFill>
-            <a:srgbClr val="ECF4E8"/>
+            <a:srgbClr val="E7EFF8"/>
           </a:solidFill>
           <a:ln w="12700">
             <a:solidFill>
-              <a:srgbClr val="5C8347"/>
+              <a:srgbClr val="4A6EA0"/>
             </a:solidFill>
           </a:ln>
         </p:spPr>
@@ -16366,72 +18671,73 @@
           <a:p>
             <a:pPr algn="ctr"/>
             <a:r>
-              <a:rPr sz="1400" b="1" i="0">
-                <a:solidFill>
-                  <a:srgbClr val="1F4E79"/>
-                </a:solidFill>
-                <a:latin typeface="Calibri"/>
-              </a:rPr>
-              <a:t>Per-story</a:t>
-            </a:r>
-          </a:p>
-        </p:txBody>
-      </p:sp>
-      <p:sp>
-        <p:nvSpPr>
-          <p:cNvPr id="9" name="TextBox 8"/>
-          <p:cNvSpPr txBox="1"/>
-          <p:nvPr/>
-        </p:nvSpPr>
-        <p:spPr>
-          <a:xfrm>
-            <a:off x="4244187" y="2057400"/>
-            <a:ext cx="3703320" cy="228600"/>
-          </a:xfrm>
-          <a:prstGeom prst="rect">
-            <a:avLst/>
-          </a:prstGeom>
-          <a:noFill/>
-        </p:spPr>
-        <p:txBody>
-          <a:bodyPr wrap="square" anchor="t">
-            <a:spAutoFit/>
-          </a:bodyPr>
-          <a:lstStyle/>
-          <a:p>
-            <a:pPr algn="ctr"/>
-            <a:r>
-              <a:rPr sz="1000" b="0" i="1">
-                <a:solidFill>
-                  <a:srgbClr val="55606E"/>
-                </a:solidFill>
-                <a:latin typeface="Calibri"/>
-              </a:rPr>
-              <a:t>(quality check fails)</a:t>
-            </a:r>
-          </a:p>
-        </p:txBody>
-      </p:sp>
-      <p:sp>
-        <p:nvSpPr>
-          <p:cNvPr id="10" name="Rectangle 9"/>
+              <a:rPr sz="1000" b="0" i="0">
+                <a:solidFill>
+                  <a:srgbClr val="1F2D3D"/>
+                </a:solidFill>
+                <a:latin typeface="Calibri"/>
+              </a:rPr>
+              <a:t>1. Closed-enum check  (tests, persona, stage in catalog?)</a:t>
+            </a:r>
+          </a:p>
+        </p:txBody>
+      </p:sp>
+      <p:cxnSp>
+        <p:nvCxnSpPr>
+          <p:cNvPr id="9" name="Connector 8"/>
+          <p:cNvCxnSpPr/>
+          <p:nvPr/>
+        </p:nvCxnSpPr>
+        <p:spPr>
+          <a:xfrm>
+            <a:off x="3246120" y="2670048"/>
+            <a:ext cx="0" cy="118872"/>
+          </a:xfrm>
+          <a:prstGeom prst="line">
+            <a:avLst/>
+          </a:prstGeom>
+          <a:ln w="16510">
+            <a:solidFill>
+              <a:srgbClr val="4A6EA0"/>
+            </a:solidFill>
+            <a:tailEnd type="triangle" w="med" h="med"/>
+          </a:ln>
+        </p:spPr>
+        <p:style>
+          <a:lnRef idx="2">
+            <a:schemeClr val="accent1"/>
+          </a:lnRef>
+          <a:fillRef idx="0">
+            <a:schemeClr val="accent1"/>
+          </a:fillRef>
+          <a:effectRef idx="1">
+            <a:schemeClr val="accent1"/>
+          </a:effectRef>
+          <a:fontRef idx="minor">
+            <a:schemeClr val="tx1"/>
+          </a:fontRef>
+        </p:style>
+      </p:cxnSp>
+      <p:sp>
+        <p:nvSpPr>
+          <p:cNvPr id="10" name="Rounded Rectangle 9"/>
           <p:cNvSpPr/>
           <p:nvPr/>
         </p:nvSpPr>
         <p:spPr>
           <a:xfrm>
-            <a:off x="4244187" y="2331720"/>
-            <a:ext cx="3703320" cy="2606040"/>
-          </a:xfrm>
-          <a:prstGeom prst="rect">
+            <a:off x="502920" y="3291839"/>
+            <a:ext cx="5486400" cy="384048"/>
+          </a:xfrm>
+          <a:prstGeom prst="roundRect">
             <a:avLst/>
           </a:prstGeom>
           <a:solidFill>
-            <a:srgbClr val="FFFFFF"/>
+            <a:srgbClr val="E7EFF8"/>
           </a:solidFill>
-          <a:ln w="9525">
+          <a:ln w="12700">
             <a:solidFill>
-              <a:srgbClr val="5C8347"/>
+              <a:srgbClr val="4A6EA0"/>
             </a:solidFill>
           </a:ln>
         </p:spPr>
@@ -16450,120 +18756,248 @@
           </a:fontRef>
         </p:style>
         <p:txBody>
-          <a:bodyPr rtlCol="0" anchor="t" wrap="square" lIns="109728" rIns="109728" tIns="91440" bIns="91440"/>
-          <a:lstStyle/>
-          <a:p>
-            <a:pPr algn="l">
-              <a:spcAft>
-                <a:spcPts val="600"/>
-              </a:spcAft>
-            </a:pPr>
-            <a:r>
-              <a:rPr sz="1000" b="1">
-                <a:solidFill>
-                  <a:srgbClr val="1F4E79"/>
-                </a:solidFill>
-                <a:latin typeface="Calibri"/>
-              </a:rPr>
-              <a:t>Trigger: </a:t>
-            </a:r>
-            <a:r>
-              <a:rPr sz="1000">
-                <a:solidFill>
-                  <a:srgbClr val="1F2D3D"/>
-                </a:solidFill>
-                <a:latin typeface="Calibri"/>
-              </a:rPr>
-              <a:t>Validator rejects a story.</a:t>
-            </a:r>
-          </a:p>
-          <a:p>
-            <a:pPr algn="l">
-              <a:spcAft>
-                <a:spcPts val="600"/>
-              </a:spcAft>
-            </a:pPr>
-            <a:r>
-              <a:rPr sz="1000" b="1">
-                <a:solidFill>
-                  <a:srgbClr val="1F4E79"/>
-                </a:solidFill>
-                <a:latin typeface="Calibri"/>
-              </a:rPr>
-              <a:t>Fallback: </a:t>
-            </a:r>
-            <a:r>
-              <a:rPr sz="1000">
-                <a:solidFill>
-                  <a:srgbClr val="1F2D3D"/>
-                </a:solidFill>
-                <a:latin typeface="Calibri"/>
-              </a:rPr>
-              <a:t>Up to 2 revision attempts; the Validator drives revisions with the failed-checks list.</a:t>
-            </a:r>
-          </a:p>
-          <a:p>
-            <a:pPr algn="l">
-              <a:spcAft>
-                <a:spcPts val="600"/>
-              </a:spcAft>
-            </a:pPr>
-            <a:r>
-              <a:rPr sz="1000" b="1">
-                <a:solidFill>
-                  <a:srgbClr val="1F4E79"/>
-                </a:solidFill>
-                <a:latin typeface="Calibri"/>
-              </a:rPr>
-              <a:t>If persistent: </a:t>
-            </a:r>
-            <a:r>
-              <a:rPr sz="1000">
-                <a:solidFill>
-                  <a:srgbClr val="1F2D3D"/>
-                </a:solidFill>
-                <a:latin typeface="Calibri"/>
-              </a:rPr>
-              <a:t>Auto-park to the review pile. Story does not reach Output A in strict mode.</a:t>
-            </a:r>
-          </a:p>
-          <a:p>
-            <a:pPr algn="l">
-              <a:spcAft>
-                <a:spcPts val="600"/>
-              </a:spcAft>
-            </a:pPr>
-            <a:r>
-              <a:rPr sz="1000" b="1">
-                <a:solidFill>
-                  <a:srgbClr val="1F4E79"/>
-                </a:solidFill>
-                <a:latin typeface="Calibri"/>
-              </a:rPr>
-              <a:t>Pipeline impact: </a:t>
-            </a:r>
-            <a:r>
-              <a:rPr sz="1000">
-                <a:solidFill>
-                  <a:srgbClr val="1F2D3D"/>
-                </a:solidFill>
-                <a:latin typeface="Calibri"/>
-              </a:rPr>
-              <a:t>Subsequent stories continue. No block.</a:t>
-            </a:r>
-          </a:p>
-        </p:txBody>
-      </p:sp>
-      <p:sp>
-        <p:nvSpPr>
-          <p:cNvPr id="11" name="Rounded Rectangle 10"/>
+          <a:bodyPr rtlCol="0" anchor="ctr" wrap="square" lIns="73152" rIns="73152" tIns="36576" bIns="36576"/>
+          <a:lstStyle/>
+          <a:p>
+            <a:pPr algn="ctr"/>
+            <a:r>
+              <a:rPr sz="1000" b="0" i="0">
+                <a:solidFill>
+                  <a:srgbClr val="1F2D3D"/>
+                </a:solidFill>
+                <a:latin typeface="Calibri"/>
+              </a:rPr>
+              <a:t>2. Shape verification  (declared shape matches content?)</a:t>
+            </a:r>
+          </a:p>
+        </p:txBody>
+      </p:sp>
+      <p:cxnSp>
+        <p:nvCxnSpPr>
+          <p:cNvPr id="11" name="Connector 10"/>
+          <p:cNvCxnSpPr/>
+          <p:nvPr/>
+        </p:nvCxnSpPr>
+        <p:spPr>
+          <a:xfrm>
+            <a:off x="3246120" y="3172968"/>
+            <a:ext cx="0" cy="118871"/>
+          </a:xfrm>
+          <a:prstGeom prst="line">
+            <a:avLst/>
+          </a:prstGeom>
+          <a:ln w="16510">
+            <a:solidFill>
+              <a:srgbClr val="4A6EA0"/>
+            </a:solidFill>
+            <a:tailEnd type="triangle" w="med" h="med"/>
+          </a:ln>
+        </p:spPr>
+        <p:style>
+          <a:lnRef idx="2">
+            <a:schemeClr val="accent1"/>
+          </a:lnRef>
+          <a:fillRef idx="0">
+            <a:schemeClr val="accent1"/>
+          </a:fillRef>
+          <a:effectRef idx="1">
+            <a:schemeClr val="accent1"/>
+          </a:effectRef>
+          <a:fontRef idx="minor">
+            <a:schemeClr val="tx1"/>
+          </a:fontRef>
+        </p:style>
+      </p:cxnSp>
+      <p:sp>
+        <p:nvSpPr>
+          <p:cNvPr id="12" name="Rounded Rectangle 11"/>
           <p:cNvSpPr/>
           <p:nvPr/>
         </p:nvSpPr>
         <p:spPr>
           <a:xfrm>
-            <a:off x="8112099" y="1554480"/>
-            <a:ext cx="3703320" cy="457200"/>
+            <a:off x="502920" y="3794759"/>
+            <a:ext cx="5486400" cy="384048"/>
+          </a:xfrm>
+          <a:prstGeom prst="roundRect">
+            <a:avLst/>
+          </a:prstGeom>
+          <a:solidFill>
+            <a:srgbClr val="E7EFF8"/>
+          </a:solidFill>
+          <a:ln w="12700">
+            <a:solidFill>
+              <a:srgbClr val="4A6EA0"/>
+            </a:solidFill>
+          </a:ln>
+        </p:spPr>
+        <p:style>
+          <a:lnRef idx="1">
+            <a:schemeClr val="accent1"/>
+          </a:lnRef>
+          <a:fillRef idx="3">
+            <a:schemeClr val="accent1"/>
+          </a:fillRef>
+          <a:effectRef idx="2">
+            <a:schemeClr val="accent1"/>
+          </a:effectRef>
+          <a:fontRef idx="minor">
+            <a:schemeClr val="lt1"/>
+          </a:fontRef>
+        </p:style>
+        <p:txBody>
+          <a:bodyPr rtlCol="0" anchor="ctr" wrap="square" lIns="73152" rIns="73152" tIns="36576" bIns="36576"/>
+          <a:lstStyle/>
+          <a:p>
+            <a:pPr algn="ctr"/>
+            <a:r>
+              <a:rPr sz="1000" b="0" i="0">
+                <a:solidFill>
+                  <a:srgbClr val="1F2D3D"/>
+                </a:solidFill>
+                <a:latin typeface="Calibri"/>
+              </a:rPr>
+              <a:t>3. Apply shape-specific rubric  (4 rules — see slide 6)</a:t>
+            </a:r>
+          </a:p>
+        </p:txBody>
+      </p:sp>
+      <p:cxnSp>
+        <p:nvCxnSpPr>
+          <p:cNvPr id="13" name="Connector 12"/>
+          <p:cNvCxnSpPr/>
+          <p:nvPr/>
+        </p:nvCxnSpPr>
+        <p:spPr>
+          <a:xfrm>
+            <a:off x="3246120" y="3675887"/>
+            <a:ext cx="0" cy="118872"/>
+          </a:xfrm>
+          <a:prstGeom prst="line">
+            <a:avLst/>
+          </a:prstGeom>
+          <a:ln w="16510">
+            <a:solidFill>
+              <a:srgbClr val="4A6EA0"/>
+            </a:solidFill>
+            <a:tailEnd type="triangle" w="med" h="med"/>
+          </a:ln>
+        </p:spPr>
+        <p:style>
+          <a:lnRef idx="2">
+            <a:schemeClr val="accent1"/>
+          </a:lnRef>
+          <a:fillRef idx="0">
+            <a:schemeClr val="accent1"/>
+          </a:fillRef>
+          <a:effectRef idx="1">
+            <a:schemeClr val="accent1"/>
+          </a:effectRef>
+          <a:fontRef idx="minor">
+            <a:schemeClr val="tx1"/>
+          </a:fontRef>
+        </p:style>
+      </p:cxnSp>
+      <p:cxnSp>
+        <p:nvCxnSpPr>
+          <p:cNvPr id="14" name="Connector 13"/>
+          <p:cNvCxnSpPr/>
+          <p:nvPr/>
+        </p:nvCxnSpPr>
+        <p:spPr>
+          <a:xfrm>
+            <a:off x="3246120" y="4178807"/>
+            <a:ext cx="0" cy="118872"/>
+          </a:xfrm>
+          <a:prstGeom prst="line">
+            <a:avLst/>
+          </a:prstGeom>
+          <a:ln w="16510">
+            <a:solidFill>
+              <a:srgbClr val="4A6EA0"/>
+            </a:solidFill>
+            <a:tailEnd type="triangle" w="med" h="med"/>
+          </a:ln>
+        </p:spPr>
+        <p:style>
+          <a:lnRef idx="2">
+            <a:schemeClr val="accent1"/>
+          </a:lnRef>
+          <a:fillRef idx="0">
+            <a:schemeClr val="accent1"/>
+          </a:fillRef>
+          <a:effectRef idx="1">
+            <a:schemeClr val="accent1"/>
+          </a:effectRef>
+          <a:fontRef idx="minor">
+            <a:schemeClr val="tx1"/>
+          </a:fontRef>
+        </p:style>
+      </p:cxnSp>
+      <p:sp>
+        <p:nvSpPr>
+          <p:cNvPr id="15" name="Diamond 14"/>
+          <p:cNvSpPr/>
+          <p:nvPr/>
+        </p:nvSpPr>
+        <p:spPr>
+          <a:xfrm>
+            <a:off x="2057400" y="4297679"/>
+            <a:ext cx="2377440" cy="502920"/>
+          </a:xfrm>
+          <a:prstGeom prst="diamond">
+            <a:avLst/>
+          </a:prstGeom>
+          <a:solidFill>
+            <a:srgbClr val="FCE7C4"/>
+          </a:solidFill>
+          <a:ln w="15875">
+            <a:solidFill>
+              <a:srgbClr val="C9952C"/>
+            </a:solidFill>
+          </a:ln>
+        </p:spPr>
+        <p:style>
+          <a:lnRef idx="1">
+            <a:schemeClr val="accent1"/>
+          </a:lnRef>
+          <a:fillRef idx="3">
+            <a:schemeClr val="accent1"/>
+          </a:fillRef>
+          <a:effectRef idx="2">
+            <a:schemeClr val="accent1"/>
+          </a:effectRef>
+          <a:fontRef idx="minor">
+            <a:schemeClr val="lt1"/>
+          </a:fontRef>
+        </p:style>
+        <p:txBody>
+          <a:bodyPr rtlCol="0" anchor="ctr" wrap="square" lIns="73152" rIns="73152" tIns="36576" bIns="36576"/>
+          <a:lstStyle/>
+          <a:p>
+            <a:pPr algn="ctr"/>
+            <a:r>
+              <a:rPr sz="1000" b="1" i="0">
+                <a:solidFill>
+                  <a:srgbClr val="1F2D3D"/>
+                </a:solidFill>
+                <a:latin typeface="Calibri"/>
+              </a:rPr>
+              <a:t>Pass all checks?</a:t>
+            </a:r>
+          </a:p>
+        </p:txBody>
+      </p:sp>
+      <p:sp>
+        <p:nvSpPr>
+          <p:cNvPr id="16" name="Rounded Rectangle 15"/>
+          <p:cNvSpPr/>
+          <p:nvPr/>
+        </p:nvSpPr>
+        <p:spPr>
+          <a:xfrm>
+            <a:off x="4206240" y="4343399"/>
+            <a:ext cx="1691640" cy="338328"/>
           </a:xfrm>
           <a:prstGeom prst="roundRect">
             <a:avLst/>
@@ -16597,27 +19031,64 @@
           <a:p>
             <a:pPr algn="ctr"/>
             <a:r>
-              <a:rPr sz="1400" b="1" i="0">
-                <a:solidFill>
-                  <a:srgbClr val="1F4E79"/>
-                </a:solidFill>
-                <a:latin typeface="Calibri"/>
-              </a:rPr>
-              <a:t>Per-batch</a:t>
-            </a:r>
-          </a:p>
-        </p:txBody>
-      </p:sp>
-      <p:sp>
-        <p:nvSpPr>
-          <p:cNvPr id="12" name="TextBox 11"/>
+              <a:rPr sz="800" b="1" i="0">
+                <a:solidFill>
+                  <a:srgbClr val="1F2D3D"/>
+                </a:solidFill>
+                <a:latin typeface="Calibri"/>
+              </a:rPr>
+              <a:t>no:  revise (≤2)
+then auto-park</a:t>
+            </a:r>
+          </a:p>
+        </p:txBody>
+      </p:sp>
+      <p:cxnSp>
+        <p:nvCxnSpPr>
+          <p:cNvPr id="17" name="Connector 16"/>
+          <p:cNvCxnSpPr/>
+          <p:nvPr/>
+        </p:nvCxnSpPr>
+        <p:spPr>
+          <a:xfrm flipH="1" flipV="1">
+            <a:off x="4206240" y="4512563"/>
+            <a:ext cx="228600" cy="36577"/>
+          </a:xfrm>
+          <a:prstGeom prst="line">
+            <a:avLst/>
+          </a:prstGeom>
+          <a:ln w="25400">
+            <a:solidFill>
+              <a:srgbClr val="4A6EA0"/>
+            </a:solidFill>
+            <a:tailEnd type="triangle" w="med" h="med"/>
+          </a:ln>
+        </p:spPr>
+        <p:style>
+          <a:lnRef idx="2">
+            <a:schemeClr val="accent1"/>
+          </a:lnRef>
+          <a:fillRef idx="0">
+            <a:schemeClr val="accent1"/>
+          </a:fillRef>
+          <a:effectRef idx="1">
+            <a:schemeClr val="accent1"/>
+          </a:effectRef>
+          <a:fontRef idx="minor">
+            <a:schemeClr val="tx1"/>
+          </a:fontRef>
+        </p:style>
+      </p:cxnSp>
+      <p:sp>
+        <p:nvSpPr>
+          <p:cNvPr id="18" name="TextBox 17"/>
           <p:cNvSpPr txBox="1"/>
           <p:nvPr/>
         </p:nvSpPr>
         <p:spPr>
           <a:xfrm>
-            <a:off x="8112099" y="2057400"/>
-            <a:ext cx="3703320" cy="228600"/>
+            <a:off x="4366259" y="4366259"/>
+            <a:ext cx="822960" cy="274320"/>
           </a:xfrm>
           <a:prstGeom prst="rect">
             <a:avLst/>
@@ -16625,44 +19096,115 @@
           <a:noFill/>
         </p:spPr>
         <p:txBody>
-          <a:bodyPr wrap="square" anchor="t">
+          <a:bodyPr wrap="none" lIns="36576" rIns="36576" tIns="0" bIns="0">
             <a:spAutoFit/>
           </a:bodyPr>
           <a:lstStyle/>
           <a:p>
             <a:pPr algn="ctr"/>
             <a:r>
-              <a:rPr sz="1000" b="0" i="1">
-                <a:solidFill>
-                  <a:srgbClr val="55606E"/>
-                </a:solidFill>
-                <a:latin typeface="Calibri"/>
-              </a:rPr>
-              <a:t>(drift / catalog issues)</a:t>
-            </a:r>
-          </a:p>
-        </p:txBody>
-      </p:sp>
-      <p:sp>
-        <p:nvSpPr>
-          <p:cNvPr id="13" name="Rectangle 12"/>
+              <a:rPr sz="1000" b="1">
+                <a:solidFill>
+                  <a:srgbClr val="A84A4A"/>
+                </a:solidFill>
+                <a:latin typeface="Calibri"/>
+              </a:rPr>
+              <a:t>no</a:t>
+            </a:r>
+          </a:p>
+        </p:txBody>
+      </p:sp>
+      <p:cxnSp>
+        <p:nvCxnSpPr>
+          <p:cNvPr id="19" name="Connector 18"/>
+          <p:cNvCxnSpPr/>
+          <p:nvPr/>
+        </p:nvCxnSpPr>
+        <p:spPr>
+          <a:xfrm>
+            <a:off x="3246120" y="4800599"/>
+            <a:ext cx="0" cy="274320"/>
+          </a:xfrm>
+          <a:prstGeom prst="line">
+            <a:avLst/>
+          </a:prstGeom>
+          <a:ln w="25400">
+            <a:solidFill>
+              <a:srgbClr val="4A6EA0"/>
+            </a:solidFill>
+            <a:tailEnd type="triangle" w="med" h="med"/>
+          </a:ln>
+        </p:spPr>
+        <p:style>
+          <a:lnRef idx="2">
+            <a:schemeClr val="accent1"/>
+          </a:lnRef>
+          <a:fillRef idx="0">
+            <a:schemeClr val="accent1"/>
+          </a:fillRef>
+          <a:effectRef idx="1">
+            <a:schemeClr val="accent1"/>
+          </a:effectRef>
+          <a:fontRef idx="minor">
+            <a:schemeClr val="tx1"/>
+          </a:fontRef>
+        </p:style>
+      </p:cxnSp>
+      <p:sp>
+        <p:nvSpPr>
+          <p:cNvPr id="20" name="TextBox 19"/>
+          <p:cNvSpPr txBox="1"/>
+          <p:nvPr/>
+        </p:nvSpPr>
+        <p:spPr>
+          <a:xfrm>
+            <a:off x="3291839" y="4773167"/>
+            <a:ext cx="822960" cy="274320"/>
+          </a:xfrm>
+          <a:prstGeom prst="rect">
+            <a:avLst/>
+          </a:prstGeom>
+          <a:noFill/>
+        </p:spPr>
+        <p:txBody>
+          <a:bodyPr wrap="none" lIns="36576" rIns="36576" tIns="0" bIns="0">
+            <a:spAutoFit/>
+          </a:bodyPr>
+          <a:lstStyle/>
+          <a:p>
+            <a:pPr algn="ctr"/>
+            <a:r>
+              <a:rPr sz="1000" b="1">
+                <a:solidFill>
+                  <a:srgbClr val="5C8347"/>
+                </a:solidFill>
+                <a:latin typeface="Calibri"/>
+              </a:rPr>
+              <a:t>yes</a:t>
+            </a:r>
+          </a:p>
+        </p:txBody>
+      </p:sp>
+      <p:sp>
+        <p:nvSpPr>
+          <p:cNvPr id="21" name="Rounded Rectangle 20"/>
           <p:cNvSpPr/>
           <p:nvPr/>
         </p:nvSpPr>
         <p:spPr>
           <a:xfrm>
-            <a:off x="8112099" y="2331720"/>
-            <a:ext cx="3703320" cy="2606040"/>
-          </a:xfrm>
-          <a:prstGeom prst="rect">
+            <a:off x="502920" y="5074919"/>
+            <a:ext cx="5486400" cy="384048"/>
+          </a:xfrm>
+          <a:prstGeom prst="roundRect">
             <a:avLst/>
           </a:prstGeom>
           <a:solidFill>
-            <a:srgbClr val="FFFFFF"/>
+            <a:srgbClr val="DCE9D7"/>
           </a:solidFill>
-          <a:ln w="9525">
+          <a:ln w="12700">
             <a:solidFill>
-              <a:srgbClr val="A84A4A"/>
+              <a:srgbClr val="5C8347"/>
             </a:solidFill>
           </a:ln>
         </p:spPr>
@@ -16681,165 +19223,42 @@
           </a:fontRef>
         </p:style>
         <p:txBody>
-          <a:bodyPr rtlCol="0" anchor="t" wrap="square" lIns="109728" rIns="109728" tIns="91440" bIns="91440"/>
-          <a:lstStyle/>
-          <a:p>
-            <a:pPr algn="l">
-              <a:spcAft>
-                <a:spcPts val="600"/>
-              </a:spcAft>
-            </a:pPr>
-            <a:r>
-              <a:rPr sz="1000" b="1">
-                <a:solidFill>
-                  <a:srgbClr val="1F4E79"/>
-                </a:solidFill>
-                <a:latin typeface="Calibri"/>
-              </a:rPr>
-              <a:t>Trigger: </a:t>
-            </a:r>
-            <a:r>
-              <a:rPr sz="1000">
-                <a:solidFill>
-                  <a:srgbClr val="1F2D3D"/>
-                </a:solidFill>
-                <a:latin typeface="Calibri"/>
-              </a:rPr>
-              <a:t>G0 / E0 bucket &gt; 5% rolling, or auto-park rate &gt; 15% sustained.</a:t>
-            </a:r>
-          </a:p>
-          <a:p>
-            <a:pPr algn="l">
-              <a:spcAft>
-                <a:spcPts val="600"/>
-              </a:spcAft>
-            </a:pPr>
-            <a:r>
-              <a:rPr sz="1000" b="1">
-                <a:solidFill>
-                  <a:srgbClr val="1F4E79"/>
-                </a:solidFill>
-                <a:latin typeface="Calibri"/>
-              </a:rPr>
-              <a:t>Fallback: </a:t>
-            </a:r>
-            <a:r>
-              <a:rPr sz="1000">
-                <a:solidFill>
-                  <a:srgbClr val="1F2D3D"/>
-                </a:solidFill>
-                <a:latin typeface="Calibri"/>
-              </a:rPr>
-              <a:t>Auto-rerun discovery with τ_match −0.05 (more permissive); re-cluster G0; quorum re-evaluates.</a:t>
-            </a:r>
-          </a:p>
-          <a:p>
-            <a:pPr algn="l">
-              <a:spcAft>
-                <a:spcPts val="600"/>
-              </a:spcAft>
-            </a:pPr>
-            <a:r>
-              <a:rPr sz="1000" b="1">
-                <a:solidFill>
-                  <a:srgbClr val="1F4E79"/>
-                </a:solidFill>
-                <a:latin typeface="Calibri"/>
-              </a:rPr>
-              <a:t>If τ_match floor (0.50) hit: </a:t>
-            </a:r>
-            <a:r>
-              <a:rPr sz="1000">
-                <a:solidFill>
-                  <a:srgbClr val="1F2D3D"/>
-                </a:solidFill>
-                <a:latin typeface="Calibri"/>
-              </a:rPr>
-              <a:t>Drift report flags the discipline for manual catalog re-curation (one-time architect action).</a:t>
-            </a:r>
-          </a:p>
-          <a:p>
-            <a:pPr algn="l">
-              <a:spcAft>
-                <a:spcPts val="600"/>
-              </a:spcAft>
-            </a:pPr>
-            <a:r>
-              <a:rPr sz="1000" b="1">
-                <a:solidFill>
-                  <a:srgbClr val="1F4E79"/>
-                </a:solidFill>
-                <a:latin typeface="Calibri"/>
-              </a:rPr>
-              <a:t>Pipeline impact: </a:t>
-            </a:r>
-            <a:r>
-              <a:rPr sz="1000">
-                <a:solidFill>
-                  <a:srgbClr val="1F2D3D"/>
-                </a:solidFill>
-                <a:latin typeface="Calibri"/>
-              </a:rPr>
-              <a:t>Pipeline continues. The drift report is informational.</a:t>
-            </a:r>
-          </a:p>
-        </p:txBody>
-      </p:sp>
-      <p:sp>
-        <p:nvSpPr>
-          <p:cNvPr id="14" name="TextBox 13"/>
-          <p:cNvSpPr txBox="1"/>
-          <p:nvPr/>
-        </p:nvSpPr>
-        <p:spPr>
-          <a:xfrm>
-            <a:off x="457200" y="5120640"/>
-            <a:ext cx="11430000" cy="320040"/>
-          </a:xfrm>
-          <a:prstGeom prst="rect">
-            <a:avLst/>
-          </a:prstGeom>
-          <a:noFill/>
-        </p:spPr>
-        <p:txBody>
-          <a:bodyPr wrap="square" anchor="t">
-            <a:spAutoFit/>
-          </a:bodyPr>
-          <a:lstStyle/>
-          <a:p>
-            <a:pPr algn="l"/>
-            <a:r>
-              <a:rPr sz="1400" b="1" i="0">
-                <a:solidFill>
-                  <a:srgbClr val="1F4E79"/>
-                </a:solidFill>
-                <a:latin typeface="Calibri"/>
-              </a:rPr>
-              <a:t>Three queues collect different kinds of failures</a:t>
-            </a:r>
-          </a:p>
-        </p:txBody>
-      </p:sp>
-      <p:sp>
-        <p:nvSpPr>
-          <p:cNvPr id="15" name="Rounded Rectangle 14"/>
+          <a:bodyPr rtlCol="0" anchor="ctr" wrap="square" lIns="73152" rIns="73152" tIns="36576" bIns="36576"/>
+          <a:lstStyle/>
+          <a:p>
+            <a:pPr algn="ctr"/>
+            <a:r>
+              <a:rPr sz="1000" b="1" i="0">
+                <a:solidFill>
+                  <a:srgbClr val="1F2D3D"/>
+                </a:solidFill>
+                <a:latin typeface="Calibri"/>
+              </a:rPr>
+              <a:t>Story kept (validated) → Output A</a:t>
+            </a:r>
+          </a:p>
+        </p:txBody>
+      </p:sp>
+      <p:sp>
+        <p:nvSpPr>
+          <p:cNvPr id="22" name="Rounded Rectangle 21"/>
           <p:cNvSpPr/>
           <p:nvPr/>
         </p:nvSpPr>
         <p:spPr>
           <a:xfrm>
-            <a:off x="376275" y="5532120"/>
-            <a:ext cx="3703320" cy="914399"/>
+            <a:off x="6355080" y="1417320"/>
+            <a:ext cx="5486400" cy="457200"/>
           </a:xfrm>
           <a:prstGeom prst="roundRect">
             <a:avLst/>
           </a:prstGeom>
           <a:solidFill>
-            <a:srgbClr val="F1F5FA"/>
+            <a:srgbClr val="FAE9CB"/>
           </a:solidFill>
-          <a:ln w="9525">
+          <a:ln w="12700">
             <a:solidFill>
-              <a:srgbClr val="4A6EA0"/>
+              <a:srgbClr val="C9952C"/>
             </a:solidFill>
           </a:ln>
         </p:spPr>
@@ -16858,64 +19277,110 @@
           </a:fontRef>
         </p:style>
         <p:txBody>
-          <a:bodyPr rtlCol="0" anchor="ctr" wrap="square" lIns="109728" rIns="109728" tIns="73152" bIns="73152"/>
-          <a:lstStyle/>
-          <a:p>
-            <a:pPr algn="l"/>
-            <a:r>
-              <a:rPr sz="1200" b="1">
+          <a:bodyPr rtlCol="0" anchor="ctr" wrap="square" lIns="73152" rIns="73152" tIns="36576" bIns="36576"/>
+          <a:lstStyle/>
+          <a:p>
+            <a:pPr algn="ctr"/>
+            <a:r>
+              <a:rPr sz="1500" b="1" i="0">
                 <a:solidFill>
                   <a:srgbClr val="1F4E79"/>
                 </a:solidFill>
                 <a:latin typeface="Calibri"/>
               </a:rPr>
-              <a:t>Review pile</a:t>
-            </a:r>
-          </a:p>
-          <a:p>
-            <a:pPr algn="l"/>
-            <a:r>
-              <a:rPr sz="1000" i="1">
+              <a:t>Dependency Resolver</a:t>
+            </a:r>
+          </a:p>
+        </p:txBody>
+      </p:sp>
+      <p:sp>
+        <p:nvSpPr>
+          <p:cNvPr id="23" name="TextBox 22"/>
+          <p:cNvSpPr txBox="1"/>
+          <p:nvPr/>
+        </p:nvSpPr>
+        <p:spPr>
+          <a:xfrm>
+            <a:off x="6355080" y="1920240"/>
+            <a:ext cx="5486400" cy="274320"/>
+          </a:xfrm>
+          <a:prstGeom prst="rect">
+            <a:avLst/>
+          </a:prstGeom>
+          <a:noFill/>
+        </p:spPr>
+        <p:txBody>
+          <a:bodyPr wrap="square" anchor="t">
+            <a:spAutoFit/>
+          </a:bodyPr>
+          <a:lstStyle/>
+          <a:p>
+            <a:pPr algn="ctr"/>
+            <a:r>
+              <a:rPr sz="1000" b="0" i="1">
                 <a:solidFill>
                   <a:srgbClr val="55606E"/>
                 </a:solidFill>
                 <a:latin typeface="Calibri"/>
               </a:rPr>
-              <a:t>Quality / rubric failures</a:t>
-            </a:r>
-          </a:p>
-          <a:p>
-            <a:pPr algn="l"/>
-            <a:r>
-              <a:rPr sz="1000">
-                <a:solidFill>
-                  <a:srgbClr val="1F2D3D"/>
-                </a:solidFill>
-                <a:latin typeface="Calibri"/>
-              </a:rPr>
-              <a:t>Stories that failed Validator after 2 revisions.</a:t>
-            </a:r>
-          </a:p>
-        </p:txBody>
-      </p:sp>
-      <p:sp>
-        <p:nvSpPr>
-          <p:cNvPr id="16" name="Rounded Rectangle 15"/>
+              <a:t>Takes all kept stories; outputs a topological order for sprint planning.</a:t>
+            </a:r>
+          </a:p>
+        </p:txBody>
+      </p:sp>
+      <p:sp>
+        <p:nvSpPr>
+          <p:cNvPr id="24" name="TextBox 23"/>
+          <p:cNvSpPr txBox="1"/>
+          <p:nvPr/>
+        </p:nvSpPr>
+        <p:spPr>
+          <a:xfrm>
+            <a:off x="6355080" y="2212848"/>
+            <a:ext cx="5486400" cy="274320"/>
+          </a:xfrm>
+          <a:prstGeom prst="rect">
+            <a:avLst/>
+          </a:prstGeom>
+          <a:noFill/>
+        </p:spPr>
+        <p:txBody>
+          <a:bodyPr wrap="square" anchor="t">
+            <a:spAutoFit/>
+          </a:bodyPr>
+          <a:lstStyle/>
+          <a:p>
+            <a:pPr algn="ctr"/>
+            <a:r>
+              <a:rPr sz="900" b="0" i="1">
+                <a:solidFill>
+                  <a:srgbClr val="55606E"/>
+                </a:solidFill>
+                <a:latin typeface="Calibri"/>
+              </a:rPr>
+              <a:t>Each story has dependencies[] and cross_links[] — the resolver builds a DAG and sorts it.</a:t>
+            </a:r>
+          </a:p>
+        </p:txBody>
+      </p:sp>
+      <p:sp>
+        <p:nvSpPr>
+          <p:cNvPr id="25" name="Rounded Rectangle 24"/>
           <p:cNvSpPr/>
           <p:nvPr/>
         </p:nvSpPr>
         <p:spPr>
           <a:xfrm>
-            <a:off x="4244187" y="5532120"/>
-            <a:ext cx="3703320" cy="914399"/>
+            <a:off x="8618219" y="2606040"/>
+            <a:ext cx="960120" cy="365760"/>
           </a:xfrm>
           <a:prstGeom prst="roundRect">
             <a:avLst/>
           </a:prstGeom>
           <a:solidFill>
-            <a:srgbClr val="F1F5FA"/>
+            <a:srgbClr val="E7EFF8"/>
           </a:solidFill>
-          <a:ln w="9525">
+          <a:ln w="12700">
             <a:solidFill>
               <a:srgbClr val="4A6EA0"/>
             </a:solidFill>
@@ -16936,64 +19401,40 @@
           </a:fontRef>
         </p:style>
         <p:txBody>
-          <a:bodyPr rtlCol="0" anchor="ctr" wrap="square" lIns="109728" rIns="109728" tIns="73152" bIns="73152"/>
-          <a:lstStyle/>
-          <a:p>
-            <a:pPr algn="l"/>
-            <a:r>
-              <a:rPr sz="1200" b="1">
-                <a:solidFill>
-                  <a:srgbClr val="1F4E79"/>
-                </a:solidFill>
-                <a:latin typeface="Calibri"/>
-              </a:rPr>
-              <a:t>G0 / E0 buckets</a:t>
-            </a:r>
-          </a:p>
-          <a:p>
-            <a:pPr algn="l"/>
-            <a:r>
-              <a:rPr sz="1000" i="1">
-                <a:solidFill>
-                  <a:srgbClr val="55606E"/>
-                </a:solidFill>
-                <a:latin typeface="Calibri"/>
-              </a:rPr>
-              <a:t>Classification failures</a:t>
-            </a:r>
-          </a:p>
-          <a:p>
-            <a:pPr algn="l"/>
-            <a:r>
-              <a:rPr sz="1000">
-                <a:solidFill>
-                  <a:srgbClr val="1F2D3D"/>
-                </a:solidFill>
-                <a:latin typeface="Calibri"/>
-              </a:rPr>
-              <a:t>Chunks (G0) and draft epics (E0) that didn't classify or cluster.</a:t>
-            </a:r>
-          </a:p>
-        </p:txBody>
-      </p:sp>
-      <p:sp>
-        <p:nvSpPr>
-          <p:cNvPr id="17" name="Rounded Rectangle 16"/>
+          <a:bodyPr rtlCol="0" anchor="ctr" wrap="square" lIns="73152" rIns="73152" tIns="36576" bIns="36576"/>
+          <a:lstStyle/>
+          <a:p>
+            <a:pPr algn="ctr"/>
+            <a:r>
+              <a:rPr sz="1000" b="1" i="0">
+                <a:solidFill>
+                  <a:srgbClr val="1F2D3D"/>
+                </a:solidFill>
+                <a:latin typeface="Calibri"/>
+              </a:rPr>
+              <a:t>Story A</a:t>
+            </a:r>
+          </a:p>
+        </p:txBody>
+      </p:sp>
+      <p:sp>
+        <p:nvSpPr>
+          <p:cNvPr id="26" name="Rounded Rectangle 25"/>
           <p:cNvSpPr/>
           <p:nvPr/>
         </p:nvSpPr>
         <p:spPr>
           <a:xfrm>
-            <a:off x="8112099" y="5532120"/>
-            <a:ext cx="3703320" cy="914399"/>
+            <a:off x="6812280" y="3337560"/>
+            <a:ext cx="960120" cy="365760"/>
           </a:xfrm>
           <a:prstGeom prst="roundRect">
             <a:avLst/>
           </a:prstGeom>
           <a:solidFill>
-            <a:srgbClr val="F1F5FA"/>
+            <a:srgbClr val="E7EFF8"/>
           </a:solidFill>
-          <a:ln w="9525">
+          <a:ln w="12700">
             <a:solidFill>
               <a:srgbClr val="4A6EA0"/>
             </a:solidFill>
@@ -17014,49 +19455,421 @@
           </a:fontRef>
         </p:style>
         <p:txBody>
-          <a:bodyPr rtlCol="0" anchor="ctr" wrap="square" lIns="109728" rIns="109728" tIns="73152" bIns="73152"/>
-          <a:lstStyle/>
-          <a:p>
-            <a:pPr algn="l"/>
-            <a:r>
-              <a:rPr sz="1200" b="1">
+          <a:bodyPr rtlCol="0" anchor="ctr" wrap="square" lIns="73152" rIns="73152" tIns="36576" bIns="36576"/>
+          <a:lstStyle/>
+          <a:p>
+            <a:pPr algn="ctr"/>
+            <a:r>
+              <a:rPr sz="1000" b="1" i="0">
+                <a:solidFill>
+                  <a:srgbClr val="1F2D3D"/>
+                </a:solidFill>
+                <a:latin typeface="Calibri"/>
+              </a:rPr>
+              <a:t>Story B</a:t>
+            </a:r>
+          </a:p>
+        </p:txBody>
+      </p:sp>
+      <p:sp>
+        <p:nvSpPr>
+          <p:cNvPr id="27" name="Rounded Rectangle 26"/>
+          <p:cNvSpPr/>
+          <p:nvPr/>
+        </p:nvSpPr>
+        <p:spPr>
+          <a:xfrm>
+            <a:off x="10424159" y="3337560"/>
+            <a:ext cx="960120" cy="365760"/>
+          </a:xfrm>
+          <a:prstGeom prst="roundRect">
+            <a:avLst/>
+          </a:prstGeom>
+          <a:solidFill>
+            <a:srgbClr val="E7EFF8"/>
+          </a:solidFill>
+          <a:ln w="12700">
+            <a:solidFill>
+              <a:srgbClr val="4A6EA0"/>
+            </a:solidFill>
+          </a:ln>
+        </p:spPr>
+        <p:style>
+          <a:lnRef idx="1">
+            <a:schemeClr val="accent1"/>
+          </a:lnRef>
+          <a:fillRef idx="3">
+            <a:schemeClr val="accent1"/>
+          </a:fillRef>
+          <a:effectRef idx="2">
+            <a:schemeClr val="accent1"/>
+          </a:effectRef>
+          <a:fontRef idx="minor">
+            <a:schemeClr val="lt1"/>
+          </a:fontRef>
+        </p:style>
+        <p:txBody>
+          <a:bodyPr rtlCol="0" anchor="ctr" wrap="square" lIns="73152" rIns="73152" tIns="36576" bIns="36576"/>
+          <a:lstStyle/>
+          <a:p>
+            <a:pPr algn="ctr"/>
+            <a:r>
+              <a:rPr sz="1000" b="1" i="0">
+                <a:solidFill>
+                  <a:srgbClr val="1F2D3D"/>
+                </a:solidFill>
+                <a:latin typeface="Calibri"/>
+              </a:rPr>
+              <a:t>Story C</a:t>
+            </a:r>
+          </a:p>
+        </p:txBody>
+      </p:sp>
+      <p:sp>
+        <p:nvSpPr>
+          <p:cNvPr id="28" name="Rounded Rectangle 27"/>
+          <p:cNvSpPr/>
+          <p:nvPr/>
+        </p:nvSpPr>
+        <p:spPr>
+          <a:xfrm>
+            <a:off x="8618219" y="4069080"/>
+            <a:ext cx="960120" cy="365760"/>
+          </a:xfrm>
+          <a:prstGeom prst="roundRect">
+            <a:avLst/>
+          </a:prstGeom>
+          <a:solidFill>
+            <a:srgbClr val="E7EFF8"/>
+          </a:solidFill>
+          <a:ln w="12700">
+            <a:solidFill>
+              <a:srgbClr val="4A6EA0"/>
+            </a:solidFill>
+          </a:ln>
+        </p:spPr>
+        <p:style>
+          <a:lnRef idx="1">
+            <a:schemeClr val="accent1"/>
+          </a:lnRef>
+          <a:fillRef idx="3">
+            <a:schemeClr val="accent1"/>
+          </a:fillRef>
+          <a:effectRef idx="2">
+            <a:schemeClr val="accent1"/>
+          </a:effectRef>
+          <a:fontRef idx="minor">
+            <a:schemeClr val="lt1"/>
+          </a:fontRef>
+        </p:style>
+        <p:txBody>
+          <a:bodyPr rtlCol="0" anchor="ctr" wrap="square" lIns="73152" rIns="73152" tIns="36576" bIns="36576"/>
+          <a:lstStyle/>
+          <a:p>
+            <a:pPr algn="ctr"/>
+            <a:r>
+              <a:rPr sz="1000" b="1" i="0">
+                <a:solidFill>
+                  <a:srgbClr val="1F2D3D"/>
+                </a:solidFill>
+                <a:latin typeface="Calibri"/>
+              </a:rPr>
+              <a:t>Story D</a:t>
+            </a:r>
+          </a:p>
+        </p:txBody>
+      </p:sp>
+      <p:sp>
+        <p:nvSpPr>
+          <p:cNvPr id="29" name="Rounded Rectangle 28"/>
+          <p:cNvSpPr/>
+          <p:nvPr/>
+        </p:nvSpPr>
+        <p:spPr>
+          <a:xfrm>
+            <a:off x="8618219" y="4800600"/>
+            <a:ext cx="960120" cy="365760"/>
+          </a:xfrm>
+          <a:prstGeom prst="roundRect">
+            <a:avLst/>
+          </a:prstGeom>
+          <a:solidFill>
+            <a:srgbClr val="E7EFF8"/>
+          </a:solidFill>
+          <a:ln w="12700">
+            <a:solidFill>
+              <a:srgbClr val="4A6EA0"/>
+            </a:solidFill>
+          </a:ln>
+        </p:spPr>
+        <p:style>
+          <a:lnRef idx="1">
+            <a:schemeClr val="accent1"/>
+          </a:lnRef>
+          <a:fillRef idx="3">
+            <a:schemeClr val="accent1"/>
+          </a:fillRef>
+          <a:effectRef idx="2">
+            <a:schemeClr val="accent1"/>
+          </a:effectRef>
+          <a:fontRef idx="minor">
+            <a:schemeClr val="lt1"/>
+          </a:fontRef>
+        </p:style>
+        <p:txBody>
+          <a:bodyPr rtlCol="0" anchor="ctr" wrap="square" lIns="73152" rIns="73152" tIns="36576" bIns="36576"/>
+          <a:lstStyle/>
+          <a:p>
+            <a:pPr algn="ctr"/>
+            <a:r>
+              <a:rPr sz="1000" b="1" i="0">
+                <a:solidFill>
+                  <a:srgbClr val="1F2D3D"/>
+                </a:solidFill>
+                <a:latin typeface="Calibri"/>
+              </a:rPr>
+              <a:t>Story E</a:t>
+            </a:r>
+          </a:p>
+        </p:txBody>
+      </p:sp>
+      <p:cxnSp>
+        <p:nvCxnSpPr>
+          <p:cNvPr id="30" name="Connector 29"/>
+          <p:cNvCxnSpPr/>
+          <p:nvPr/>
+        </p:nvCxnSpPr>
+        <p:spPr>
+          <a:xfrm flipH="1">
+            <a:off x="7292340" y="2971800"/>
+            <a:ext cx="1805940" cy="365760"/>
+          </a:xfrm>
+          <a:prstGeom prst="line">
+            <a:avLst/>
+          </a:prstGeom>
+          <a:ln w="15240">
+            <a:solidFill>
+              <a:srgbClr val="4A6EA0"/>
+            </a:solidFill>
+            <a:tailEnd type="triangle" w="med" h="med"/>
+          </a:ln>
+        </p:spPr>
+        <p:style>
+          <a:lnRef idx="2">
+            <a:schemeClr val="accent1"/>
+          </a:lnRef>
+          <a:fillRef idx="0">
+            <a:schemeClr val="accent1"/>
+          </a:fillRef>
+          <a:effectRef idx="1">
+            <a:schemeClr val="accent1"/>
+          </a:effectRef>
+          <a:fontRef idx="minor">
+            <a:schemeClr val="tx1"/>
+          </a:fontRef>
+        </p:style>
+      </p:cxnSp>
+      <p:cxnSp>
+        <p:nvCxnSpPr>
+          <p:cNvPr id="31" name="Connector 30"/>
+          <p:cNvCxnSpPr/>
+          <p:nvPr/>
+        </p:nvCxnSpPr>
+        <p:spPr>
+          <a:xfrm>
+            <a:off x="9098280" y="2971800"/>
+            <a:ext cx="1805939" cy="365760"/>
+          </a:xfrm>
+          <a:prstGeom prst="line">
+            <a:avLst/>
+          </a:prstGeom>
+          <a:ln w="15240">
+            <a:solidFill>
+              <a:srgbClr val="4A6EA0"/>
+            </a:solidFill>
+            <a:tailEnd type="triangle" w="med" h="med"/>
+          </a:ln>
+        </p:spPr>
+        <p:style>
+          <a:lnRef idx="2">
+            <a:schemeClr val="accent1"/>
+          </a:lnRef>
+          <a:fillRef idx="0">
+            <a:schemeClr val="accent1"/>
+          </a:fillRef>
+          <a:effectRef idx="1">
+            <a:schemeClr val="accent1"/>
+          </a:effectRef>
+          <a:fontRef idx="minor">
+            <a:schemeClr val="tx1"/>
+          </a:fontRef>
+        </p:style>
+      </p:cxnSp>
+      <p:cxnSp>
+        <p:nvCxnSpPr>
+          <p:cNvPr id="32" name="Connector 31"/>
+          <p:cNvCxnSpPr/>
+          <p:nvPr/>
+        </p:nvCxnSpPr>
+        <p:spPr>
+          <a:xfrm>
+            <a:off x="7292340" y="3703320"/>
+            <a:ext cx="1805940" cy="365760"/>
+          </a:xfrm>
+          <a:prstGeom prst="line">
+            <a:avLst/>
+          </a:prstGeom>
+          <a:ln w="15240">
+            <a:solidFill>
+              <a:srgbClr val="4A6EA0"/>
+            </a:solidFill>
+            <a:tailEnd type="triangle" w="med" h="med"/>
+          </a:ln>
+        </p:spPr>
+        <p:style>
+          <a:lnRef idx="2">
+            <a:schemeClr val="accent1"/>
+          </a:lnRef>
+          <a:fillRef idx="0">
+            <a:schemeClr val="accent1"/>
+          </a:fillRef>
+          <a:effectRef idx="1">
+            <a:schemeClr val="accent1"/>
+          </a:effectRef>
+          <a:fontRef idx="minor">
+            <a:schemeClr val="tx1"/>
+          </a:fontRef>
+        </p:style>
+      </p:cxnSp>
+      <p:cxnSp>
+        <p:nvCxnSpPr>
+          <p:cNvPr id="33" name="Connector 32"/>
+          <p:cNvCxnSpPr/>
+          <p:nvPr/>
+        </p:nvCxnSpPr>
+        <p:spPr>
+          <a:xfrm flipH="1">
+            <a:off x="9098280" y="3703320"/>
+            <a:ext cx="1805939" cy="365760"/>
+          </a:xfrm>
+          <a:prstGeom prst="line">
+            <a:avLst/>
+          </a:prstGeom>
+          <a:ln w="15240">
+            <a:solidFill>
+              <a:srgbClr val="4A6EA0"/>
+            </a:solidFill>
+            <a:tailEnd type="triangle" w="med" h="med"/>
+          </a:ln>
+        </p:spPr>
+        <p:style>
+          <a:lnRef idx="2">
+            <a:schemeClr val="accent1"/>
+          </a:lnRef>
+          <a:fillRef idx="0">
+            <a:schemeClr val="accent1"/>
+          </a:fillRef>
+          <a:effectRef idx="1">
+            <a:schemeClr val="accent1"/>
+          </a:effectRef>
+          <a:fontRef idx="minor">
+            <a:schemeClr val="tx1"/>
+          </a:fontRef>
+        </p:style>
+      </p:cxnSp>
+      <p:cxnSp>
+        <p:nvCxnSpPr>
+          <p:cNvPr id="34" name="Connector 33"/>
+          <p:cNvCxnSpPr/>
+          <p:nvPr/>
+        </p:nvCxnSpPr>
+        <p:spPr>
+          <a:xfrm>
+            <a:off x="9098280" y="4434840"/>
+            <a:ext cx="0" cy="365760"/>
+          </a:xfrm>
+          <a:prstGeom prst="line">
+            <a:avLst/>
+          </a:prstGeom>
+          <a:ln w="15240">
+            <a:solidFill>
+              <a:srgbClr val="4A6EA0"/>
+            </a:solidFill>
+            <a:tailEnd type="triangle" w="med" h="med"/>
+          </a:ln>
+        </p:spPr>
+        <p:style>
+          <a:lnRef idx="2">
+            <a:schemeClr val="accent1"/>
+          </a:lnRef>
+          <a:fillRef idx="0">
+            <a:schemeClr val="accent1"/>
+          </a:fillRef>
+          <a:effectRef idx="1">
+            <a:schemeClr val="accent1"/>
+          </a:effectRef>
+          <a:fontRef idx="minor">
+            <a:schemeClr val="tx1"/>
+          </a:fontRef>
+        </p:style>
+      </p:cxnSp>
+      <p:sp>
+        <p:nvSpPr>
+          <p:cNvPr id="35" name="Rounded Rectangle 34"/>
+          <p:cNvSpPr/>
+          <p:nvPr/>
+        </p:nvSpPr>
+        <p:spPr>
+          <a:xfrm>
+            <a:off x="6355080" y="5349240"/>
+            <a:ext cx="5486400" cy="411480"/>
+          </a:xfrm>
+          <a:prstGeom prst="roundRect">
+            <a:avLst/>
+          </a:prstGeom>
+          <a:solidFill>
+            <a:srgbClr val="DCE9D7"/>
+          </a:solidFill>
+          <a:ln w="12700">
+            <a:solidFill>
+              <a:srgbClr val="5C8347"/>
+            </a:solidFill>
+          </a:ln>
+        </p:spPr>
+        <p:style>
+          <a:lnRef idx="1">
+            <a:schemeClr val="accent1"/>
+          </a:lnRef>
+          <a:fillRef idx="3">
+            <a:schemeClr val="accent1"/>
+          </a:fillRef>
+          <a:effectRef idx="2">
+            <a:schemeClr val="accent1"/>
+          </a:effectRef>
+          <a:fontRef idx="minor">
+            <a:schemeClr val="lt1"/>
+          </a:fontRef>
+        </p:style>
+        <p:txBody>
+          <a:bodyPr rtlCol="0" anchor="ctr" wrap="square" lIns="73152" rIns="73152" tIns="36576" bIns="36576"/>
+          <a:lstStyle/>
+          <a:p>
+            <a:pPr algn="ctr"/>
+            <a:r>
+              <a:rPr sz="1100" b="1" i="0">
                 <a:solidFill>
                   <a:srgbClr val="1F4E79"/>
                 </a:solidFill>
                 <a:latin typeface="Calibri"/>
               </a:rPr>
-              <a:t>Audit trail</a:t>
-            </a:r>
-          </a:p>
-          <a:p>
-            <a:pPr algn="l"/>
-            <a:r>
-              <a:rPr sz="1000" i="1">
-                <a:solidFill>
-                  <a:srgbClr val="55606E"/>
-                </a:solidFill>
-                <a:latin typeface="Calibri"/>
-              </a:rPr>
-              <a:t>Call-level errors</a:t>
-            </a:r>
-          </a:p>
-          <a:p>
-            <a:pPr algn="l"/>
-            <a:r>
-              <a:rPr sz="1000">
-                <a:solidFill>
-                  <a:srgbClr val="1F2D3D"/>
-                </a:solidFill>
-                <a:latin typeface="Calibri"/>
-              </a:rPr>
-              <a:t>LLM-call failures after retry exhaustion. For diagnostics.</a:t>
-            </a:r>
-          </a:p>
-        </p:txBody>
-      </p:sp>
-      <p:sp>
-        <p:nvSpPr>
-          <p:cNvPr id="18" name="Rectangle 17"/>
+              <a:t>Output:   1. A  →  2. B  →  3. C  →  4. D  →  5. E</a:t>
+            </a:r>
+          </a:p>
+        </p:txBody>
+      </p:sp>
+      <p:sp>
+        <p:nvSpPr>
+          <p:cNvPr id="36" name="Rectangle 35"/>
           <p:cNvSpPr/>
           <p:nvPr/>
         </p:nvSpPr>
@@ -17099,7 +19912,7 @@
       </p:sp>
       <p:sp>
         <p:nvSpPr>
-          <p:cNvPr id="19" name="TextBox 18"/>
+          <p:cNvPr id="37" name="TextBox 36"/>
           <p:cNvSpPr txBox="1"/>
           <p:nvPr/>
         </p:nvSpPr>
@@ -17134,7 +19947,7 @@
       </p:sp>
       <p:sp>
         <p:nvSpPr>
-          <p:cNvPr id="20" name="TextBox 19"/>
+          <p:cNvPr id="38" name="TextBox 37"/>
           <p:cNvSpPr txBox="1"/>
           <p:nvPr/>
         </p:nvSpPr>
@@ -17162,7 +19975,7 @@
                 </a:solidFill>
                 <a:latin typeface="Calibri"/>
               </a:rPr>
-              <a:t>9 / 10</a:t>
+              <a:t>9 / 12</a:t>
             </a:r>
           </a:p>
         </p:txBody>

--- a/client_alignment_deck.pptx
+++ b/client_alignment_deck.pptx
@@ -12806,7 +12806,42 @@
       </p:sp>
       <p:sp>
         <p:nvSpPr>
-          <p:cNvPr id="48" name="Rectangle 47"/>
+          <p:cNvPr id="48" name="TextBox 47"/>
+          <p:cNvSpPr txBox="1"/>
+          <p:nvPr/>
+        </p:nvSpPr>
+        <p:spPr>
+          <a:xfrm>
+            <a:off x="7040880" y="6062471"/>
+            <a:ext cx="4937760" cy="365760"/>
+          </a:xfrm>
+          <a:prstGeom prst="rect">
+            <a:avLst/>
+          </a:prstGeom>
+          <a:noFill/>
+        </p:spPr>
+        <p:txBody>
+          <a:bodyPr wrap="square" anchor="t">
+            <a:spAutoFit/>
+          </a:bodyPr>
+          <a:lstStyle/>
+          <a:p>
+            <a:pPr algn="l"/>
+            <a:r>
+              <a:rPr sz="800" b="0" i="1">
+                <a:solidFill>
+                  <a:srgbClr val="55606E"/>
+                </a:solidFill>
+                <a:latin typeface="Calibri"/>
+              </a:rPr>
+              <a:t>Note:  Pass 1 here is single-label — each chunk goes to its best-matching theme above τ_match=0.65 (or to residual). Runtime story / chunk theme tags are multi-label per D3 (themes are soft tags, not a forced taxonomy).</a:t>
+            </a:r>
+          </a:p>
+        </p:txBody>
+      </p:sp>
+      <p:sp>
+        <p:nvSpPr>
+          <p:cNvPr id="49" name="Rectangle 48"/>
           <p:cNvSpPr/>
           <p:nvPr/>
         </p:nvSpPr>
@@ -12849,7 +12884,7 @@
       </p:sp>
       <p:sp>
         <p:nvSpPr>
-          <p:cNvPr id="49" name="TextBox 48"/>
+          <p:cNvPr id="50" name="TextBox 49"/>
           <p:cNvSpPr txBox="1"/>
           <p:nvPr/>
         </p:nvSpPr>
@@ -12884,7 +12919,7 @@
       </p:sp>
       <p:sp>
         <p:nvSpPr>
-          <p:cNvPr id="50" name="TextBox 49"/>
+          <p:cNvPr id="51" name="TextBox 50"/>
           <p:cNvSpPr txBox="1"/>
           <p:nvPr/>
         </p:nvSpPr>

--- a/client_alignment_deck.pptx
+++ b/client_alignment_deck.pptx
@@ -6934,8 +6934,8 @@
         </p:nvSpPr>
         <p:spPr>
           <a:xfrm>
-            <a:off x="457200" y="2880360"/>
-            <a:ext cx="11430000" cy="365760"/>
+            <a:off x="457200" y="2697480"/>
+            <a:ext cx="11430000" cy="320040"/>
           </a:xfrm>
           <a:prstGeom prst="rect">
             <a:avLst/>
@@ -6950,27 +6950,116 @@
           <a:p>
             <a:pPr algn="l"/>
             <a:r>
-              <a:rPr sz="1500" b="1" i="0">
+              <a:rPr sz="1400" b="1" i="0">
                 <a:solidFill>
                   <a:srgbClr val="1F4E79"/>
                 </a:solidFill>
                 <a:latin typeface="Calibri"/>
               </a:rPr>
-              <a:t>What we need from the client — mandatory</a:t>
-            </a:r>
-          </a:p>
-        </p:txBody>
-      </p:sp>
-      <p:sp>
-        <p:nvSpPr>
-          <p:cNvPr id="11" name="TextBox 10"/>
+              <a:t>Inputs to the system  —  what's already captured vs what's still needed</a:t>
+            </a:r>
+          </a:p>
+        </p:txBody>
+      </p:sp>
+      <p:sp>
+        <p:nvSpPr>
+          <p:cNvPr id="11" name="Rounded Rectangle 10"/>
+          <p:cNvSpPr/>
+          <p:nvPr/>
+        </p:nvSpPr>
+        <p:spPr>
+          <a:xfrm>
+            <a:off x="365760" y="3063240"/>
+            <a:ext cx="3710330" cy="365760"/>
+          </a:xfrm>
+          <a:prstGeom prst="roundRect">
+            <a:avLst/>
+          </a:prstGeom>
+          <a:solidFill>
+            <a:srgbClr val="DCE9D7"/>
+          </a:solidFill>
+          <a:ln w="12700">
+            <a:solidFill>
+              <a:srgbClr val="5C8347"/>
+            </a:solidFill>
+          </a:ln>
+        </p:spPr>
+        <p:style>
+          <a:lnRef idx="1">
+            <a:schemeClr val="accent1"/>
+          </a:lnRef>
+          <a:fillRef idx="3">
+            <a:schemeClr val="accent1"/>
+          </a:fillRef>
+          <a:effectRef idx="2">
+            <a:schemeClr val="accent1"/>
+          </a:effectRef>
+          <a:fontRef idx="minor">
+            <a:schemeClr val="lt1"/>
+          </a:fontRef>
+        </p:style>
+        <p:txBody>
+          <a:bodyPr rtlCol="0" anchor="ctr" wrap="square" lIns="73152" rIns="73152" tIns="36576" bIns="36576"/>
+          <a:lstStyle/>
+          <a:p>
+            <a:pPr algn="ctr"/>
+            <a:r>
+              <a:rPr sz="1200" b="1" i="0">
+                <a:solidFill>
+                  <a:srgbClr val="5C8347"/>
+                </a:solidFill>
+                <a:latin typeface="Calibri"/>
+              </a:rPr>
+              <a:t>Already captured  ✓</a:t>
+            </a:r>
+          </a:p>
+        </p:txBody>
+      </p:sp>
+      <p:sp>
+        <p:nvSpPr>
+          <p:cNvPr id="12" name="TextBox 11"/>
           <p:cNvSpPr txBox="1"/>
           <p:nvPr/>
         </p:nvSpPr>
         <p:spPr>
           <a:xfrm>
-            <a:off x="640080" y="3246120"/>
-            <a:ext cx="10972800" cy="1463040"/>
+            <a:off x="393192" y="3447288"/>
+            <a:ext cx="3655466" cy="201168"/>
+          </a:xfrm>
+          <a:prstGeom prst="rect">
+            <a:avLst/>
+          </a:prstGeom>
+          <a:noFill/>
+        </p:spPr>
+        <p:txBody>
+          <a:bodyPr wrap="square" anchor="t">
+            <a:spAutoFit/>
+          </a:bodyPr>
+          <a:lstStyle/>
+          <a:p>
+            <a:pPr algn="ctr"/>
+            <a:r>
+              <a:rPr sz="900" b="0" i="1">
+                <a:solidFill>
+                  <a:srgbClr val="55606E"/>
+                </a:solidFill>
+                <a:latin typeface="Calibri"/>
+              </a:rPr>
+              <a:t>from your project documentation</a:t>
+            </a:r>
+          </a:p>
+        </p:txBody>
+      </p:sp>
+      <p:sp>
+        <p:nvSpPr>
+          <p:cNvPr id="13" name="TextBox 12"/>
+          <p:cNvSpPr txBox="1"/>
+          <p:nvPr/>
+        </p:nvSpPr>
+        <p:spPr>
+          <a:xfrm>
+            <a:off x="457200" y="3721608"/>
+            <a:ext cx="3527450" cy="1261872"/>
           </a:xfrm>
           <a:prstGeom prst="rect">
             <a:avLst/>
@@ -6989,13 +7078,13 @@
               </a:spcAft>
             </a:pPr>
             <a:r>
-              <a:rPr sz="1100">
-                <a:solidFill>
-                  <a:srgbClr val="1F2D3D"/>
-                </a:solidFill>
-                <a:latin typeface="Calibri"/>
-              </a:rPr>
-              <a:t>•  The list of tests for each discipline in scope (blood culture, urine culture, target pathogens for Microbiology).</a:t>
+              <a:rPr sz="900">
+                <a:solidFill>
+                  <a:srgbClr val="1F2D3D"/>
+                </a:solidFill>
+                <a:latin typeface="Calibri"/>
+              </a:rPr>
+              <a:t>•  Persona catalog  —  from the Roles &amp; Process Map document</a:t>
             </a:r>
           </a:p>
           <a:p>
@@ -7005,13 +7094,13 @@
               </a:spcAft>
             </a:pPr>
             <a:r>
-              <a:rPr sz="1100">
-                <a:solidFill>
-                  <a:srgbClr val="1F2D3D"/>
-                </a:solidFill>
-                <a:latin typeface="Calibri"/>
-              </a:rPr>
-              <a:t>•  The list of roles in those disciplines (with type: human / system / external).</a:t>
+              <a:rPr sz="900">
+                <a:solidFill>
+                  <a:srgbClr val="1F2D3D"/>
+                </a:solidFill>
+                <a:latin typeface="Calibri"/>
+              </a:rPr>
+              <a:t>•  Universal 6-stage enum  —  from the Process Map</a:t>
             </a:r>
           </a:p>
           <a:p>
@@ -7021,15 +7110,127 @@
               </a:spcAft>
             </a:pPr>
             <a:r>
-              <a:rPr sz="1100">
-                <a:solidFill>
-                  <a:srgbClr val="1F2D3D"/>
-                </a:solidFill>
-                <a:latin typeface="Calibri"/>
-              </a:rPr>
-              <a:t>•  The prior discipline's theme catalog and epic catalog (small structured YAMLs — Cytology for the seminal extension).</a:t>
-            </a:r>
-          </a:p>
+              <a:rPr sz="900">
+                <a:solidFill>
+                  <a:srgbClr val="1F2D3D"/>
+                </a:solidFill>
+                <a:latin typeface="Calibri"/>
+              </a:rPr>
+              <a:t>•  ANALOGY map persona_links  —  from the cross-discipline role inventory</a:t>
+            </a:r>
+          </a:p>
+        </p:txBody>
+      </p:sp>
+      <p:sp>
+        <p:nvSpPr>
+          <p:cNvPr id="14" name="Rounded Rectangle 13"/>
+          <p:cNvSpPr/>
+          <p:nvPr/>
+        </p:nvSpPr>
+        <p:spPr>
+          <a:xfrm>
+            <a:off x="4240682" y="3063240"/>
+            <a:ext cx="3710330" cy="365760"/>
+          </a:xfrm>
+          <a:prstGeom prst="roundRect">
+            <a:avLst/>
+          </a:prstGeom>
+          <a:solidFill>
+            <a:srgbClr val="E7EFF8"/>
+          </a:solidFill>
+          <a:ln w="12700">
+            <a:solidFill>
+              <a:srgbClr val="4A6EA0"/>
+            </a:solidFill>
+          </a:ln>
+        </p:spPr>
+        <p:style>
+          <a:lnRef idx="1">
+            <a:schemeClr val="accent1"/>
+          </a:lnRef>
+          <a:fillRef idx="3">
+            <a:schemeClr val="accent1"/>
+          </a:fillRef>
+          <a:effectRef idx="2">
+            <a:schemeClr val="accent1"/>
+          </a:effectRef>
+          <a:fontRef idx="minor">
+            <a:schemeClr val="lt1"/>
+          </a:fontRef>
+        </p:style>
+        <p:txBody>
+          <a:bodyPr rtlCol="0" anchor="ctr" wrap="square" lIns="73152" rIns="73152" tIns="36576" bIns="36576"/>
+          <a:lstStyle/>
+          <a:p>
+            <a:pPr algn="ctr"/>
+            <a:r>
+              <a:rPr sz="1200" b="1" i="0">
+                <a:solidFill>
+                  <a:srgbClr val="1F4E79"/>
+                </a:solidFill>
+                <a:latin typeface="Calibri"/>
+              </a:rPr>
+              <a:t>From the seminal prior  ✓</a:t>
+            </a:r>
+          </a:p>
+        </p:txBody>
+      </p:sp>
+      <p:sp>
+        <p:nvSpPr>
+          <p:cNvPr id="15" name="TextBox 14"/>
+          <p:cNvSpPr txBox="1"/>
+          <p:nvPr/>
+        </p:nvSpPr>
+        <p:spPr>
+          <a:xfrm>
+            <a:off x="4268114" y="3447288"/>
+            <a:ext cx="3655466" cy="201168"/>
+          </a:xfrm>
+          <a:prstGeom prst="rect">
+            <a:avLst/>
+          </a:prstGeom>
+          <a:noFill/>
+        </p:spPr>
+        <p:txBody>
+          <a:bodyPr wrap="square" anchor="t">
+            <a:spAutoFit/>
+          </a:bodyPr>
+          <a:lstStyle/>
+          <a:p>
+            <a:pPr algn="ctr"/>
+            <a:r>
+              <a:rPr sz="900" b="0" i="1">
+                <a:solidFill>
+                  <a:srgbClr val="55606E"/>
+                </a:solidFill>
+                <a:latin typeface="Calibri"/>
+              </a:rPr>
+              <a:t>snapshotted from Cytology's Connect build</a:t>
+            </a:r>
+          </a:p>
+        </p:txBody>
+      </p:sp>
+      <p:sp>
+        <p:nvSpPr>
+          <p:cNvPr id="16" name="TextBox 15"/>
+          <p:cNvSpPr txBox="1"/>
+          <p:nvPr/>
+        </p:nvSpPr>
+        <p:spPr>
+          <a:xfrm>
+            <a:off x="4332122" y="3721608"/>
+            <a:ext cx="3527450" cy="1261872"/>
+          </a:xfrm>
+          <a:prstGeom prst="rect">
+            <a:avLst/>
+          </a:prstGeom>
+          <a:noFill/>
+        </p:spPr>
+        <p:txBody>
+          <a:bodyPr wrap="square" anchor="t">
+            <a:spAutoFit/>
+          </a:bodyPr>
+          <a:lstStyle/>
           <a:p>
             <a:pPr algn="l">
               <a:spcAft>
@@ -7037,73 +7238,15 @@
               </a:spcAft>
             </a:pPr>
             <a:r>
-              <a:rPr sz="1100">
-                <a:solidFill>
-                  <a:srgbClr val="1F2D3D"/>
-                </a:solidFill>
-                <a:latin typeface="Calibri"/>
-              </a:rPr>
-              <a:t>•  A sample of ~20 SOPs per new discipline to seed Phase 1.</a:t>
-            </a:r>
-          </a:p>
-        </p:txBody>
-      </p:sp>
-      <p:sp>
-        <p:nvSpPr>
-          <p:cNvPr id="12" name="TextBox 11"/>
-          <p:cNvSpPr txBox="1"/>
-          <p:nvPr/>
-        </p:nvSpPr>
-        <p:spPr>
-          <a:xfrm>
-            <a:off x="457200" y="4709160"/>
-            <a:ext cx="11430000" cy="320040"/>
-          </a:xfrm>
-          <a:prstGeom prst="rect">
-            <a:avLst/>
-          </a:prstGeom>
-          <a:noFill/>
-        </p:spPr>
-        <p:txBody>
-          <a:bodyPr wrap="square" anchor="t">
-            <a:spAutoFit/>
-          </a:bodyPr>
-          <a:lstStyle/>
-          <a:p>
-            <a:pPr algn="l"/>
-            <a:r>
-              <a:rPr sz="1200" b="1" i="1">
-                <a:solidFill>
-                  <a:srgbClr val="55606E"/>
-                </a:solidFill>
-                <a:latin typeface="Calibri"/>
-              </a:rPr>
-              <a:t>Optional — quality enhancement</a:t>
-            </a:r>
-          </a:p>
-        </p:txBody>
-      </p:sp>
-      <p:sp>
-        <p:nvSpPr>
-          <p:cNvPr id="13" name="TextBox 12"/>
-          <p:cNvSpPr txBox="1"/>
-          <p:nvPr/>
-        </p:nvSpPr>
-        <p:spPr>
-          <a:xfrm>
-            <a:off x="640080" y="5029200"/>
-            <a:ext cx="10972800" cy="457200"/>
-          </a:xfrm>
-          <a:prstGeom prst="rect">
-            <a:avLst/>
-          </a:prstGeom>
-          <a:noFill/>
-        </p:spPr>
-        <p:txBody>
-          <a:bodyPr wrap="square" anchor="t">
-            <a:spAutoFit/>
-          </a:bodyPr>
-          <a:lstStyle/>
+              <a:rPr sz="900">
+                <a:solidFill>
+                  <a:srgbClr val="1F2D3D"/>
+                </a:solidFill>
+                <a:latin typeface="Calibri"/>
+              </a:rPr>
+              <a:t>•  Theme catalog  (cyto_v1)  —  used as the warm-start prior for Theme Discovery</a:t>
+            </a:r>
+          </a:p>
           <a:p>
             <a:pPr algn="l">
               <a:spcAft>
@@ -7111,27 +7254,27 @@
               </a:spcAft>
             </a:pPr>
             <a:r>
-              <a:rPr sz="1100">
-                <a:solidFill>
-                  <a:srgbClr val="55606E"/>
-                </a:solidFill>
-                <a:latin typeface="Calibri"/>
-              </a:rPr>
-              <a:t>•  Sanitized prior-discipline Jira export — improves story style fidelity if available; not required for the system to function.</a:t>
-            </a:r>
-          </a:p>
-        </p:txBody>
-      </p:sp>
-      <p:sp>
-        <p:nvSpPr>
-          <p:cNvPr id="14" name="Rounded Rectangle 13"/>
+              <a:rPr sz="900">
+                <a:solidFill>
+                  <a:srgbClr val="1F2D3D"/>
+                </a:solidFill>
+                <a:latin typeface="Calibri"/>
+              </a:rPr>
+              <a:t>•  Epic catalog  (cyto_epic_v1)  —  used by the conditioned Epic Extractor</a:t>
+            </a:r>
+          </a:p>
+        </p:txBody>
+      </p:sp>
+      <p:sp>
+        <p:nvSpPr>
+          <p:cNvPr id="17" name="Rounded Rectangle 16"/>
           <p:cNvSpPr/>
           <p:nvPr/>
         </p:nvSpPr>
         <p:spPr>
           <a:xfrm>
-            <a:off x="457200" y="5623560"/>
-            <a:ext cx="11475720" cy="777240"/>
+            <a:off x="8115604" y="3063240"/>
+            <a:ext cx="3710330" cy="365760"/>
           </a:xfrm>
           <a:prstGeom prst="roundRect">
             <a:avLst/>
@@ -7165,20 +7308,234 @@
           <a:p>
             <a:pPr algn="ctr"/>
             <a:r>
+              <a:rPr sz="1200" b="1" i="0">
+                <a:solidFill>
+                  <a:srgbClr val="1F4E79"/>
+                </a:solidFill>
+                <a:latin typeface="Calibri"/>
+              </a:rPr>
+              <a:t>Still needed from the client</a:t>
+            </a:r>
+          </a:p>
+        </p:txBody>
+      </p:sp>
+      <p:sp>
+        <p:nvSpPr>
+          <p:cNvPr id="18" name="TextBox 17"/>
+          <p:cNvSpPr txBox="1"/>
+          <p:nvPr/>
+        </p:nvSpPr>
+        <p:spPr>
+          <a:xfrm>
+            <a:off x="8143036" y="3447288"/>
+            <a:ext cx="3655466" cy="201168"/>
+          </a:xfrm>
+          <a:prstGeom prst="rect">
+            <a:avLst/>
+          </a:prstGeom>
+          <a:noFill/>
+        </p:spPr>
+        <p:txBody>
+          <a:bodyPr wrap="square" anchor="t">
+            <a:spAutoFit/>
+          </a:bodyPr>
+          <a:lstStyle/>
+          <a:p>
+            <a:pPr algn="ctr"/>
+            <a:r>
+              <a:rPr sz="900" b="0" i="1">
+                <a:solidFill>
+                  <a:srgbClr val="55606E"/>
+                </a:solidFill>
+                <a:latin typeface="Calibri"/>
+              </a:rPr>
+              <a:t>the only blocking inputs</a:t>
+            </a:r>
+          </a:p>
+        </p:txBody>
+      </p:sp>
+      <p:sp>
+        <p:nvSpPr>
+          <p:cNvPr id="19" name="TextBox 18"/>
+          <p:cNvSpPr txBox="1"/>
+          <p:nvPr/>
+        </p:nvSpPr>
+        <p:spPr>
+          <a:xfrm>
+            <a:off x="8207044" y="3721608"/>
+            <a:ext cx="3527450" cy="1261872"/>
+          </a:xfrm>
+          <a:prstGeom prst="rect">
+            <a:avLst/>
+          </a:prstGeom>
+          <a:noFill/>
+        </p:spPr>
+        <p:txBody>
+          <a:bodyPr wrap="square" anchor="t">
+            <a:spAutoFit/>
+          </a:bodyPr>
+          <a:lstStyle/>
+          <a:p>
+            <a:pPr algn="l">
+              <a:spcAft>
+                <a:spcPts val="300"/>
+              </a:spcAft>
+            </a:pPr>
+            <a:r>
+              <a:rPr sz="900">
+                <a:solidFill>
+                  <a:srgbClr val="1F2D3D"/>
+                </a:solidFill>
+                <a:latin typeface="Calibri"/>
+              </a:rPr>
+              <a:t>•  Test catalog  (micro_test_v1.yaml)  —  list of in-scope Microbiology tests (Gram stain, blood culture, MALDI, AST, …)</a:t>
+            </a:r>
+          </a:p>
+          <a:p>
+            <a:pPr algn="l">
+              <a:spcAft>
+                <a:spcPts val="300"/>
+              </a:spcAft>
+            </a:pPr>
+            <a:r>
+              <a:rPr sz="900">
+                <a:solidFill>
+                  <a:srgbClr val="1F2D3D"/>
+                </a:solidFill>
+                <a:latin typeface="Calibri"/>
+              </a:rPr>
+              <a:t>•  Sample SOPs  (~20 representative procedure documents) to seed Phase 1</a:t>
+            </a:r>
+          </a:p>
+        </p:txBody>
+      </p:sp>
+      <p:sp>
+        <p:nvSpPr>
+          <p:cNvPr id="20" name="TextBox 19"/>
+          <p:cNvSpPr txBox="1"/>
+          <p:nvPr/>
+        </p:nvSpPr>
+        <p:spPr>
+          <a:xfrm>
+            <a:off x="457200" y="5074920"/>
+            <a:ext cx="11430000" cy="228600"/>
+          </a:xfrm>
+          <a:prstGeom prst="rect">
+            <a:avLst/>
+          </a:prstGeom>
+          <a:noFill/>
+        </p:spPr>
+        <p:txBody>
+          <a:bodyPr wrap="square" anchor="t">
+            <a:spAutoFit/>
+          </a:bodyPr>
+          <a:lstStyle/>
+          <a:p>
+            <a:pPr algn="l"/>
+            <a:r>
+              <a:rPr sz="1100" b="1" i="1">
+                <a:solidFill>
+                  <a:srgbClr val="55606E"/>
+                </a:solidFill>
+                <a:latin typeface="Calibri"/>
+              </a:rPr>
+              <a:t>Optional  —  quality enhancement</a:t>
+            </a:r>
+          </a:p>
+        </p:txBody>
+      </p:sp>
+      <p:sp>
+        <p:nvSpPr>
+          <p:cNvPr id="21" name="TextBox 20"/>
+          <p:cNvSpPr txBox="1"/>
+          <p:nvPr/>
+        </p:nvSpPr>
+        <p:spPr>
+          <a:xfrm>
+            <a:off x="640080" y="5321808"/>
+            <a:ext cx="10972800" cy="228600"/>
+          </a:xfrm>
+          <a:prstGeom prst="rect">
+            <a:avLst/>
+          </a:prstGeom>
+          <a:noFill/>
+        </p:spPr>
+        <p:txBody>
+          <a:bodyPr wrap="square" anchor="t">
+            <a:spAutoFit/>
+          </a:bodyPr>
+          <a:lstStyle/>
+          <a:p>
+            <a:pPr algn="l"/>
+            <a:r>
+              <a:rPr sz="1000" b="0" i="1">
+                <a:solidFill>
+                  <a:srgbClr val="55606E"/>
+                </a:solidFill>
+                <a:latin typeface="Calibri"/>
+              </a:rPr>
+              <a:t>•   Sanitized Cytology Jira export  —  improves story style fidelity at extraction time. The system runs without it.</a:t>
+            </a:r>
+          </a:p>
+        </p:txBody>
+      </p:sp>
+      <p:sp>
+        <p:nvSpPr>
+          <p:cNvPr id="22" name="Rounded Rectangle 21"/>
+          <p:cNvSpPr/>
+          <p:nvPr/>
+        </p:nvSpPr>
+        <p:spPr>
+          <a:xfrm>
+            <a:off x="457200" y="5669280"/>
+            <a:ext cx="11475720" cy="502920"/>
+          </a:xfrm>
+          <a:prstGeom prst="roundRect">
+            <a:avLst/>
+          </a:prstGeom>
+          <a:solidFill>
+            <a:srgbClr val="FAE9CB"/>
+          </a:solidFill>
+          <a:ln w="12700">
+            <a:solidFill>
+              <a:srgbClr val="C9952C"/>
+            </a:solidFill>
+          </a:ln>
+        </p:spPr>
+        <p:style>
+          <a:lnRef idx="1">
+            <a:schemeClr val="accent1"/>
+          </a:lnRef>
+          <a:fillRef idx="3">
+            <a:schemeClr val="accent1"/>
+          </a:fillRef>
+          <a:effectRef idx="2">
+            <a:schemeClr val="accent1"/>
+          </a:effectRef>
+          <a:fontRef idx="minor">
+            <a:schemeClr val="lt1"/>
+          </a:fontRef>
+        </p:style>
+        <p:txBody>
+          <a:bodyPr rtlCol="0" anchor="ctr" wrap="square" lIns="73152" rIns="73152" tIns="36576" bIns="36576"/>
+          <a:lstStyle/>
+          <a:p>
+            <a:pPr algn="ctr"/>
+            <a:r>
               <a:rPr sz="1300" b="1" i="0">
                 <a:solidFill>
                   <a:srgbClr val="1F4E79"/>
                 </a:solidFill>
                 <a:latin typeface="Calibri"/>
               </a:rPr>
-              <a:t>Alignment ask: do these inputs match what's available on your side, and does the output match what your dev team would consume?</a:t>
-            </a:r>
-          </a:p>
-        </p:txBody>
-      </p:sp>
-      <p:sp>
-        <p:nvSpPr>
-          <p:cNvPr id="15" name="Rectangle 14"/>
+              <a:t>Alignment ask:  the test catalog + sample SOPs are the gating inputs.  Everything else is in hand.  Confirm?</a:t>
+            </a:r>
+          </a:p>
+        </p:txBody>
+      </p:sp>
+      <p:sp>
+        <p:nvSpPr>
+          <p:cNvPr id="23" name="Rectangle 22"/>
           <p:cNvSpPr/>
           <p:nvPr/>
         </p:nvSpPr>
@@ -7221,7 +7578,7 @@
       </p:sp>
       <p:sp>
         <p:nvSpPr>
-          <p:cNvPr id="16" name="TextBox 15"/>
+          <p:cNvPr id="24" name="TextBox 23"/>
           <p:cNvSpPr txBox="1"/>
           <p:nvPr/>
         </p:nvSpPr>
@@ -7256,7 +7613,7 @@
       </p:sp>
       <p:sp>
         <p:nvSpPr>
-          <p:cNvPr id="17" name="TextBox 16"/>
+          <p:cNvPr id="25" name="TextBox 24"/>
           <p:cNvSpPr txBox="1"/>
           <p:nvPr/>
         </p:nvSpPr>
@@ -7934,8 +8291,8 @@
         </p:nvSpPr>
         <p:spPr>
           <a:xfrm>
-            <a:off x="457200" y="5897880"/>
-            <a:ext cx="11430000" cy="548640"/>
+            <a:off x="457200" y="5852160"/>
+            <a:ext cx="11430000" cy="274320"/>
           </a:xfrm>
           <a:prstGeom prst="rect">
             <a:avLst/>
@@ -7952,6 +8309,41 @@
             <a:r>
               <a:rPr sz="1000" b="0" i="1">
                 <a:solidFill>
+                  <a:srgbClr val="1F4E79"/>
+                </a:solidFill>
+                <a:latin typeface="Calibri"/>
+              </a:rPr>
+              <a:t>Sourcing:  theme + epic catalogs are snapshotted from Cytology's existing Connect build (the seminal prior).</a:t>
+            </a:r>
+          </a:p>
+        </p:txBody>
+      </p:sp>
+      <p:sp>
+        <p:nvSpPr>
+          <p:cNvPr id="18" name="TextBox 17"/>
+          <p:cNvSpPr txBox="1"/>
+          <p:nvPr/>
+        </p:nvSpPr>
+        <p:spPr>
+          <a:xfrm>
+            <a:off x="457200" y="6144768"/>
+            <a:ext cx="11430000" cy="274320"/>
+          </a:xfrm>
+          <a:prstGeom prst="rect">
+            <a:avLst/>
+          </a:prstGeom>
+          <a:noFill/>
+        </p:spPr>
+        <p:txBody>
+          <a:bodyPr wrap="square" anchor="t">
+            <a:spAutoFit/>
+          </a:bodyPr>
+          <a:lstStyle/>
+          <a:p>
+            <a:pPr algn="l"/>
+            <a:r>
+              <a:rPr sz="1000" b="0" i="1">
+                <a:solidFill>
                   <a:srgbClr val="55606E"/>
                 </a:solidFill>
                 <a:latin typeface="Calibri"/>
@@ -7963,7 +8355,7 @@
       </p:sp>
       <p:sp>
         <p:nvSpPr>
-          <p:cNvPr id="18" name="Rectangle 17"/>
+          <p:cNvPr id="19" name="Rectangle 18"/>
           <p:cNvSpPr/>
           <p:nvPr/>
         </p:nvSpPr>
@@ -8006,7 +8398,7 @@
       </p:sp>
       <p:sp>
         <p:nvSpPr>
-          <p:cNvPr id="19" name="TextBox 18"/>
+          <p:cNvPr id="20" name="TextBox 19"/>
           <p:cNvSpPr txBox="1"/>
           <p:nvPr/>
         </p:nvSpPr>
@@ -8041,7 +8433,7 @@
       </p:sp>
       <p:sp>
         <p:nvSpPr>
-          <p:cNvPr id="20" name="TextBox 19"/>
+          <p:cNvPr id="21" name="TextBox 20"/>
           <p:cNvSpPr txBox="1"/>
           <p:nvPr/>
         </p:nvSpPr>

--- a/client_alignment_deck.pptx
+++ b/client_alignment_deck.pptx
@@ -4309,7 +4309,7 @@
         <p:spPr>
           <a:xfrm>
             <a:off x="365760" y="1828800"/>
-            <a:ext cx="5638647" cy="1417320"/>
+            <a:ext cx="5638647" cy="1600200"/>
           </a:xfrm>
           <a:prstGeom prst="rect">
             <a:avLst/>
@@ -4494,7 +4494,7 @@
         </p:nvSpPr>
         <p:spPr>
           <a:xfrm>
-            <a:off x="411480" y="3337560"/>
+            <a:off x="411480" y="3520440"/>
             <a:ext cx="5547207" cy="228600"/>
           </a:xfrm>
           <a:prstGeom prst="rect">
@@ -4529,7 +4529,7 @@
         </p:nvSpPr>
         <p:spPr>
           <a:xfrm>
-            <a:off x="457200" y="3630168"/>
+            <a:off x="457200" y="3813048"/>
             <a:ext cx="5455767" cy="274320"/>
           </a:xfrm>
           <a:prstGeom prst="rect">
@@ -4564,7 +4564,7 @@
         </p:nvSpPr>
         <p:spPr>
           <a:xfrm>
-            <a:off x="457200" y="3922776"/>
+            <a:off x="457200" y="4105656"/>
             <a:ext cx="5455767" cy="274320"/>
           </a:xfrm>
           <a:prstGeom prst="rect">
@@ -4599,7 +4599,7 @@
         </p:nvSpPr>
         <p:spPr>
           <a:xfrm>
-            <a:off x="457200" y="4215384"/>
+            <a:off x="457200" y="4398264"/>
             <a:ext cx="5455767" cy="274320"/>
           </a:xfrm>
           <a:prstGeom prst="rect">
@@ -4634,7 +4634,7 @@
         </p:nvSpPr>
         <p:spPr>
           <a:xfrm>
-            <a:off x="365760" y="4599432"/>
+            <a:off x="365760" y="4782312"/>
             <a:ext cx="5638647" cy="365760"/>
           </a:xfrm>
           <a:prstGeom prst="roundRect">
@@ -4743,7 +4743,7 @@
         <p:spPr>
           <a:xfrm>
             <a:off x="6187287" y="1828800"/>
-            <a:ext cx="5638647" cy="1417320"/>
+            <a:ext cx="5638647" cy="1600200"/>
           </a:xfrm>
           <a:prstGeom prst="rect">
             <a:avLst/>
@@ -4960,7 +4960,7 @@
         </p:nvSpPr>
         <p:spPr>
           <a:xfrm>
-            <a:off x="6233007" y="3337560"/>
+            <a:off x="6233007" y="3520440"/>
             <a:ext cx="5547207" cy="228600"/>
           </a:xfrm>
           <a:prstGeom prst="rect">
@@ -4995,7 +4995,7 @@
         </p:nvSpPr>
         <p:spPr>
           <a:xfrm>
-            <a:off x="6278727" y="3630168"/>
+            <a:off x="6278727" y="3813048"/>
             <a:ext cx="5455767" cy="274320"/>
           </a:xfrm>
           <a:prstGeom prst="rect">
@@ -5030,7 +5030,7 @@
         </p:nvSpPr>
         <p:spPr>
           <a:xfrm>
-            <a:off x="6278727" y="3922776"/>
+            <a:off x="6278727" y="4105656"/>
             <a:ext cx="5455767" cy="274320"/>
           </a:xfrm>
           <a:prstGeom prst="rect">
@@ -5065,7 +5065,7 @@
         </p:nvSpPr>
         <p:spPr>
           <a:xfrm>
-            <a:off x="6278727" y="4215384"/>
+            <a:off x="6278727" y="4398264"/>
             <a:ext cx="5455767" cy="274320"/>
           </a:xfrm>
           <a:prstGeom prst="rect">
@@ -5100,7 +5100,7 @@
         </p:nvSpPr>
         <p:spPr>
           <a:xfrm>
-            <a:off x="6187287" y="4599432"/>
+            <a:off x="6187287" y="4782312"/>
             <a:ext cx="5638647" cy="365760"/>
           </a:xfrm>
           <a:prstGeom prst="roundRect">
@@ -5154,7 +5154,7 @@
         </p:nvSpPr>
         <p:spPr>
           <a:xfrm>
-            <a:off x="457200" y="5102352"/>
+            <a:off x="457200" y="5285232"/>
             <a:ext cx="11430000" cy="457200"/>
           </a:xfrm>
           <a:prstGeom prst="rect">
@@ -6701,7 +6701,7 @@
               </a:rPr>
               <a:t>Epics + Stories
 Ready for the dev team
-Includes traceability to source docs</a:t>
+Includes traceability to source SOPs</a:t>
             </a:r>
           </a:p>
         </p:txBody>
@@ -7084,7 +7084,7 @@
                 </a:solidFill>
                 <a:latin typeface="Calibri"/>
               </a:rPr>
-              <a:t>•  Persona catalog  —  from the Roles &amp; Process Map document</a:t>
+              <a:t>•  Persona inventory  —  documented in your Roles &amp; Process Map (we'll structure it into micro_persona_v1.yaml)</a:t>
             </a:r>
           </a:p>
           <a:p>
@@ -7100,7 +7100,7 @@
                 </a:solidFill>
                 <a:latin typeface="Calibri"/>
               </a:rPr>
-              <a:t>•  Universal 6-stage enum  —  from the Process Map</a:t>
+              <a:t>•  Universal 6-stage enum  —  derived from the Process Map (one-time, universal)</a:t>
             </a:r>
           </a:p>
           <a:p>
@@ -7116,7 +7116,7 @@
                 </a:solidFill>
                 <a:latin typeface="Calibri"/>
               </a:rPr>
-              <a:t>•  ANALOGY map persona_links  —  from the cross-discipline role inventory</a:t>
+              <a:t>•  ANALOGY persona_links  —  from the cross-discipline role inventory</a:t>
             </a:r>
           </a:p>
         </p:txBody>
@@ -7388,7 +7388,7 @@
                 </a:solidFill>
                 <a:latin typeface="Calibri"/>
               </a:rPr>
-              <a:t>•  Test catalog  (micro_test_v1.yaml)  —  list of in-scope Microbiology tests (Gram stain, blood culture, MALDI, AST, …)</a:t>
+              <a:t>•  Test catalog  (micro_test_v1.yaml)  —  list of in-scope Microbiology tests (Gram stain, blood culture, MALDI mass-spec ID, AST antimicrobial susceptibility testing, …)</a:t>
             </a:r>
           </a:p>
           <a:p>
@@ -7404,7 +7404,7 @@
                 </a:solidFill>
                 <a:latin typeface="Calibri"/>
               </a:rPr>
-              <a:t>•  Sample SOPs  (~20 representative procedure documents) to seed Phase 1</a:t>
+              <a:t>•  Sample SOPs  (~20 representative SOPs) to seed Phase 1</a:t>
             </a:r>
           </a:p>
         </p:txBody>
@@ -7840,7 +7840,7 @@
         </p:nvSpPr>
         <p:spPr>
           <a:xfrm>
-            <a:off x="457200" y="1691640"/>
+            <a:off x="457200" y="1828800"/>
             <a:ext cx="3291840" cy="1234440"/>
           </a:xfrm>
           <a:prstGeom prst="roundRect">
@@ -7896,7 +7896,7 @@
         </p:nvSpPr>
         <p:spPr>
           <a:xfrm>
-            <a:off x="8442655" y="1691640"/>
+            <a:off x="8442655" y="1828800"/>
             <a:ext cx="3291840" cy="1234440"/>
           </a:xfrm>
           <a:prstGeom prst="roundRect">
@@ -7952,7 +7952,7 @@
         </p:nvSpPr>
         <p:spPr>
           <a:xfrm>
-            <a:off x="457200" y="1417320"/>
+            <a:off x="457200" y="1554480"/>
             <a:ext cx="1280160" cy="274320"/>
           </a:xfrm>
           <a:prstGeom prst="rect">
@@ -7987,7 +7987,7 @@
         </p:nvSpPr>
         <p:spPr>
           <a:xfrm>
-            <a:off x="8442655" y="1417320"/>
+            <a:off x="8442655" y="1554480"/>
             <a:ext cx="1280160" cy="274320"/>
           </a:xfrm>
           <a:prstGeom prst="rect">
@@ -8023,7 +8023,7 @@
         <p:spPr>
           <a:xfrm flipH="1">
             <a:off x="3749039" y="2281428"/>
-            <a:ext cx="1158088" cy="27432"/>
+            <a:ext cx="1158088" cy="164592"/>
           </a:xfrm>
           <a:prstGeom prst="line">
             <a:avLst/>
@@ -8059,7 +8059,7 @@
         <p:spPr>
           <a:xfrm>
             <a:off x="7284567" y="2281428"/>
-            <a:ext cx="1158088" cy="27432"/>
+            <a:ext cx="1158088" cy="164592"/>
           </a:xfrm>
           <a:prstGeom prst="line">
             <a:avLst/>
@@ -8965,7 +8965,7 @@
                           </a:solidFill>
                           <a:latin typeface="Calibri"/>
                         </a:rPr>
-                        <a:t>Drafts user stories from SOP chunks using schema + shape definitions + closed-enum catalogs. Optionally retrieves (test, role, stage, shape)-matched exemplars from the prior discipline's Jira if it's available — improves style fidelity.</a:t>
+                        <a:t>Drafts user stories from SOP chunks using schema + shape definitions + closed-enum catalogs. Optionally retrieves (test, persona, stage, shape)-matched exemplars from the prior discipline's Jira if it's available — improves style fidelity.</a:t>
                       </a:r>
                     </a:p>
                   </a:txBody>
@@ -10830,7 +10830,7 @@
                 </a:solidFill>
                 <a:latin typeface="Calibri"/>
               </a:rPr>
-              <a:t>Tag chunks: theme, test, role, stage</a:t>
+              <a:t>Tag chunks: theme, test, persona, stage</a:t>
             </a:r>
           </a:p>
         </p:txBody>
@@ -12111,7 +12111,7 @@
                 </a:solidFill>
                 <a:latin typeface="Consolas"/>
               </a:rPr>
-              <a:t>new_lab_theme_catalog:</a:t>
+              <a:t>theme_catalog:</a:t>
             </a:r>
           </a:p>
           <a:p>
@@ -12127,7 +12127,7 @@
                 </a:solidFill>
                 <a:latin typeface="Consolas"/>
               </a:rPr>
-              <a:t>  catalog_id: micro_v1</a:t>
+              <a:t>  catalog_id:     micro_v1</a:t>
             </a:r>
           </a:p>
           <a:p>
@@ -12175,7 +12175,7 @@
                 </a:solidFill>
                 <a:latin typeface="Consolas"/>
               </a:rPr>
-              <a:t>  inherited_from_cytology:    # carried over by Pass 1</a:t>
+              <a:t>  inherited_themes:           # carried over by Pass 1</a:t>
             </a:r>
           </a:p>
           <a:p>
@@ -12191,7 +12191,7 @@
                 </a:solidFill>
                 <a:latin typeface="Consolas"/>
               </a:rPr>
-              <a:t>    - Pre-Analytic</a:t>
+              <a:t>    - G1, G2, G3, G4, G5, G6, G7, G8</a:t>
             </a:r>
           </a:p>
           <a:p>
@@ -12207,7 +12207,7 @@
                 </a:solidFill>
                 <a:latin typeface="Consolas"/>
               </a:rPr>
-              <a:t>    - Analytic</a:t>
+              <a:t/>
             </a:r>
           </a:p>
           <a:p>
@@ -12223,7 +12223,7 @@
                 </a:solidFill>
                 <a:latin typeface="Consolas"/>
               </a:rPr>
-              <a:t>    - Post-Analytic</a:t>
+              <a:t>  novel_themes:               # admitted by quorum</a:t>
             </a:r>
           </a:p>
           <a:p>
@@ -12239,7 +12239,7 @@
                 </a:solidFill>
                 <a:latin typeface="Consolas"/>
               </a:rPr>
-              <a:t>    - Reporting</a:t>
+              <a:t>    - id: MI1</a:t>
             </a:r>
           </a:p>
           <a:p>
@@ -12255,7 +12255,7 @@
                 </a:solidFill>
                 <a:latin typeface="Consolas"/>
               </a:rPr>
-              <a:t>    - QC</a:t>
+              <a:t>      name: Susceptibility Testing</a:t>
             </a:r>
           </a:p>
           <a:p>
@@ -12271,7 +12271,7 @@
                 </a:solidFill>
                 <a:latin typeface="Consolas"/>
               </a:rPr>
-              <a:t>    - Compliance</a:t>
+              <a:t>      evidence: 42 chunks</a:t>
             </a:r>
           </a:p>
           <a:p>
@@ -12287,7 +12287,7 @@
                 </a:solidFill>
                 <a:latin typeface="Consolas"/>
               </a:rPr>
-              <a:t>    - Instrumentation</a:t>
+              <a:t>      votes: [admit×5]    decision: admit</a:t>
             </a:r>
           </a:p>
           <a:p>
@@ -12303,7 +12303,7 @@
                 </a:solidFill>
                 <a:latin typeface="Consolas"/>
               </a:rPr>
-              <a:t>    - Platform</a:t>
+              <a:t>    - id: MI2</a:t>
             </a:r>
           </a:p>
           <a:p>
@@ -12319,7 +12319,7 @@
                 </a:solidFill>
                 <a:latin typeface="Consolas"/>
               </a:rPr>
-              <a:t/>
+              <a:t>      name: Biosafety Containment</a:t>
             </a:r>
           </a:p>
           <a:p>
@@ -12335,7 +12335,7 @@
                 </a:solidFill>
                 <a:latin typeface="Consolas"/>
               </a:rPr>
-              <a:t>  newly_added:                # admitted by quorum</a:t>
+              <a:t>      evidence: 28 chunks</a:t>
             </a:r>
           </a:p>
           <a:p>
@@ -12351,7 +12351,7 @@
                 </a:solidFill>
                 <a:latin typeface="Consolas"/>
               </a:rPr>
-              <a:t>    - id: MI1</a:t>
+              <a:t>      votes: [admit×4, fold→G6]    decision: admit</a:t>
             </a:r>
           </a:p>
           <a:p>
@@ -12367,7 +12367,7 @@
                 </a:solidFill>
                 <a:latin typeface="Consolas"/>
               </a:rPr>
-              <a:t>      name: Susceptibility Testing</a:t>
+              <a:t/>
             </a:r>
           </a:p>
           <a:p>
@@ -12383,7 +12383,7 @@
                 </a:solidFill>
                 <a:latin typeface="Consolas"/>
               </a:rPr>
-              <a:t>      evidence: 42 chunks</a:t>
+              <a:t>  folded_in:                  # M=3 majority on fold target</a:t>
             </a:r>
           </a:p>
           <a:p>
@@ -12399,7 +12399,7 @@
                 </a:solidFill>
                 <a:latin typeface="Consolas"/>
               </a:rPr>
-              <a:t>      quorum_decision:</a:t>
+              <a:t>    - id: MI3</a:t>
             </a:r>
           </a:p>
           <a:p>
@@ -12415,7 +12415,7 @@
                 </a:solidFill>
                 <a:latin typeface="Consolas"/>
               </a:rPr>
-              <a:t>        votes: [admit×5]</a:t>
+              <a:t>      name: Critical Result Notification</a:t>
             </a:r>
           </a:p>
           <a:p>
@@ -12431,7 +12431,7 @@
                 </a:solidFill>
                 <a:latin typeface="Consolas"/>
               </a:rPr>
-              <a:t>        decision: admit</a:t>
+              <a:t>      evidence: 15 chunks</a:t>
             </a:r>
           </a:p>
           <a:p>
@@ -12447,7 +12447,7 @@
                 </a:solidFill>
                 <a:latin typeface="Consolas"/>
               </a:rPr>
-              <a:t>    - id: MI2</a:t>
+              <a:t>      votes: [fold→G4×3, admit×2]    decision: fold→G4</a:t>
             </a:r>
           </a:p>
           <a:p>
@@ -12463,7 +12463,7 @@
                 </a:solidFill>
                 <a:latin typeface="Consolas"/>
               </a:rPr>
-              <a:t>      name: Biosafety Containment</a:t>
+              <a:t/>
             </a:r>
           </a:p>
           <a:p>
@@ -12479,7 +12479,7 @@
                 </a:solidFill>
                 <a:latin typeface="Consolas"/>
               </a:rPr>
-              <a:t>      evidence: 28 chunks</a:t>
+              <a:t>  unclassified_bucket:        # left for next round</a:t>
             </a:r>
           </a:p>
           <a:p>
@@ -12495,103 +12495,7 @@
                 </a:solidFill>
                 <a:latin typeface="Consolas"/>
               </a:rPr>
-              <a:t>      quorum_decision:</a:t>
-            </a:r>
-          </a:p>
-          <a:p>
-            <a:pPr algn="l">
-              <a:spcAft>
-                <a:spcPts val="0"/>
-              </a:spcAft>
-            </a:pPr>
-            <a:r>
-              <a:rPr sz="850">
-                <a:solidFill>
-                  <a:srgbClr val="1F2D3D"/>
-                </a:solidFill>
-                <a:latin typeface="Consolas"/>
-              </a:rPr>
-              <a:t>        votes: [admit×4, fold→Compliance]</a:t>
-            </a:r>
-          </a:p>
-          <a:p>
-            <a:pPr algn="l">
-              <a:spcAft>
-                <a:spcPts val="0"/>
-              </a:spcAft>
-            </a:pPr>
-            <a:r>
-              <a:rPr sz="850">
-                <a:solidFill>
-                  <a:srgbClr val="1F2D3D"/>
-                </a:solidFill>
-                <a:latin typeface="Consolas"/>
-              </a:rPr>
-              <a:t>        decision: admit</a:t>
-            </a:r>
-          </a:p>
-          <a:p>
-            <a:pPr algn="l">
-              <a:spcAft>
-                <a:spcPts val="0"/>
-              </a:spcAft>
-            </a:pPr>
-            <a:r>
-              <a:rPr sz="850">
-                <a:solidFill>
-                  <a:srgbClr val="1F2D3D"/>
-                </a:solidFill>
-                <a:latin typeface="Consolas"/>
-              </a:rPr>
-              <a:t/>
-            </a:r>
-          </a:p>
-          <a:p>
-            <a:pPr algn="l">
-              <a:spcAft>
-                <a:spcPts val="0"/>
-              </a:spcAft>
-            </a:pPr>
-            <a:r>
-              <a:rPr sz="850">
-                <a:solidFill>
-                  <a:srgbClr val="1F2D3D"/>
-                </a:solidFill>
-                <a:latin typeface="Consolas"/>
-              </a:rPr>
-              <a:t>  unclassified_bucket:        # left for next round</a:t>
-            </a:r>
-          </a:p>
-          <a:p>
-            <a:pPr algn="l">
-              <a:spcAft>
-                <a:spcPts val="0"/>
-              </a:spcAft>
-            </a:pPr>
-            <a:r>
-              <a:rPr sz="850">
-                <a:solidFill>
-                  <a:srgbClr val="1F2D3D"/>
-                </a:solidFill>
-                <a:latin typeface="Consolas"/>
-              </a:rPr>
-              <a:t>    count: 38</a:t>
-            </a:r>
-          </a:p>
-          <a:p>
-            <a:pPr algn="l">
-              <a:spcAft>
-                <a:spcPts val="0"/>
-              </a:spcAft>
-            </a:pPr>
-            <a:r>
-              <a:rPr sz="850">
-                <a:solidFill>
-                  <a:srgbClr val="1F2D3D"/>
-                </a:solidFill>
-                <a:latin typeface="Consolas"/>
-              </a:rPr>
-              <a:t>    pct: 6.3%</a:t>
+              <a:t>    count: 38                 # = 6.3% of 600 (above 5% alarm)</a:t>
             </a:r>
           </a:p>
         </p:txBody>
@@ -13086,11 +12990,11 @@
             <a:avLst/>
           </a:prstGeom>
           <a:solidFill>
-            <a:srgbClr val="F8E3E3"/>
+            <a:srgbClr val="E8E2D4"/>
           </a:solidFill>
           <a:ln w="12700">
             <a:solidFill>
-              <a:srgbClr val="A84A4A"/>
+              <a:srgbClr val="908878"/>
             </a:solidFill>
           </a:ln>
         </p:spPr>
@@ -13187,7 +13091,7 @@
             <a:r>
               <a:rPr sz="800" b="0" i="1">
                 <a:solidFill>
-                  <a:srgbClr val="A84A4A"/>
+                  <a:srgbClr val="706858"/>
                 </a:solidFill>
                 <a:latin typeface="Calibri"/>
               </a:rPr>
@@ -13700,7 +13604,7 @@
                 </a:solidFill>
                 <a:latin typeface="Calibri"/>
               </a:rPr>
-              <a:t>Tag chunks: theme, test, role, stage</a:t>
+              <a:t>Tag chunks: theme, test, persona, stage</a:t>
             </a:r>
           </a:p>
         </p:txBody>
@@ -14665,7 +14569,7 @@
                 </a:solidFill>
                 <a:latin typeface="Consolas"/>
               </a:rPr>
-              <a:t>  tests: [gram_stain, blood_culture]</a:t>
+              <a:t>  tests: [gram_stain, blood_culture_incubation]</a:t>
             </a:r>
           </a:p>
           <a:p>
@@ -15569,7 +15473,7 @@
                 </a:solidFill>
                 <a:latin typeface="Calibri"/>
               </a:rPr>
-              <a:t>Cluster on (test, role, stage,
+              <a:t>Cluster on (test, persona, stage,
 shape, behavior)</a:t>
             </a:r>
           </a:p>
@@ -15625,7 +15529,7 @@
                 <a:latin typeface="Calibri"/>
               </a:rPr>
               <a:t>Pattern in
-≥ 2 docs?</a:t>
+≥ 2 SOPs?</a:t>
             </a:r>
           </a:p>
         </p:txBody>
@@ -16493,7 +16397,7 @@
                 </a:solidFill>
                 <a:latin typeface="Consolas"/>
               </a:rPr>
-              <a:t>    - persona_owner: supervisor</a:t>
+              <a:t>    - persona_owner: microbiologist_supervisor</a:t>
             </a:r>
           </a:p>
           <a:p>
@@ -17275,7 +17179,7 @@
                 </a:solidFill>
                 <a:latin typeface="Calibri"/>
               </a:rPr>
-              <a:t>Different shapes have different quality rules (slide 6). These examples show what makes each shape that shape.</a:t>
+              <a:t>Different shapes have different quality rules (slide 6). These examples show what makes each shape that shape.   (AC = Acceptance Criterion.)</a:t>
             </a:r>
           </a:p>
         </p:txBody>
@@ -17502,7 +17406,7 @@
                 </a:solidFill>
                 <a:latin typeface="Consolas"/>
               </a:rPr>
-              <a:t>tests:   [gram_stain, blood_culture]</a:t>
+              <a:t>tests:   [gram_stain, blood_culture_incubation]</a:t>
             </a:r>
           </a:p>
           <a:p>
@@ -17745,7 +17649,7 @@
                 </a:solidFill>
                 <a:latin typeface="Consolas"/>
               </a:rPr>
-              <a:t>title:  "PHI update — after results</a:t>
+              <a:t>title:  "PHI (patient-health-info) update —</a:t>
             </a:r>
           </a:p>
           <a:p>
@@ -17761,7 +17665,7 @@
                 </a:solidFill>
                 <a:latin typeface="Consolas"/>
               </a:rPr>
-              <a:t>        are reported"</a:t>
+              <a:t>         after results are reported"</a:t>
             </a:r>
           </a:p>
           <a:p>
@@ -17793,7 +17697,7 @@
                 </a:solidFill>
                 <a:latin typeface="Consolas"/>
               </a:rPr>
-              <a:t>persona: supervisor</a:t>
+              <a:t>persona:  microbiologist_supervisor</a:t>
             </a:r>
           </a:p>
           <a:p>
@@ -17889,7 +17793,23 @@
                 </a:solidFill>
                 <a:latin typeface="Consolas"/>
               </a:rPr>
-              <a:t>AC2:  When EHR has report, system MUST</a:t>
+              <a:t>AC2:  When the EHR (electronic health</a:t>
+            </a:r>
+          </a:p>
+          <a:p>
+            <a:pPr algn="l">
+              <a:spcAft>
+                <a:spcPts val="0"/>
+              </a:spcAft>
+            </a:pPr>
+            <a:r>
+              <a:rPr sz="850">
+                <a:solidFill>
+                  <a:srgbClr val="1F2D3D"/>
+                </a:solidFill>
+                <a:latin typeface="Consolas"/>
+              </a:rPr>
+              <a:t>      record) has the report, system MUST</a:t>
             </a:r>
           </a:p>
           <a:p>
@@ -18631,7 +18551,7 @@
                 </a:solidFill>
                 <a:latin typeface="Consolas"/>
               </a:rPr>
-              <a:t>edge_cases_handled:</a:t>
+              <a:t>edge_cases:  existing case w/ status,</a:t>
             </a:r>
           </a:p>
           <a:p>
@@ -18647,23 +18567,7 @@
                 </a:solidFill>
                 <a:latin typeface="Consolas"/>
               </a:rPr>
-              <a:t>  - existing case with the status</a:t>
-            </a:r>
-          </a:p>
-          <a:p>
-            <a:pPr algn="l">
-              <a:spcAft>
-                <a:spcPts val="0"/>
-              </a:spcAft>
-            </a:pPr>
-            <a:r>
-              <a:rPr sz="850">
-                <a:solidFill>
-                  <a:srgbClr val="1F2D3D"/>
-                </a:solidFill>
-                <a:latin typeface="Consolas"/>
-              </a:rPr>
-              <a:t>  - in-flight orders with the status</a:t>
+              <a:t>             in-flight orders w/ status</a:t>
             </a:r>
           </a:p>
         </p:txBody>
@@ -19369,8 +19273,8 @@
         </p:nvSpPr>
         <p:spPr>
           <a:xfrm>
-            <a:off x="2057400" y="4297679"/>
-            <a:ext cx="2377440" cy="502920"/>
+            <a:off x="2286000" y="4297679"/>
+            <a:ext cx="1737360" cy="502920"/>
           </a:xfrm>
           <a:prstGeom prst="diamond">
             <a:avLst/>
@@ -19423,8 +19327,8 @@
         </p:nvSpPr>
         <p:spPr>
           <a:xfrm>
-            <a:off x="4206240" y="4343399"/>
-            <a:ext cx="1691640" cy="338328"/>
+            <a:off x="4297680" y="4343399"/>
+            <a:ext cx="1691639" cy="338328"/>
           </a:xfrm>
           <a:prstGeom prst="roundRect">
             <a:avLst/>
@@ -19464,7 +19368,7 @@
                 </a:solidFill>
                 <a:latin typeface="Calibri"/>
               </a:rPr>
-              <a:t>no:  revise (≤2)
+              <a:t>revise (≤2)
 then auto-park</a:t>
             </a:r>
           </a:p>
@@ -19477,9 +19381,9 @@
           <p:nvPr/>
         </p:nvCxnSpPr>
         <p:spPr>
-          <a:xfrm flipH="1" flipV="1">
-            <a:off x="4206240" y="4512563"/>
-            <a:ext cx="228600" cy="36577"/>
+          <a:xfrm flipV="1">
+            <a:off x="4023360" y="4512563"/>
+            <a:ext cx="274320" cy="36577"/>
           </a:xfrm>
           <a:prstGeom prst="line">
             <a:avLst/>
@@ -19514,7 +19418,7 @@
         </p:nvSpPr>
         <p:spPr>
           <a:xfrm>
-            <a:off x="4366259" y="4366259"/>
+            <a:off x="4160520" y="4329683"/>
             <a:ext cx="822960" cy="274320"/>
           </a:xfrm>
           <a:prstGeom prst="rect">
@@ -19785,7 +19689,7 @@
                 </a:solidFill>
                 <a:latin typeface="Calibri"/>
               </a:rPr>
-              <a:t>Each story has dependencies[] and cross_links[] — the resolver builds a DAG and sorts it.</a:t>
+              <a:t>Each story has dependencies[] and cross_links[] — the resolver builds a dependency graph (DAG) and sorts it.</a:t>
             </a:r>
           </a:p>
         </p:txBody>

--- a/client_alignment_deck.pptx
+++ b/client_alignment_deck.pptx
@@ -8291,8 +8291,8 @@
         </p:nvSpPr>
         <p:spPr>
           <a:xfrm>
-            <a:off x="457200" y="5852160"/>
-            <a:ext cx="11430000" cy="274320"/>
+            <a:off x="457200" y="5760720"/>
+            <a:ext cx="11430000" cy="411480"/>
           </a:xfrm>
           <a:prstGeom prst="rect">
             <a:avLst/>
@@ -8313,7 +8313,7 @@
                 </a:solidFill>
                 <a:latin typeface="Calibri"/>
               </a:rPr>
-              <a:t>Sourcing:  theme + epic catalogs are snapshotted from Cytology's existing Connect build (the seminal prior).</a:t>
+              <a:t>Sourcing:  theme + epic catalogs are typically snapshotted from a validated prior discipline (Cytology, in our case).  If no prior is available, a one-time cold-start SOP analysis discovers themes and epics from scratch — that's how Cytology's catalog was built originally.</a:t>
             </a:r>
           </a:p>
         </p:txBody>
@@ -8326,7 +8326,7 @@
         </p:nvSpPr>
         <p:spPr>
           <a:xfrm>
-            <a:off x="457200" y="6144768"/>
+            <a:off x="457200" y="6199632"/>
             <a:ext cx="11430000" cy="274320"/>
           </a:xfrm>
           <a:prstGeom prst="rect">
@@ -8342,7 +8342,7 @@
           <a:p>
             <a:pPr algn="l"/>
             <a:r>
-              <a:rPr sz="1000" b="0" i="1">
+              <a:rPr sz="900" b="0" i="1">
                 <a:solidFill>
                   <a:srgbClr val="55606E"/>
                 </a:solidFill>
@@ -8592,7 +8592,7 @@
                 </a:solidFill>
                 <a:latin typeface="Calibri"/>
               </a:rPr>
-              <a:t>Six agents do the work. Plus a 5-reviewer panel that votes when admitting new categories.</a:t>
+              <a:t>Six agents do the work. Plus a quorum — 5 conditional checks evaluated when admitting new categories.</a:t>
             </a:r>
           </a:p>
         </p:txBody>
@@ -9316,7 +9316,7 @@
                 </a:solidFill>
                 <a:latin typeface="Calibri"/>
               </a:rPr>
-              <a:t>Quorum panel — 5 reviewer agents running IN PARALLEL  (used inside Theme Discovery and Epic Extractor)</a:t>
+              <a:t>Quorum  —  conditional logic with 5 parallel checks  (used inside Theme Discovery and Epic Extractor)</a:t>
             </a:r>
           </a:p>
         </p:txBody>
@@ -9370,8 +9370,8 @@
                 </a:solidFill>
                 <a:latin typeface="Calibri"/>
               </a:rPr>
-              <a:t>1. Is it coherent
-as a new theme?</a:t>
+              <a:t>1. Coherence
+as a new theme</a:t>
             </a:r>
           </a:p>
         </p:txBody>
@@ -9425,8 +9425,8 @@
                 </a:solidFill>
                 <a:latin typeface="Calibri"/>
               </a:rPr>
-              <a:t>2. Is it distinct
-from existing?</a:t>
+              <a:t>2. Distinctness
+from existing</a:t>
             </a:r>
           </a:p>
         </p:txBody>
@@ -9480,8 +9480,8 @@
                 </a:solidFill>
                 <a:latin typeface="Calibri"/>
               </a:rPr>
-              <a:t>3. Is the description
-sharp enough?</a:t>
+              <a:t>3. Description
+sharpness</a:t>
             </a:r>
           </a:p>
         </p:txBody>
@@ -9535,8 +9535,8 @@
                 </a:solidFill>
                 <a:latin typeface="Calibri"/>
               </a:rPr>
-              <a:t>4. Are the cluster
-members consistent?</a:t>
+              <a:t>4. Cluster member
+consistency</a:t>
             </a:r>
           </a:p>
         </p:txBody>
@@ -9590,8 +9590,8 @@
                 </a:solidFill>
                 <a:latin typeface="Calibri"/>
               </a:rPr>
-              <a:t>5. Would admitting
-fragment the catalog?</a:t>
+              <a:t>5. No catalog
+fragmentation</a:t>
             </a:r>
           </a:p>
         </p:txBody>
@@ -9626,7 +9626,7 @@
                 </a:solidFill>
                 <a:latin typeface="Calibri"/>
               </a:rPr>
-              <a:t>All 5 vote in parallel. Need 3 of 5 agreeing on the same action; their descriptions must be similar enough.  Otherwise the candidate goes to the review pile for the next round.</a:t>
+              <a:t>5 conditions evaluated in parallel. Need 3 of 5 to clear plus consensus on the proposed entry.  Otherwise the candidate goes to the review pile for the next round.</a:t>
             </a:r>
           </a:p>
         </p:txBody>
@@ -10735,7 +10735,7 @@
         <p:spPr>
           <a:xfrm>
             <a:off x="457200" y="1417320"/>
-            <a:ext cx="2743200" cy="411480"/>
+            <a:ext cx="2743200" cy="384048"/>
           </a:xfrm>
           <a:prstGeom prst="roundRect">
             <a:avLst/>
@@ -10789,8 +10789,8 @@
         </p:nvSpPr>
         <p:spPr>
           <a:xfrm>
-            <a:off x="457200" y="1965960"/>
-            <a:ext cx="2743200" cy="411480"/>
+            <a:off x="457200" y="1892807"/>
+            <a:ext cx="2743200" cy="384048"/>
           </a:xfrm>
           <a:prstGeom prst="roundRect">
             <a:avLst/>
@@ -10830,7 +10830,8 @@
                 </a:solidFill>
                 <a:latin typeface="Calibri"/>
               </a:rPr>
-              <a:t>Tag chunks: theme, test, persona, stage</a:t>
+              <a:t>Section each SOP
+into logical chunks</a:t>
             </a:r>
           </a:p>
         </p:txBody>
@@ -10843,8 +10844,8 @@
         </p:nvSpPr>
         <p:spPr>
           <a:xfrm>
-            <a:off x="457200" y="2514600"/>
-            <a:ext cx="2743200" cy="411480"/>
+            <a:off x="457200" y="2368296"/>
+            <a:ext cx="2743200" cy="384048"/>
           </a:xfrm>
           <a:prstGeom prst="roundRect">
             <a:avLst/>
@@ -10884,21 +10885,77 @@
                 </a:solidFill>
                 <a:latin typeface="Calibri"/>
               </a:rPr>
-              <a:t>Compare each chunk to prior discipline's themes</a:t>
-            </a:r>
-          </a:p>
-        </p:txBody>
-      </p:sp>
-      <p:sp>
-        <p:nvSpPr>
-          <p:cNvPr id="8" name="Diamond 7"/>
+              <a:t>Tag chunks:
+theme, test, persona, stage</a:t>
+            </a:r>
+          </a:p>
+        </p:txBody>
+      </p:sp>
+      <p:sp>
+        <p:nvSpPr>
+          <p:cNvPr id="8" name="Rounded Rectangle 7"/>
           <p:cNvSpPr/>
           <p:nvPr/>
         </p:nvSpPr>
         <p:spPr>
           <a:xfrm>
-            <a:off x="822960" y="3063240"/>
-            <a:ext cx="2011680" cy="548640"/>
+            <a:off x="457200" y="2843784"/>
+            <a:ext cx="2743200" cy="384048"/>
+          </a:xfrm>
+          <a:prstGeom prst="roundRect">
+            <a:avLst/>
+          </a:prstGeom>
+          <a:solidFill>
+            <a:srgbClr val="E7EFF8"/>
+          </a:solidFill>
+          <a:ln w="12700">
+            <a:solidFill>
+              <a:srgbClr val="4A6EA0"/>
+            </a:solidFill>
+          </a:ln>
+        </p:spPr>
+        <p:style>
+          <a:lnRef idx="1">
+            <a:schemeClr val="accent1"/>
+          </a:lnRef>
+          <a:fillRef idx="3">
+            <a:schemeClr val="accent1"/>
+          </a:fillRef>
+          <a:effectRef idx="2">
+            <a:schemeClr val="accent1"/>
+          </a:effectRef>
+          <a:fontRef idx="minor">
+            <a:schemeClr val="lt1"/>
+          </a:fontRef>
+        </p:style>
+        <p:txBody>
+          <a:bodyPr rtlCol="0" anchor="ctr" wrap="square" lIns="73152" rIns="73152" tIns="36576" bIns="36576"/>
+          <a:lstStyle/>
+          <a:p>
+            <a:pPr algn="ctr"/>
+            <a:r>
+              <a:rPr sz="900" b="0" i="0">
+                <a:solidFill>
+                  <a:srgbClr val="1F2D3D"/>
+                </a:solidFill>
+                <a:latin typeface="Calibri"/>
+              </a:rPr>
+              <a:t>Compare each chunk to
+prior discipline's themes</a:t>
+            </a:r>
+          </a:p>
+        </p:txBody>
+      </p:sp>
+      <p:sp>
+        <p:nvSpPr>
+          <p:cNvPr id="9" name="Diamond 8"/>
+          <p:cNvSpPr/>
+          <p:nvPr/>
+        </p:nvSpPr>
+        <p:spPr>
+          <a:xfrm>
+            <a:off x="822960" y="3319272"/>
+            <a:ext cx="2011680" cy="502920"/>
           </a:xfrm>
           <a:prstGeom prst="diamond">
             <a:avLst/>
@@ -10946,14 +11003,14 @@
       </p:sp>
       <p:sp>
         <p:nvSpPr>
-          <p:cNvPr id="9" name="Rounded Rectangle 8"/>
+          <p:cNvPr id="10" name="Rounded Rectangle 9"/>
           <p:cNvSpPr/>
           <p:nvPr/>
         </p:nvSpPr>
         <p:spPr>
           <a:xfrm>
-            <a:off x="3566160" y="3131820"/>
-            <a:ext cx="2286000" cy="411480"/>
+            <a:off x="3566160" y="3378708"/>
+            <a:ext cx="2286000" cy="384048"/>
           </a:xfrm>
           <a:prstGeom prst="roundRect">
             <a:avLst/>
@@ -11001,14 +11058,14 @@
       </p:sp>
       <p:sp>
         <p:nvSpPr>
-          <p:cNvPr id="10" name="Rounded Rectangle 9"/>
+          <p:cNvPr id="11" name="Rounded Rectangle 10"/>
           <p:cNvSpPr/>
           <p:nvPr/>
         </p:nvSpPr>
         <p:spPr>
           <a:xfrm>
-            <a:off x="457200" y="3886200"/>
-            <a:ext cx="2743200" cy="411480"/>
+            <a:off x="457200" y="4023359"/>
+            <a:ext cx="2743200" cy="384048"/>
           </a:xfrm>
           <a:prstGeom prst="roundRect">
             <a:avLst/>
@@ -11055,14 +11112,14 @@
       </p:sp>
       <p:sp>
         <p:nvSpPr>
-          <p:cNvPr id="11" name="Rounded Rectangle 10"/>
+          <p:cNvPr id="12" name="Rounded Rectangle 11"/>
           <p:cNvSpPr/>
           <p:nvPr/>
         </p:nvSpPr>
         <p:spPr>
           <a:xfrm>
-            <a:off x="457200" y="4434840"/>
-            <a:ext cx="519379" cy="457200"/>
+            <a:off x="457200" y="4498847"/>
+            <a:ext cx="519379" cy="384048"/>
           </a:xfrm>
           <a:prstGeom prst="roundRect">
             <a:avLst/>
@@ -11109,14 +11166,14 @@
       </p:sp>
       <p:sp>
         <p:nvSpPr>
-          <p:cNvPr id="12" name="Rounded Rectangle 11"/>
+          <p:cNvPr id="13" name="Rounded Rectangle 12"/>
           <p:cNvSpPr/>
           <p:nvPr/>
         </p:nvSpPr>
         <p:spPr>
           <a:xfrm>
-            <a:off x="1013155" y="4434840"/>
-            <a:ext cx="519379" cy="457200"/>
+            <a:off x="1013155" y="4498847"/>
+            <a:ext cx="519379" cy="384048"/>
           </a:xfrm>
           <a:prstGeom prst="roundRect">
             <a:avLst/>
@@ -11163,14 +11220,14 @@
       </p:sp>
       <p:sp>
         <p:nvSpPr>
-          <p:cNvPr id="13" name="Rounded Rectangle 12"/>
+          <p:cNvPr id="14" name="Rounded Rectangle 13"/>
           <p:cNvSpPr/>
           <p:nvPr/>
         </p:nvSpPr>
         <p:spPr>
           <a:xfrm>
-            <a:off x="1569110" y="4434840"/>
-            <a:ext cx="519379" cy="457200"/>
+            <a:off x="1569110" y="4498847"/>
+            <a:ext cx="519379" cy="384048"/>
           </a:xfrm>
           <a:prstGeom prst="roundRect">
             <a:avLst/>
@@ -11217,14 +11274,14 @@
       </p:sp>
       <p:sp>
         <p:nvSpPr>
-          <p:cNvPr id="14" name="Rounded Rectangle 13"/>
+          <p:cNvPr id="15" name="Rounded Rectangle 14"/>
           <p:cNvSpPr/>
           <p:nvPr/>
         </p:nvSpPr>
         <p:spPr>
           <a:xfrm>
-            <a:off x="2125065" y="4434840"/>
-            <a:ext cx="519379" cy="457200"/>
+            <a:off x="2125065" y="4498847"/>
+            <a:ext cx="519379" cy="384048"/>
           </a:xfrm>
           <a:prstGeom prst="roundRect">
             <a:avLst/>
@@ -11271,14 +11328,14 @@
       </p:sp>
       <p:sp>
         <p:nvSpPr>
-          <p:cNvPr id="15" name="Rounded Rectangle 14"/>
+          <p:cNvPr id="16" name="Rounded Rectangle 15"/>
           <p:cNvSpPr/>
           <p:nvPr/>
         </p:nvSpPr>
         <p:spPr>
           <a:xfrm>
-            <a:off x="2681020" y="4434840"/>
-            <a:ext cx="519379" cy="457200"/>
+            <a:off x="2681020" y="4498847"/>
+            <a:ext cx="519379" cy="384048"/>
           </a:xfrm>
           <a:prstGeom prst="roundRect">
             <a:avLst/>
@@ -11325,14 +11382,14 @@
       </p:sp>
       <p:sp>
         <p:nvSpPr>
-          <p:cNvPr id="16" name="TextBox 15"/>
+          <p:cNvPr id="17" name="TextBox 16"/>
           <p:cNvSpPr txBox="1"/>
           <p:nvPr/>
         </p:nvSpPr>
         <p:spPr>
           <a:xfrm>
-            <a:off x="457200" y="4910328"/>
-            <a:ext cx="2743200" cy="182880"/>
+            <a:off x="457200" y="4892039"/>
+            <a:ext cx="2743200" cy="164592"/>
           </a:xfrm>
           <a:prstGeom prst="rect">
             <a:avLst/>
@@ -11353,21 +11410,21 @@
                 </a:solidFill>
                 <a:latin typeface="Calibri"/>
               </a:rPr>
-              <a:t>5 reviewers vote in parallel</a:t>
-            </a:r>
-          </a:p>
-        </p:txBody>
-      </p:sp>
-      <p:sp>
-        <p:nvSpPr>
-          <p:cNvPr id="17" name="Diamond 16"/>
+              <a:t>5 conditional checks evaluated in parallel</a:t>
+            </a:r>
+          </a:p>
+        </p:txBody>
+      </p:sp>
+      <p:sp>
+        <p:nvSpPr>
+          <p:cNvPr id="18" name="Diamond 17"/>
           <p:cNvSpPr/>
           <p:nvPr/>
         </p:nvSpPr>
         <p:spPr>
           <a:xfrm>
-            <a:off x="822960" y="5166360"/>
-            <a:ext cx="2011680" cy="548640"/>
+            <a:off x="822960" y="5111495"/>
+            <a:ext cx="2011680" cy="502920"/>
           </a:xfrm>
           <a:prstGeom prst="diamond">
             <a:avLst/>
@@ -11407,21 +11464,22 @@
                 </a:solidFill>
                 <a:latin typeface="Calibri"/>
               </a:rPr>
-              <a:t>3 of 5 agree?</a:t>
-            </a:r>
-          </a:p>
-        </p:txBody>
-      </p:sp>
-      <p:sp>
-        <p:nvSpPr>
-          <p:cNvPr id="18" name="Rounded Rectangle 17"/>
+              <a:t>3 of 5 conditions
+cleared?</a:t>
+            </a:r>
+          </a:p>
+        </p:txBody>
+      </p:sp>
+      <p:sp>
+        <p:nvSpPr>
+          <p:cNvPr id="19" name="Rounded Rectangle 18"/>
           <p:cNvSpPr/>
           <p:nvPr/>
         </p:nvSpPr>
         <p:spPr>
           <a:xfrm>
-            <a:off x="3566160" y="5234940"/>
-            <a:ext cx="2286000" cy="411480"/>
+            <a:off x="3566160" y="5170931"/>
+            <a:ext cx="2286000" cy="384048"/>
           </a:xfrm>
           <a:prstGeom prst="roundRect">
             <a:avLst/>
@@ -11469,14 +11527,14 @@
       </p:sp>
       <p:sp>
         <p:nvSpPr>
-          <p:cNvPr id="19" name="Rounded Rectangle 18"/>
+          <p:cNvPr id="20" name="Rounded Rectangle 19"/>
           <p:cNvSpPr/>
           <p:nvPr/>
         </p:nvSpPr>
         <p:spPr>
           <a:xfrm>
-            <a:off x="457200" y="5989320"/>
-            <a:ext cx="2743200" cy="411480"/>
+            <a:off x="457200" y="5815583"/>
+            <a:ext cx="2743200" cy="384048"/>
           </a:xfrm>
           <a:prstGeom prst="roundRect">
             <a:avLst/>
@@ -11523,50 +11581,14 @@
       </p:sp>
       <p:cxnSp>
         <p:nvCxnSpPr>
-          <p:cNvPr id="20" name="Connector 19"/>
-          <p:cNvCxnSpPr/>
-          <p:nvPr/>
-        </p:nvCxnSpPr>
-        <p:spPr>
-          <a:xfrm>
-            <a:off x="1828800" y="1828800"/>
-            <a:ext cx="0" cy="137160"/>
-          </a:xfrm>
-          <a:prstGeom prst="line">
-            <a:avLst/>
-          </a:prstGeom>
-          <a:ln w="25400">
-            <a:solidFill>
-              <a:srgbClr val="4A6EA0"/>
-            </a:solidFill>
-            <a:tailEnd type="triangle" w="med" h="med"/>
-          </a:ln>
-        </p:spPr>
-        <p:style>
-          <a:lnRef idx="2">
-            <a:schemeClr val="accent1"/>
-          </a:lnRef>
-          <a:fillRef idx="0">
-            <a:schemeClr val="accent1"/>
-          </a:fillRef>
-          <a:effectRef idx="1">
-            <a:schemeClr val="accent1"/>
-          </a:effectRef>
-          <a:fontRef idx="minor">
-            <a:schemeClr val="tx1"/>
-          </a:fontRef>
-        </p:style>
-      </p:cxnSp>
-      <p:cxnSp>
-        <p:nvCxnSpPr>
           <p:cNvPr id="21" name="Connector 20"/>
           <p:cNvCxnSpPr/>
           <p:nvPr/>
         </p:nvCxnSpPr>
         <p:spPr>
           <a:xfrm>
-            <a:off x="1828800" y="2377440"/>
-            <a:ext cx="0" cy="137160"/>
+            <a:off x="1828800" y="1801368"/>
+            <a:ext cx="0" cy="91439"/>
           </a:xfrm>
           <a:prstGeom prst="line">
             <a:avLst/>
@@ -11601,8 +11623,8 @@
         </p:nvCxnSpPr>
         <p:spPr>
           <a:xfrm>
-            <a:off x="1828800" y="2926080"/>
-            <a:ext cx="0" cy="137160"/>
+            <a:off x="1828800" y="2276856"/>
+            <a:ext cx="0" cy="91440"/>
           </a:xfrm>
           <a:prstGeom prst="line">
             <a:avLst/>
@@ -11637,152 +11659,8 @@
         </p:nvCxnSpPr>
         <p:spPr>
           <a:xfrm>
-            <a:off x="2834640" y="3337560"/>
-            <a:ext cx="731520" cy="0"/>
-          </a:xfrm>
-          <a:prstGeom prst="line">
-            <a:avLst/>
-          </a:prstGeom>
-          <a:ln w="25400">
-            <a:solidFill>
-              <a:srgbClr val="4A6EA0"/>
-            </a:solidFill>
-            <a:tailEnd type="triangle" w="med" h="med"/>
-          </a:ln>
-        </p:spPr>
-        <p:style>
-          <a:lnRef idx="2">
-            <a:schemeClr val="accent1"/>
-          </a:lnRef>
-          <a:fillRef idx="0">
-            <a:schemeClr val="accent1"/>
-          </a:fillRef>
-          <a:effectRef idx="1">
-            <a:schemeClr val="accent1"/>
-          </a:effectRef>
-          <a:fontRef idx="minor">
-            <a:schemeClr val="tx1"/>
-          </a:fontRef>
-        </p:style>
-      </p:cxnSp>
-      <p:sp>
-        <p:nvSpPr>
-          <p:cNvPr id="24" name="TextBox 23"/>
-          <p:cNvSpPr txBox="1"/>
-          <p:nvPr/>
-        </p:nvSpPr>
-        <p:spPr>
-          <a:xfrm>
-            <a:off x="3246120" y="3044952"/>
-            <a:ext cx="822960" cy="274320"/>
-          </a:xfrm>
-          <a:prstGeom prst="rect">
-            <a:avLst/>
-          </a:prstGeom>
-          <a:noFill/>
-        </p:spPr>
-        <p:txBody>
-          <a:bodyPr wrap="none" lIns="36576" rIns="36576" tIns="0" bIns="0">
-            <a:spAutoFit/>
-          </a:bodyPr>
-          <a:lstStyle/>
-          <a:p>
-            <a:pPr algn="ctr"/>
-            <a:r>
-              <a:rPr sz="1000" b="1">
-                <a:solidFill>
-                  <a:srgbClr val="5C8347"/>
-                </a:solidFill>
-                <a:latin typeface="Calibri"/>
-              </a:rPr>
-              <a:t>yes
-(inherit)</a:t>
-            </a:r>
-          </a:p>
-        </p:txBody>
-      </p:sp>
-      <p:cxnSp>
-        <p:nvCxnSpPr>
-          <p:cNvPr id="25" name="Connector 24"/>
-          <p:cNvCxnSpPr/>
-          <p:nvPr/>
-        </p:nvCxnSpPr>
-        <p:spPr>
-          <a:xfrm>
-            <a:off x="1828800" y="3611880"/>
-            <a:ext cx="0" cy="274320"/>
-          </a:xfrm>
-          <a:prstGeom prst="line">
-            <a:avLst/>
-          </a:prstGeom>
-          <a:ln w="25400">
-            <a:solidFill>
-              <a:srgbClr val="4A6EA0"/>
-            </a:solidFill>
-            <a:tailEnd type="triangle" w="med" h="med"/>
-          </a:ln>
-        </p:spPr>
-        <p:style>
-          <a:lnRef idx="2">
-            <a:schemeClr val="accent1"/>
-          </a:lnRef>
-          <a:fillRef idx="0">
-            <a:schemeClr val="accent1"/>
-          </a:fillRef>
-          <a:effectRef idx="1">
-            <a:schemeClr val="accent1"/>
-          </a:effectRef>
-          <a:fontRef idx="minor">
-            <a:schemeClr val="tx1"/>
-          </a:fontRef>
-        </p:style>
-      </p:cxnSp>
-      <p:sp>
-        <p:nvSpPr>
-          <p:cNvPr id="26" name="TextBox 25"/>
-          <p:cNvSpPr txBox="1"/>
-          <p:nvPr/>
-        </p:nvSpPr>
-        <p:spPr>
-          <a:xfrm>
-            <a:off x="1901952" y="3584447"/>
-            <a:ext cx="822960" cy="274320"/>
-          </a:xfrm>
-          <a:prstGeom prst="rect">
-            <a:avLst/>
-          </a:prstGeom>
-          <a:noFill/>
-        </p:spPr>
-        <p:txBody>
-          <a:bodyPr wrap="none" lIns="36576" rIns="36576" tIns="0" bIns="0">
-            <a:spAutoFit/>
-          </a:bodyPr>
-          <a:lstStyle/>
-          <a:p>
-            <a:pPr algn="ctr"/>
-            <a:r>
-              <a:rPr sz="1000" b="1">
-                <a:solidFill>
-                  <a:srgbClr val="A84A4A"/>
-                </a:solidFill>
-                <a:latin typeface="Calibri"/>
-              </a:rPr>
-              <a:t>no
-(residual)</a:t>
-            </a:r>
-          </a:p>
-        </p:txBody>
-      </p:sp>
-      <p:cxnSp>
-        <p:nvCxnSpPr>
-          <p:cNvPr id="27" name="Connector 26"/>
-          <p:cNvCxnSpPr/>
-          <p:nvPr/>
-        </p:nvCxnSpPr>
-        <p:spPr>
-          <a:xfrm>
-            <a:off x="1828800" y="4297680"/>
-            <a:ext cx="0" cy="137160"/>
+            <a:off x="1828800" y="2752344"/>
+            <a:ext cx="0" cy="91440"/>
           </a:xfrm>
           <a:prstGeom prst="line">
             <a:avLst/>
@@ -11811,14 +11689,14 @@
       </p:cxnSp>
       <p:cxnSp>
         <p:nvCxnSpPr>
-          <p:cNvPr id="28" name="Connector 27"/>
+          <p:cNvPr id="24" name="Connector 23"/>
           <p:cNvCxnSpPr/>
           <p:nvPr/>
         </p:nvCxnSpPr>
         <p:spPr>
           <a:xfrm>
-            <a:off x="1828800" y="5093208"/>
-            <a:ext cx="0" cy="73152"/>
+            <a:off x="1828800" y="3227832"/>
+            <a:ext cx="0" cy="91440"/>
           </a:xfrm>
           <a:prstGeom prst="line">
             <a:avLst/>
@@ -11847,13 +11725,13 @@
       </p:cxnSp>
       <p:cxnSp>
         <p:nvCxnSpPr>
-          <p:cNvPr id="29" name="Connector 28"/>
+          <p:cNvPr id="25" name="Connector 24"/>
           <p:cNvCxnSpPr/>
           <p:nvPr/>
         </p:nvCxnSpPr>
         <p:spPr>
           <a:xfrm>
-            <a:off x="2834640" y="5440680"/>
+            <a:off x="2834640" y="3570732"/>
             <a:ext cx="731520" cy="0"/>
           </a:xfrm>
           <a:prstGeom prst="line">
@@ -11883,13 +11761,13 @@
       </p:cxnSp>
       <p:sp>
         <p:nvSpPr>
-          <p:cNvPr id="30" name="TextBox 29"/>
+          <p:cNvPr id="26" name="TextBox 25"/>
           <p:cNvSpPr txBox="1"/>
           <p:nvPr/>
         </p:nvSpPr>
         <p:spPr>
           <a:xfrm>
-            <a:off x="3246120" y="5276088"/>
+            <a:off x="3246120" y="3278124"/>
             <a:ext cx="822960" cy="274320"/>
           </a:xfrm>
           <a:prstGeom prst="rect">
@@ -11907,25 +11785,26 @@
             <a:r>
               <a:rPr sz="1000" b="1">
                 <a:solidFill>
-                  <a:srgbClr val="A84A4A"/>
-                </a:solidFill>
-                <a:latin typeface="Calibri"/>
-              </a:rPr>
-              <a:t>no</a:t>
+                  <a:srgbClr val="5C8347"/>
+                </a:solidFill>
+                <a:latin typeface="Calibri"/>
+              </a:rPr>
+              <a:t>yes
+(inherit)</a:t>
             </a:r>
           </a:p>
         </p:txBody>
       </p:sp>
       <p:cxnSp>
         <p:nvCxnSpPr>
-          <p:cNvPr id="31" name="Connector 30"/>
+          <p:cNvPr id="27" name="Connector 26"/>
           <p:cNvCxnSpPr/>
           <p:nvPr/>
         </p:nvCxnSpPr>
         <p:spPr>
           <a:xfrm>
-            <a:off x="1828800" y="5715000"/>
-            <a:ext cx="0" cy="274320"/>
+            <a:off x="1828800" y="3822191"/>
+            <a:ext cx="0" cy="201168"/>
           </a:xfrm>
           <a:prstGeom prst="line">
             <a:avLst/>
@@ -11954,13 +11833,13 @@
       </p:cxnSp>
       <p:sp>
         <p:nvSpPr>
-          <p:cNvPr id="32" name="TextBox 31"/>
+          <p:cNvPr id="28" name="TextBox 27"/>
           <p:cNvSpPr txBox="1"/>
           <p:nvPr/>
         </p:nvSpPr>
         <p:spPr>
           <a:xfrm>
-            <a:off x="1874519" y="5687568"/>
+            <a:off x="1901952" y="3758183"/>
             <a:ext cx="822960" cy="274320"/>
           </a:xfrm>
           <a:prstGeom prst="rect">
@@ -11978,11 +11857,155 @@
             <a:r>
               <a:rPr sz="1000" b="1">
                 <a:solidFill>
-                  <a:srgbClr val="5C8347"/>
-                </a:solidFill>
-                <a:latin typeface="Calibri"/>
-              </a:rPr>
-              <a:t>yes (admit)</a:t>
+                  <a:srgbClr val="A84A4A"/>
+                </a:solidFill>
+                <a:latin typeface="Calibri"/>
+              </a:rPr>
+              <a:t>no
+(residual)</a:t>
+            </a:r>
+          </a:p>
+        </p:txBody>
+      </p:sp>
+      <p:cxnSp>
+        <p:nvCxnSpPr>
+          <p:cNvPr id="29" name="Connector 28"/>
+          <p:cNvCxnSpPr/>
+          <p:nvPr/>
+        </p:nvCxnSpPr>
+        <p:spPr>
+          <a:xfrm>
+            <a:off x="1828800" y="4407407"/>
+            <a:ext cx="0" cy="91440"/>
+          </a:xfrm>
+          <a:prstGeom prst="line">
+            <a:avLst/>
+          </a:prstGeom>
+          <a:ln w="25400">
+            <a:solidFill>
+              <a:srgbClr val="4A6EA0"/>
+            </a:solidFill>
+            <a:tailEnd type="triangle" w="med" h="med"/>
+          </a:ln>
+        </p:spPr>
+        <p:style>
+          <a:lnRef idx="2">
+            <a:schemeClr val="accent1"/>
+          </a:lnRef>
+          <a:fillRef idx="0">
+            <a:schemeClr val="accent1"/>
+          </a:fillRef>
+          <a:effectRef idx="1">
+            <a:schemeClr val="accent1"/>
+          </a:effectRef>
+          <a:fontRef idx="minor">
+            <a:schemeClr val="tx1"/>
+          </a:fontRef>
+        </p:style>
+      </p:cxnSp>
+      <p:cxnSp>
+        <p:nvCxnSpPr>
+          <p:cNvPr id="30" name="Connector 29"/>
+          <p:cNvCxnSpPr/>
+          <p:nvPr/>
+        </p:nvCxnSpPr>
+        <p:spPr>
+          <a:xfrm>
+            <a:off x="1828800" y="5084063"/>
+            <a:ext cx="0" cy="27432"/>
+          </a:xfrm>
+          <a:prstGeom prst="line">
+            <a:avLst/>
+          </a:prstGeom>
+          <a:ln w="25400">
+            <a:solidFill>
+              <a:srgbClr val="4A6EA0"/>
+            </a:solidFill>
+            <a:tailEnd type="triangle" w="med" h="med"/>
+          </a:ln>
+        </p:spPr>
+        <p:style>
+          <a:lnRef idx="2">
+            <a:schemeClr val="accent1"/>
+          </a:lnRef>
+          <a:fillRef idx="0">
+            <a:schemeClr val="accent1"/>
+          </a:fillRef>
+          <a:effectRef idx="1">
+            <a:schemeClr val="accent1"/>
+          </a:effectRef>
+          <a:fontRef idx="minor">
+            <a:schemeClr val="tx1"/>
+          </a:fontRef>
+        </p:style>
+      </p:cxnSp>
+      <p:cxnSp>
+        <p:nvCxnSpPr>
+          <p:cNvPr id="31" name="Connector 30"/>
+          <p:cNvCxnSpPr/>
+          <p:nvPr/>
+        </p:nvCxnSpPr>
+        <p:spPr>
+          <a:xfrm>
+            <a:off x="2834640" y="5362955"/>
+            <a:ext cx="731520" cy="0"/>
+          </a:xfrm>
+          <a:prstGeom prst="line">
+            <a:avLst/>
+          </a:prstGeom>
+          <a:ln w="25400">
+            <a:solidFill>
+              <a:srgbClr val="4A6EA0"/>
+            </a:solidFill>
+            <a:tailEnd type="triangle" w="med" h="med"/>
+          </a:ln>
+        </p:spPr>
+        <p:style>
+          <a:lnRef idx="2">
+            <a:schemeClr val="accent1"/>
+          </a:lnRef>
+          <a:fillRef idx="0">
+            <a:schemeClr val="accent1"/>
+          </a:fillRef>
+          <a:effectRef idx="1">
+            <a:schemeClr val="accent1"/>
+          </a:effectRef>
+          <a:fontRef idx="minor">
+            <a:schemeClr val="tx1"/>
+          </a:fontRef>
+        </p:style>
+      </p:cxnSp>
+      <p:sp>
+        <p:nvSpPr>
+          <p:cNvPr id="32" name="TextBox 31"/>
+          <p:cNvSpPr txBox="1"/>
+          <p:nvPr/>
+        </p:nvSpPr>
+        <p:spPr>
+          <a:xfrm>
+            <a:off x="3246120" y="5198364"/>
+            <a:ext cx="822960" cy="274320"/>
+          </a:xfrm>
+          <a:prstGeom prst="rect">
+            <a:avLst/>
+          </a:prstGeom>
+          <a:noFill/>
+        </p:spPr>
+        <p:txBody>
+          <a:bodyPr wrap="none" lIns="36576" rIns="36576" tIns="0" bIns="0">
+            <a:spAutoFit/>
+          </a:bodyPr>
+          <a:lstStyle/>
+          <a:p>
+            <a:pPr algn="ctr"/>
+            <a:r>
+              <a:rPr sz="1000" b="1">
+                <a:solidFill>
+                  <a:srgbClr val="A84A4A"/>
+                </a:solidFill>
+                <a:latin typeface="Calibri"/>
+              </a:rPr>
+              <a:t>no</a:t>
             </a:r>
           </a:p>
         </p:txBody>
@@ -11994,9 +12017,80 @@
           <p:nvPr/>
         </p:nvCxnSpPr>
         <p:spPr>
+          <a:xfrm>
+            <a:off x="1828800" y="5614415"/>
+            <a:ext cx="0" cy="201168"/>
+          </a:xfrm>
+          <a:prstGeom prst="line">
+            <a:avLst/>
+          </a:prstGeom>
+          <a:ln w="25400">
+            <a:solidFill>
+              <a:srgbClr val="4A6EA0"/>
+            </a:solidFill>
+            <a:tailEnd type="triangle" w="med" h="med"/>
+          </a:ln>
+        </p:spPr>
+        <p:style>
+          <a:lnRef idx="2">
+            <a:schemeClr val="accent1"/>
+          </a:lnRef>
+          <a:fillRef idx="0">
+            <a:schemeClr val="accent1"/>
+          </a:fillRef>
+          <a:effectRef idx="1">
+            <a:schemeClr val="accent1"/>
+          </a:effectRef>
+          <a:fontRef idx="minor">
+            <a:schemeClr val="tx1"/>
+          </a:fontRef>
+        </p:style>
+      </p:cxnSp>
+      <p:sp>
+        <p:nvSpPr>
+          <p:cNvPr id="34" name="TextBox 33"/>
+          <p:cNvSpPr txBox="1"/>
+          <p:nvPr/>
+        </p:nvSpPr>
+        <p:spPr>
+          <a:xfrm>
+            <a:off x="1874519" y="5550407"/>
+            <a:ext cx="822960" cy="274320"/>
+          </a:xfrm>
+          <a:prstGeom prst="rect">
+            <a:avLst/>
+          </a:prstGeom>
+          <a:noFill/>
+        </p:spPr>
+        <p:txBody>
+          <a:bodyPr wrap="none" lIns="36576" rIns="36576" tIns="0" bIns="0">
+            <a:spAutoFit/>
+          </a:bodyPr>
+          <a:lstStyle/>
+          <a:p>
+            <a:pPr algn="ctr"/>
+            <a:r>
+              <a:rPr sz="1000" b="1">
+                <a:solidFill>
+                  <a:srgbClr val="5C8347"/>
+                </a:solidFill>
+                <a:latin typeface="Calibri"/>
+              </a:rPr>
+              <a:t>yes (admit)</a:t>
+            </a:r>
+          </a:p>
+        </p:txBody>
+      </p:sp>
+      <p:cxnSp>
+        <p:nvCxnSpPr>
+          <p:cNvPr id="35" name="Connector 34"/>
+          <p:cNvCxnSpPr/>
+          <p:nvPr/>
+        </p:nvCxnSpPr>
+        <p:spPr>
           <a:xfrm flipH="1">
-            <a:off x="3200400" y="3543300"/>
-            <a:ext cx="1508760" cy="2651759"/>
+            <a:off x="3200400" y="3762756"/>
+            <a:ext cx="1508760" cy="2244851"/>
           </a:xfrm>
           <a:prstGeom prst="bentConnector3">
             <a:avLst/>
@@ -12025,7 +12119,7 @@
       </p:cxnSp>
       <p:sp>
         <p:nvSpPr>
-          <p:cNvPr id="34" name="TextBox 33"/>
+          <p:cNvPr id="36" name="TextBox 35"/>
           <p:cNvSpPr txBox="1"/>
           <p:nvPr/>
         </p:nvSpPr>
@@ -12060,7 +12154,7 @@
       </p:sp>
       <p:sp>
         <p:nvSpPr>
-          <p:cNvPr id="35" name="Rectangle 34"/>
+          <p:cNvPr id="37" name="Rectangle 36"/>
           <p:cNvSpPr/>
           <p:nvPr/>
         </p:nvSpPr>
@@ -12502,7 +12596,7 @@
       </p:sp>
       <p:sp>
         <p:nvSpPr>
-          <p:cNvPr id="36" name="TextBox 35"/>
+          <p:cNvPr id="38" name="TextBox 37"/>
           <p:cNvSpPr txBox="1"/>
           <p:nvPr/>
         </p:nvSpPr>
@@ -12537,7 +12631,7 @@
       </p:sp>
       <p:sp>
         <p:nvSpPr>
-          <p:cNvPr id="37" name="Rounded Rectangle 36"/>
+          <p:cNvPr id="39" name="Rounded Rectangle 38"/>
           <p:cNvSpPr/>
           <p:nvPr/>
         </p:nvSpPr>
@@ -12592,7 +12686,7 @@
       </p:sp>
       <p:sp>
         <p:nvSpPr>
-          <p:cNvPr id="38" name="Rounded Rectangle 37"/>
+          <p:cNvPr id="40" name="Rounded Rectangle 39"/>
           <p:cNvSpPr/>
           <p:nvPr/>
         </p:nvSpPr>
@@ -12647,7 +12741,7 @@
       </p:sp>
       <p:sp>
         <p:nvSpPr>
-          <p:cNvPr id="39" name="Rounded Rectangle 38"/>
+          <p:cNvPr id="41" name="Rounded Rectangle 40"/>
           <p:cNvSpPr/>
           <p:nvPr/>
         </p:nvSpPr>
@@ -12702,7 +12796,7 @@
       </p:sp>
       <p:sp>
         <p:nvSpPr>
-          <p:cNvPr id="40" name="Rounded Rectangle 39"/>
+          <p:cNvPr id="42" name="Rounded Rectangle 41"/>
           <p:cNvSpPr/>
           <p:nvPr/>
         </p:nvSpPr>
@@ -12757,7 +12851,7 @@
       </p:sp>
       <p:sp>
         <p:nvSpPr>
-          <p:cNvPr id="41" name="Rounded Rectangle 40"/>
+          <p:cNvPr id="43" name="Rounded Rectangle 42"/>
           <p:cNvSpPr/>
           <p:nvPr/>
         </p:nvSpPr>
@@ -12812,7 +12906,7 @@
       </p:sp>
       <p:sp>
         <p:nvSpPr>
-          <p:cNvPr id="42" name="Rounded Rectangle 41"/>
+          <p:cNvPr id="44" name="Rounded Rectangle 43"/>
           <p:cNvSpPr/>
           <p:nvPr/>
         </p:nvSpPr>
@@ -12867,7 +12961,7 @@
       </p:sp>
       <p:sp>
         <p:nvSpPr>
-          <p:cNvPr id="43" name="Rounded Rectangle 42"/>
+          <p:cNvPr id="45" name="Rounded Rectangle 44"/>
           <p:cNvSpPr/>
           <p:nvPr/>
         </p:nvSpPr>
@@ -12922,7 +13016,7 @@
       </p:sp>
       <p:sp>
         <p:nvSpPr>
-          <p:cNvPr id="44" name="Rounded Rectangle 43"/>
+          <p:cNvPr id="46" name="Rounded Rectangle 45"/>
           <p:cNvSpPr/>
           <p:nvPr/>
         </p:nvSpPr>
@@ -12977,7 +13071,7 @@
       </p:sp>
       <p:sp>
         <p:nvSpPr>
-          <p:cNvPr id="45" name="Rounded Rectangle 44"/>
+          <p:cNvPr id="47" name="Rounded Rectangle 46"/>
           <p:cNvSpPr/>
           <p:nvPr/>
         </p:nvSpPr>
@@ -13032,7 +13126,7 @@
       </p:sp>
       <p:sp>
         <p:nvSpPr>
-          <p:cNvPr id="46" name="TextBox 45"/>
+          <p:cNvPr id="48" name="TextBox 47"/>
           <p:cNvSpPr txBox="1"/>
           <p:nvPr/>
         </p:nvSpPr>
@@ -13067,7 +13161,7 @@
       </p:sp>
       <p:sp>
         <p:nvSpPr>
-          <p:cNvPr id="47" name="TextBox 46"/>
+          <p:cNvPr id="49" name="TextBox 48"/>
           <p:cNvSpPr txBox="1"/>
           <p:nvPr/>
         </p:nvSpPr>
@@ -13102,7 +13196,7 @@
       </p:sp>
       <p:sp>
         <p:nvSpPr>
-          <p:cNvPr id="48" name="TextBox 47"/>
+          <p:cNvPr id="50" name="TextBox 49"/>
           <p:cNvSpPr txBox="1"/>
           <p:nvPr/>
         </p:nvSpPr>
@@ -13137,7 +13231,7 @@
       </p:sp>
       <p:sp>
         <p:nvSpPr>
-          <p:cNvPr id="49" name="Rectangle 48"/>
+          <p:cNvPr id="51" name="Rectangle 50"/>
           <p:cNvSpPr/>
           <p:nvPr/>
         </p:nvSpPr>
@@ -13180,7 +13274,7 @@
       </p:sp>
       <p:sp>
         <p:nvSpPr>
-          <p:cNvPr id="50" name="TextBox 49"/>
+          <p:cNvPr id="52" name="TextBox 51"/>
           <p:cNvSpPr txBox="1"/>
           <p:nvPr/>
         </p:nvSpPr>
@@ -13215,7 +13309,7 @@
       </p:sp>
       <p:sp>
         <p:nvSpPr>
-          <p:cNvPr id="51" name="TextBox 50"/>
+          <p:cNvPr id="53" name="TextBox 52"/>
           <p:cNvSpPr txBox="1"/>
           <p:nvPr/>
         </p:nvSpPr>
@@ -13510,7 +13604,7 @@
         <p:spPr>
           <a:xfrm>
             <a:off x="457200" y="1417320"/>
-            <a:ext cx="2743200" cy="502920"/>
+            <a:ext cx="2743200" cy="457200"/>
           </a:xfrm>
           <a:prstGeom prst="roundRect">
             <a:avLst/>
@@ -13563,8 +13657,8 @@
         </p:nvSpPr>
         <p:spPr>
           <a:xfrm>
-            <a:off x="457200" y="2103120"/>
-            <a:ext cx="2743200" cy="502920"/>
+            <a:off x="457200" y="2011679"/>
+            <a:ext cx="2743200" cy="457200"/>
           </a:xfrm>
           <a:prstGeom prst="roundRect">
             <a:avLst/>
@@ -13604,7 +13698,7 @@
                 </a:solidFill>
                 <a:latin typeface="Calibri"/>
               </a:rPr>
-              <a:t>Tag chunks: theme, test, persona, stage</a:t>
+              <a:t>Section SOP into logical chunks</a:t>
             </a:r>
           </a:p>
         </p:txBody>
@@ -13617,8 +13711,62 @@
         </p:nvSpPr>
         <p:spPr>
           <a:xfrm>
-            <a:off x="457200" y="2788920"/>
-            <a:ext cx="2743200" cy="502920"/>
+            <a:off x="457200" y="2606039"/>
+            <a:ext cx="2743200" cy="457200"/>
+          </a:xfrm>
+          <a:prstGeom prst="roundRect">
+            <a:avLst/>
+          </a:prstGeom>
+          <a:solidFill>
+            <a:srgbClr val="E7EFF8"/>
+          </a:solidFill>
+          <a:ln w="12700">
+            <a:solidFill>
+              <a:srgbClr val="4A6EA0"/>
+            </a:solidFill>
+          </a:ln>
+        </p:spPr>
+        <p:style>
+          <a:lnRef idx="1">
+            <a:schemeClr val="accent1"/>
+          </a:lnRef>
+          <a:fillRef idx="3">
+            <a:schemeClr val="accent1"/>
+          </a:fillRef>
+          <a:effectRef idx="2">
+            <a:schemeClr val="accent1"/>
+          </a:effectRef>
+          <a:fontRef idx="minor">
+            <a:schemeClr val="lt1"/>
+          </a:fontRef>
+        </p:style>
+        <p:txBody>
+          <a:bodyPr rtlCol="0" anchor="ctr" wrap="square" lIns="73152" rIns="73152" tIns="36576" bIns="36576"/>
+          <a:lstStyle/>
+          <a:p>
+            <a:pPr algn="ctr"/>
+            <a:r>
+              <a:rPr sz="1000" b="0" i="0">
+                <a:solidFill>
+                  <a:srgbClr val="1F2D3D"/>
+                </a:solidFill>
+                <a:latin typeface="Calibri"/>
+              </a:rPr>
+              <a:t>Tag chunks: theme, test, persona, stage</a:t>
+            </a:r>
+          </a:p>
+        </p:txBody>
+      </p:sp>
+      <p:sp>
+        <p:nvSpPr>
+          <p:cNvPr id="11" name="Rounded Rectangle 10"/>
+          <p:cNvSpPr/>
+          <p:nvPr/>
+        </p:nvSpPr>
+        <p:spPr>
+          <a:xfrm>
+            <a:off x="457200" y="3200399"/>
+            <a:ext cx="2743200" cy="457200"/>
           </a:xfrm>
           <a:prstGeom prst="roundRect">
             <a:avLst/>
@@ -13665,14 +13813,14 @@
       </p:sp>
       <p:sp>
         <p:nvSpPr>
-          <p:cNvPr id="11" name="Rounded Rectangle 10"/>
+          <p:cNvPr id="12" name="Rounded Rectangle 11"/>
           <p:cNvSpPr/>
           <p:nvPr/>
         </p:nvSpPr>
         <p:spPr>
           <a:xfrm>
-            <a:off x="457200" y="3474720"/>
-            <a:ext cx="2743200" cy="502920"/>
+            <a:off x="457200" y="3794759"/>
+            <a:ext cx="2743200" cy="457200"/>
           </a:xfrm>
           <a:prstGeom prst="roundRect">
             <a:avLst/>
@@ -13720,14 +13868,14 @@
       </p:sp>
       <p:sp>
         <p:nvSpPr>
-          <p:cNvPr id="12" name="Rounded Rectangle 11"/>
+          <p:cNvPr id="13" name="Rounded Rectangle 12"/>
           <p:cNvSpPr/>
           <p:nvPr/>
         </p:nvSpPr>
         <p:spPr>
           <a:xfrm>
-            <a:off x="457200" y="4251959"/>
-            <a:ext cx="2743200" cy="502920"/>
+            <a:off x="457200" y="4389120"/>
+            <a:ext cx="2743200" cy="457200"/>
           </a:xfrm>
           <a:prstGeom prst="roundRect">
             <a:avLst/>
@@ -13774,14 +13922,14 @@
       </p:sp>
       <p:sp>
         <p:nvSpPr>
-          <p:cNvPr id="13" name="Diamond 12"/>
+          <p:cNvPr id="14" name="Diamond 13"/>
           <p:cNvSpPr/>
           <p:nvPr/>
         </p:nvSpPr>
         <p:spPr>
           <a:xfrm>
-            <a:off x="822960" y="4937759"/>
-            <a:ext cx="2011680" cy="685800"/>
+            <a:off x="822960" y="4983480"/>
+            <a:ext cx="2011680" cy="548640"/>
           </a:xfrm>
           <a:prstGeom prst="diamond">
             <a:avLst/>
@@ -13828,14 +13976,14 @@
       </p:sp>
       <p:sp>
         <p:nvSpPr>
-          <p:cNvPr id="14" name="Rounded Rectangle 13"/>
+          <p:cNvPr id="15" name="Rounded Rectangle 14"/>
           <p:cNvSpPr/>
           <p:nvPr/>
         </p:nvSpPr>
         <p:spPr>
           <a:xfrm>
-            <a:off x="3566160" y="5029199"/>
-            <a:ext cx="2194560" cy="502920"/>
+            <a:off x="3566160" y="5029200"/>
+            <a:ext cx="2194560" cy="411480"/>
           </a:xfrm>
           <a:prstGeom prst="roundRect">
             <a:avLst/>
@@ -13883,14 +14031,14 @@
       </p:sp>
       <p:sp>
         <p:nvSpPr>
-          <p:cNvPr id="15" name="Rounded Rectangle 14"/>
+          <p:cNvPr id="16" name="Rounded Rectangle 15"/>
           <p:cNvSpPr/>
           <p:nvPr/>
         </p:nvSpPr>
         <p:spPr>
           <a:xfrm>
-            <a:off x="457200" y="6035040"/>
-            <a:ext cx="2743200" cy="502920"/>
+            <a:off x="457200" y="5852159"/>
+            <a:ext cx="2743200" cy="457200"/>
           </a:xfrm>
           <a:prstGeom prst="roundRect">
             <a:avLst/>
@@ -13937,50 +14085,14 @@
       </p:sp>
       <p:cxnSp>
         <p:nvCxnSpPr>
-          <p:cNvPr id="16" name="Connector 15"/>
-          <p:cNvCxnSpPr/>
-          <p:nvPr/>
-        </p:nvCxnSpPr>
-        <p:spPr>
-          <a:xfrm>
-            <a:off x="1828800" y="1920240"/>
-            <a:ext cx="0" cy="182880"/>
-          </a:xfrm>
-          <a:prstGeom prst="line">
-            <a:avLst/>
-          </a:prstGeom>
-          <a:ln w="25400">
-            <a:solidFill>
-              <a:srgbClr val="4A6EA0"/>
-            </a:solidFill>
-            <a:tailEnd type="triangle" w="med" h="med"/>
-          </a:ln>
-        </p:spPr>
-        <p:style>
-          <a:lnRef idx="2">
-            <a:schemeClr val="accent1"/>
-          </a:lnRef>
-          <a:fillRef idx="0">
-            <a:schemeClr val="accent1"/>
-          </a:fillRef>
-          <a:effectRef idx="1">
-            <a:schemeClr val="accent1"/>
-          </a:effectRef>
-          <a:fontRef idx="minor">
-            <a:schemeClr val="tx1"/>
-          </a:fontRef>
-        </p:style>
-      </p:cxnSp>
-      <p:cxnSp>
-        <p:nvCxnSpPr>
           <p:cNvPr id="17" name="Connector 16"/>
           <p:cNvCxnSpPr/>
           <p:nvPr/>
         </p:nvCxnSpPr>
         <p:spPr>
           <a:xfrm>
-            <a:off x="1828800" y="2606039"/>
-            <a:ext cx="0" cy="182881"/>
+            <a:off x="1828800" y="1874519"/>
+            <a:ext cx="0" cy="137160"/>
           </a:xfrm>
           <a:prstGeom prst="line">
             <a:avLst/>
@@ -14015,8 +14127,8 @@
         </p:nvCxnSpPr>
         <p:spPr>
           <a:xfrm>
-            <a:off x="1828800" y="3291839"/>
-            <a:ext cx="0" cy="182881"/>
+            <a:off x="1828800" y="2468879"/>
+            <a:ext cx="0" cy="137160"/>
           </a:xfrm>
           <a:prstGeom prst="line">
             <a:avLst/>
@@ -14051,8 +14163,8 @@
         </p:nvCxnSpPr>
         <p:spPr>
           <a:xfrm>
-            <a:off x="1828800" y="3977639"/>
-            <a:ext cx="0" cy="274320"/>
+            <a:off x="1828800" y="3063239"/>
+            <a:ext cx="0" cy="137160"/>
           </a:xfrm>
           <a:prstGeom prst="line">
             <a:avLst/>
@@ -14087,8 +14199,8 @@
         </p:nvCxnSpPr>
         <p:spPr>
           <a:xfrm>
-            <a:off x="1828800" y="4754879"/>
-            <a:ext cx="0" cy="182880"/>
+            <a:off x="1828800" y="3657599"/>
+            <a:ext cx="0" cy="137160"/>
           </a:xfrm>
           <a:prstGeom prst="line">
             <a:avLst/>
@@ -14123,8 +14235,8 @@
         </p:nvCxnSpPr>
         <p:spPr>
           <a:xfrm>
-            <a:off x="2834640" y="5280659"/>
-            <a:ext cx="731520" cy="0"/>
+            <a:off x="1828800" y="4251959"/>
+            <a:ext cx="0" cy="137161"/>
           </a:xfrm>
           <a:prstGeom prst="line">
             <a:avLst/>
@@ -14151,51 +14263,16 @@
           </a:fontRef>
         </p:style>
       </p:cxnSp>
-      <p:sp>
-        <p:nvSpPr>
-          <p:cNvPr id="22" name="TextBox 21"/>
-          <p:cNvSpPr txBox="1"/>
-          <p:nvPr/>
-        </p:nvSpPr>
-        <p:spPr>
-          <a:xfrm>
-            <a:off x="3246120" y="5116068"/>
-            <a:ext cx="822960" cy="274320"/>
-          </a:xfrm>
-          <a:prstGeom prst="rect">
-            <a:avLst/>
-          </a:prstGeom>
-          <a:noFill/>
-        </p:spPr>
-        <p:txBody>
-          <a:bodyPr wrap="none" lIns="36576" rIns="36576" tIns="0" bIns="0">
-            <a:spAutoFit/>
-          </a:bodyPr>
-          <a:lstStyle/>
-          <a:p>
-            <a:pPr algn="ctr"/>
-            <a:r>
-              <a:rPr sz="1000" b="1">
-                <a:solidFill>
-                  <a:srgbClr val="A84A4A"/>
-                </a:solidFill>
-                <a:latin typeface="Calibri"/>
-              </a:rPr>
-              <a:t>no</a:t>
-            </a:r>
-          </a:p>
-        </p:txBody>
-      </p:sp>
       <p:cxnSp>
         <p:nvCxnSpPr>
-          <p:cNvPr id="23" name="Connector 22"/>
+          <p:cNvPr id="22" name="Connector 21"/>
           <p:cNvCxnSpPr/>
           <p:nvPr/>
         </p:nvCxnSpPr>
         <p:spPr>
           <a:xfrm>
-            <a:off x="1828800" y="5623559"/>
-            <a:ext cx="0" cy="411481"/>
+            <a:off x="1828800" y="4846320"/>
+            <a:ext cx="0" cy="137160"/>
           </a:xfrm>
           <a:prstGeom prst="line">
             <a:avLst/>
@@ -14222,6 +14299,42 @@
           </a:fontRef>
         </p:style>
       </p:cxnSp>
+      <p:cxnSp>
+        <p:nvCxnSpPr>
+          <p:cNvPr id="23" name="Connector 22"/>
+          <p:cNvCxnSpPr/>
+          <p:nvPr/>
+        </p:nvCxnSpPr>
+        <p:spPr>
+          <a:xfrm flipV="1">
+            <a:off x="2834640" y="5234940"/>
+            <a:ext cx="731520" cy="22860"/>
+          </a:xfrm>
+          <a:prstGeom prst="line">
+            <a:avLst/>
+          </a:prstGeom>
+          <a:ln w="25400">
+            <a:solidFill>
+              <a:srgbClr val="4A6EA0"/>
+            </a:solidFill>
+            <a:tailEnd type="triangle" w="med" h="med"/>
+          </a:ln>
+        </p:spPr>
+        <p:style>
+          <a:lnRef idx="2">
+            <a:schemeClr val="accent1"/>
+          </a:lnRef>
+          <a:fillRef idx="0">
+            <a:schemeClr val="accent1"/>
+          </a:fillRef>
+          <a:effectRef idx="1">
+            <a:schemeClr val="accent1"/>
+          </a:effectRef>
+          <a:fontRef idx="minor">
+            <a:schemeClr val="tx1"/>
+          </a:fontRef>
+        </p:style>
+      </p:cxnSp>
       <p:sp>
         <p:nvSpPr>
           <p:cNvPr id="24" name="TextBox 23"/>
@@ -14230,7 +14343,7 @@
         </p:nvSpPr>
         <p:spPr>
           <a:xfrm>
-            <a:off x="1874519" y="5664708"/>
+            <a:off x="3246120" y="5081778"/>
             <a:ext cx="822960" cy="274320"/>
           </a:xfrm>
           <a:prstGeom prst="rect">
@@ -14248,6 +14361,77 @@
             <a:r>
               <a:rPr sz="1000" b="1">
                 <a:solidFill>
+                  <a:srgbClr val="A84A4A"/>
+                </a:solidFill>
+                <a:latin typeface="Calibri"/>
+              </a:rPr>
+              <a:t>no</a:t>
+            </a:r>
+          </a:p>
+        </p:txBody>
+      </p:sp>
+      <p:cxnSp>
+        <p:nvCxnSpPr>
+          <p:cNvPr id="25" name="Connector 24"/>
+          <p:cNvCxnSpPr/>
+          <p:nvPr/>
+        </p:nvCxnSpPr>
+        <p:spPr>
+          <a:xfrm>
+            <a:off x="1828800" y="5532120"/>
+            <a:ext cx="0" cy="320039"/>
+          </a:xfrm>
+          <a:prstGeom prst="line">
+            <a:avLst/>
+          </a:prstGeom>
+          <a:ln w="25400">
+            <a:solidFill>
+              <a:srgbClr val="4A6EA0"/>
+            </a:solidFill>
+            <a:tailEnd type="triangle" w="med" h="med"/>
+          </a:ln>
+        </p:spPr>
+        <p:style>
+          <a:lnRef idx="2">
+            <a:schemeClr val="accent1"/>
+          </a:lnRef>
+          <a:fillRef idx="0">
+            <a:schemeClr val="accent1"/>
+          </a:fillRef>
+          <a:effectRef idx="1">
+            <a:schemeClr val="accent1"/>
+          </a:effectRef>
+          <a:fontRef idx="minor">
+            <a:schemeClr val="tx1"/>
+          </a:fontRef>
+        </p:style>
+      </p:cxnSp>
+      <p:sp>
+        <p:nvSpPr>
+          <p:cNvPr id="26" name="TextBox 25"/>
+          <p:cNvSpPr txBox="1"/>
+          <p:nvPr/>
+        </p:nvSpPr>
+        <p:spPr>
+          <a:xfrm>
+            <a:off x="1874519" y="5527548"/>
+            <a:ext cx="822960" cy="274320"/>
+          </a:xfrm>
+          <a:prstGeom prst="rect">
+            <a:avLst/>
+          </a:prstGeom>
+          <a:noFill/>
+        </p:spPr>
+        <p:txBody>
+          <a:bodyPr wrap="none" lIns="36576" rIns="36576" tIns="0" bIns="0">
+            <a:spAutoFit/>
+          </a:bodyPr>
+          <a:lstStyle/>
+          <a:p>
+            <a:pPr algn="ctr"/>
+            <a:r>
+              <a:rPr sz="1000" b="1">
+                <a:solidFill>
                   <a:srgbClr val="5C8347"/>
                 </a:solidFill>
                 <a:latin typeface="Calibri"/>
@@ -14259,7 +14443,7 @@
       </p:sp>
       <p:sp>
         <p:nvSpPr>
-          <p:cNvPr id="25" name="TextBox 24"/>
+          <p:cNvPr id="27" name="TextBox 26"/>
           <p:cNvSpPr txBox="1"/>
           <p:nvPr/>
         </p:nvSpPr>
@@ -14294,7 +14478,7 @@
       </p:sp>
       <p:sp>
         <p:nvSpPr>
-          <p:cNvPr id="26" name="Rectangle 25"/>
+          <p:cNvPr id="28" name="Rectangle 27"/>
           <p:cNvSpPr/>
           <p:nvPr/>
         </p:nvSpPr>
@@ -14656,7 +14840,7 @@
       </p:sp>
       <p:sp>
         <p:nvSpPr>
-          <p:cNvPr id="27" name="TextBox 26"/>
+          <p:cNvPr id="29" name="TextBox 28"/>
           <p:cNvSpPr txBox="1"/>
           <p:nvPr/>
         </p:nvSpPr>
@@ -14691,7 +14875,7 @@
       </p:sp>
       <p:sp>
         <p:nvSpPr>
-          <p:cNvPr id="28" name="Rounded Rectangle 27"/>
+          <p:cNvPr id="30" name="Rounded Rectangle 29"/>
           <p:cNvSpPr/>
           <p:nvPr/>
         </p:nvSpPr>
@@ -14745,7 +14929,7 @@
       </p:sp>
       <p:sp>
         <p:nvSpPr>
-          <p:cNvPr id="29" name="Rounded Rectangle 28"/>
+          <p:cNvPr id="31" name="Rounded Rectangle 30"/>
           <p:cNvSpPr/>
           <p:nvPr/>
         </p:nvSpPr>
@@ -14800,7 +14984,7 @@
       </p:sp>
       <p:sp>
         <p:nvSpPr>
-          <p:cNvPr id="30" name="Rounded Rectangle 29"/>
+          <p:cNvPr id="32" name="Rounded Rectangle 31"/>
           <p:cNvSpPr/>
           <p:nvPr/>
         </p:nvSpPr>
@@ -14854,7 +15038,7 @@
       </p:sp>
       <p:sp>
         <p:nvSpPr>
-          <p:cNvPr id="31" name="Rounded Rectangle 30"/>
+          <p:cNvPr id="33" name="Rounded Rectangle 32"/>
           <p:cNvSpPr/>
           <p:nvPr/>
         </p:nvSpPr>
@@ -14909,7 +15093,7 @@
       </p:sp>
       <p:sp>
         <p:nvSpPr>
-          <p:cNvPr id="32" name="Rounded Rectangle 31"/>
+          <p:cNvPr id="34" name="Rounded Rectangle 33"/>
           <p:cNvSpPr/>
           <p:nvPr/>
         </p:nvSpPr>
@@ -14963,7 +15147,7 @@
       </p:sp>
       <p:sp>
         <p:nvSpPr>
-          <p:cNvPr id="33" name="Rounded Rectangle 32"/>
+          <p:cNvPr id="35" name="Rounded Rectangle 34"/>
           <p:cNvSpPr/>
           <p:nvPr/>
         </p:nvSpPr>
@@ -15018,7 +15202,7 @@
       </p:sp>
       <p:sp>
         <p:nvSpPr>
-          <p:cNvPr id="34" name="Rounded Rectangle 33"/>
+          <p:cNvPr id="36" name="Rounded Rectangle 35"/>
           <p:cNvSpPr/>
           <p:nvPr/>
         </p:nvSpPr>
@@ -15072,7 +15256,7 @@
       </p:sp>
       <p:sp>
         <p:nvSpPr>
-          <p:cNvPr id="35" name="Rounded Rectangle 34"/>
+          <p:cNvPr id="37" name="Rounded Rectangle 36"/>
           <p:cNvSpPr/>
           <p:nvPr/>
         </p:nvSpPr>
@@ -15127,7 +15311,7 @@
       </p:sp>
       <p:sp>
         <p:nvSpPr>
-          <p:cNvPr id="36" name="Rectangle 35"/>
+          <p:cNvPr id="38" name="Rectangle 37"/>
           <p:cNvSpPr/>
           <p:nvPr/>
         </p:nvSpPr>
@@ -15170,7 +15354,7 @@
       </p:sp>
       <p:sp>
         <p:nvSpPr>
-          <p:cNvPr id="37" name="TextBox 36"/>
+          <p:cNvPr id="39" name="TextBox 38"/>
           <p:cNvSpPr txBox="1"/>
           <p:nvPr/>
         </p:nvSpPr>
@@ -15205,7 +15389,7 @@
       </p:sp>
       <p:sp>
         <p:nvSpPr>
-          <p:cNvPr id="38" name="TextBox 37"/>
+          <p:cNvPr id="40" name="TextBox 39"/>
           <p:cNvSpPr txBox="1"/>
           <p:nvPr/>
         </p:nvSpPr>
@@ -19237,7 +19421,7 @@
         </p:nvCxnSpPr>
         <p:spPr>
           <a:xfrm>
-            <a:off x="3246120" y="4178807"/>
+            <a:off x="3154680" y="4178807"/>
             <a:ext cx="0" cy="118872"/>
           </a:xfrm>
           <a:prstGeom prst="line">
@@ -19453,7 +19637,7 @@
         </p:nvCxnSpPr>
         <p:spPr>
           <a:xfrm>
-            <a:off x="3246120" y="4800599"/>
+            <a:off x="3154680" y="4800599"/>
             <a:ext cx="0" cy="274320"/>
           </a:xfrm>
           <a:prstGeom prst="line">
@@ -19489,7 +19673,7 @@
         </p:nvSpPr>
         <p:spPr>
           <a:xfrm>
-            <a:off x="3291839" y="4773167"/>
+            <a:off x="3200400" y="4773167"/>
             <a:ext cx="822960" cy="274320"/>
           </a:xfrm>
           <a:prstGeom prst="rect">
